--- a/project_update.pptx
+++ b/project_update.pptx
@@ -5,11 +5,14 @@
     <p:sldMasterId id="2147483672" r:id="rId1"/>
   </p:sldMasterIdLst>
   <p:notesMasterIdLst>
-    <p:notesMasterId r:id="rId4"/>
+    <p:notesMasterId r:id="rId7"/>
   </p:notesMasterIdLst>
   <p:sldIdLst>
     <p:sldId id="275" r:id="rId2"/>
-    <p:sldId id="277" r:id="rId3"/>
+    <p:sldId id="312" r:id="rId3"/>
+    <p:sldId id="327" r:id="rId4"/>
+    <p:sldId id="334" r:id="rId5"/>
+    <p:sldId id="332" r:id="rId6"/>
   </p:sldIdLst>
   <p:sldSz cx="12192000" cy="6858000"/>
   <p:notesSz cx="6858000" cy="9144000"/>
@@ -4073,17 +4076,41 @@
         </p:nvSpPr>
         <p:spPr>
           <a:xfrm>
-            <a:off x="838200" y="1473200"/>
-            <a:ext cx="10515600" cy="812800"/>
+            <a:off x="838200" y="1397000"/>
+            <a:ext cx="10515600" cy="711200"/>
           </a:xfrm>
         </p:spPr>
         <p:txBody>
-          <a:bodyPr/>
+          <a:bodyPr anchor="t" anchorCtr="0"/>
           <a:lstStyle/>
           <a:p>
             <a:pPr algn="l">
               <a:buNone/>
             </a:pPr>
+            <a:r>
+              <a:rPr lang="en-US" sz="3200" b="1" dirty="0">
+                <a:solidFill>
+                  <a:srgbClr val="00396B"/>
+                </a:solidFill>
+              </a:rPr>
+              <a:t>Project</a:t>
+            </a:r>
+            <a:r>
+              <a:rPr lang="zh-CN" altLang="en-US" sz="3200" b="1" dirty="0">
+                <a:solidFill>
+                  <a:srgbClr val="00396B"/>
+                </a:solidFill>
+              </a:rPr>
+              <a:t> </a:t>
+            </a:r>
+            <a:r>
+              <a:rPr lang="en-US" altLang="zh-CN" sz="3200" b="1" dirty="0">
+                <a:solidFill>
+                  <a:srgbClr val="00396B"/>
+                </a:solidFill>
+              </a:rPr>
+              <a:t>Overview</a:t>
+            </a:r>
             <a:endParaRPr lang="en-US" sz="3200" b="1" dirty="0">
               <a:solidFill>
                 <a:srgbClr val="00396B"/>
@@ -4121,11 +4148,7 @@
             <a:pPr>
               <a:buNone/>
             </a:pPr>
-            <a:endParaRPr lang="en-US" sz="2000" dirty="0">
-              <a:solidFill>
-                <a:srgbClr val="1A1A1A"/>
-              </a:solidFill>
-            </a:endParaRPr>
+            <a:endParaRPr lang="en-US" sz="1200" dirty="0"/>
           </a:p>
         </p:txBody>
       </p:sp>
@@ -4185,7 +4208,7 @@
         </p:nvSpPr>
         <p:spPr>
           <a:xfrm>
-            <a:off x="838200" y="2311400"/>
+            <a:off x="838200" y="2209800"/>
             <a:ext cx="1524000" cy="76200"/>
           </a:xfrm>
           <a:prstGeom prst="rect">
@@ -4255,10 +4278,2214 @@
           </a:prstGeom>
         </p:spPr>
       </p:pic>
+      <p:sp>
+        <p:nvSpPr>
+          <p:cNvPr id="20" name="Card Header 20"/>
+          <p:cNvSpPr/>
+          <p:nvPr/>
+        </p:nvSpPr>
+        <p:spPr>
+          <a:xfrm>
+            <a:off x="838200" y="2489200"/>
+            <a:ext cx="5080000" cy="584200"/>
+          </a:xfrm>
+          <a:prstGeom prst="round2SameRect">
+            <a:avLst>
+              <a:gd name="adj1" fmla="val 12000"/>
+              <a:gd name="adj2" fmla="val 0"/>
+            </a:avLst>
+          </a:prstGeom>
+          <a:solidFill>
+            <a:srgbClr val="00396B"/>
+          </a:solidFill>
+          <a:ln>
+            <a:noFill/>
+          </a:ln>
+        </p:spPr>
+        <p:txBody>
+          <a:bodyPr wrap="square" lIns="203200" tIns="0" rIns="203200" bIns="0" anchor="ctr"/>
+          <a:lstStyle/>
+          <a:p>
+            <a:pPr algn="l">
+              <a:buNone/>
+            </a:pPr>
+            <a:r>
+              <a:rPr lang="en-US" sz="2000" b="1" dirty="0">
+                <a:solidFill>
+                  <a:srgbClr val="FFFFFF"/>
+                </a:solidFill>
+              </a:rPr>
+              <a:t>Research Direction</a:t>
+            </a:r>
+          </a:p>
+        </p:txBody>
+      </p:sp>
+      <p:sp>
+        <p:nvSpPr>
+          <p:cNvPr id="21" name="Card Body 20"/>
+          <p:cNvSpPr/>
+          <p:nvPr/>
+        </p:nvSpPr>
+        <p:spPr>
+          <a:xfrm>
+            <a:off x="838200" y="3073400"/>
+            <a:ext cx="5080000" cy="3175000"/>
+          </a:xfrm>
+          <a:prstGeom prst="round2SameRect">
+            <a:avLst>
+              <a:gd name="adj1" fmla="val 0"/>
+              <a:gd name="adj2" fmla="val 12000"/>
+            </a:avLst>
+          </a:prstGeom>
+          <a:solidFill>
+            <a:srgbClr val="EEF2F6"/>
+          </a:solidFill>
+          <a:ln>
+            <a:noFill/>
+          </a:ln>
+        </p:spPr>
+        <p:txBody>
+          <a:bodyPr wrap="square" lIns="228600" tIns="177800" rIns="228600" bIns="177800" anchor="t"/>
+          <a:lstStyle/>
+          <a:p>
+            <a:pPr marL="0" indent="0" algn="l">
+              <a:spcAft>
+                <a:spcPts val="400"/>
+              </a:spcAft>
+              <a:buNone/>
+            </a:pPr>
+            <a:r>
+              <a:rPr lang="en-US" sz="1700" b="1" dirty="0">
+                <a:solidFill>
+                  <a:srgbClr val="1A1A1A"/>
+                </a:solidFill>
+              </a:rPr>
+              <a:t>LLM-based multi-agent system</a:t>
+            </a:r>
+          </a:p>
+          <a:p>
+            <a:pPr marL="254000" indent="-254000" algn="l">
+              <a:spcBef>
+                <a:spcPts val="300"/>
+              </a:spcBef>
+              <a:spcAft>
+                <a:spcPts val="300"/>
+              </a:spcAft>
+              <a:buFont typeface="Arial"/>
+              <a:buChar char="•"/>
+            </a:pPr>
+            <a:r>
+              <a:rPr lang="en-US" sz="1500" b="1" dirty="0">
+                <a:solidFill>
+                  <a:srgbClr val="1A1A1A"/>
+                </a:solidFill>
+              </a:rPr>
+              <a:t>Agent harness: </a:t>
+            </a:r>
+            <a:r>
+              <a:rPr lang="en-US" sz="1500" dirty="0">
+                <a:solidFill>
+                  <a:srgbClr val="1A1A1A"/>
+                </a:solidFill>
+              </a:rPr>
+              <a:t>scaffolding around the LLM that manages the reasoning loop, tool invocation, and state across turns</a:t>
+            </a:r>
+          </a:p>
+          <a:p>
+            <a:pPr marL="254000" indent="-254000" algn="l">
+              <a:spcBef>
+                <a:spcPts val="300"/>
+              </a:spcBef>
+              <a:spcAft>
+                <a:spcPts val="300"/>
+              </a:spcAft>
+              <a:buFont typeface="Arial"/>
+              <a:buChar char="•"/>
+            </a:pPr>
+            <a:r>
+              <a:rPr lang="en-US" sz="1500" b="1" dirty="0">
+                <a:solidFill>
+                  <a:srgbClr val="1A1A1A"/>
+                </a:solidFill>
+              </a:rPr>
+              <a:t>Decentralized coordination: </a:t>
+            </a:r>
+            <a:r>
+              <a:rPr lang="en-US" sz="1500" dirty="0">
+                <a:solidFill>
+                  <a:srgbClr val="1A1A1A"/>
+                </a:solidFill>
+              </a:rPr>
+              <a:t>agents self-organize and reach consensus without a central orchestrator</a:t>
+            </a:r>
+          </a:p>
+        </p:txBody>
+      </p:sp>
+      <p:sp>
+        <p:nvSpPr>
+          <p:cNvPr id="30" name="Card Header 30"/>
+          <p:cNvSpPr/>
+          <p:nvPr/>
+        </p:nvSpPr>
+        <p:spPr>
+          <a:xfrm>
+            <a:off x="6273800" y="2489200"/>
+            <a:ext cx="5080000" cy="584200"/>
+          </a:xfrm>
+          <a:prstGeom prst="round2SameRect">
+            <a:avLst>
+              <a:gd name="adj1" fmla="val 12000"/>
+              <a:gd name="adj2" fmla="val 0"/>
+            </a:avLst>
+          </a:prstGeom>
+          <a:solidFill>
+            <a:srgbClr val="00396B"/>
+          </a:solidFill>
+          <a:ln>
+            <a:noFill/>
+          </a:ln>
+        </p:spPr>
+        <p:txBody>
+          <a:bodyPr wrap="square" lIns="203200" tIns="0" rIns="203200" bIns="0" anchor="ctr"/>
+          <a:lstStyle/>
+          <a:p>
+            <a:pPr algn="l">
+              <a:buNone/>
+            </a:pPr>
+            <a:r>
+              <a:rPr lang="en-US" sz="2000" b="1" dirty="0">
+                <a:solidFill>
+                  <a:srgbClr val="FFFFFF"/>
+                </a:solidFill>
+              </a:rPr>
+              <a:t>Goals</a:t>
+            </a:r>
+          </a:p>
+        </p:txBody>
+      </p:sp>
+      <p:sp>
+        <p:nvSpPr>
+          <p:cNvPr id="31" name="Card Body 30"/>
+          <p:cNvSpPr/>
+          <p:nvPr/>
+        </p:nvSpPr>
+        <p:spPr>
+          <a:xfrm>
+            <a:off x="6273800" y="3073400"/>
+            <a:ext cx="5080000" cy="3175000"/>
+          </a:xfrm>
+          <a:prstGeom prst="round2SameRect">
+            <a:avLst>
+              <a:gd name="adj1" fmla="val 0"/>
+              <a:gd name="adj2" fmla="val 12000"/>
+            </a:avLst>
+          </a:prstGeom>
+          <a:solidFill>
+            <a:srgbClr val="EEF2F6"/>
+          </a:solidFill>
+          <a:ln>
+            <a:noFill/>
+          </a:ln>
+        </p:spPr>
+        <p:txBody>
+          <a:bodyPr wrap="square" lIns="228600" tIns="177800" rIns="228600" bIns="177800" anchor="t"/>
+          <a:lstStyle/>
+          <a:p>
+            <a:pPr marL="254000" indent="-254000" algn="l">
+              <a:spcBef>
+                <a:spcPts val="300"/>
+              </a:spcBef>
+              <a:spcAft>
+                <a:spcPts val="300"/>
+              </a:spcAft>
+              <a:buFont typeface="Arial"/>
+              <a:buChar char="•"/>
+            </a:pPr>
+            <a:r>
+              <a:rPr lang="en-US" sz="1500" b="1" dirty="0">
+                <a:solidFill>
+                  <a:srgbClr val="1A1A1A"/>
+                </a:solidFill>
+              </a:rPr>
+              <a:t>Effective agent workflows: </a:t>
+            </a:r>
+            <a:r>
+              <a:rPr lang="en-US" sz="1500" dirty="0">
+                <a:solidFill>
+                  <a:srgbClr val="1A1A1A"/>
+                </a:solidFill>
+              </a:rPr>
+              <a:t>robust task decomposition and recovery that hold up on long-horizon tasks</a:t>
+            </a:r>
+          </a:p>
+          <a:p>
+            <a:pPr marL="254000" indent="-254000" algn="l">
+              <a:spcBef>
+                <a:spcPts val="300"/>
+              </a:spcBef>
+              <a:spcAft>
+                <a:spcPts val="300"/>
+              </a:spcAft>
+              <a:buFont typeface="Arial"/>
+              <a:buChar char="•"/>
+            </a:pPr>
+            <a:r>
+              <a:rPr lang="en-US" sz="1500" b="1" dirty="0">
+                <a:solidFill>
+                  <a:srgbClr val="1A1A1A"/>
+                </a:solidFill>
+              </a:rPr>
+              <a:t>Token efficiency: </a:t>
+            </a:r>
+            <a:r>
+              <a:rPr lang="en-US" sz="1500" dirty="0">
+                <a:solidFill>
+                  <a:srgbClr val="1A1A1A"/>
+                </a:solidFill>
+              </a:rPr>
+              <a:t>cut inter-agent communication and context overhead without losing accuracy</a:t>
+            </a:r>
+          </a:p>
+          <a:p>
+            <a:pPr marL="254000" indent="-254000" algn="l">
+              <a:spcBef>
+                <a:spcPts val="300"/>
+              </a:spcBef>
+              <a:spcAft>
+                <a:spcPts val="300"/>
+              </a:spcAft>
+              <a:buFont typeface="Arial"/>
+              <a:buChar char="•"/>
+            </a:pPr>
+            <a:r>
+              <a:rPr lang="en-US" sz="1500" b="1" dirty="0">
+                <a:solidFill>
+                  <a:srgbClr val="1A1A1A"/>
+                </a:solidFill>
+              </a:rPr>
+              <a:t>Research output: </a:t>
+            </a:r>
+            <a:r>
+              <a:rPr lang="en-US" sz="1500" dirty="0">
+                <a:solidFill>
+                  <a:srgbClr val="1A1A1A"/>
+                </a:solidFill>
+              </a:rPr>
+              <a:t>identify challenging, high-impact problems, solve them, and consolidate the findings into a paper submission</a:t>
+            </a:r>
+          </a:p>
+        </p:txBody>
+      </p:sp>
+      <p:sp>
+        <p:nvSpPr>
+          <p:cNvPr id="10" name="Footer Name">
+            <a:extLst>
+              <a:ext uri="{FF2B5EF4-FFF2-40B4-BE49-F238E27FC236}">
+                <a16:creationId xmlns:a16="http://schemas.microsoft.com/office/drawing/2014/main" id="{C86A6180-15B8-B344-BE74-A13E0788843F}"/>
+              </a:ext>
+            </a:extLst>
+          </p:cNvPr>
+          <p:cNvSpPr txBox="1"/>
+          <p:nvPr/>
+        </p:nvSpPr>
+        <p:spPr>
+          <a:xfrm>
+            <a:off x="838200" y="6350000"/>
+            <a:ext cx="5080000" cy="508000"/>
+          </a:xfrm>
+          <a:prstGeom prst="rect">
+            <a:avLst/>
+          </a:prstGeom>
+          <a:noFill/>
+        </p:spPr>
+        <p:txBody>
+          <a:bodyPr vertOverflow="overflow" vert="horz" wrap="none" rtlCol="0" anchor="ctr" anchorCtr="0">
+            <a:noAutofit/>
+          </a:bodyPr>
+          <a:lstStyle/>
+          <a:p>
+            <a:pPr algn="l">
+              <a:buNone/>
+            </a:pPr>
+            <a:r>
+              <a:rPr lang="en-US" sz="1400" b="1" spc="200" dirty="0">
+                <a:solidFill>
+                  <a:srgbClr val="FFFFFF"/>
+                </a:solidFill>
+              </a:rPr>
+              <a:t>Quan Wei</a:t>
+            </a:r>
+            <a:r>
+              <a:rPr lang="en-US" sz="1400" b="1" spc="200" dirty="0">
+                <a:solidFill>
+                  <a:srgbClr val="9AA7B5"/>
+                </a:solidFill>
+              </a:rPr>
+              <a:t>   |   </a:t>
+            </a:r>
+            <a:r>
+              <a:rPr lang="en-US" sz="1400" b="1" spc="200" dirty="0">
+                <a:solidFill>
+                  <a:srgbClr val="FFFFFF"/>
+                </a:solidFill>
+              </a:rPr>
+              <a:t>WEEK 1</a:t>
+            </a:r>
+          </a:p>
+        </p:txBody>
+      </p:sp>
     </p:spTree>
     <p:extLst>
       <p:ext uri="{BB962C8B-B14F-4D97-AF65-F5344CB8AC3E}">
-        <p14:creationId xmlns:p14="http://schemas.microsoft.com/office/powerpoint/2010/main" val="659560431"/>
+        <p14:creationId xmlns:p14="http://schemas.microsoft.com/office/powerpoint/2010/main" val="2649299185"/>
+      </p:ext>
+    </p:extLst>
+  </p:cSld>
+  <p:clrMapOvr>
+    <a:masterClrMapping/>
+  </p:clrMapOvr>
+</p:sld>
+</file>
+
+<file path=ppt/slides/slide3.xml><?xml version="1.0" encoding="utf-8"?>
+<p:sld xmlns:a="http://schemas.openxmlformats.org/drawingml/2006/main" xmlns:r="http://schemas.openxmlformats.org/officeDocument/2006/relationships" xmlns:p="http://schemas.openxmlformats.org/presentationml/2006/main">
+  <p:cSld>
+    <p:spTree>
+      <p:nvGrpSpPr>
+        <p:cNvPr id="1" name="">
+          <a:extLst>
+            <a:ext uri="{FF2B5EF4-FFF2-40B4-BE49-F238E27FC236}">
+              <a16:creationId xmlns:a16="http://schemas.microsoft.com/office/drawing/2014/main" id="{984EEBEB-8015-2366-C980-540CC20E1FE2}"/>
+            </a:ext>
+          </a:extLst>
+        </p:cNvPr>
+        <p:cNvGrpSpPr/>
+        <p:nvPr/>
+      </p:nvGrpSpPr>
+      <p:grpSpPr>
+        <a:xfrm>
+          <a:off x="0" y="0"/>
+          <a:ext cx="0" cy="0"/>
+          <a:chOff x="0" y="0"/>
+          <a:chExt cx="0" cy="0"/>
+        </a:xfrm>
+      </p:grpSpPr>
+      <p:sp>
+        <p:nvSpPr>
+          <p:cNvPr id="5" name="Footer Bar">
+            <a:extLst>
+              <a:ext uri="{FF2B5EF4-FFF2-40B4-BE49-F238E27FC236}">
+                <a16:creationId xmlns:a16="http://schemas.microsoft.com/office/drawing/2014/main" id="{3C4C11B8-CC0E-5DAA-BC2A-D74FC9415AF1}"/>
+              </a:ext>
+            </a:extLst>
+          </p:cNvPr>
+          <p:cNvSpPr/>
+          <p:nvPr/>
+        </p:nvSpPr>
+        <p:spPr>
+          <a:xfrm>
+            <a:off x="0" y="6350000"/>
+            <a:ext cx="12192000" cy="508000"/>
+          </a:xfrm>
+          <a:prstGeom prst="rect">
+            <a:avLst/>
+          </a:prstGeom>
+          <a:solidFill>
+            <a:srgbClr val="00396B"/>
+          </a:solidFill>
+          <a:ln w="12700" cap="flat" cmpd="sng" algn="ctr">
+            <a:noFill/>
+            <a:prstDash val="solid"/>
+            <a:miter lim="800000"/>
+          </a:ln>
+        </p:spPr>
+        <p:style>
+          <a:lnRef idx="2">
+            <a:schemeClr val="accent1">
+              <a:shade val="15000"/>
+            </a:schemeClr>
+          </a:lnRef>
+          <a:fillRef idx="1">
+            <a:schemeClr val="accent1"/>
+          </a:fillRef>
+          <a:effectRef idx="0">
+            <a:schemeClr val="accent1"/>
+          </a:effectRef>
+          <a:fontRef idx="minor">
+            <a:schemeClr val="lt1"/>
+          </a:fontRef>
+        </p:style>
+        <p:txBody>
+          <a:bodyPr vertOverflow="clip" horzOverflow="clip" rtlCol="0" anchor="t"/>
+          <a:lstStyle/>
+          <a:p>
+            <a:pPr algn="l"/>
+            <a:endParaRPr lang="en-CN"/>
+          </a:p>
+        </p:txBody>
+      </p:sp>
+      <p:sp>
+        <p:nvSpPr>
+          <p:cNvPr id="2" name="Title 1">
+            <a:extLst>
+              <a:ext uri="{FF2B5EF4-FFF2-40B4-BE49-F238E27FC236}">
+                <a16:creationId xmlns:a16="http://schemas.microsoft.com/office/drawing/2014/main" id="{EAF7C45E-9EB4-C736-A453-7F982B2067D5}"/>
+              </a:ext>
+            </a:extLst>
+          </p:cNvPr>
+          <p:cNvSpPr>
+            <a:spLocks noGrp="1"/>
+          </p:cNvSpPr>
+          <p:nvPr>
+            <p:ph type="title"/>
+          </p:nvPr>
+        </p:nvSpPr>
+        <p:spPr>
+          <a:xfrm>
+            <a:off x="838200" y="1397000"/>
+            <a:ext cx="10515600" cy="711200"/>
+          </a:xfrm>
+        </p:spPr>
+        <p:txBody>
+          <a:bodyPr anchor="t" anchorCtr="0"/>
+          <a:lstStyle/>
+          <a:p>
+            <a:r>
+              <a:rPr lang="en-US" altLang="zh-CN" sz="3200" b="1" dirty="0">
+                <a:solidFill>
+                  <a:srgbClr val="00396B"/>
+                </a:solidFill>
+              </a:rPr>
+              <a:t>Project</a:t>
+            </a:r>
+            <a:r>
+              <a:rPr lang="zh-CN" altLang="en-US" sz="3200" b="1" dirty="0">
+                <a:solidFill>
+                  <a:srgbClr val="00396B"/>
+                </a:solidFill>
+              </a:rPr>
+              <a:t> </a:t>
+            </a:r>
+            <a:r>
+              <a:rPr lang="en-US" sz="3200" b="1" dirty="0">
+                <a:solidFill>
+                  <a:srgbClr val="00396B"/>
+                </a:solidFill>
+              </a:rPr>
+              <a:t>Proposal</a:t>
+            </a:r>
+          </a:p>
+        </p:txBody>
+      </p:sp>
+      <p:sp>
+        <p:nvSpPr>
+          <p:cNvPr id="3" name="Content Placeholder 2">
+            <a:extLst>
+              <a:ext uri="{FF2B5EF4-FFF2-40B4-BE49-F238E27FC236}">
+                <a16:creationId xmlns:a16="http://schemas.microsoft.com/office/drawing/2014/main" id="{013F6CFD-F019-3D66-B40F-9942631B9A30}"/>
+              </a:ext>
+            </a:extLst>
+          </p:cNvPr>
+          <p:cNvSpPr>
+            <a:spLocks noGrp="1"/>
+          </p:cNvSpPr>
+          <p:nvPr>
+            <p:ph idx="1"/>
+          </p:nvPr>
+        </p:nvSpPr>
+        <p:spPr>
+          <a:xfrm>
+            <a:off x="838200" y="2387600"/>
+            <a:ext cx="10515600" cy="457200"/>
+          </a:xfrm>
+        </p:spPr>
+        <p:txBody>
+          <a:bodyPr>
+            <a:normAutofit/>
+          </a:bodyPr>
+          <a:lstStyle/>
+          <a:p>
+            <a:pPr marL="0" indent="0" algn="l">
+              <a:spcBef>
+                <a:spcPts val="200"/>
+              </a:spcBef>
+              <a:spcAft>
+                <a:spcPts val="200"/>
+              </a:spcAft>
+              <a:buNone/>
+            </a:pPr>
+            <a:r>
+              <a:rPr lang="en-US" sz="2000" b="1" dirty="0">
+                <a:solidFill>
+                  <a:srgbClr val="00396B"/>
+                </a:solidFill>
+              </a:rPr>
+              <a:t>Large–Small Model Collaboration</a:t>
+            </a:r>
+            <a:r>
+              <a:rPr lang="en-US" sz="1600" dirty="0">
+                <a:solidFill>
+                  <a:srgbClr val="3A3A3C"/>
+                </a:solidFill>
+              </a:rPr>
+              <a:t>  —  each tier does the work it is best suited for</a:t>
+            </a:r>
+          </a:p>
+        </p:txBody>
+      </p:sp>
+      <p:sp>
+        <p:nvSpPr>
+          <p:cNvPr id="4" name="Slide Number Placeholder 3">
+            <a:extLst>
+              <a:ext uri="{FF2B5EF4-FFF2-40B4-BE49-F238E27FC236}">
+                <a16:creationId xmlns:a16="http://schemas.microsoft.com/office/drawing/2014/main" id="{EBDF33FE-E587-E27D-873C-E07E16B0A796}"/>
+              </a:ext>
+            </a:extLst>
+          </p:cNvPr>
+          <p:cNvSpPr>
+            <a:spLocks noGrp="1"/>
+          </p:cNvSpPr>
+          <p:nvPr>
+            <p:ph type="sldNum" sz="quarter" idx="12"/>
+          </p:nvPr>
+        </p:nvSpPr>
+        <p:spPr>
+          <a:xfrm>
+            <a:off x="10210800" y="6451600"/>
+            <a:ext cx="1524000" cy="304800"/>
+          </a:xfrm>
+        </p:spPr>
+        <p:txBody>
+          <a:bodyPr anchor="ctr" anchorCtr="0"/>
+          <a:lstStyle/>
+          <a:p>
+            <a:fld id="{FC0A7A6B-4B1F-5446-A3A1-99DEB5EA7F81}" type="slidenum">
+              <a:rPr lang="en-CN" smtClean="0">
+                <a:solidFill>
+                  <a:srgbClr val="9AA7B5"/>
+                </a:solidFill>
+              </a:rPr>
+              <a:t>3</a:t>
+            </a:fld>
+            <a:endParaRPr lang="en-CN">
+              <a:solidFill>
+                <a:srgbClr val="9AA7B5"/>
+              </a:solidFill>
+            </a:endParaRPr>
+          </a:p>
+        </p:txBody>
+      </p:sp>
+      <p:sp>
+        <p:nvSpPr>
+          <p:cNvPr id="6" name="Accent Rule">
+            <a:extLst>
+              <a:ext uri="{FF2B5EF4-FFF2-40B4-BE49-F238E27FC236}">
+                <a16:creationId xmlns:a16="http://schemas.microsoft.com/office/drawing/2014/main" id="{C68C517F-5ACB-7B49-135C-7434082740D8}"/>
+              </a:ext>
+            </a:extLst>
+          </p:cNvPr>
+          <p:cNvSpPr/>
+          <p:nvPr/>
+        </p:nvSpPr>
+        <p:spPr>
+          <a:xfrm>
+            <a:off x="838200" y="2209800"/>
+            <a:ext cx="1524000" cy="76200"/>
+          </a:xfrm>
+          <a:prstGeom prst="rect">
+            <a:avLst/>
+          </a:prstGeom>
+          <a:solidFill>
+            <a:srgbClr val="0073CF"/>
+          </a:solidFill>
+          <a:ln w="12700" cap="flat" cmpd="sng" algn="ctr">
+            <a:noFill/>
+            <a:prstDash val="solid"/>
+            <a:miter lim="800000"/>
+          </a:ln>
+        </p:spPr>
+        <p:style>
+          <a:lnRef idx="2">
+            <a:schemeClr val="accent1">
+              <a:shade val="15000"/>
+            </a:schemeClr>
+          </a:lnRef>
+          <a:fillRef idx="1">
+            <a:schemeClr val="accent1"/>
+          </a:fillRef>
+          <a:effectRef idx="0">
+            <a:schemeClr val="accent1"/>
+          </a:effectRef>
+          <a:fontRef idx="minor">
+            <a:schemeClr val="lt1"/>
+          </a:fontRef>
+        </p:style>
+        <p:txBody>
+          <a:bodyPr vertOverflow="clip" horzOverflow="clip" rtlCol="0" anchor="t"/>
+          <a:lstStyle/>
+          <a:p>
+            <a:pPr algn="l"/>
+            <a:endParaRPr lang="en-CN"/>
+          </a:p>
+        </p:txBody>
+      </p:sp>
+      <p:pic>
+        <p:nvPicPr>
+          <p:cNvPr id="7" name="Copied Picture 7">
+            <a:extLst>
+              <a:ext uri="{FF2B5EF4-FFF2-40B4-BE49-F238E27FC236}">
+                <a16:creationId xmlns:a16="http://schemas.microsoft.com/office/drawing/2014/main" id="{CA4B2E08-AD10-974E-24F5-613EE04D3031}"/>
+              </a:ext>
+            </a:extLst>
+          </p:cNvPr>
+          <p:cNvPicPr>
+            <a:picLocks noChangeAspect="1"/>
+          </p:cNvPicPr>
+          <p:nvPr/>
+        </p:nvPicPr>
+        <p:blipFill>
+          <a:blip r:embed="rId2"/>
+          <a:stretch>
+            <a:fillRect/>
+          </a:stretch>
+        </p:blipFill>
+        <p:spPr>
+          <a:xfrm>
+            <a:off x="838200" y="508000"/>
+            <a:ext cx="762000" cy="762000"/>
+          </a:xfrm>
+          <a:prstGeom prst="rect">
+            <a:avLst/>
+          </a:prstGeom>
+        </p:spPr>
+      </p:pic>
+      <p:sp>
+        <p:nvSpPr>
+          <p:cNvPr id="10" name="Footer Name">
+            <a:extLst>
+              <a:ext uri="{FF2B5EF4-FFF2-40B4-BE49-F238E27FC236}">
+                <a16:creationId xmlns:a16="http://schemas.microsoft.com/office/drawing/2014/main" id="{96DB3708-BCDB-4D06-A70B-E5FA88A3E60A}"/>
+              </a:ext>
+            </a:extLst>
+          </p:cNvPr>
+          <p:cNvSpPr txBox="1"/>
+          <p:nvPr/>
+        </p:nvSpPr>
+        <p:spPr>
+          <a:xfrm>
+            <a:off x="838200" y="6350000"/>
+            <a:ext cx="5080000" cy="508000"/>
+          </a:xfrm>
+          <a:prstGeom prst="rect">
+            <a:avLst/>
+          </a:prstGeom>
+          <a:noFill/>
+        </p:spPr>
+        <p:txBody>
+          <a:bodyPr vertOverflow="overflow" vert="horz" wrap="none" rtlCol="0" anchor="ctr" anchorCtr="0">
+            <a:noAutofit/>
+          </a:bodyPr>
+          <a:lstStyle/>
+          <a:p>
+            <a:pPr algn="l">
+              <a:buNone/>
+            </a:pPr>
+            <a:r>
+              <a:rPr lang="en-US" sz="1400" b="1" spc="200" dirty="0">
+                <a:solidFill>
+                  <a:srgbClr val="FFFFFF"/>
+                </a:solidFill>
+              </a:rPr>
+              <a:t>Quan Wei</a:t>
+            </a:r>
+            <a:r>
+              <a:rPr lang="en-US" sz="1400" b="1" spc="200" dirty="0">
+                <a:solidFill>
+                  <a:srgbClr val="9AA7B5"/>
+                </a:solidFill>
+              </a:rPr>
+              <a:t>   |   </a:t>
+            </a:r>
+            <a:r>
+              <a:rPr lang="en-US" sz="1400" b="1" spc="200" dirty="0">
+                <a:solidFill>
+                  <a:srgbClr val="FFFFFF"/>
+                </a:solidFill>
+              </a:rPr>
+              <a:t>WEEK 1</a:t>
+            </a:r>
+          </a:p>
+        </p:txBody>
+      </p:sp>
+      <p:graphicFrame>
+        <p:nvGraphicFramePr>
+          <p:cNvPr id="9" name="LLM SLM Table">
+            <a:extLst>
+              <a:ext uri="{FF2B5EF4-FFF2-40B4-BE49-F238E27FC236}">
+                <a16:creationId xmlns:a16="http://schemas.microsoft.com/office/drawing/2014/main" id="{29D22ECD-818E-5847-B870-BB464A49F2F4}"/>
+              </a:ext>
+            </a:extLst>
+          </p:cNvPr>
+          <p:cNvGraphicFramePr>
+            <a:graphicFrameLocks noGrp="1"/>
+          </p:cNvGraphicFramePr>
+          <p:nvPr>
+            <p:extLst>
+              <p:ext uri="{D42A27DB-BD31-4B8C-83A1-F6EECF244321}">
+                <p14:modId xmlns:p14="http://schemas.microsoft.com/office/powerpoint/2010/main" val="2998387024"/>
+              </p:ext>
+            </p:extLst>
+          </p:nvPr>
+        </p:nvGraphicFramePr>
+        <p:xfrm>
+          <a:off x="838200" y="2971800"/>
+          <a:ext cx="10515600" cy="1422400"/>
+        </p:xfrm>
+        <a:graphic>
+          <a:graphicData uri="http://schemas.openxmlformats.org/drawingml/2006/table">
+            <a:tbl>
+              <a:tblPr firstRow="1" bandRow="1">
+                <a:tableStyleId>{5C22544A-7EE6-4342-B048-85BDC9FD1C3A}</a:tableStyleId>
+              </a:tblPr>
+              <a:tblGrid>
+                <a:gridCol w="3505200">
+                  <a:extLst>
+                    <a:ext uri="{9D8B030D-6E8A-4147-A177-3AD203B41FA5}">
+                      <a16:colId xmlns:a16="http://schemas.microsoft.com/office/drawing/2014/main" val="2108653149"/>
+                    </a:ext>
+                  </a:extLst>
+                </a:gridCol>
+                <a:gridCol w="3505200">
+                  <a:extLst>
+                    <a:ext uri="{9D8B030D-6E8A-4147-A177-3AD203B41FA5}">
+                      <a16:colId xmlns:a16="http://schemas.microsoft.com/office/drawing/2014/main" val="1666027131"/>
+                    </a:ext>
+                  </a:extLst>
+                </a:gridCol>
+                <a:gridCol w="3505200">
+                  <a:extLst>
+                    <a:ext uri="{9D8B030D-6E8A-4147-A177-3AD203B41FA5}">
+                      <a16:colId xmlns:a16="http://schemas.microsoft.com/office/drawing/2014/main" val="2661020268"/>
+                    </a:ext>
+                  </a:extLst>
+                </a:gridCol>
+              </a:tblGrid>
+              <a:tr h="355600">
+                <a:tc>
+                  <a:txBody>
+                    <a:bodyPr/>
+                    <a:lstStyle/>
+                    <a:p>
+                      <a:pPr algn="l"/>
+                      <a:endParaRPr lang="en-CN" sz="1500" b="1">
+                        <a:solidFill>
+                          <a:srgbClr val="FFFFFF"/>
+                        </a:solidFill>
+                      </a:endParaRPr>
+                    </a:p>
+                  </a:txBody>
+                  <a:tcPr anchor="ctr">
+                    <a:solidFill>
+                      <a:srgbClr val="00396B"/>
+                    </a:solidFill>
+                  </a:tcPr>
+                </a:tc>
+                <a:tc>
+                  <a:txBody>
+                    <a:bodyPr/>
+                    <a:lstStyle/>
+                    <a:p>
+                      <a:pPr algn="ctr"/>
+                      <a:r>
+                        <a:rPr lang="en-CN" sz="1500" b="1">
+                          <a:solidFill>
+                            <a:srgbClr val="FFFFFF"/>
+                          </a:solidFill>
+                        </a:rPr>
+                        <a:t>Large model (LLM)</a:t>
+                      </a:r>
+                    </a:p>
+                  </a:txBody>
+                  <a:tcPr anchor="ctr">
+                    <a:solidFill>
+                      <a:srgbClr val="00396B"/>
+                    </a:solidFill>
+                  </a:tcPr>
+                </a:tc>
+                <a:tc>
+                  <a:txBody>
+                    <a:bodyPr/>
+                    <a:lstStyle/>
+                    <a:p>
+                      <a:pPr algn="ctr"/>
+                      <a:r>
+                        <a:rPr lang="en-CN" sz="1500" b="1">
+                          <a:solidFill>
+                            <a:srgbClr val="FFFFFF"/>
+                          </a:solidFill>
+                        </a:rPr>
+                        <a:t>Small model (SLM)</a:t>
+                      </a:r>
+                    </a:p>
+                  </a:txBody>
+                  <a:tcPr anchor="ctr">
+                    <a:solidFill>
+                      <a:srgbClr val="00396B"/>
+                    </a:solidFill>
+                  </a:tcPr>
+                </a:tc>
+                <a:extLst>
+                  <a:ext uri="{0D108BD9-81ED-4DB2-BD59-A6C34878D82A}">
+                    <a16:rowId xmlns:a16="http://schemas.microsoft.com/office/drawing/2014/main" val="698580651"/>
+                  </a:ext>
+                </a:extLst>
+              </a:tr>
+              <a:tr h="355600">
+                <a:tc>
+                  <a:txBody>
+                    <a:bodyPr/>
+                    <a:lstStyle/>
+                    <a:p>
+                      <a:pPr algn="l"/>
+                      <a:r>
+                        <a:rPr lang="en-CN" sz="1400" b="1">
+                          <a:solidFill>
+                            <a:srgbClr val="00396B"/>
+                          </a:solidFill>
+                        </a:rPr>
+                        <a:t>Role</a:t>
+                      </a:r>
+                    </a:p>
+                  </a:txBody>
+                  <a:tcPr anchor="ctr">
+                    <a:solidFill>
+                      <a:srgbClr val="EEF2F6"/>
+                    </a:solidFill>
+                  </a:tcPr>
+                </a:tc>
+                <a:tc>
+                  <a:txBody>
+                    <a:bodyPr/>
+                    <a:lstStyle/>
+                    <a:p>
+                      <a:pPr algn="l"/>
+                      <a:r>
+                        <a:rPr lang="en-CN" sz="1400">
+                          <a:solidFill>
+                            <a:srgbClr val="1A1A1A"/>
+                          </a:solidFill>
+                        </a:rPr>
+                        <a:t>Planner / orchestrator</a:t>
+                      </a:r>
+                    </a:p>
+                  </a:txBody>
+                  <a:tcPr anchor="ctr">
+                    <a:solidFill>
+                      <a:srgbClr val="FFFFFF"/>
+                    </a:solidFill>
+                  </a:tcPr>
+                </a:tc>
+                <a:tc>
+                  <a:txBody>
+                    <a:bodyPr/>
+                    <a:lstStyle/>
+                    <a:p>
+                      <a:pPr algn="l"/>
+                      <a:r>
+                        <a:rPr lang="en-CN" sz="1400">
+                          <a:solidFill>
+                            <a:srgbClr val="1A1A1A"/>
+                          </a:solidFill>
+                        </a:rPr>
+                        <a:t>Executor / specialist</a:t>
+                      </a:r>
+                    </a:p>
+                  </a:txBody>
+                  <a:tcPr anchor="ctr">
+                    <a:solidFill>
+                      <a:srgbClr val="FFFFFF"/>
+                    </a:solidFill>
+                  </a:tcPr>
+                </a:tc>
+                <a:extLst>
+                  <a:ext uri="{0D108BD9-81ED-4DB2-BD59-A6C34878D82A}">
+                    <a16:rowId xmlns:a16="http://schemas.microsoft.com/office/drawing/2014/main" val="4037059216"/>
+                  </a:ext>
+                </a:extLst>
+              </a:tr>
+              <a:tr h="355600">
+                <a:tc>
+                  <a:txBody>
+                    <a:bodyPr/>
+                    <a:lstStyle/>
+                    <a:p>
+                      <a:pPr algn="l"/>
+                      <a:r>
+                        <a:rPr lang="en-CN" sz="1400" b="1">
+                          <a:solidFill>
+                            <a:srgbClr val="00396B"/>
+                          </a:solidFill>
+                        </a:rPr>
+                        <a:t>Handles</a:t>
+                      </a:r>
+                    </a:p>
+                  </a:txBody>
+                  <a:tcPr anchor="ctr">
+                    <a:solidFill>
+                      <a:srgbClr val="EEF2F6"/>
+                    </a:solidFill>
+                  </a:tcPr>
+                </a:tc>
+                <a:tc>
+                  <a:txBody>
+                    <a:bodyPr/>
+                    <a:lstStyle/>
+                    <a:p>
+                      <a:pPr algn="l"/>
+                      <a:r>
+                        <a:rPr lang="en-CN" sz="1400">
+                          <a:solidFill>
+                            <a:srgbClr val="1A1A1A"/>
+                          </a:solidFill>
+                        </a:rPr>
+                        <a:t>Complex reasoning, decomposition</a:t>
+                      </a:r>
+                    </a:p>
+                  </a:txBody>
+                  <a:tcPr anchor="ctr">
+                    <a:solidFill>
+                      <a:srgbClr val="FFFFFF"/>
+                    </a:solidFill>
+                  </a:tcPr>
+                </a:tc>
+                <a:tc>
+                  <a:txBody>
+                    <a:bodyPr/>
+                    <a:lstStyle/>
+                    <a:p>
+                      <a:pPr algn="l"/>
+                      <a:r>
+                        <a:rPr lang="en-CN" sz="1400">
+                          <a:solidFill>
+                            <a:srgbClr val="1A1A1A"/>
+                          </a:solidFill>
+                        </a:rPr>
+                        <a:t>Routine, latency-sensitive subtasks</a:t>
+                      </a:r>
+                    </a:p>
+                  </a:txBody>
+                  <a:tcPr anchor="ctr">
+                    <a:solidFill>
+                      <a:srgbClr val="FFFFFF"/>
+                    </a:solidFill>
+                  </a:tcPr>
+                </a:tc>
+                <a:extLst>
+                  <a:ext uri="{0D108BD9-81ED-4DB2-BD59-A6C34878D82A}">
+                    <a16:rowId xmlns:a16="http://schemas.microsoft.com/office/drawing/2014/main" val="2966796175"/>
+                  </a:ext>
+                </a:extLst>
+              </a:tr>
+              <a:tr h="355600">
+                <a:tc>
+                  <a:txBody>
+                    <a:bodyPr/>
+                    <a:lstStyle/>
+                    <a:p>
+                      <a:pPr algn="l"/>
+                      <a:r>
+                        <a:rPr lang="en-CN" sz="1400" b="1" dirty="0">
+                          <a:solidFill>
+                            <a:srgbClr val="00396B"/>
+                          </a:solidFill>
+                        </a:rPr>
+                        <a:t>Cost</a:t>
+                      </a:r>
+                      <a:r>
+                        <a:rPr lang="en-US" altLang="zh-CN" sz="1400" b="1" dirty="0">
+                          <a:solidFill>
+                            <a:srgbClr val="00396B"/>
+                          </a:solidFill>
+                        </a:rPr>
+                        <a:t>/Latency</a:t>
+                      </a:r>
+                      <a:endParaRPr lang="en-CN" sz="1400" b="1" dirty="0">
+                        <a:solidFill>
+                          <a:srgbClr val="00396B"/>
+                        </a:solidFill>
+                      </a:endParaRPr>
+                    </a:p>
+                  </a:txBody>
+                  <a:tcPr anchor="ctr">
+                    <a:solidFill>
+                      <a:srgbClr val="EEF2F6"/>
+                    </a:solidFill>
+                  </a:tcPr>
+                </a:tc>
+                <a:tc>
+                  <a:txBody>
+                    <a:bodyPr/>
+                    <a:lstStyle/>
+                    <a:p>
+                      <a:pPr algn="l"/>
+                      <a:r>
+                        <a:rPr lang="en-CN" sz="1400" b="1" dirty="0">
+                          <a:solidFill>
+                            <a:srgbClr val="00396B"/>
+                          </a:solidFill>
+                        </a:rPr>
+                        <a:t>High</a:t>
+                      </a:r>
+                    </a:p>
+                  </a:txBody>
+                  <a:tcPr anchor="ctr">
+                    <a:solidFill>
+                      <a:srgbClr val="FFFFFF"/>
+                    </a:solidFill>
+                  </a:tcPr>
+                </a:tc>
+                <a:tc>
+                  <a:txBody>
+                    <a:bodyPr/>
+                    <a:lstStyle/>
+                    <a:p>
+                      <a:pPr algn="l"/>
+                      <a:r>
+                        <a:rPr lang="en-CN" sz="1400" b="1" dirty="0">
+                          <a:solidFill>
+                            <a:srgbClr val="0073CF"/>
+                          </a:solidFill>
+                        </a:rPr>
+                        <a:t>Low</a:t>
+                      </a:r>
+                    </a:p>
+                  </a:txBody>
+                  <a:tcPr anchor="ctr">
+                    <a:solidFill>
+                      <a:srgbClr val="FFFFFF"/>
+                    </a:solidFill>
+                  </a:tcPr>
+                </a:tc>
+                <a:extLst>
+                  <a:ext uri="{0D108BD9-81ED-4DB2-BD59-A6C34878D82A}">
+                    <a16:rowId xmlns:a16="http://schemas.microsoft.com/office/drawing/2014/main" val="3661423708"/>
+                  </a:ext>
+                </a:extLst>
+              </a:tr>
+            </a:tbl>
+          </a:graphicData>
+        </a:graphic>
+      </p:graphicFrame>
+      <p:sp>
+        <p:nvSpPr>
+          <p:cNvPr id="11" name="Bilevel Box">
+            <a:extLst>
+              <a:ext uri="{FF2B5EF4-FFF2-40B4-BE49-F238E27FC236}">
+                <a16:creationId xmlns:a16="http://schemas.microsoft.com/office/drawing/2014/main" id="{BA0E625F-F202-264B-8D4C-2991FD6B7B63}"/>
+              </a:ext>
+            </a:extLst>
+          </p:cNvPr>
+          <p:cNvSpPr txBox="1"/>
+          <p:nvPr/>
+        </p:nvSpPr>
+        <p:spPr>
+          <a:xfrm>
+            <a:off x="838200" y="4572000"/>
+            <a:ext cx="10515600" cy="1676400"/>
+          </a:xfrm>
+          <a:prstGeom prst="rect">
+            <a:avLst/>
+          </a:prstGeom>
+          <a:noFill/>
+        </p:spPr>
+        <p:txBody>
+          <a:bodyPr vertOverflow="overflow" vert="horz" wrap="square" rtlCol="0" anchor="t">
+            <a:noAutofit/>
+          </a:bodyPr>
+          <a:lstStyle/>
+          <a:p>
+            <a:pPr marL="0" indent="0" algn="l">
+              <a:spcBef>
+                <a:spcPts val="0"/>
+              </a:spcBef>
+              <a:spcAft>
+                <a:spcPts val="200"/>
+              </a:spcAft>
+              <a:buNone/>
+            </a:pPr>
+            <a:r>
+              <a:rPr lang="en-US" sz="1800" b="1" dirty="0">
+                <a:solidFill>
+                  <a:srgbClr val="00396B"/>
+                </a:solidFill>
+              </a:rPr>
+              <a:t>Bilevel Collaboration</a:t>
+            </a:r>
+          </a:p>
+          <a:p>
+            <a:pPr marL="285750" indent="-285750" algn="l">
+              <a:spcBef>
+                <a:spcPts val="120"/>
+              </a:spcBef>
+              <a:spcAft>
+                <a:spcPts val="120"/>
+              </a:spcAft>
+              <a:buFont typeface="Arial"/>
+              <a:buChar char="•"/>
+            </a:pPr>
+            <a:r>
+              <a:rPr lang="en-US" sz="1500" b="1" dirty="0">
+                <a:solidFill>
+                  <a:srgbClr val="1A1A1A"/>
+                </a:solidFill>
+              </a:rPr>
+              <a:t>Task-level — cost-efficient: </a:t>
+            </a:r>
+            <a:r>
+              <a:rPr lang="en-US" sz="1500" dirty="0">
+                <a:solidFill>
+                  <a:srgbClr val="1A1A1A"/>
+                </a:solidFill>
+              </a:rPr>
+              <a:t>route simple subtasks to small models, sparing large-model calls.</a:t>
+            </a:r>
+          </a:p>
+          <a:p>
+            <a:pPr marL="285750" indent="-285750" algn="l">
+              <a:spcBef>
+                <a:spcPts val="120"/>
+              </a:spcBef>
+              <a:spcAft>
+                <a:spcPts val="200"/>
+              </a:spcAft>
+              <a:buFont typeface="Arial"/>
+              <a:buChar char="•"/>
+            </a:pPr>
+            <a:r>
+              <a:rPr lang="en-US" sz="1500" b="1" dirty="0">
+                <a:solidFill>
+                  <a:srgbClr val="1A1A1A"/>
+                </a:solidFill>
+              </a:rPr>
+              <a:t>Token-level — token-efficient: </a:t>
+            </a:r>
+            <a:r>
+              <a:rPr lang="en-US" sz="1500" dirty="0">
+                <a:solidFill>
+                  <a:srgbClr val="1A1A1A"/>
+                </a:solidFill>
+              </a:rPr>
+              <a:t>small models draft tokens via speculative decoding, verified in one pass.</a:t>
+            </a:r>
+          </a:p>
+          <a:p>
+            <a:pPr marL="0" indent="0" algn="l">
+              <a:spcBef>
+                <a:spcPts val="0"/>
+              </a:spcBef>
+              <a:spcAft>
+                <a:spcPts val="0"/>
+              </a:spcAft>
+              <a:buNone/>
+            </a:pPr>
+            <a:endParaRPr lang="en-US" sz="1500" b="1" i="1" dirty="0">
+              <a:solidFill>
+                <a:srgbClr val="0073CF"/>
+              </a:solidFill>
+            </a:endParaRPr>
+          </a:p>
+          <a:p>
+            <a:pPr marL="0" indent="0" algn="l">
+              <a:spcBef>
+                <a:spcPts val="0"/>
+              </a:spcBef>
+              <a:spcAft>
+                <a:spcPts val="0"/>
+              </a:spcAft>
+              <a:buNone/>
+            </a:pPr>
+            <a:r>
+              <a:rPr lang="en-US" sz="1500" b="1" i="1" dirty="0">
+                <a:solidFill>
+                  <a:srgbClr val="0073CF"/>
+                </a:solidFill>
+              </a:rPr>
+              <a:t>Unified, the two levels make end-to-end inference both cost- and token-efficient—without sacrificing quality.</a:t>
+            </a:r>
+          </a:p>
+        </p:txBody>
+      </p:sp>
+    </p:spTree>
+    <p:extLst>
+      <p:ext uri="{BB962C8B-B14F-4D97-AF65-F5344CB8AC3E}">
+        <p14:creationId xmlns:p14="http://schemas.microsoft.com/office/powerpoint/2010/main" val="2778514529"/>
+      </p:ext>
+    </p:extLst>
+  </p:cSld>
+  <p:clrMapOvr>
+    <a:masterClrMapping/>
+  </p:clrMapOvr>
+</p:sld>
+</file>
+
+<file path=ppt/slides/slide4.xml><?xml version="1.0" encoding="utf-8"?>
+<p:sld xmlns:a="http://schemas.openxmlformats.org/drawingml/2006/main" xmlns:r="http://schemas.openxmlformats.org/officeDocument/2006/relationships" xmlns:p="http://schemas.openxmlformats.org/presentationml/2006/main">
+  <p:cSld>
+    <p:spTree>
+      <p:nvGrpSpPr>
+        <p:cNvPr id="1" name="">
+          <a:extLst>
+            <a:ext uri="{FF2B5EF4-FFF2-40B4-BE49-F238E27FC236}">
+              <a16:creationId xmlns:a16="http://schemas.microsoft.com/office/drawing/2014/main" id="{D6062070-167E-3408-EEB2-F6ED38BCD5B7}"/>
+            </a:ext>
+          </a:extLst>
+        </p:cNvPr>
+        <p:cNvGrpSpPr/>
+        <p:nvPr/>
+      </p:nvGrpSpPr>
+      <p:grpSpPr>
+        <a:xfrm>
+          <a:off x="0" y="0"/>
+          <a:ext cx="0" cy="0"/>
+          <a:chOff x="0" y="0"/>
+          <a:chExt cx="0" cy="0"/>
+        </a:xfrm>
+      </p:grpSpPr>
+      <p:sp>
+        <p:nvSpPr>
+          <p:cNvPr id="5" name="Footer Bar">
+            <a:extLst>
+              <a:ext uri="{FF2B5EF4-FFF2-40B4-BE49-F238E27FC236}">
+                <a16:creationId xmlns:a16="http://schemas.microsoft.com/office/drawing/2014/main" id="{17037776-F042-D4D0-3477-67DA63A42406}"/>
+              </a:ext>
+            </a:extLst>
+          </p:cNvPr>
+          <p:cNvSpPr/>
+          <p:nvPr/>
+        </p:nvSpPr>
+        <p:spPr>
+          <a:xfrm>
+            <a:off x="0" y="6350000"/>
+            <a:ext cx="12192000" cy="508000"/>
+          </a:xfrm>
+          <a:prstGeom prst="rect">
+            <a:avLst/>
+          </a:prstGeom>
+          <a:solidFill>
+            <a:srgbClr val="00396B"/>
+          </a:solidFill>
+          <a:ln w="12700" cap="flat" cmpd="sng" algn="ctr">
+            <a:noFill/>
+            <a:prstDash val="solid"/>
+            <a:miter lim="800000"/>
+          </a:ln>
+        </p:spPr>
+        <p:style>
+          <a:lnRef idx="2">
+            <a:schemeClr val="accent1">
+              <a:shade val="15000"/>
+            </a:schemeClr>
+          </a:lnRef>
+          <a:fillRef idx="1">
+            <a:schemeClr val="accent1"/>
+          </a:fillRef>
+          <a:effectRef idx="0">
+            <a:schemeClr val="accent1"/>
+          </a:effectRef>
+          <a:fontRef idx="minor">
+            <a:schemeClr val="lt1"/>
+          </a:fontRef>
+        </p:style>
+        <p:txBody>
+          <a:bodyPr vertOverflow="clip" horzOverflow="clip" rtlCol="0" anchor="t"/>
+          <a:lstStyle/>
+          <a:p>
+            <a:pPr algn="l"/>
+            <a:endParaRPr lang="en-CN"/>
+          </a:p>
+        </p:txBody>
+      </p:sp>
+      <p:sp>
+        <p:nvSpPr>
+          <p:cNvPr id="2" name="Title 1">
+            <a:extLst>
+              <a:ext uri="{FF2B5EF4-FFF2-40B4-BE49-F238E27FC236}">
+                <a16:creationId xmlns:a16="http://schemas.microsoft.com/office/drawing/2014/main" id="{639BD462-E1DC-1CB9-A732-6BBF69942286}"/>
+              </a:ext>
+            </a:extLst>
+          </p:cNvPr>
+          <p:cNvSpPr>
+            <a:spLocks noGrp="1"/>
+          </p:cNvSpPr>
+          <p:nvPr>
+            <p:ph type="title"/>
+          </p:nvPr>
+        </p:nvSpPr>
+        <p:spPr>
+          <a:xfrm>
+            <a:off x="838200" y="1397000"/>
+            <a:ext cx="10515600" cy="711200"/>
+          </a:xfrm>
+        </p:spPr>
+        <p:txBody>
+          <a:bodyPr anchor="t" anchorCtr="0"/>
+          <a:lstStyle/>
+          <a:p>
+            <a:r>
+              <a:rPr lang="en-US" sz="3200" b="1" dirty="0">
+                <a:solidFill>
+                  <a:srgbClr val="00396B"/>
+                </a:solidFill>
+              </a:rPr>
+              <a:t>Project</a:t>
+            </a:r>
+            <a:r>
+              <a:rPr lang="zh-CN" altLang="en-US" sz="3200" b="1" dirty="0">
+                <a:solidFill>
+                  <a:srgbClr val="00396B"/>
+                </a:solidFill>
+              </a:rPr>
+              <a:t> </a:t>
+            </a:r>
+            <a:r>
+              <a:rPr lang="en-US" altLang="zh-CN" sz="3200" b="1" dirty="0">
+                <a:solidFill>
+                  <a:srgbClr val="00396B"/>
+                </a:solidFill>
+              </a:rPr>
+              <a:t>Plan</a:t>
+            </a:r>
+            <a:endParaRPr lang="en-US" sz="3200" b="1" dirty="0">
+              <a:solidFill>
+                <a:srgbClr val="00396B"/>
+              </a:solidFill>
+            </a:endParaRPr>
+          </a:p>
+        </p:txBody>
+      </p:sp>
+      <p:sp>
+        <p:nvSpPr>
+          <p:cNvPr id="3" name="Content Placeholder 2">
+            <a:extLst>
+              <a:ext uri="{FF2B5EF4-FFF2-40B4-BE49-F238E27FC236}">
+                <a16:creationId xmlns:a16="http://schemas.microsoft.com/office/drawing/2014/main" id="{8C0AF201-9B98-2B16-C7F0-1698DC08D7EA}"/>
+              </a:ext>
+            </a:extLst>
+          </p:cNvPr>
+          <p:cNvSpPr>
+            <a:spLocks noGrp="1"/>
+          </p:cNvSpPr>
+          <p:nvPr>
+            <p:ph idx="1"/>
+          </p:nvPr>
+        </p:nvSpPr>
+        <p:spPr>
+          <a:xfrm>
+            <a:off x="838200" y="2540000"/>
+            <a:ext cx="10515600" cy="3657600"/>
+          </a:xfrm>
+        </p:spPr>
+        <p:txBody>
+          <a:bodyPr>
+            <a:normAutofit/>
+          </a:bodyPr>
+          <a:lstStyle/>
+          <a:p>
+            <a:pPr marL="0" indent="0" algn="l">
+              <a:spcBef>
+                <a:spcPts val="300"/>
+              </a:spcBef>
+              <a:spcAft>
+                <a:spcPts val="300"/>
+              </a:spcAft>
+              <a:buNone/>
+            </a:pPr>
+            <a:r>
+              <a:rPr lang="en-US" sz="1900" b="1" dirty="0">
+                <a:solidFill>
+                  <a:srgbClr val="00396B"/>
+                </a:solidFill>
+              </a:rPr>
+              <a:t>Models</a:t>
+            </a:r>
+          </a:p>
+          <a:p>
+            <a:pPr marL="342900" indent="-342900" algn="l">
+              <a:spcBef>
+                <a:spcPts val="300"/>
+              </a:spcBef>
+              <a:spcAft>
+                <a:spcPts val="300"/>
+              </a:spcAft>
+              <a:buFont typeface="Arial"/>
+              <a:buChar char="•"/>
+            </a:pPr>
+            <a:r>
+              <a:rPr lang="en-US" sz="1600" b="1" dirty="0">
+                <a:solidFill>
+                  <a:srgbClr val="1A1A1A"/>
+                </a:solidFill>
+              </a:rPr>
+              <a:t>Closed-source (API): </a:t>
+            </a:r>
+            <a:r>
+              <a:rPr lang="en-US" sz="1600" dirty="0">
+                <a:solidFill>
+                  <a:srgbClr val="1A1A1A"/>
+                </a:solidFill>
+              </a:rPr>
+              <a:t>Claude</a:t>
+            </a:r>
+          </a:p>
+          <a:p>
+            <a:pPr marL="342900" indent="-342900" algn="l">
+              <a:spcBef>
+                <a:spcPts val="300"/>
+              </a:spcBef>
+              <a:spcAft>
+                <a:spcPts val="300"/>
+              </a:spcAft>
+              <a:buFont typeface="Arial"/>
+              <a:buChar char="•"/>
+            </a:pPr>
+            <a:r>
+              <a:rPr lang="en-US" sz="1600" b="1" dirty="0">
+                <a:solidFill>
+                  <a:srgbClr val="1A1A1A"/>
+                </a:solidFill>
+              </a:rPr>
+              <a:t>Open-source: </a:t>
+            </a:r>
+            <a:r>
+              <a:rPr lang="en-US" sz="1600" dirty="0">
+                <a:solidFill>
+                  <a:srgbClr val="1A1A1A"/>
+                </a:solidFill>
+              </a:rPr>
+              <a:t>Qwen series</a:t>
+            </a:r>
+          </a:p>
+          <a:p>
+            <a:pPr marL="0" indent="0" algn="l">
+              <a:spcBef>
+                <a:spcPts val="900"/>
+              </a:spcBef>
+              <a:spcAft>
+                <a:spcPts val="300"/>
+              </a:spcAft>
+              <a:buNone/>
+            </a:pPr>
+            <a:r>
+              <a:rPr lang="en-US" sz="1900" b="1" dirty="0">
+                <a:solidFill>
+                  <a:srgbClr val="00396B"/>
+                </a:solidFill>
+              </a:rPr>
+              <a:t>Tasks</a:t>
+            </a:r>
+          </a:p>
+          <a:p>
+            <a:pPr marL="342900" indent="-342900" algn="l">
+              <a:spcBef>
+                <a:spcPts val="300"/>
+              </a:spcBef>
+              <a:spcAft>
+                <a:spcPts val="300"/>
+              </a:spcAft>
+              <a:buFont typeface="Arial"/>
+              <a:buChar char="•"/>
+            </a:pPr>
+            <a:r>
+              <a:rPr lang="en-US" sz="1600" b="1" dirty="0">
+                <a:solidFill>
+                  <a:srgbClr val="1A1A1A"/>
+                </a:solidFill>
+              </a:rPr>
+              <a:t>Deep Search: </a:t>
+            </a:r>
+            <a:r>
+              <a:rPr lang="en-US" sz="1600" dirty="0">
+                <a:solidFill>
+                  <a:srgbClr val="1A1A1A"/>
+                </a:solidFill>
+              </a:rPr>
+              <a:t>multi-step retrieval across sources</a:t>
+            </a:r>
+          </a:p>
+          <a:p>
+            <a:pPr marL="342900" indent="-342900" algn="l">
+              <a:spcBef>
+                <a:spcPts val="300"/>
+              </a:spcBef>
+              <a:spcAft>
+                <a:spcPts val="300"/>
+              </a:spcAft>
+              <a:buFont typeface="Arial"/>
+              <a:buChar char="•"/>
+            </a:pPr>
+            <a:r>
+              <a:rPr lang="en-US" sz="1600" b="1" dirty="0">
+                <a:solidFill>
+                  <a:srgbClr val="1A1A1A"/>
+                </a:solidFill>
+              </a:rPr>
+              <a:t>Deep Research: </a:t>
+            </a:r>
+            <a:r>
+              <a:rPr lang="en-US" sz="1600" dirty="0">
+                <a:solidFill>
+                  <a:srgbClr val="1A1A1A"/>
+                </a:solidFill>
+              </a:rPr>
+              <a:t>synthesis of findings into structured reports</a:t>
+            </a:r>
+          </a:p>
+          <a:p>
+            <a:pPr marL="342900" indent="-342900" algn="l">
+              <a:spcBef>
+                <a:spcPts val="300"/>
+              </a:spcBef>
+              <a:spcAft>
+                <a:spcPts val="300"/>
+              </a:spcAft>
+              <a:buFont typeface="Arial"/>
+              <a:buChar char="•"/>
+            </a:pPr>
+            <a:r>
+              <a:rPr lang="en-US" sz="1600" b="1" dirty="0">
+                <a:solidFill>
+                  <a:srgbClr val="1A1A1A"/>
+                </a:solidFill>
+              </a:rPr>
+              <a:t>Code Generation: </a:t>
+            </a:r>
+            <a:r>
+              <a:rPr lang="en-US" sz="1600" dirty="0">
+                <a:solidFill>
+                  <a:srgbClr val="1A1A1A"/>
+                </a:solidFill>
+              </a:rPr>
+              <a:t>end-to-end code writing and execution</a:t>
+            </a:r>
+          </a:p>
+          <a:p>
+            <a:pPr marL="0" indent="0" algn="l">
+              <a:spcBef>
+                <a:spcPts val="900"/>
+              </a:spcBef>
+              <a:spcAft>
+                <a:spcPts val="300"/>
+              </a:spcAft>
+              <a:buNone/>
+            </a:pPr>
+            <a:r>
+              <a:rPr lang="en-US" sz="1900" b="1" dirty="0">
+                <a:solidFill>
+                  <a:srgbClr val="00396B"/>
+                </a:solidFill>
+              </a:rPr>
+              <a:t>Metrics</a:t>
+            </a:r>
+          </a:p>
+          <a:p>
+            <a:pPr marL="342900" indent="-342900" algn="l">
+              <a:spcBef>
+                <a:spcPts val="300"/>
+              </a:spcBef>
+              <a:spcAft>
+                <a:spcPts val="300"/>
+              </a:spcAft>
+              <a:buFont typeface="Arial"/>
+              <a:buChar char="•"/>
+            </a:pPr>
+            <a:r>
+              <a:rPr lang="en-US" sz="1600" b="1" dirty="0">
+                <a:solidFill>
+                  <a:srgbClr val="1A1A1A"/>
+                </a:solidFill>
+              </a:rPr>
+              <a:t>Quality: </a:t>
+            </a:r>
+            <a:r>
+              <a:rPr lang="en-US" sz="1600" dirty="0">
+                <a:solidFill>
+                  <a:srgbClr val="1A1A1A"/>
+                </a:solidFill>
+              </a:rPr>
+              <a:t>task accuracy and answer correctness</a:t>
+            </a:r>
+          </a:p>
+          <a:p>
+            <a:pPr marL="342900" indent="-342900" algn="l">
+              <a:spcBef>
+                <a:spcPts val="300"/>
+              </a:spcBef>
+              <a:spcAft>
+                <a:spcPts val="300"/>
+              </a:spcAft>
+              <a:buFont typeface="Arial"/>
+              <a:buChar char="•"/>
+            </a:pPr>
+            <a:r>
+              <a:rPr lang="en-US" sz="1600" b="1" dirty="0">
+                <a:solidFill>
+                  <a:srgbClr val="1A1A1A"/>
+                </a:solidFill>
+              </a:rPr>
+              <a:t>Efficiency: </a:t>
+            </a:r>
+            <a:r>
+              <a:rPr lang="en-US" sz="1600" dirty="0">
+                <a:solidFill>
+                  <a:srgbClr val="1A1A1A"/>
+                </a:solidFill>
+              </a:rPr>
+              <a:t>token cost and latency</a:t>
+            </a:r>
+          </a:p>
+        </p:txBody>
+      </p:sp>
+      <p:sp>
+        <p:nvSpPr>
+          <p:cNvPr id="4" name="Slide Number Placeholder 3">
+            <a:extLst>
+              <a:ext uri="{FF2B5EF4-FFF2-40B4-BE49-F238E27FC236}">
+                <a16:creationId xmlns:a16="http://schemas.microsoft.com/office/drawing/2014/main" id="{655AF0E1-99F5-B2B8-5864-40A0EC7866A0}"/>
+              </a:ext>
+            </a:extLst>
+          </p:cNvPr>
+          <p:cNvSpPr>
+            <a:spLocks noGrp="1"/>
+          </p:cNvSpPr>
+          <p:nvPr>
+            <p:ph type="sldNum" sz="quarter" idx="12"/>
+          </p:nvPr>
+        </p:nvSpPr>
+        <p:spPr>
+          <a:xfrm>
+            <a:off x="10210800" y="6451600"/>
+            <a:ext cx="1524000" cy="304800"/>
+          </a:xfrm>
+        </p:spPr>
+        <p:txBody>
+          <a:bodyPr anchor="ctr" anchorCtr="0"/>
+          <a:lstStyle/>
+          <a:p>
+            <a:fld id="{FC0A7A6B-4B1F-5446-A3A1-99DEB5EA7F81}" type="slidenum">
+              <a:rPr lang="en-CN" smtClean="0">
+                <a:solidFill>
+                  <a:srgbClr val="9AA7B5"/>
+                </a:solidFill>
+              </a:rPr>
+              <a:t>4</a:t>
+            </a:fld>
+            <a:endParaRPr lang="en-CN">
+              <a:solidFill>
+                <a:srgbClr val="9AA7B5"/>
+              </a:solidFill>
+            </a:endParaRPr>
+          </a:p>
+        </p:txBody>
+      </p:sp>
+      <p:sp>
+        <p:nvSpPr>
+          <p:cNvPr id="6" name="Accent Rule">
+            <a:extLst>
+              <a:ext uri="{FF2B5EF4-FFF2-40B4-BE49-F238E27FC236}">
+                <a16:creationId xmlns:a16="http://schemas.microsoft.com/office/drawing/2014/main" id="{1FEDF0BE-EA3E-F678-521A-F662C53C156B}"/>
+              </a:ext>
+            </a:extLst>
+          </p:cNvPr>
+          <p:cNvSpPr/>
+          <p:nvPr/>
+        </p:nvSpPr>
+        <p:spPr>
+          <a:xfrm>
+            <a:off x="838200" y="2209800"/>
+            <a:ext cx="1524000" cy="76200"/>
+          </a:xfrm>
+          <a:prstGeom prst="rect">
+            <a:avLst/>
+          </a:prstGeom>
+          <a:solidFill>
+            <a:srgbClr val="0073CF"/>
+          </a:solidFill>
+          <a:ln w="12700" cap="flat" cmpd="sng" algn="ctr">
+            <a:noFill/>
+            <a:prstDash val="solid"/>
+            <a:miter lim="800000"/>
+          </a:ln>
+        </p:spPr>
+        <p:style>
+          <a:lnRef idx="2">
+            <a:schemeClr val="accent1">
+              <a:shade val="15000"/>
+            </a:schemeClr>
+          </a:lnRef>
+          <a:fillRef idx="1">
+            <a:schemeClr val="accent1"/>
+          </a:fillRef>
+          <a:effectRef idx="0">
+            <a:schemeClr val="accent1"/>
+          </a:effectRef>
+          <a:fontRef idx="minor">
+            <a:schemeClr val="lt1"/>
+          </a:fontRef>
+        </p:style>
+        <p:txBody>
+          <a:bodyPr vertOverflow="clip" horzOverflow="clip" rtlCol="0" anchor="t"/>
+          <a:lstStyle/>
+          <a:p>
+            <a:pPr algn="l"/>
+            <a:endParaRPr lang="en-CN"/>
+          </a:p>
+        </p:txBody>
+      </p:sp>
+      <p:pic>
+        <p:nvPicPr>
+          <p:cNvPr id="7" name="Copied Picture 7">
+            <a:extLst>
+              <a:ext uri="{FF2B5EF4-FFF2-40B4-BE49-F238E27FC236}">
+                <a16:creationId xmlns:a16="http://schemas.microsoft.com/office/drawing/2014/main" id="{00348D28-ADBA-B423-2122-472CBF1EF219}"/>
+              </a:ext>
+            </a:extLst>
+          </p:cNvPr>
+          <p:cNvPicPr>
+            <a:picLocks noChangeAspect="1"/>
+          </p:cNvPicPr>
+          <p:nvPr/>
+        </p:nvPicPr>
+        <p:blipFill>
+          <a:blip r:embed="rId2"/>
+          <a:stretch>
+            <a:fillRect/>
+          </a:stretch>
+        </p:blipFill>
+        <p:spPr>
+          <a:xfrm>
+            <a:off x="838200" y="508000"/>
+            <a:ext cx="762000" cy="762000"/>
+          </a:xfrm>
+          <a:prstGeom prst="rect">
+            <a:avLst/>
+          </a:prstGeom>
+        </p:spPr>
+      </p:pic>
+      <p:sp>
+        <p:nvSpPr>
+          <p:cNvPr id="10" name="Footer Name">
+            <a:extLst>
+              <a:ext uri="{FF2B5EF4-FFF2-40B4-BE49-F238E27FC236}">
+                <a16:creationId xmlns:a16="http://schemas.microsoft.com/office/drawing/2014/main" id="{BEEE8946-DC29-629D-73C8-6B761EF36F3D}"/>
+              </a:ext>
+            </a:extLst>
+          </p:cNvPr>
+          <p:cNvSpPr txBox="1"/>
+          <p:nvPr/>
+        </p:nvSpPr>
+        <p:spPr>
+          <a:xfrm>
+            <a:off x="838200" y="6350000"/>
+            <a:ext cx="5080000" cy="508000"/>
+          </a:xfrm>
+          <a:prstGeom prst="rect">
+            <a:avLst/>
+          </a:prstGeom>
+          <a:noFill/>
+        </p:spPr>
+        <p:txBody>
+          <a:bodyPr vertOverflow="overflow" vert="horz" wrap="none" rtlCol="0" anchor="ctr" anchorCtr="0">
+            <a:noAutofit/>
+          </a:bodyPr>
+          <a:lstStyle/>
+          <a:p>
+            <a:pPr algn="l">
+              <a:buNone/>
+            </a:pPr>
+            <a:r>
+              <a:rPr lang="en-US" sz="1400" b="1" spc="200" dirty="0">
+                <a:solidFill>
+                  <a:srgbClr val="FFFFFF"/>
+                </a:solidFill>
+              </a:rPr>
+              <a:t>Quan Wei</a:t>
+            </a:r>
+            <a:r>
+              <a:rPr lang="en-US" sz="1400" b="1" spc="200" dirty="0">
+                <a:solidFill>
+                  <a:srgbClr val="9AA7B5"/>
+                </a:solidFill>
+              </a:rPr>
+              <a:t>   |   </a:t>
+            </a:r>
+            <a:r>
+              <a:rPr lang="en-US" sz="1400" b="1" spc="200" dirty="0">
+                <a:solidFill>
+                  <a:srgbClr val="FFFFFF"/>
+                </a:solidFill>
+              </a:rPr>
+              <a:t>WEEK 1</a:t>
+            </a:r>
+          </a:p>
+        </p:txBody>
+      </p:sp>
+    </p:spTree>
+    <p:extLst>
+      <p:ext uri="{BB962C8B-B14F-4D97-AF65-F5344CB8AC3E}">
+        <p14:creationId xmlns:p14="http://schemas.microsoft.com/office/powerpoint/2010/main" val="1557384389"/>
+      </p:ext>
+    </p:extLst>
+  </p:cSld>
+  <p:clrMapOvr>
+    <a:masterClrMapping/>
+  </p:clrMapOvr>
+</p:sld>
+</file>
+
+<file path=ppt/slides/slide5.xml><?xml version="1.0" encoding="utf-8"?>
+<p:sld xmlns:a="http://schemas.openxmlformats.org/drawingml/2006/main" xmlns:r="http://schemas.openxmlformats.org/officeDocument/2006/relationships" xmlns:p="http://schemas.openxmlformats.org/presentationml/2006/main">
+  <p:cSld>
+    <p:spTree>
+      <p:nvGrpSpPr>
+        <p:cNvPr id="1" name="">
+          <a:extLst>
+            <a:ext uri="{FF2B5EF4-FFF2-40B4-BE49-F238E27FC236}">
+              <a16:creationId xmlns:a16="http://schemas.microsoft.com/office/drawing/2014/main" id="{C17FF716-6B78-A664-4C46-3C5977ECDDBA}"/>
+            </a:ext>
+          </a:extLst>
+        </p:cNvPr>
+        <p:cNvGrpSpPr/>
+        <p:nvPr/>
+      </p:nvGrpSpPr>
+      <p:grpSpPr>
+        <a:xfrm>
+          <a:off x="0" y="0"/>
+          <a:ext cx="0" cy="0"/>
+          <a:chOff x="0" y="0"/>
+          <a:chExt cx="0" cy="0"/>
+        </a:xfrm>
+      </p:grpSpPr>
+      <p:sp>
+        <p:nvSpPr>
+          <p:cNvPr id="5" name="Footer Bar">
+            <a:extLst>
+              <a:ext uri="{FF2B5EF4-FFF2-40B4-BE49-F238E27FC236}">
+                <a16:creationId xmlns:a16="http://schemas.microsoft.com/office/drawing/2014/main" id="{3C9D4CEF-3555-7854-1F9D-D28008C4F266}"/>
+              </a:ext>
+            </a:extLst>
+          </p:cNvPr>
+          <p:cNvSpPr/>
+          <p:nvPr/>
+        </p:nvSpPr>
+        <p:spPr>
+          <a:xfrm>
+            <a:off x="0" y="6350000"/>
+            <a:ext cx="12192000" cy="508000"/>
+          </a:xfrm>
+          <a:prstGeom prst="rect">
+            <a:avLst/>
+          </a:prstGeom>
+          <a:solidFill>
+            <a:srgbClr val="00396B"/>
+          </a:solidFill>
+          <a:ln w="12700" cap="flat" cmpd="sng" algn="ctr">
+            <a:noFill/>
+            <a:prstDash val="solid"/>
+            <a:miter lim="800000"/>
+          </a:ln>
+        </p:spPr>
+        <p:style>
+          <a:lnRef idx="2">
+            <a:schemeClr val="accent1">
+              <a:shade val="15000"/>
+            </a:schemeClr>
+          </a:lnRef>
+          <a:fillRef idx="1">
+            <a:schemeClr val="accent1"/>
+          </a:fillRef>
+          <a:effectRef idx="0">
+            <a:schemeClr val="accent1"/>
+          </a:effectRef>
+          <a:fontRef idx="minor">
+            <a:schemeClr val="lt1"/>
+          </a:fontRef>
+        </p:style>
+        <p:txBody>
+          <a:bodyPr vertOverflow="clip" horzOverflow="clip" rtlCol="0" anchor="t"/>
+          <a:lstStyle/>
+          <a:p>
+            <a:pPr algn="l"/>
+            <a:endParaRPr lang="en-CN"/>
+          </a:p>
+        </p:txBody>
+      </p:sp>
+      <p:sp>
+        <p:nvSpPr>
+          <p:cNvPr id="2" name="Title 1">
+            <a:extLst>
+              <a:ext uri="{FF2B5EF4-FFF2-40B4-BE49-F238E27FC236}">
+                <a16:creationId xmlns:a16="http://schemas.microsoft.com/office/drawing/2014/main" id="{F0B634FB-DF64-3844-36D2-1830F63A78A5}"/>
+              </a:ext>
+            </a:extLst>
+          </p:cNvPr>
+          <p:cNvSpPr>
+            <a:spLocks noGrp="1"/>
+          </p:cNvSpPr>
+          <p:nvPr>
+            <p:ph type="title"/>
+          </p:nvPr>
+        </p:nvSpPr>
+        <p:spPr>
+          <a:xfrm>
+            <a:off x="838200" y="1397000"/>
+            <a:ext cx="10515600" cy="711200"/>
+          </a:xfrm>
+        </p:spPr>
+        <p:txBody>
+          <a:bodyPr anchor="t" anchorCtr="0"/>
+          <a:lstStyle/>
+          <a:p>
+            <a:endParaRPr lang="en-US" sz="3200" b="1" dirty="0">
+              <a:solidFill>
+                <a:srgbClr val="00396B"/>
+              </a:solidFill>
+            </a:endParaRPr>
+          </a:p>
+        </p:txBody>
+      </p:sp>
+      <p:sp>
+        <p:nvSpPr>
+          <p:cNvPr id="3" name="Content Placeholder 2">
+            <a:extLst>
+              <a:ext uri="{FF2B5EF4-FFF2-40B4-BE49-F238E27FC236}">
+                <a16:creationId xmlns:a16="http://schemas.microsoft.com/office/drawing/2014/main" id="{F36A2116-23F5-FE71-A642-B53DB8E4A88E}"/>
+              </a:ext>
+            </a:extLst>
+          </p:cNvPr>
+          <p:cNvSpPr>
+            <a:spLocks noGrp="1"/>
+          </p:cNvSpPr>
+          <p:nvPr>
+            <p:ph idx="1"/>
+          </p:nvPr>
+        </p:nvSpPr>
+        <p:spPr>
+          <a:xfrm>
+            <a:off x="838200" y="2540000"/>
+            <a:ext cx="10515600" cy="3657600"/>
+          </a:xfrm>
+        </p:spPr>
+        <p:txBody>
+          <a:bodyPr>
+            <a:normAutofit/>
+          </a:bodyPr>
+          <a:lstStyle/>
+          <a:p>
+            <a:pPr marL="0" indent="0" algn="l">
+              <a:spcBef>
+                <a:spcPts val="100"/>
+              </a:spcBef>
+              <a:spcAft>
+                <a:spcPts val="150"/>
+              </a:spcAft>
+              <a:buNone/>
+            </a:pPr>
+            <a:endParaRPr lang="en-US" sz="1500" dirty="0">
+              <a:solidFill>
+                <a:srgbClr val="0073CF"/>
+              </a:solidFill>
+            </a:endParaRPr>
+          </a:p>
+        </p:txBody>
+      </p:sp>
+      <p:sp>
+        <p:nvSpPr>
+          <p:cNvPr id="4" name="Slide Number Placeholder 3">
+            <a:extLst>
+              <a:ext uri="{FF2B5EF4-FFF2-40B4-BE49-F238E27FC236}">
+                <a16:creationId xmlns:a16="http://schemas.microsoft.com/office/drawing/2014/main" id="{F4266C49-890C-B537-243D-F46EA0E6AA60}"/>
+              </a:ext>
+            </a:extLst>
+          </p:cNvPr>
+          <p:cNvSpPr>
+            <a:spLocks noGrp="1"/>
+          </p:cNvSpPr>
+          <p:nvPr>
+            <p:ph type="sldNum" sz="quarter" idx="12"/>
+          </p:nvPr>
+        </p:nvSpPr>
+        <p:spPr>
+          <a:xfrm>
+            <a:off x="10210800" y="6451600"/>
+            <a:ext cx="1524000" cy="304800"/>
+          </a:xfrm>
+        </p:spPr>
+        <p:txBody>
+          <a:bodyPr anchor="ctr" anchorCtr="0"/>
+          <a:lstStyle/>
+          <a:p>
+            <a:fld id="{FC0A7A6B-4B1F-5446-A3A1-99DEB5EA7F81}" type="slidenum">
+              <a:rPr lang="en-CN" smtClean="0">
+                <a:solidFill>
+                  <a:srgbClr val="9AA7B5"/>
+                </a:solidFill>
+              </a:rPr>
+              <a:t>5</a:t>
+            </a:fld>
+            <a:endParaRPr lang="en-CN">
+              <a:solidFill>
+                <a:srgbClr val="9AA7B5"/>
+              </a:solidFill>
+            </a:endParaRPr>
+          </a:p>
+        </p:txBody>
+      </p:sp>
+      <p:sp>
+        <p:nvSpPr>
+          <p:cNvPr id="6" name="Accent Rule">
+            <a:extLst>
+              <a:ext uri="{FF2B5EF4-FFF2-40B4-BE49-F238E27FC236}">
+                <a16:creationId xmlns:a16="http://schemas.microsoft.com/office/drawing/2014/main" id="{F552D167-F6C6-DD8A-C58A-E3062CB80615}"/>
+              </a:ext>
+            </a:extLst>
+          </p:cNvPr>
+          <p:cNvSpPr/>
+          <p:nvPr/>
+        </p:nvSpPr>
+        <p:spPr>
+          <a:xfrm>
+            <a:off x="838200" y="2209800"/>
+            <a:ext cx="1524000" cy="76200"/>
+          </a:xfrm>
+          <a:prstGeom prst="rect">
+            <a:avLst/>
+          </a:prstGeom>
+          <a:solidFill>
+            <a:srgbClr val="0073CF"/>
+          </a:solidFill>
+          <a:ln w="12700" cap="flat" cmpd="sng" algn="ctr">
+            <a:noFill/>
+            <a:prstDash val="solid"/>
+            <a:miter lim="800000"/>
+          </a:ln>
+        </p:spPr>
+        <p:style>
+          <a:lnRef idx="2">
+            <a:schemeClr val="accent1">
+              <a:shade val="15000"/>
+            </a:schemeClr>
+          </a:lnRef>
+          <a:fillRef idx="1">
+            <a:schemeClr val="accent1"/>
+          </a:fillRef>
+          <a:effectRef idx="0">
+            <a:schemeClr val="accent1"/>
+          </a:effectRef>
+          <a:fontRef idx="minor">
+            <a:schemeClr val="lt1"/>
+          </a:fontRef>
+        </p:style>
+        <p:txBody>
+          <a:bodyPr vertOverflow="clip" horzOverflow="clip" rtlCol="0" anchor="t"/>
+          <a:lstStyle/>
+          <a:p>
+            <a:pPr algn="l"/>
+            <a:endParaRPr lang="en-CN"/>
+          </a:p>
+        </p:txBody>
+      </p:sp>
+      <p:pic>
+        <p:nvPicPr>
+          <p:cNvPr id="7" name="Copied Picture 7">
+            <a:extLst>
+              <a:ext uri="{FF2B5EF4-FFF2-40B4-BE49-F238E27FC236}">
+                <a16:creationId xmlns:a16="http://schemas.microsoft.com/office/drawing/2014/main" id="{44F6969E-B7D6-DB4F-3D46-0898E523108E}"/>
+              </a:ext>
+            </a:extLst>
+          </p:cNvPr>
+          <p:cNvPicPr>
+            <a:picLocks noChangeAspect="1"/>
+          </p:cNvPicPr>
+          <p:nvPr/>
+        </p:nvPicPr>
+        <p:blipFill>
+          <a:blip r:embed="rId2"/>
+          <a:stretch>
+            <a:fillRect/>
+          </a:stretch>
+        </p:blipFill>
+        <p:spPr>
+          <a:xfrm>
+            <a:off x="838200" y="508000"/>
+            <a:ext cx="762000" cy="762000"/>
+          </a:xfrm>
+          <a:prstGeom prst="rect">
+            <a:avLst/>
+          </a:prstGeom>
+        </p:spPr>
+      </p:pic>
+      <p:sp>
+        <p:nvSpPr>
+          <p:cNvPr id="10" name="Footer Name">
+            <a:extLst>
+              <a:ext uri="{FF2B5EF4-FFF2-40B4-BE49-F238E27FC236}">
+                <a16:creationId xmlns:a16="http://schemas.microsoft.com/office/drawing/2014/main" id="{5640A57E-3A3F-4D74-E8E3-76F0EFD6D3B0}"/>
+              </a:ext>
+            </a:extLst>
+          </p:cNvPr>
+          <p:cNvSpPr txBox="1"/>
+          <p:nvPr/>
+        </p:nvSpPr>
+        <p:spPr>
+          <a:xfrm>
+            <a:off x="838200" y="6350000"/>
+            <a:ext cx="5080000" cy="508000"/>
+          </a:xfrm>
+          <a:prstGeom prst="rect">
+            <a:avLst/>
+          </a:prstGeom>
+          <a:noFill/>
+        </p:spPr>
+        <p:txBody>
+          <a:bodyPr vertOverflow="overflow" vert="horz" wrap="none" rtlCol="0" anchor="ctr" anchorCtr="0">
+            <a:noAutofit/>
+          </a:bodyPr>
+          <a:lstStyle/>
+          <a:p>
+            <a:pPr algn="l">
+              <a:buNone/>
+            </a:pPr>
+            <a:r>
+              <a:rPr lang="en-US" sz="1400" b="1" spc="200" dirty="0">
+                <a:solidFill>
+                  <a:srgbClr val="FFFFFF"/>
+                </a:solidFill>
+              </a:rPr>
+              <a:t>Quan Wei</a:t>
+            </a:r>
+            <a:r>
+              <a:rPr lang="en-US" sz="1400" b="1" spc="200" dirty="0">
+                <a:solidFill>
+                  <a:srgbClr val="9AA7B5"/>
+                </a:solidFill>
+              </a:rPr>
+              <a:t>   |   </a:t>
+            </a:r>
+            <a:r>
+              <a:rPr lang="en-US" sz="1400" b="1" spc="200" dirty="0">
+                <a:solidFill>
+                  <a:srgbClr val="FFFFFF"/>
+                </a:solidFill>
+              </a:rPr>
+              <a:t>WEEK 1</a:t>
+            </a:r>
+          </a:p>
+        </p:txBody>
+      </p:sp>
+    </p:spTree>
+    <p:extLst>
+      <p:ext uri="{BB962C8B-B14F-4D97-AF65-F5344CB8AC3E}">
+        <p14:creationId xmlns:p14="http://schemas.microsoft.com/office/powerpoint/2010/main" val="3498725614"/>
       </p:ext>
     </p:extLst>
   </p:cSld>

--- a/project_update.pptx
+++ b/project_update.pptx
@@ -5,14 +5,22 @@
     <p:sldMasterId id="2147483672" r:id="rId1"/>
   </p:sldMasterIdLst>
   <p:notesMasterIdLst>
-    <p:notesMasterId r:id="rId7"/>
+    <p:notesMasterId r:id="rId15"/>
   </p:notesMasterIdLst>
   <p:sldIdLst>
-    <p:sldId id="275" r:id="rId2"/>
-    <p:sldId id="312" r:id="rId3"/>
-    <p:sldId id="327" r:id="rId4"/>
-    <p:sldId id="334" r:id="rId5"/>
-    <p:sldId id="332" r:id="rId6"/>
+    <p:sldId id="332" r:id="rId2"/>
+    <p:sldId id="275" r:id="rId3"/>
+    <p:sldId id="353" r:id="rId4"/>
+    <p:sldId id="312" r:id="rId5"/>
+    <p:sldId id="327" r:id="rId6"/>
+    <p:sldId id="334" r:id="rId7"/>
+    <p:sldId id="354" r:id="rId8"/>
+    <p:sldId id="355" r:id="rId9"/>
+    <p:sldId id="356" r:id="rId10"/>
+    <p:sldId id="362" r:id="rId11"/>
+    <p:sldId id="361" r:id="rId12"/>
+    <p:sldId id="365" r:id="rId13"/>
+    <p:sldId id="369" r:id="rId14"/>
   </p:sldIdLst>
   <p:sldSz cx="12192000" cy="6858000"/>
   <p:notesSz cx="6858000" cy="9144000"/>
@@ -201,7 +209,7 @@
           <a:p>
             <a:fld id="{A969A4D8-3B2C-044F-B9CE-BA9A5D441629}" type="datetimeFigureOut">
               <a:rPr lang="en-CN" smtClean="0"/>
-              <a:t>2026/6/3</a:t>
+              <a:t>2026/6/10</a:t>
             </a:fld>
             <a:endParaRPr lang="en-CN"/>
           </a:p>
@@ -618,7 +626,7 @@
           <a:p>
             <a:fld id="{95F109AB-5A71-B848-AE30-6241B4A377C3}" type="datetime1">
               <a:rPr lang="en-US" smtClean="0"/>
-              <a:t>6/3/26</a:t>
+              <a:t>6/10/26</a:t>
             </a:fld>
             <a:endParaRPr lang="en-CN"/>
           </a:p>
@@ -818,7 +826,7 @@
           <a:p>
             <a:fld id="{3988228F-5CF2-0046-9186-A5BCE16AD50F}" type="datetime1">
               <a:rPr lang="en-US" smtClean="0"/>
-              <a:t>6/3/26</a:t>
+              <a:t>6/10/26</a:t>
             </a:fld>
             <a:endParaRPr lang="en-CN"/>
           </a:p>
@@ -1028,7 +1036,7 @@
           <a:p>
             <a:fld id="{9F4B0477-26BF-834F-AE73-C91BC4DF75D4}" type="datetime1">
               <a:rPr lang="en-US" smtClean="0"/>
-              <a:t>6/3/26</a:t>
+              <a:t>6/10/26</a:t>
             </a:fld>
             <a:endParaRPr lang="en-CN"/>
           </a:p>
@@ -1228,7 +1236,7 @@
           <a:p>
             <a:fld id="{589112CF-B6AE-474E-A1D1-12258281CB95}" type="datetime1">
               <a:rPr lang="en-US" smtClean="0"/>
-              <a:t>6/3/26</a:t>
+              <a:t>6/10/26</a:t>
             </a:fld>
             <a:endParaRPr lang="en-CN"/>
           </a:p>
@@ -1504,7 +1512,7 @@
           <a:p>
             <a:fld id="{C226D9D0-4F79-BC4B-978E-030A93E4CCAE}" type="datetime1">
               <a:rPr lang="en-US" smtClean="0"/>
-              <a:t>6/3/26</a:t>
+              <a:t>6/10/26</a:t>
             </a:fld>
             <a:endParaRPr lang="en-CN"/>
           </a:p>
@@ -1772,7 +1780,7 @@
           <a:p>
             <a:fld id="{9122B4FA-D8CB-FF46-9B48-72A2520F1EB0}" type="datetime1">
               <a:rPr lang="en-US" smtClean="0"/>
-              <a:t>6/3/26</a:t>
+              <a:t>6/10/26</a:t>
             </a:fld>
             <a:endParaRPr lang="en-CN"/>
           </a:p>
@@ -2187,7 +2195,7 @@
           <a:p>
             <a:fld id="{C4DD5D45-C04D-A143-B571-20041271315A}" type="datetime1">
               <a:rPr lang="en-US" smtClean="0"/>
-              <a:t>6/3/26</a:t>
+              <a:t>6/10/26</a:t>
             </a:fld>
             <a:endParaRPr lang="en-CN"/>
           </a:p>
@@ -2329,7 +2337,7 @@
           <a:p>
             <a:fld id="{6B770501-1AEF-9240-8471-86DF1A6D9745}" type="datetime1">
               <a:rPr lang="en-US" smtClean="0"/>
-              <a:t>6/3/26</a:t>
+              <a:t>6/10/26</a:t>
             </a:fld>
             <a:endParaRPr lang="en-CN"/>
           </a:p>
@@ -2442,7 +2450,7 @@
           <a:p>
             <a:fld id="{F04344E2-A38D-ED4A-9FAE-38DACDB44195}" type="datetime1">
               <a:rPr lang="en-US" smtClean="0"/>
-              <a:t>6/3/26</a:t>
+              <a:t>6/10/26</a:t>
             </a:fld>
             <a:endParaRPr lang="en-CN"/>
           </a:p>
@@ -2755,7 +2763,7 @@
           <a:p>
             <a:fld id="{5FB8D108-18C9-8A47-BCEE-FC844F24048D}" type="datetime1">
               <a:rPr lang="en-US" smtClean="0"/>
-              <a:t>6/3/26</a:t>
+              <a:t>6/10/26</a:t>
             </a:fld>
             <a:endParaRPr lang="en-CN"/>
           </a:p>
@@ -3044,7 +3052,7 @@
           <a:p>
             <a:fld id="{564B0546-E853-EA4A-BB99-95D94DD39026}" type="datetime1">
               <a:rPr lang="en-US" smtClean="0"/>
-              <a:t>6/3/26</a:t>
+              <a:t>6/10/26</a:t>
             </a:fld>
             <a:endParaRPr lang="en-CN"/>
           </a:p>
@@ -3287,7 +3295,7 @@
           <a:p>
             <a:fld id="{DB67D221-21D5-E343-9B76-E6DA17C5106F}" type="datetime1">
               <a:rPr lang="en-US" smtClean="0"/>
-              <a:t>6/3/26</a:t>
+              <a:t>6/10/26</a:t>
             </a:fld>
             <a:endParaRPr lang="en-CN"/>
           </a:p>
@@ -3693,7 +3701,13 @@
   <p:cSld>
     <p:spTree>
       <p:nvGrpSpPr>
-        <p:cNvPr id="1" name=""/>
+        <p:cNvPr id="1" name="">
+          <a:extLst>
+            <a:ext uri="{FF2B5EF4-FFF2-40B4-BE49-F238E27FC236}">
+              <a16:creationId xmlns:a16="http://schemas.microsoft.com/office/drawing/2014/main" id="{C17FF716-6B78-A664-4C46-3C5977ECDDBA}"/>
+            </a:ext>
+          </a:extLst>
+        </p:cNvPr>
         <p:cNvGrpSpPr/>
         <p:nvPr/>
       </p:nvGrpSpPr>
@@ -3707,7 +3721,13 @@
       </p:grpSpPr>
       <p:sp>
         <p:nvSpPr>
-          <p:cNvPr id="50" name="Side Band"/>
+          <p:cNvPr id="5" name="Footer Bar">
+            <a:extLst>
+              <a:ext uri="{FF2B5EF4-FFF2-40B4-BE49-F238E27FC236}">
+                <a16:creationId xmlns:a16="http://schemas.microsoft.com/office/drawing/2014/main" id="{3C9D4CEF-3555-7854-1F9D-D28008C4F266}"/>
+              </a:ext>
+            </a:extLst>
+          </p:cNvPr>
           <p:cNvSpPr/>
           <p:nvPr/>
         </p:nvSpPr>
@@ -3722,44 +3742,34 @@
           <a:solidFill>
             <a:srgbClr val="00396B"/>
           </a:solidFill>
-          <a:ln>
+          <a:ln w="12700" cap="flat" cmpd="sng" algn="ctr">
             <a:noFill/>
+            <a:prstDash val="solid"/>
+            <a:miter lim="800000"/>
           </a:ln>
         </p:spPr>
-        <p:txBody>
-          <a:bodyPr/>
-          <a:lstStyle/>
-          <a:p>
-            <a:endParaRPr lang="en-US"/>
-          </a:p>
-        </p:txBody>
-      </p:sp>
-      <p:sp>
-        <p:nvSpPr>
-          <p:cNvPr id="51" name="Accent Stripe"/>
-          <p:cNvSpPr/>
-          <p:nvPr/>
-        </p:nvSpPr>
-        <p:spPr>
-          <a:xfrm>
-            <a:off x="914400" y="4572000"/>
-            <a:ext cx="1524000" cy="76200"/>
-          </a:xfrm>
-          <a:prstGeom prst="rect">
-            <a:avLst/>
-          </a:prstGeom>
-          <a:solidFill>
-            <a:srgbClr val="0073CF"/>
-          </a:solidFill>
-          <a:ln>
-            <a:noFill/>
-          </a:ln>
-        </p:spPr>
-        <p:txBody>
-          <a:bodyPr/>
-          <a:lstStyle/>
-          <a:p>
-            <a:endParaRPr lang="en-US"/>
+        <p:style>
+          <a:lnRef idx="2">
+            <a:schemeClr val="accent1">
+              <a:shade val="15000"/>
+            </a:schemeClr>
+          </a:lnRef>
+          <a:fillRef idx="1">
+            <a:schemeClr val="accent1"/>
+          </a:fillRef>
+          <a:effectRef idx="0">
+            <a:schemeClr val="accent1"/>
+          </a:effectRef>
+          <a:fontRef idx="minor">
+            <a:schemeClr val="lt1"/>
+          </a:fontRef>
+        </p:style>
+        <p:txBody>
+          <a:bodyPr vertOverflow="clip" horzOverflow="clip" rtlCol="0" anchor="t"/>
+          <a:lstStyle/>
+          <a:p>
+            <a:pPr algn="l"/>
+            <a:endParaRPr lang="en-CN"/>
           </a:p>
         </p:txBody>
       </p:sp>
@@ -3768,7 +3778,7 @@
           <p:cNvPr id="2" name="Title 1">
             <a:extLst>
               <a:ext uri="{FF2B5EF4-FFF2-40B4-BE49-F238E27FC236}">
-                <a16:creationId xmlns:a16="http://schemas.microsoft.com/office/drawing/2014/main" id="{9603BC2B-9AD7-8F77-0482-60AC0C38D2D0}"/>
+                <a16:creationId xmlns:a16="http://schemas.microsoft.com/office/drawing/2014/main" id="{F0B634FB-DF64-3844-36D2-1830F63A78A5}"/>
               </a:ext>
             </a:extLst>
           </p:cNvPr>
@@ -3776,41 +3786,33 @@
             <a:spLocks noGrp="1"/>
           </p:cNvSpPr>
           <p:nvPr>
-            <p:ph type="ctrTitle"/>
+            <p:ph type="title"/>
           </p:nvPr>
         </p:nvSpPr>
         <p:spPr>
           <a:xfrm>
-            <a:off x="914400" y="2489200"/>
-            <a:ext cx="10414000" cy="1524000"/>
-          </a:xfrm>
-        </p:spPr>
-        <p:txBody>
-          <a:bodyPr>
-            <a:normAutofit/>
-          </a:bodyPr>
-          <a:lstStyle/>
-          <a:p>
-            <a:pPr algn="l">
-              <a:buNone/>
-            </a:pPr>
-            <a:r>
-              <a:rPr lang="en-US" sz="4800" b="1" dirty="0">
-                <a:solidFill>
-                  <a:srgbClr val="00396B"/>
-                </a:solidFill>
-              </a:rPr>
-              <a:t>Summer Intern Project Update</a:t>
-            </a:r>
-          </a:p>
-        </p:txBody>
-      </p:sp>
-      <p:sp>
-        <p:nvSpPr>
-          <p:cNvPr id="3" name="Subtitle 2">
-            <a:extLst>
-              <a:ext uri="{FF2B5EF4-FFF2-40B4-BE49-F238E27FC236}">
-                <a16:creationId xmlns:a16="http://schemas.microsoft.com/office/drawing/2014/main" id="{3C306AAC-30D0-931F-13F6-83F8F178D39A}"/>
+            <a:off x="838200" y="1397000"/>
+            <a:ext cx="10515600" cy="711200"/>
+          </a:xfrm>
+        </p:spPr>
+        <p:txBody>
+          <a:bodyPr anchor="t" anchorCtr="0"/>
+          <a:lstStyle/>
+          <a:p>
+            <a:endParaRPr lang="en-US" sz="3200" b="1" dirty="0">
+              <a:solidFill>
+                <a:srgbClr val="00396B"/>
+              </a:solidFill>
+            </a:endParaRPr>
+          </a:p>
+        </p:txBody>
+      </p:sp>
+      <p:sp>
+        <p:nvSpPr>
+          <p:cNvPr id="3" name="Content Placeholder 2">
+            <a:extLst>
+              <a:ext uri="{FF2B5EF4-FFF2-40B4-BE49-F238E27FC236}">
+                <a16:creationId xmlns:a16="http://schemas.microsoft.com/office/drawing/2014/main" id="{F36A2116-23F5-FE71-A642-B53DB8E4A88E}"/>
               </a:ext>
             </a:extLst>
           </p:cNvPr>
@@ -3818,48 +3820,35 @@
             <a:spLocks noGrp="1"/>
           </p:cNvSpPr>
           <p:nvPr>
-            <p:ph type="subTitle" idx="1"/>
+            <p:ph idx="1"/>
           </p:nvPr>
         </p:nvSpPr>
         <p:spPr>
           <a:xfrm>
-            <a:off x="914400" y="4978400"/>
-            <a:ext cx="9652000" cy="889000"/>
-          </a:xfrm>
-        </p:spPr>
-        <p:txBody>
-          <a:bodyPr anchor="ctr">
+            <a:off x="838200" y="2540000"/>
+            <a:ext cx="10515600" cy="3657600"/>
+          </a:xfrm>
+        </p:spPr>
+        <p:txBody>
+          <a:bodyPr>
             <a:normAutofit/>
           </a:bodyPr>
           <a:lstStyle/>
           <a:p>
-            <a:pPr algn="l">
+            <a:pPr marL="0" indent="0" algn="l">
+              <a:spcBef>
+                <a:spcPts val="100"/>
+              </a:spcBef>
+              <a:spcAft>
+                <a:spcPts val="150"/>
+              </a:spcAft>
               <a:buNone/>
             </a:pPr>
-            <a:r>
-              <a:rPr lang="en-US" sz="2200" b="1" dirty="0">
-                <a:solidFill>
-                  <a:srgbClr val="00396B"/>
-                </a:solidFill>
-              </a:rPr>
-              <a:t>Quan Wei</a:t>
-            </a:r>
-            <a:r>
-              <a:rPr lang="en-US" sz="1800" dirty="0">
-                <a:solidFill>
-                  <a:srgbClr val="9AA7B5"/>
-                </a:solidFill>
-              </a:rPr>
-              <a:t>      |      </a:t>
-            </a:r>
-            <a:r>
-              <a:rPr lang="en-US" sz="1600" dirty="0">
-                <a:solidFill>
-                  <a:srgbClr val="6E7B8B"/>
-                </a:solidFill>
-              </a:rPr>
-              <a:t>June 1 – August 7, 2026</a:t>
-            </a:r>
+            <a:endParaRPr lang="en-US" sz="1500" dirty="0">
+              <a:solidFill>
+                <a:srgbClr val="0073CF"/>
+              </a:solidFill>
+            </a:endParaRPr>
           </a:p>
         </p:txBody>
       </p:sp>
@@ -3868,7 +3857,7 @@
           <p:cNvPr id="4" name="Slide Number Placeholder 3">
             <a:extLst>
               <a:ext uri="{FF2B5EF4-FFF2-40B4-BE49-F238E27FC236}">
-                <a16:creationId xmlns:a16="http://schemas.microsoft.com/office/drawing/2014/main" id="{30D07311-195D-0088-1A8F-8AE5FDECFF7F}"/>
+                <a16:creationId xmlns:a16="http://schemas.microsoft.com/office/drawing/2014/main" id="{F4266C49-890C-B537-243D-F46EA0E6AA60}"/>
               </a:ext>
             </a:extLst>
           </p:cNvPr>
@@ -3907,49 +3896,64 @@
       </p:sp>
       <p:sp>
         <p:nvSpPr>
-          <p:cNvPr id="61" name="Band Label"/>
+          <p:cNvPr id="6" name="Accent Rule">
+            <a:extLst>
+              <a:ext uri="{FF2B5EF4-FFF2-40B4-BE49-F238E27FC236}">
+                <a16:creationId xmlns:a16="http://schemas.microsoft.com/office/drawing/2014/main" id="{F552D167-F6C6-DD8A-C58A-E3062CB80615}"/>
+              </a:ext>
+            </a:extLst>
+          </p:cNvPr>
           <p:cNvSpPr/>
           <p:nvPr/>
         </p:nvSpPr>
         <p:spPr>
           <a:xfrm>
-            <a:off x="914400" y="2133600"/>
-            <a:ext cx="6350000" cy="355600"/>
+            <a:off x="838200" y="2209800"/>
+            <a:ext cx="1524000" cy="76200"/>
           </a:xfrm>
           <a:prstGeom prst="rect">
             <a:avLst/>
           </a:prstGeom>
-          <a:noFill/>
-          <a:ln>
+          <a:solidFill>
+            <a:srgbClr val="0073CF"/>
+          </a:solidFill>
+          <a:ln w="12700" cap="flat" cmpd="sng" algn="ctr">
             <a:noFill/>
+            <a:prstDash val="solid"/>
+            <a:miter lim="800000"/>
           </a:ln>
         </p:spPr>
-        <p:txBody>
-          <a:bodyPr wrap="square" lIns="0" tIns="0" rIns="0" bIns="0">
-            <a:normAutofit/>
-          </a:bodyPr>
-          <a:lstStyle/>
-          <a:p>
-            <a:pPr algn="l">
-              <a:buNone/>
-            </a:pPr>
-            <a:r>
-              <a:rPr lang="en-US" sz="1400" b="1" spc="300" dirty="0">
-                <a:solidFill>
-                  <a:srgbClr val="0073CF"/>
-                </a:solidFill>
-              </a:rPr>
-              <a:t>RESEARCH INTERNSHIP</a:t>
-            </a:r>
+        <p:style>
+          <a:lnRef idx="2">
+            <a:schemeClr val="accent1">
+              <a:shade val="15000"/>
+            </a:schemeClr>
+          </a:lnRef>
+          <a:fillRef idx="1">
+            <a:schemeClr val="accent1"/>
+          </a:fillRef>
+          <a:effectRef idx="0">
+            <a:schemeClr val="accent1"/>
+          </a:effectRef>
+          <a:fontRef idx="minor">
+            <a:schemeClr val="lt1"/>
+          </a:fontRef>
+        </p:style>
+        <p:txBody>
+          <a:bodyPr vertOverflow="clip" horzOverflow="clip" rtlCol="0" anchor="t"/>
+          <a:lstStyle/>
+          <a:p>
+            <a:pPr algn="l"/>
+            <a:endParaRPr lang="en-CN"/>
           </a:p>
         </p:txBody>
       </p:sp>
       <p:pic>
         <p:nvPicPr>
-          <p:cNvPr id="5" name="Picture 4">
-            <a:extLst>
-              <a:ext uri="{FF2B5EF4-FFF2-40B4-BE49-F238E27FC236}">
-                <a16:creationId xmlns:a16="http://schemas.microsoft.com/office/drawing/2014/main" id="{56B1ED2A-126C-C268-0703-0A945A4F18CB}"/>
+          <p:cNvPr id="7" name="Copied Picture 7">
+            <a:extLst>
+              <a:ext uri="{FF2B5EF4-FFF2-40B4-BE49-F238E27FC236}">
+                <a16:creationId xmlns:a16="http://schemas.microsoft.com/office/drawing/2014/main" id="{44F6969E-B7D6-DB4F-3D46-0898E523108E}"/>
               </a:ext>
             </a:extLst>
           </p:cNvPr>
@@ -3966,18 +3970,2637 @@
         </p:blipFill>
         <p:spPr>
           <a:xfrm>
-            <a:off x="914400" y="711200"/>
-            <a:ext cx="1219200" cy="1219200"/>
+            <a:off x="838200" y="508000"/>
+            <a:ext cx="762000" cy="762000"/>
           </a:xfrm>
           <a:prstGeom prst="rect">
             <a:avLst/>
           </a:prstGeom>
         </p:spPr>
       </p:pic>
+      <p:sp>
+        <p:nvSpPr>
+          <p:cNvPr id="10" name="Footer Name">
+            <a:extLst>
+              <a:ext uri="{FF2B5EF4-FFF2-40B4-BE49-F238E27FC236}">
+                <a16:creationId xmlns:a16="http://schemas.microsoft.com/office/drawing/2014/main" id="{5640A57E-3A3F-4D74-E8E3-76F0EFD6D3B0}"/>
+              </a:ext>
+            </a:extLst>
+          </p:cNvPr>
+          <p:cNvSpPr txBox="1"/>
+          <p:nvPr/>
+        </p:nvSpPr>
+        <p:spPr>
+          <a:xfrm>
+            <a:off x="838200" y="6350000"/>
+            <a:ext cx="5080000" cy="508000"/>
+          </a:xfrm>
+          <a:prstGeom prst="rect">
+            <a:avLst/>
+          </a:prstGeom>
+          <a:noFill/>
+        </p:spPr>
+        <p:txBody>
+          <a:bodyPr vertOverflow="overflow" vert="horz" wrap="none" rtlCol="0" anchor="ctr" anchorCtr="0">
+            <a:noAutofit/>
+          </a:bodyPr>
+          <a:lstStyle/>
+          <a:p>
+            <a:pPr algn="l">
+              <a:buNone/>
+            </a:pPr>
+            <a:r>
+              <a:rPr lang="en-US" sz="1400" b="1" spc="200" dirty="0">
+                <a:solidFill>
+                  <a:srgbClr val="FFFFFF"/>
+                </a:solidFill>
+              </a:rPr>
+              <a:t>Quan Wei</a:t>
+            </a:r>
+            <a:r>
+              <a:rPr lang="en-US" sz="1400" b="1" spc="200" dirty="0">
+                <a:solidFill>
+                  <a:srgbClr val="9AA7B5"/>
+                </a:solidFill>
+              </a:rPr>
+              <a:t>   |   </a:t>
+            </a:r>
+            <a:r>
+              <a:rPr lang="en-US" sz="1400" b="1" spc="200" dirty="0">
+                <a:solidFill>
+                  <a:srgbClr val="FFFFFF"/>
+                </a:solidFill>
+              </a:rPr>
+              <a:t>WEEK 1</a:t>
+            </a:r>
+          </a:p>
+        </p:txBody>
+      </p:sp>
     </p:spTree>
     <p:extLst>
       <p:ext uri="{BB962C8B-B14F-4D97-AF65-F5344CB8AC3E}">
-        <p14:creationId xmlns:p14="http://schemas.microsoft.com/office/powerpoint/2010/main" val="3483358848"/>
+        <p14:creationId xmlns:p14="http://schemas.microsoft.com/office/powerpoint/2010/main" val="3498725614"/>
+      </p:ext>
+    </p:extLst>
+  </p:cSld>
+  <p:clrMapOvr>
+    <a:masterClrMapping/>
+  </p:clrMapOvr>
+</p:sld>
+</file>
+
+<file path=ppt/slides/slide10.xml><?xml version="1.0" encoding="utf-8"?>
+<p:sld xmlns:a="http://schemas.openxmlformats.org/drawingml/2006/main" xmlns:r="http://schemas.openxmlformats.org/officeDocument/2006/relationships" xmlns:p="http://schemas.openxmlformats.org/presentationml/2006/main">
+  <p:cSld>
+    <p:spTree>
+      <p:nvGrpSpPr>
+        <p:cNvPr id="1" name="">
+          <a:extLst>
+            <a:ext uri="{FF2B5EF4-FFF2-40B4-BE49-F238E27FC236}">
+              <a16:creationId xmlns:a16="http://schemas.microsoft.com/office/drawing/2014/main" id="{322D2A01-C805-89C4-FE86-4736CB820CCA}"/>
+            </a:ext>
+          </a:extLst>
+        </p:cNvPr>
+        <p:cNvGrpSpPr/>
+        <p:nvPr/>
+      </p:nvGrpSpPr>
+      <p:grpSpPr>
+        <a:xfrm>
+          <a:off x="0" y="0"/>
+          <a:ext cx="0" cy="0"/>
+          <a:chOff x="0" y="0"/>
+          <a:chExt cx="0" cy="0"/>
+        </a:xfrm>
+      </p:grpSpPr>
+      <p:sp>
+        <p:nvSpPr>
+          <p:cNvPr id="5" name="Footer Bar">
+            <a:extLst>
+              <a:ext uri="{FF2B5EF4-FFF2-40B4-BE49-F238E27FC236}">
+                <a16:creationId xmlns:a16="http://schemas.microsoft.com/office/drawing/2014/main" id="{8120D02C-6AB4-F46D-729E-F63B9791E97A}"/>
+              </a:ext>
+            </a:extLst>
+          </p:cNvPr>
+          <p:cNvSpPr/>
+          <p:nvPr/>
+        </p:nvSpPr>
+        <p:spPr>
+          <a:xfrm>
+            <a:off x="0" y="6350000"/>
+            <a:ext cx="12192000" cy="508000"/>
+          </a:xfrm>
+          <a:prstGeom prst="rect">
+            <a:avLst/>
+          </a:prstGeom>
+          <a:solidFill>
+            <a:srgbClr val="00396B"/>
+          </a:solidFill>
+          <a:ln w="12700" cap="flat" cmpd="sng" algn="ctr">
+            <a:noFill/>
+            <a:prstDash val="solid"/>
+            <a:miter lim="800000"/>
+          </a:ln>
+        </p:spPr>
+        <p:style>
+          <a:lnRef idx="2">
+            <a:schemeClr val="accent1">
+              <a:shade val="15000"/>
+            </a:schemeClr>
+          </a:lnRef>
+          <a:fillRef idx="1">
+            <a:schemeClr val="accent1"/>
+          </a:fillRef>
+          <a:effectRef idx="0">
+            <a:schemeClr val="accent1"/>
+          </a:effectRef>
+          <a:fontRef idx="minor">
+            <a:schemeClr val="lt1"/>
+          </a:fontRef>
+        </p:style>
+        <p:txBody>
+          <a:bodyPr vertOverflow="clip" horzOverflow="clip" rtlCol="0" anchor="t"/>
+          <a:lstStyle/>
+          <a:p>
+            <a:pPr algn="l"/>
+            <a:endParaRPr lang="en-CN"/>
+          </a:p>
+        </p:txBody>
+      </p:sp>
+      <p:sp>
+        <p:nvSpPr>
+          <p:cNvPr id="2" name="Title 1">
+            <a:extLst>
+              <a:ext uri="{FF2B5EF4-FFF2-40B4-BE49-F238E27FC236}">
+                <a16:creationId xmlns:a16="http://schemas.microsoft.com/office/drawing/2014/main" id="{782A9FB5-B9B5-0D0A-0FF8-5D0E2D8DA0EB}"/>
+              </a:ext>
+            </a:extLst>
+          </p:cNvPr>
+          <p:cNvSpPr>
+            <a:spLocks noGrp="1"/>
+          </p:cNvSpPr>
+          <p:nvPr>
+            <p:ph type="title"/>
+          </p:nvPr>
+        </p:nvSpPr>
+        <p:spPr>
+          <a:xfrm>
+            <a:off x="838200" y="1397000"/>
+            <a:ext cx="10515600" cy="711200"/>
+          </a:xfrm>
+        </p:spPr>
+        <p:txBody>
+          <a:bodyPr anchor="t" anchorCtr="0"/>
+          <a:lstStyle/>
+          <a:p>
+            <a:r>
+              <a:rPr lang="en-US" sz="3200" b="1" dirty="0">
+                <a:solidFill>
+                  <a:srgbClr val="00396B"/>
+                </a:solidFill>
+              </a:rPr>
+              <a:t>Orchestrator Responsibilities</a:t>
+            </a:r>
+          </a:p>
+        </p:txBody>
+      </p:sp>
+      <p:sp>
+        <p:nvSpPr>
+          <p:cNvPr id="3" name="Content Placeholder 2">
+            <a:extLst>
+              <a:ext uri="{FF2B5EF4-FFF2-40B4-BE49-F238E27FC236}">
+                <a16:creationId xmlns:a16="http://schemas.microsoft.com/office/drawing/2014/main" id="{AC01FF6C-C3DD-1C88-260A-36C216ACC5ED}"/>
+              </a:ext>
+            </a:extLst>
+          </p:cNvPr>
+          <p:cNvSpPr>
+            <a:spLocks noGrp="1"/>
+          </p:cNvSpPr>
+          <p:nvPr>
+            <p:ph idx="1"/>
+          </p:nvPr>
+        </p:nvSpPr>
+        <p:spPr>
+          <a:xfrm>
+            <a:off x="838200" y="2387600"/>
+            <a:ext cx="10515600" cy="3810000"/>
+          </a:xfrm>
+        </p:spPr>
+        <p:txBody>
+          <a:bodyPr anchor="ctr" anchorCtr="0">
+            <a:normAutofit/>
+          </a:bodyPr>
+          <a:lstStyle/>
+          <a:p>
+            <a:pPr marL="0" indent="0" algn="l">
+              <a:spcAft>
+                <a:spcPts val="400"/>
+              </a:spcAft>
+              <a:buNone/>
+            </a:pPr>
+            <a:r>
+              <a:rPr lang="en-US" sz="1600" i="1" dirty="0">
+                <a:solidFill>
+                  <a:srgbClr val="6E7B8B"/>
+                </a:solidFill>
+              </a:rPr>
+              <a:t>The orchestrator coordinates the system across three levels.</a:t>
+            </a:r>
+          </a:p>
+          <a:p>
+            <a:pPr marL="285750" indent="-285750" algn="l">
+              <a:lnSpc>
+                <a:spcPct val="106000"/>
+              </a:lnSpc>
+              <a:spcBef>
+                <a:spcPts val="120"/>
+              </a:spcBef>
+              <a:spcAft>
+                <a:spcPts val="200"/>
+              </a:spcAft>
+              <a:buFont typeface="Arial"/>
+              <a:buChar char="•"/>
+            </a:pPr>
+            <a:r>
+              <a:rPr lang="en-US" sz="1600" b="1" dirty="0">
+                <a:solidFill>
+                  <a:srgbClr val="00396B"/>
+                </a:solidFill>
+              </a:rPr>
+              <a:t>Task orchestration — </a:t>
+            </a:r>
+            <a:r>
+              <a:rPr lang="en-US" sz="1600" dirty="0">
+                <a:solidFill>
+                  <a:srgbClr val="3A3A3C"/>
+                </a:solidFill>
+              </a:rPr>
+              <a:t>decompose the input into a subtask DAG and assign subtasks to subagents.</a:t>
+            </a:r>
+          </a:p>
+          <a:p>
+            <a:pPr marL="285750" indent="-285750" algn="l">
+              <a:lnSpc>
+                <a:spcPct val="106000"/>
+              </a:lnSpc>
+              <a:spcBef>
+                <a:spcPts val="120"/>
+              </a:spcBef>
+              <a:spcAft>
+                <a:spcPts val="200"/>
+              </a:spcAft>
+              <a:buFont typeface="Arial"/>
+              <a:buChar char="•"/>
+            </a:pPr>
+            <a:r>
+              <a:rPr lang="en-US" sz="1600" b="1" dirty="0">
+                <a:solidFill>
+                  <a:srgbClr val="00396B"/>
+                </a:solidFill>
+              </a:rPr>
+              <a:t>Model orchestration — </a:t>
+            </a:r>
+            <a:r>
+              <a:rPr lang="en-US" sz="1600" dirty="0">
+                <a:solidFill>
+                  <a:srgbClr val="3A3A3C"/>
+                </a:solidFill>
+              </a:rPr>
+              <a:t>match each subagent to a model based on task demands and model capability.</a:t>
+            </a:r>
+          </a:p>
+          <a:p>
+            <a:pPr marL="285750" indent="-285750" algn="l">
+              <a:lnSpc>
+                <a:spcPct val="106000"/>
+              </a:lnSpc>
+              <a:spcBef>
+                <a:spcPts val="120"/>
+              </a:spcBef>
+              <a:spcAft>
+                <a:spcPts val="200"/>
+              </a:spcAft>
+              <a:buFont typeface="Arial"/>
+              <a:buChar char="•"/>
+            </a:pPr>
+            <a:r>
+              <a:rPr lang="en-US" sz="1600" b="1" dirty="0">
+                <a:solidFill>
+                  <a:srgbClr val="00396B"/>
+                </a:solidFill>
+              </a:rPr>
+              <a:t>Resource orchestration — </a:t>
+            </a:r>
+            <a:r>
+              <a:rPr lang="en-US" sz="1600" dirty="0">
+                <a:solidFill>
+                  <a:srgbClr val="3A3A3C"/>
+                </a:solidFill>
+              </a:rPr>
+              <a:t>govern shared memory and communication channels for coordinated execution.</a:t>
+            </a:r>
+          </a:p>
+          <a:p>
+            <a:pPr marL="0" indent="0" algn="l">
+              <a:spcBef>
+                <a:spcPts val="900"/>
+              </a:spcBef>
+              <a:spcAft>
+                <a:spcPts val="250"/>
+              </a:spcAft>
+              <a:buNone/>
+            </a:pPr>
+            <a:r>
+              <a:rPr lang="en-US" sz="1800" b="1" dirty="0">
+                <a:solidFill>
+                  <a:srgbClr val="0073CF"/>
+                </a:solidFill>
+              </a:rPr>
+              <a:t>Why it matters</a:t>
+            </a:r>
+          </a:p>
+          <a:p>
+            <a:pPr marL="285750" indent="-285750" algn="l">
+              <a:lnSpc>
+                <a:spcPct val="106000"/>
+              </a:lnSpc>
+              <a:spcBef>
+                <a:spcPts val="120"/>
+              </a:spcBef>
+              <a:spcAft>
+                <a:spcPts val="200"/>
+              </a:spcAft>
+              <a:buFont typeface="Arial"/>
+              <a:buChar char="•"/>
+            </a:pPr>
+            <a:r>
+              <a:rPr lang="en-US" sz="1600" dirty="0">
+                <a:solidFill>
+                  <a:srgbClr val="3A3A3C"/>
+                </a:solidFill>
+              </a:rPr>
+              <a:t>Prior work covers task and model orchestration; </a:t>
+            </a:r>
+            <a:r>
+              <a:rPr lang="en-US" sz="1600" b="1" dirty="0">
+                <a:solidFill>
+                  <a:srgbClr val="00396B"/>
+                </a:solidFill>
+              </a:rPr>
+              <a:t>resource orchestration is the gap we target.</a:t>
+            </a:r>
+          </a:p>
+        </p:txBody>
+      </p:sp>
+      <p:sp>
+        <p:nvSpPr>
+          <p:cNvPr id="4" name="Slide Number Placeholder 3">
+            <a:extLst>
+              <a:ext uri="{FF2B5EF4-FFF2-40B4-BE49-F238E27FC236}">
+                <a16:creationId xmlns:a16="http://schemas.microsoft.com/office/drawing/2014/main" id="{E3D1ED76-F6D7-A61B-11DD-4AE45BFF4E92}"/>
+              </a:ext>
+            </a:extLst>
+          </p:cNvPr>
+          <p:cNvSpPr>
+            <a:spLocks noGrp="1"/>
+          </p:cNvSpPr>
+          <p:nvPr>
+            <p:ph type="sldNum" sz="quarter" idx="12"/>
+          </p:nvPr>
+        </p:nvSpPr>
+        <p:spPr>
+          <a:xfrm>
+            <a:off x="10210800" y="6451600"/>
+            <a:ext cx="1524000" cy="304800"/>
+          </a:xfrm>
+        </p:spPr>
+        <p:txBody>
+          <a:bodyPr anchor="ctr" anchorCtr="0"/>
+          <a:lstStyle/>
+          <a:p>
+            <a:fld id="{FC0A7A6B-4B1F-5446-A3A1-99DEB5EA7F81}" type="slidenum">
+              <a:rPr lang="en-CN" smtClean="0">
+                <a:solidFill>
+                  <a:srgbClr val="9AA7B5"/>
+                </a:solidFill>
+              </a:rPr>
+              <a:t>10</a:t>
+            </a:fld>
+            <a:endParaRPr lang="en-CN">
+              <a:solidFill>
+                <a:srgbClr val="9AA7B5"/>
+              </a:solidFill>
+            </a:endParaRPr>
+          </a:p>
+        </p:txBody>
+      </p:sp>
+      <p:sp>
+        <p:nvSpPr>
+          <p:cNvPr id="6" name="Accent Rule">
+            <a:extLst>
+              <a:ext uri="{FF2B5EF4-FFF2-40B4-BE49-F238E27FC236}">
+                <a16:creationId xmlns:a16="http://schemas.microsoft.com/office/drawing/2014/main" id="{4A2B0E84-C141-4C5F-333F-D3C04C3195A7}"/>
+              </a:ext>
+            </a:extLst>
+          </p:cNvPr>
+          <p:cNvSpPr/>
+          <p:nvPr/>
+        </p:nvSpPr>
+        <p:spPr>
+          <a:xfrm>
+            <a:off x="838200" y="2209800"/>
+            <a:ext cx="1524000" cy="76200"/>
+          </a:xfrm>
+          <a:prstGeom prst="rect">
+            <a:avLst/>
+          </a:prstGeom>
+          <a:solidFill>
+            <a:srgbClr val="0073CF"/>
+          </a:solidFill>
+          <a:ln w="12700" cap="flat" cmpd="sng" algn="ctr">
+            <a:noFill/>
+            <a:prstDash val="solid"/>
+            <a:miter lim="800000"/>
+          </a:ln>
+        </p:spPr>
+        <p:style>
+          <a:lnRef idx="2">
+            <a:schemeClr val="accent1">
+              <a:shade val="15000"/>
+            </a:schemeClr>
+          </a:lnRef>
+          <a:fillRef idx="1">
+            <a:schemeClr val="accent1"/>
+          </a:fillRef>
+          <a:effectRef idx="0">
+            <a:schemeClr val="accent1"/>
+          </a:effectRef>
+          <a:fontRef idx="minor">
+            <a:schemeClr val="lt1"/>
+          </a:fontRef>
+        </p:style>
+        <p:txBody>
+          <a:bodyPr vertOverflow="clip" horzOverflow="clip" rtlCol="0" anchor="t"/>
+          <a:lstStyle/>
+          <a:p>
+            <a:pPr algn="l"/>
+            <a:endParaRPr lang="en-CN"/>
+          </a:p>
+        </p:txBody>
+      </p:sp>
+      <p:pic>
+        <p:nvPicPr>
+          <p:cNvPr id="7" name="Copied Picture 7">
+            <a:extLst>
+              <a:ext uri="{FF2B5EF4-FFF2-40B4-BE49-F238E27FC236}">
+                <a16:creationId xmlns:a16="http://schemas.microsoft.com/office/drawing/2014/main" id="{1AF6E5B8-18A0-7B6C-D54E-461A0F812AF4}"/>
+              </a:ext>
+            </a:extLst>
+          </p:cNvPr>
+          <p:cNvPicPr>
+            <a:picLocks noChangeAspect="1"/>
+          </p:cNvPicPr>
+          <p:nvPr/>
+        </p:nvPicPr>
+        <p:blipFill>
+          <a:blip r:embed="rId2"/>
+          <a:stretch>
+            <a:fillRect/>
+          </a:stretch>
+        </p:blipFill>
+        <p:spPr>
+          <a:xfrm>
+            <a:off x="838200" y="508000"/>
+            <a:ext cx="762000" cy="762000"/>
+          </a:xfrm>
+          <a:prstGeom prst="rect">
+            <a:avLst/>
+          </a:prstGeom>
+        </p:spPr>
+      </p:pic>
+      <p:sp>
+        <p:nvSpPr>
+          <p:cNvPr id="10" name="Footer Name">
+            <a:extLst>
+              <a:ext uri="{FF2B5EF4-FFF2-40B4-BE49-F238E27FC236}">
+                <a16:creationId xmlns:a16="http://schemas.microsoft.com/office/drawing/2014/main" id="{8C9BA624-0AC7-5B31-287F-E60FC337C4C7}"/>
+              </a:ext>
+            </a:extLst>
+          </p:cNvPr>
+          <p:cNvSpPr txBox="1"/>
+          <p:nvPr/>
+        </p:nvSpPr>
+        <p:spPr>
+          <a:xfrm>
+            <a:off x="838200" y="6350000"/>
+            <a:ext cx="5080000" cy="508000"/>
+          </a:xfrm>
+          <a:prstGeom prst="rect">
+            <a:avLst/>
+          </a:prstGeom>
+          <a:noFill/>
+        </p:spPr>
+        <p:txBody>
+          <a:bodyPr vertOverflow="overflow" vert="horz" wrap="none" rtlCol="0" anchor="ctr" anchorCtr="0">
+            <a:noAutofit/>
+          </a:bodyPr>
+          <a:lstStyle/>
+          <a:p>
+            <a:pPr algn="l">
+              <a:buNone/>
+            </a:pPr>
+            <a:r>
+              <a:rPr lang="en-US" sz="1400" b="1" spc="200" dirty="0">
+                <a:solidFill>
+                  <a:srgbClr val="FFFFFF"/>
+                </a:solidFill>
+              </a:rPr>
+              <a:t>Quan Wei</a:t>
+            </a:r>
+            <a:r>
+              <a:rPr lang="en-US" sz="1400" b="1" spc="200" dirty="0">
+                <a:solidFill>
+                  <a:srgbClr val="9AA7B5"/>
+                </a:solidFill>
+              </a:rPr>
+              <a:t>   |   </a:t>
+            </a:r>
+            <a:r>
+              <a:rPr lang="en-US" sz="1400" b="1" spc="200" dirty="0">
+                <a:solidFill>
+                  <a:srgbClr val="FFFFFF"/>
+                </a:solidFill>
+              </a:rPr>
+              <a:t>WEEK 2</a:t>
+            </a:r>
+          </a:p>
+        </p:txBody>
+      </p:sp>
+    </p:spTree>
+    <p:extLst>
+      <p:ext uri="{BB962C8B-B14F-4D97-AF65-F5344CB8AC3E}">
+        <p14:creationId xmlns:p14="http://schemas.microsoft.com/office/powerpoint/2010/main" val="2798204962"/>
+      </p:ext>
+    </p:extLst>
+  </p:cSld>
+  <p:clrMapOvr>
+    <a:masterClrMapping/>
+  </p:clrMapOvr>
+</p:sld>
+</file>
+
+<file path=ppt/slides/slide11.xml><?xml version="1.0" encoding="utf-8"?>
+<p:sld xmlns:a="http://schemas.openxmlformats.org/drawingml/2006/main" xmlns:r="http://schemas.openxmlformats.org/officeDocument/2006/relationships" xmlns:p="http://schemas.openxmlformats.org/presentationml/2006/main">
+  <p:cSld>
+    <p:spTree>
+      <p:nvGrpSpPr>
+        <p:cNvPr id="1" name="">
+          <a:extLst>
+            <a:ext uri="{FF2B5EF4-FFF2-40B4-BE49-F238E27FC236}">
+              <a16:creationId xmlns:a16="http://schemas.microsoft.com/office/drawing/2014/main" id="{C5B8F57F-7B6D-77CA-0416-E62BAF6D8DEB}"/>
+            </a:ext>
+          </a:extLst>
+        </p:cNvPr>
+        <p:cNvGrpSpPr/>
+        <p:nvPr/>
+      </p:nvGrpSpPr>
+      <p:grpSpPr>
+        <a:xfrm>
+          <a:off x="0" y="0"/>
+          <a:ext cx="0" cy="0"/>
+          <a:chOff x="0" y="0"/>
+          <a:chExt cx="0" cy="0"/>
+        </a:xfrm>
+      </p:grpSpPr>
+      <p:sp>
+        <p:nvSpPr>
+          <p:cNvPr id="5" name="Footer Bar">
+            <a:extLst>
+              <a:ext uri="{FF2B5EF4-FFF2-40B4-BE49-F238E27FC236}">
+                <a16:creationId xmlns:a16="http://schemas.microsoft.com/office/drawing/2014/main" id="{B21E1795-6626-C8D2-ACB7-02312CFDB57D}"/>
+              </a:ext>
+            </a:extLst>
+          </p:cNvPr>
+          <p:cNvSpPr/>
+          <p:nvPr/>
+        </p:nvSpPr>
+        <p:spPr>
+          <a:xfrm>
+            <a:off x="0" y="6350000"/>
+            <a:ext cx="12192000" cy="508000"/>
+          </a:xfrm>
+          <a:prstGeom prst="rect">
+            <a:avLst/>
+          </a:prstGeom>
+          <a:solidFill>
+            <a:srgbClr val="00396B"/>
+          </a:solidFill>
+          <a:ln w="12700" cap="flat" cmpd="sng" algn="ctr">
+            <a:noFill/>
+            <a:prstDash val="solid"/>
+            <a:miter lim="800000"/>
+          </a:ln>
+        </p:spPr>
+        <p:style>
+          <a:lnRef idx="2">
+            <a:schemeClr val="accent1">
+              <a:shade val="15000"/>
+            </a:schemeClr>
+          </a:lnRef>
+          <a:fillRef idx="1">
+            <a:schemeClr val="accent1"/>
+          </a:fillRef>
+          <a:effectRef idx="0">
+            <a:schemeClr val="accent1"/>
+          </a:effectRef>
+          <a:fontRef idx="minor">
+            <a:schemeClr val="lt1"/>
+          </a:fontRef>
+        </p:style>
+        <p:txBody>
+          <a:bodyPr vertOverflow="clip" horzOverflow="clip" rtlCol="0" anchor="t"/>
+          <a:lstStyle/>
+          <a:p>
+            <a:pPr algn="l"/>
+            <a:endParaRPr lang="en-CN"/>
+          </a:p>
+        </p:txBody>
+      </p:sp>
+      <p:sp>
+        <p:nvSpPr>
+          <p:cNvPr id="2" name="Title 1">
+            <a:extLst>
+              <a:ext uri="{FF2B5EF4-FFF2-40B4-BE49-F238E27FC236}">
+                <a16:creationId xmlns:a16="http://schemas.microsoft.com/office/drawing/2014/main" id="{D9FB3D32-4AD5-0E86-4DA1-2B0A464DE11F}"/>
+              </a:ext>
+            </a:extLst>
+          </p:cNvPr>
+          <p:cNvSpPr>
+            <a:spLocks noGrp="1"/>
+          </p:cNvSpPr>
+          <p:nvPr>
+            <p:ph type="title"/>
+          </p:nvPr>
+        </p:nvSpPr>
+        <p:spPr>
+          <a:xfrm>
+            <a:off x="838200" y="1397000"/>
+            <a:ext cx="10515600" cy="711200"/>
+          </a:xfrm>
+        </p:spPr>
+        <p:txBody>
+          <a:bodyPr anchor="t" anchorCtr="0"/>
+          <a:lstStyle/>
+          <a:p>
+            <a:r>
+              <a:rPr lang="en-US" sz="3200" b="1" dirty="0">
+                <a:solidFill>
+                  <a:srgbClr val="00396B"/>
+                </a:solidFill>
+              </a:rPr>
+              <a:t>Efficiency: Costs &amp; Resource Allocation</a:t>
+            </a:r>
+          </a:p>
+        </p:txBody>
+      </p:sp>
+      <p:sp>
+        <p:nvSpPr>
+          <p:cNvPr id="3" name="Content Placeholder 2">
+            <a:extLst>
+              <a:ext uri="{FF2B5EF4-FFF2-40B4-BE49-F238E27FC236}">
+                <a16:creationId xmlns:a16="http://schemas.microsoft.com/office/drawing/2014/main" id="{D4DC84AA-C467-47CA-C1DC-EEE64CBB1B47}"/>
+              </a:ext>
+            </a:extLst>
+          </p:cNvPr>
+          <p:cNvSpPr>
+            <a:spLocks noGrp="1"/>
+          </p:cNvSpPr>
+          <p:nvPr>
+            <p:ph idx="1"/>
+          </p:nvPr>
+        </p:nvSpPr>
+        <p:spPr>
+          <a:xfrm>
+            <a:off x="838200" y="2540000"/>
+            <a:ext cx="10515600" cy="3657600"/>
+          </a:xfrm>
+        </p:spPr>
+        <p:txBody>
+          <a:bodyPr>
+            <a:normAutofit/>
+          </a:bodyPr>
+          <a:lstStyle/>
+          <a:p>
+            <a:pPr marL="0" indent="0" algn="l">
+              <a:spcBef>
+                <a:spcPts val="0"/>
+              </a:spcBef>
+              <a:spcAft>
+                <a:spcPts val="250"/>
+              </a:spcAft>
+              <a:buNone/>
+            </a:pPr>
+            <a:r>
+              <a:rPr lang="en-US" sz="1700" b="1" dirty="0">
+                <a:solidFill>
+                  <a:srgbClr val="0073CF"/>
+                </a:solidFill>
+              </a:rPr>
+              <a:t>Five cost dimensions to optimize jointly</a:t>
+            </a:r>
+          </a:p>
+          <a:p>
+            <a:pPr marL="285750" indent="-285750" algn="l">
+              <a:lnSpc>
+                <a:spcPct val="104000"/>
+              </a:lnSpc>
+              <a:spcBef>
+                <a:spcPts val="100"/>
+              </a:spcBef>
+              <a:spcAft>
+                <a:spcPts val="160"/>
+              </a:spcAft>
+              <a:buFont typeface="Arial"/>
+              <a:buChar char="•"/>
+            </a:pPr>
+            <a:r>
+              <a:rPr lang="en-US" sz="1500" b="1" dirty="0">
+                <a:solidFill>
+                  <a:srgbClr val="00396B"/>
+                </a:solidFill>
+              </a:rPr>
+              <a:t>Model — </a:t>
+            </a:r>
+            <a:r>
+              <a:rPr lang="en-US" sz="1500" dirty="0">
+                <a:solidFill>
+                  <a:srgbClr val="3A3A3C"/>
+                </a:solidFill>
+              </a:rPr>
+              <a:t>scales with tier: closed-source &gt; open large &gt; open small.</a:t>
+            </a:r>
+          </a:p>
+          <a:p>
+            <a:pPr marL="285750" indent="-285750" algn="l">
+              <a:lnSpc>
+                <a:spcPct val="104000"/>
+              </a:lnSpc>
+              <a:spcBef>
+                <a:spcPts val="100"/>
+              </a:spcBef>
+              <a:spcAft>
+                <a:spcPts val="160"/>
+              </a:spcAft>
+              <a:buFont typeface="Arial"/>
+              <a:buChar char="•"/>
+            </a:pPr>
+            <a:r>
+              <a:rPr lang="en-US" sz="1500" b="1" dirty="0">
+                <a:solidFill>
+                  <a:srgbClr val="00396B"/>
+                </a:solidFill>
+              </a:rPr>
+              <a:t>Token — </a:t>
+            </a:r>
+            <a:r>
+              <a:rPr lang="en-US" sz="1500" dirty="0">
+                <a:solidFill>
+                  <a:srgbClr val="3A3A3C"/>
+                </a:solidFill>
+              </a:rPr>
+              <a:t>scales with prompt and completion tokens per call.</a:t>
+            </a:r>
+          </a:p>
+          <a:p>
+            <a:pPr marL="285750" indent="-285750" algn="l">
+              <a:lnSpc>
+                <a:spcPct val="104000"/>
+              </a:lnSpc>
+              <a:spcBef>
+                <a:spcPts val="100"/>
+              </a:spcBef>
+              <a:spcAft>
+                <a:spcPts val="160"/>
+              </a:spcAft>
+              <a:buFont typeface="Arial"/>
+              <a:buChar char="•"/>
+            </a:pPr>
+            <a:r>
+              <a:rPr lang="en-US" sz="1500" b="1" dirty="0">
+                <a:solidFill>
+                  <a:srgbClr val="00396B"/>
+                </a:solidFill>
+              </a:rPr>
+              <a:t>Communication — </a:t>
+            </a:r>
+            <a:r>
+              <a:rPr lang="en-US" sz="1500" dirty="0">
+                <a:solidFill>
+                  <a:srgbClr val="3A3A3C"/>
+                </a:solidFill>
+              </a:rPr>
+              <a:t>message frequency and payload size between agents.</a:t>
+            </a:r>
+          </a:p>
+          <a:p>
+            <a:pPr marL="285750" indent="-285750" algn="l">
+              <a:lnSpc>
+                <a:spcPct val="104000"/>
+              </a:lnSpc>
+              <a:spcBef>
+                <a:spcPts val="100"/>
+              </a:spcBef>
+              <a:spcAft>
+                <a:spcPts val="160"/>
+              </a:spcAft>
+              <a:buFont typeface="Arial"/>
+              <a:buChar char="•"/>
+            </a:pPr>
+            <a:r>
+              <a:rPr lang="en-US" sz="1500" b="1" dirty="0">
+                <a:solidFill>
+                  <a:srgbClr val="00396B"/>
+                </a:solidFill>
+              </a:rPr>
+              <a:t>API — </a:t>
+            </a:r>
+            <a:r>
+              <a:rPr lang="en-US" sz="1500" dirty="0">
+                <a:solidFill>
+                  <a:srgbClr val="3A3A3C"/>
+                </a:solidFill>
+              </a:rPr>
+              <a:t>each tool call (retrieval, code execution) adds cost.</a:t>
+            </a:r>
+          </a:p>
+          <a:p>
+            <a:pPr marL="285750" indent="-285750" algn="l">
+              <a:lnSpc>
+                <a:spcPct val="104000"/>
+              </a:lnSpc>
+              <a:spcBef>
+                <a:spcPts val="100"/>
+              </a:spcBef>
+              <a:spcAft>
+                <a:spcPts val="160"/>
+              </a:spcAft>
+              <a:buFont typeface="Arial"/>
+              <a:buChar char="•"/>
+            </a:pPr>
+            <a:r>
+              <a:rPr lang="en-US" sz="1500" b="1" dirty="0">
+                <a:solidFill>
+                  <a:srgbClr val="00396B"/>
+                </a:solidFill>
+              </a:rPr>
+              <a:t>Latency — </a:t>
+            </a:r>
+            <a:r>
+              <a:rPr lang="en-US" sz="1500" dirty="0">
+                <a:solidFill>
+                  <a:srgbClr val="3A3A3C"/>
+                </a:solidFill>
+              </a:rPr>
+              <a:t>delay from inference and inter-agent messaging.</a:t>
+            </a:r>
+          </a:p>
+          <a:p>
+            <a:pPr marL="0" indent="0" algn="l">
+              <a:spcBef>
+                <a:spcPts val="800"/>
+              </a:spcBef>
+              <a:spcAft>
+                <a:spcPts val="250"/>
+              </a:spcAft>
+              <a:buNone/>
+            </a:pPr>
+            <a:r>
+              <a:rPr lang="en-US" sz="1700" b="1" dirty="0">
+                <a:solidFill>
+                  <a:srgbClr val="0073CF"/>
+                </a:solidFill>
+              </a:rPr>
+              <a:t>Three allocation levers</a:t>
+            </a:r>
+          </a:p>
+          <a:p>
+            <a:pPr marL="285750" indent="-285750" algn="l">
+              <a:lnSpc>
+                <a:spcPct val="104000"/>
+              </a:lnSpc>
+              <a:spcBef>
+                <a:spcPts val="100"/>
+              </a:spcBef>
+              <a:spcAft>
+                <a:spcPts val="160"/>
+              </a:spcAft>
+              <a:buFont typeface="Arial"/>
+              <a:buChar char="•"/>
+            </a:pPr>
+            <a:r>
+              <a:rPr lang="en-US" sz="1500" b="1" dirty="0">
+                <a:solidFill>
+                  <a:srgbClr val="00396B"/>
+                </a:solidFill>
+              </a:rPr>
+              <a:t>Model allocation — </a:t>
+            </a:r>
+            <a:r>
+              <a:rPr lang="en-US" sz="1500" dirty="0">
+                <a:solidFill>
+                  <a:srgbClr val="3A3A3C"/>
+                </a:solidFill>
+              </a:rPr>
+              <a:t>which model runs each subtask; controls model cost &amp; accuracy.</a:t>
+            </a:r>
+          </a:p>
+          <a:p>
+            <a:pPr marL="285750" indent="-285750" algn="l">
+              <a:lnSpc>
+                <a:spcPct val="104000"/>
+              </a:lnSpc>
+              <a:spcBef>
+                <a:spcPts val="100"/>
+              </a:spcBef>
+              <a:spcAft>
+                <a:spcPts val="160"/>
+              </a:spcAft>
+              <a:buFont typeface="Arial"/>
+              <a:buChar char="•"/>
+            </a:pPr>
+            <a:r>
+              <a:rPr lang="en-US" sz="1500" b="1" dirty="0">
+                <a:solidFill>
+                  <a:srgbClr val="00396B"/>
+                </a:solidFill>
+              </a:rPr>
+              <a:t>Token allocation — </a:t>
+            </a:r>
+            <a:r>
+              <a:rPr lang="en-US" sz="1500" dirty="0">
+                <a:solidFill>
+                  <a:srgbClr val="3A3A3C"/>
+                </a:solidFill>
+              </a:rPr>
+              <a:t>budget per agent or subtask; controls token cost.</a:t>
+            </a:r>
+          </a:p>
+          <a:p>
+            <a:pPr marL="285750" indent="-285750" algn="l">
+              <a:lnSpc>
+                <a:spcPct val="104000"/>
+              </a:lnSpc>
+              <a:spcBef>
+                <a:spcPts val="100"/>
+              </a:spcBef>
+              <a:spcAft>
+                <a:spcPts val="160"/>
+              </a:spcAft>
+              <a:buFont typeface="Arial"/>
+              <a:buChar char="•"/>
+            </a:pPr>
+            <a:r>
+              <a:rPr lang="en-US" sz="1500" b="1" dirty="0">
+                <a:solidFill>
+                  <a:srgbClr val="00396B"/>
+                </a:solidFill>
+              </a:rPr>
+              <a:t>Communication allocation — </a:t>
+            </a:r>
+            <a:r>
+              <a:rPr lang="en-US" sz="1500" dirty="0">
+                <a:solidFill>
+                  <a:srgbClr val="3A3A3C"/>
+                </a:solidFill>
+              </a:rPr>
+              <a:t>routing and frequency; controls comm and latency cost.</a:t>
+            </a:r>
+          </a:p>
+        </p:txBody>
+      </p:sp>
+      <p:sp>
+        <p:nvSpPr>
+          <p:cNvPr id="4" name="Slide Number Placeholder 3">
+            <a:extLst>
+              <a:ext uri="{FF2B5EF4-FFF2-40B4-BE49-F238E27FC236}">
+                <a16:creationId xmlns:a16="http://schemas.microsoft.com/office/drawing/2014/main" id="{8224744B-6558-CD84-EBBE-8048A84C1E6F}"/>
+              </a:ext>
+            </a:extLst>
+          </p:cNvPr>
+          <p:cNvSpPr>
+            <a:spLocks noGrp="1"/>
+          </p:cNvSpPr>
+          <p:nvPr>
+            <p:ph type="sldNum" sz="quarter" idx="12"/>
+          </p:nvPr>
+        </p:nvSpPr>
+        <p:spPr>
+          <a:xfrm>
+            <a:off x="10210800" y="6451600"/>
+            <a:ext cx="1524000" cy="304800"/>
+          </a:xfrm>
+        </p:spPr>
+        <p:txBody>
+          <a:bodyPr anchor="ctr" anchorCtr="0"/>
+          <a:lstStyle/>
+          <a:p>
+            <a:fld id="{FC0A7A6B-4B1F-5446-A3A1-99DEB5EA7F81}" type="slidenum">
+              <a:rPr lang="en-CN" smtClean="0">
+                <a:solidFill>
+                  <a:srgbClr val="9AA7B5"/>
+                </a:solidFill>
+              </a:rPr>
+              <a:t>11</a:t>
+            </a:fld>
+            <a:endParaRPr lang="en-CN">
+              <a:solidFill>
+                <a:srgbClr val="9AA7B5"/>
+              </a:solidFill>
+            </a:endParaRPr>
+          </a:p>
+        </p:txBody>
+      </p:sp>
+      <p:sp>
+        <p:nvSpPr>
+          <p:cNvPr id="6" name="Accent Rule">
+            <a:extLst>
+              <a:ext uri="{FF2B5EF4-FFF2-40B4-BE49-F238E27FC236}">
+                <a16:creationId xmlns:a16="http://schemas.microsoft.com/office/drawing/2014/main" id="{AF2EFD33-8926-DC84-B531-0C05793A3F9F}"/>
+              </a:ext>
+            </a:extLst>
+          </p:cNvPr>
+          <p:cNvSpPr/>
+          <p:nvPr/>
+        </p:nvSpPr>
+        <p:spPr>
+          <a:xfrm>
+            <a:off x="838200" y="2209800"/>
+            <a:ext cx="1524000" cy="76200"/>
+          </a:xfrm>
+          <a:prstGeom prst="rect">
+            <a:avLst/>
+          </a:prstGeom>
+          <a:solidFill>
+            <a:srgbClr val="0073CF"/>
+          </a:solidFill>
+          <a:ln w="12700" cap="flat" cmpd="sng" algn="ctr">
+            <a:noFill/>
+            <a:prstDash val="solid"/>
+            <a:miter lim="800000"/>
+          </a:ln>
+        </p:spPr>
+        <p:style>
+          <a:lnRef idx="2">
+            <a:schemeClr val="accent1">
+              <a:shade val="15000"/>
+            </a:schemeClr>
+          </a:lnRef>
+          <a:fillRef idx="1">
+            <a:schemeClr val="accent1"/>
+          </a:fillRef>
+          <a:effectRef idx="0">
+            <a:schemeClr val="accent1"/>
+          </a:effectRef>
+          <a:fontRef idx="minor">
+            <a:schemeClr val="lt1"/>
+          </a:fontRef>
+        </p:style>
+        <p:txBody>
+          <a:bodyPr vertOverflow="clip" horzOverflow="clip" rtlCol="0" anchor="t"/>
+          <a:lstStyle/>
+          <a:p>
+            <a:pPr algn="l"/>
+            <a:endParaRPr lang="en-CN"/>
+          </a:p>
+        </p:txBody>
+      </p:sp>
+      <p:pic>
+        <p:nvPicPr>
+          <p:cNvPr id="7" name="Copied Picture 7">
+            <a:extLst>
+              <a:ext uri="{FF2B5EF4-FFF2-40B4-BE49-F238E27FC236}">
+                <a16:creationId xmlns:a16="http://schemas.microsoft.com/office/drawing/2014/main" id="{10F56977-2791-E200-8E56-59046F20DB43}"/>
+              </a:ext>
+            </a:extLst>
+          </p:cNvPr>
+          <p:cNvPicPr>
+            <a:picLocks noChangeAspect="1"/>
+          </p:cNvPicPr>
+          <p:nvPr/>
+        </p:nvPicPr>
+        <p:blipFill>
+          <a:blip r:embed="rId2"/>
+          <a:stretch>
+            <a:fillRect/>
+          </a:stretch>
+        </p:blipFill>
+        <p:spPr>
+          <a:xfrm>
+            <a:off x="838200" y="508000"/>
+            <a:ext cx="762000" cy="762000"/>
+          </a:xfrm>
+          <a:prstGeom prst="rect">
+            <a:avLst/>
+          </a:prstGeom>
+        </p:spPr>
+      </p:pic>
+      <p:sp>
+        <p:nvSpPr>
+          <p:cNvPr id="10" name="Footer Name">
+            <a:extLst>
+              <a:ext uri="{FF2B5EF4-FFF2-40B4-BE49-F238E27FC236}">
+                <a16:creationId xmlns:a16="http://schemas.microsoft.com/office/drawing/2014/main" id="{9B3DD55C-A236-F124-F6EE-355FBE441AFB}"/>
+              </a:ext>
+            </a:extLst>
+          </p:cNvPr>
+          <p:cNvSpPr txBox="1"/>
+          <p:nvPr/>
+        </p:nvSpPr>
+        <p:spPr>
+          <a:xfrm>
+            <a:off x="838200" y="6350000"/>
+            <a:ext cx="5080000" cy="508000"/>
+          </a:xfrm>
+          <a:prstGeom prst="rect">
+            <a:avLst/>
+          </a:prstGeom>
+          <a:noFill/>
+        </p:spPr>
+        <p:txBody>
+          <a:bodyPr vertOverflow="overflow" vert="horz" wrap="none" rtlCol="0" anchor="ctr" anchorCtr="0">
+            <a:noAutofit/>
+          </a:bodyPr>
+          <a:lstStyle/>
+          <a:p>
+            <a:pPr algn="l">
+              <a:buNone/>
+            </a:pPr>
+            <a:r>
+              <a:rPr lang="en-US" sz="1400" b="1" spc="200" dirty="0">
+                <a:solidFill>
+                  <a:srgbClr val="FFFFFF"/>
+                </a:solidFill>
+              </a:rPr>
+              <a:t>Quan Wei</a:t>
+            </a:r>
+            <a:r>
+              <a:rPr lang="en-US" sz="1400" b="1" spc="200" dirty="0">
+                <a:solidFill>
+                  <a:srgbClr val="9AA7B5"/>
+                </a:solidFill>
+              </a:rPr>
+              <a:t>   |   </a:t>
+            </a:r>
+            <a:r>
+              <a:rPr lang="en-US" sz="1400" b="1" spc="200" dirty="0">
+                <a:solidFill>
+                  <a:srgbClr val="FFFFFF"/>
+                </a:solidFill>
+              </a:rPr>
+              <a:t>WEEK 2</a:t>
+            </a:r>
+          </a:p>
+        </p:txBody>
+      </p:sp>
+    </p:spTree>
+    <p:extLst>
+      <p:ext uri="{BB962C8B-B14F-4D97-AF65-F5344CB8AC3E}">
+        <p14:creationId xmlns:p14="http://schemas.microsoft.com/office/powerpoint/2010/main" val="4216221840"/>
+      </p:ext>
+    </p:extLst>
+  </p:cSld>
+  <p:clrMapOvr>
+    <a:masterClrMapping/>
+  </p:clrMapOvr>
+</p:sld>
+</file>
+
+<file path=ppt/slides/slide12.xml><?xml version="1.0" encoding="utf-8"?>
+<p:sld xmlns:a="http://schemas.openxmlformats.org/drawingml/2006/main" xmlns:r="http://schemas.openxmlformats.org/officeDocument/2006/relationships" xmlns:p="http://schemas.openxmlformats.org/presentationml/2006/main">
+  <p:cSld>
+    <p:spTree>
+      <p:nvGrpSpPr>
+        <p:cNvPr id="1" name="">
+          <a:extLst>
+            <a:ext uri="{FF2B5EF4-FFF2-40B4-BE49-F238E27FC236}">
+              <a16:creationId xmlns:a16="http://schemas.microsoft.com/office/drawing/2014/main" id="{4E0B8982-4435-BFA1-D40B-2079FDB93E52}"/>
+            </a:ext>
+          </a:extLst>
+        </p:cNvPr>
+        <p:cNvGrpSpPr/>
+        <p:nvPr/>
+      </p:nvGrpSpPr>
+      <p:grpSpPr>
+        <a:xfrm>
+          <a:off x="0" y="0"/>
+          <a:ext cx="0" cy="0"/>
+          <a:chOff x="0" y="0"/>
+          <a:chExt cx="0" cy="0"/>
+        </a:xfrm>
+      </p:grpSpPr>
+      <p:sp>
+        <p:nvSpPr>
+          <p:cNvPr id="5" name="Footer Bar">
+            <a:extLst>
+              <a:ext uri="{FF2B5EF4-FFF2-40B4-BE49-F238E27FC236}">
+                <a16:creationId xmlns:a16="http://schemas.microsoft.com/office/drawing/2014/main" id="{CD2C8233-A9CC-0441-BDE6-F3D112A2F4B0}"/>
+              </a:ext>
+            </a:extLst>
+          </p:cNvPr>
+          <p:cNvSpPr/>
+          <p:nvPr/>
+        </p:nvSpPr>
+        <p:spPr>
+          <a:xfrm>
+            <a:off x="0" y="6350000"/>
+            <a:ext cx="12192000" cy="508000"/>
+          </a:xfrm>
+          <a:prstGeom prst="rect">
+            <a:avLst/>
+          </a:prstGeom>
+          <a:solidFill>
+            <a:srgbClr val="00396B"/>
+          </a:solidFill>
+          <a:ln w="12700" cap="flat" cmpd="sng" algn="ctr">
+            <a:noFill/>
+            <a:prstDash val="solid"/>
+            <a:miter lim="800000"/>
+          </a:ln>
+        </p:spPr>
+        <p:style>
+          <a:lnRef idx="2">
+            <a:schemeClr val="accent1">
+              <a:shade val="15000"/>
+            </a:schemeClr>
+          </a:lnRef>
+          <a:fillRef idx="1">
+            <a:schemeClr val="accent1"/>
+          </a:fillRef>
+          <a:effectRef idx="0">
+            <a:schemeClr val="accent1"/>
+          </a:effectRef>
+          <a:fontRef idx="minor">
+            <a:schemeClr val="lt1"/>
+          </a:fontRef>
+        </p:style>
+        <p:txBody>
+          <a:bodyPr vertOverflow="clip" horzOverflow="clip" rtlCol="0" anchor="t"/>
+          <a:lstStyle/>
+          <a:p>
+            <a:pPr algn="l"/>
+            <a:endParaRPr lang="en-CN"/>
+          </a:p>
+        </p:txBody>
+      </p:sp>
+      <p:sp>
+        <p:nvSpPr>
+          <p:cNvPr id="2" name="Title 1">
+            <a:extLst>
+              <a:ext uri="{FF2B5EF4-FFF2-40B4-BE49-F238E27FC236}">
+                <a16:creationId xmlns:a16="http://schemas.microsoft.com/office/drawing/2014/main" id="{82058B8F-21E6-5F36-3572-68C78BA750CA}"/>
+              </a:ext>
+            </a:extLst>
+          </p:cNvPr>
+          <p:cNvSpPr>
+            <a:spLocks noGrp="1"/>
+          </p:cNvSpPr>
+          <p:nvPr>
+            <p:ph type="title"/>
+          </p:nvPr>
+        </p:nvSpPr>
+        <p:spPr>
+          <a:xfrm>
+            <a:off x="838200" y="1397000"/>
+            <a:ext cx="10515600" cy="711200"/>
+          </a:xfrm>
+        </p:spPr>
+        <p:txBody>
+          <a:bodyPr anchor="t" anchorCtr="0"/>
+          <a:lstStyle/>
+          <a:p>
+            <a:r>
+              <a:rPr lang="en-US" sz="3200" b="1" dirty="0">
+                <a:solidFill>
+                  <a:srgbClr val="00396B"/>
+                </a:solidFill>
+              </a:rPr>
+              <a:t>Experimental Design</a:t>
+            </a:r>
+          </a:p>
+        </p:txBody>
+      </p:sp>
+      <p:sp>
+        <p:nvSpPr>
+          <p:cNvPr id="3" name="Content Placeholder 2">
+            <a:extLst>
+              <a:ext uri="{FF2B5EF4-FFF2-40B4-BE49-F238E27FC236}">
+                <a16:creationId xmlns:a16="http://schemas.microsoft.com/office/drawing/2014/main" id="{C66B918F-784C-1E1A-F9FB-F47ABE5CBC10}"/>
+              </a:ext>
+            </a:extLst>
+          </p:cNvPr>
+          <p:cNvSpPr>
+            <a:spLocks noGrp="1"/>
+          </p:cNvSpPr>
+          <p:nvPr>
+            <p:ph idx="1"/>
+          </p:nvPr>
+        </p:nvSpPr>
+        <p:spPr>
+          <a:xfrm>
+            <a:off x="838200" y="2489200"/>
+            <a:ext cx="5029200" cy="3429000"/>
+          </a:xfrm>
+        </p:spPr>
+        <p:txBody>
+          <a:bodyPr anchor="t" anchorCtr="0">
+            <a:normAutofit/>
+          </a:bodyPr>
+          <a:lstStyle/>
+          <a:p>
+            <a:pPr marL="0" indent="0" algn="l">
+              <a:spcBef>
+                <a:spcPts val="0"/>
+              </a:spcBef>
+              <a:spcAft>
+                <a:spcPts val="200"/>
+              </a:spcAft>
+              <a:buNone/>
+            </a:pPr>
+            <a:r>
+              <a:rPr lang="en-US" sz="1600" b="1" dirty="0">
+                <a:solidFill>
+                  <a:srgbClr val="0073CF"/>
+                </a:solidFill>
+              </a:rPr>
+              <a:t>Baselines</a:t>
+            </a:r>
+          </a:p>
+          <a:p>
+            <a:pPr marL="228600" indent="-228600" algn="l">
+              <a:lnSpc>
+                <a:spcPct val="104000"/>
+              </a:lnSpc>
+              <a:spcBef>
+                <a:spcPts val="100"/>
+              </a:spcBef>
+              <a:spcAft>
+                <a:spcPts val="140"/>
+              </a:spcAft>
+              <a:buFont typeface="Arial"/>
+              <a:buChar char="•"/>
+            </a:pPr>
+            <a:r>
+              <a:rPr lang="en-US" sz="1400" b="1" dirty="0">
+                <a:solidFill>
+                  <a:srgbClr val="00396B"/>
+                </a:solidFill>
+              </a:rPr>
+              <a:t>Single agent — </a:t>
+            </a:r>
+            <a:r>
+              <a:rPr lang="en-US" sz="1400" dirty="0">
+                <a:solidFill>
+                  <a:srgbClr val="3A3A3C"/>
+                </a:solidFill>
+              </a:rPr>
+              <a:t>one model, no decomposition</a:t>
+            </a:r>
+          </a:p>
+          <a:p>
+            <a:pPr marL="228600" indent="-228600" algn="l">
+              <a:lnSpc>
+                <a:spcPct val="104000"/>
+              </a:lnSpc>
+              <a:spcBef>
+                <a:spcPts val="100"/>
+              </a:spcBef>
+              <a:spcAft>
+                <a:spcPts val="140"/>
+              </a:spcAft>
+              <a:buFont typeface="Arial"/>
+              <a:buChar char="•"/>
+            </a:pPr>
+            <a:r>
+              <a:rPr lang="en-US" sz="1400" b="1" dirty="0">
+                <a:solidFill>
+                  <a:srgbClr val="00396B"/>
+                </a:solidFill>
+              </a:rPr>
+              <a:t>Homogeneous MAS — </a:t>
+            </a:r>
+            <a:r>
+              <a:rPr lang="en-US" sz="1400" dirty="0">
+                <a:solidFill>
+                  <a:srgbClr val="3A3A3C"/>
+                </a:solidFill>
+              </a:rPr>
+              <a:t>AgentFlow, AORCHESTRA</a:t>
+            </a:r>
+          </a:p>
+          <a:p>
+            <a:pPr marL="228600" indent="-228600" algn="l">
+              <a:lnSpc>
+                <a:spcPct val="104000"/>
+              </a:lnSpc>
+              <a:spcBef>
+                <a:spcPts val="100"/>
+              </a:spcBef>
+              <a:spcAft>
+                <a:spcPts val="140"/>
+              </a:spcAft>
+              <a:buFont typeface="Arial"/>
+              <a:buChar char="•"/>
+            </a:pPr>
+            <a:r>
+              <a:rPr lang="en-US" sz="1400" b="1" dirty="0">
+                <a:solidFill>
+                  <a:srgbClr val="00396B"/>
+                </a:solidFill>
+              </a:rPr>
+              <a:t>Heterogeneous MAS — </a:t>
+            </a:r>
+            <a:r>
+              <a:rPr lang="en-US" sz="1400" dirty="0">
+                <a:solidFill>
+                  <a:srgbClr val="3A3A3C"/>
+                </a:solidFill>
+              </a:rPr>
+              <a:t>MAS-Orchestra</a:t>
+            </a:r>
+          </a:p>
+          <a:p>
+            <a:pPr marL="228600" indent="-228600" algn="l">
+              <a:lnSpc>
+                <a:spcPct val="104000"/>
+              </a:lnSpc>
+              <a:spcBef>
+                <a:spcPts val="100"/>
+              </a:spcBef>
+              <a:spcAft>
+                <a:spcPts val="140"/>
+              </a:spcAft>
+              <a:buFont typeface="Arial"/>
+              <a:buChar char="•"/>
+            </a:pPr>
+            <a:r>
+              <a:rPr lang="en-US" sz="1400" b="1" dirty="0">
+                <a:solidFill>
+                  <a:srgbClr val="00396B"/>
+                </a:solidFill>
+              </a:rPr>
+              <a:t>Public vs. Ours — </a:t>
+            </a:r>
+            <a:r>
+              <a:rPr lang="en-US" sz="1400" dirty="0">
+                <a:solidFill>
+                  <a:srgbClr val="3A3A3C"/>
+                </a:solidFill>
+              </a:rPr>
+              <a:t>pre-trained vs. trained</a:t>
+            </a:r>
+          </a:p>
+          <a:p>
+            <a:pPr marL="0" indent="0" algn="l">
+              <a:spcBef>
+                <a:spcPts val="600"/>
+              </a:spcBef>
+              <a:spcAft>
+                <a:spcPts val="200"/>
+              </a:spcAft>
+              <a:buNone/>
+            </a:pPr>
+            <a:r>
+              <a:rPr lang="en-US" sz="1600" b="1" dirty="0">
+                <a:solidFill>
+                  <a:srgbClr val="0073CF"/>
+                </a:solidFill>
+              </a:rPr>
+              <a:t>Model pool</a:t>
+            </a:r>
+          </a:p>
+          <a:p>
+            <a:pPr marL="228600" indent="-228600" algn="l">
+              <a:lnSpc>
+                <a:spcPct val="104000"/>
+              </a:lnSpc>
+              <a:spcBef>
+                <a:spcPts val="100"/>
+              </a:spcBef>
+              <a:spcAft>
+                <a:spcPts val="140"/>
+              </a:spcAft>
+              <a:buFont typeface="Arial"/>
+              <a:buChar char="•"/>
+            </a:pPr>
+            <a:r>
+              <a:rPr lang="en-US" sz="1400" b="1" dirty="0">
+                <a:solidFill>
+                  <a:srgbClr val="00396B"/>
+                </a:solidFill>
+              </a:rPr>
+              <a:t>Closed-source — </a:t>
+            </a:r>
+            <a:r>
+              <a:rPr lang="en-US" sz="1400" dirty="0">
+                <a:solidFill>
+                  <a:srgbClr val="3A3A3C"/>
+                </a:solidFill>
+              </a:rPr>
+              <a:t>Claude, GPT, Gemini</a:t>
+            </a:r>
+          </a:p>
+          <a:p>
+            <a:pPr marL="228600" indent="-228600" algn="l">
+              <a:lnSpc>
+                <a:spcPct val="104000"/>
+              </a:lnSpc>
+              <a:spcBef>
+                <a:spcPts val="100"/>
+              </a:spcBef>
+              <a:spcAft>
+                <a:spcPts val="140"/>
+              </a:spcAft>
+              <a:buFont typeface="Arial"/>
+              <a:buChar char="•"/>
+            </a:pPr>
+            <a:r>
+              <a:rPr lang="en-US" sz="1400" b="1" dirty="0">
+                <a:solidFill>
+                  <a:srgbClr val="00396B"/>
+                </a:solidFill>
+              </a:rPr>
+              <a:t>Open-source — </a:t>
+            </a:r>
+            <a:r>
+              <a:rPr lang="en-US" sz="1400" dirty="0">
+                <a:solidFill>
+                  <a:srgbClr val="3A3A3C"/>
+                </a:solidFill>
+              </a:rPr>
+              <a:t>gpt-oss-120B / 20B</a:t>
+            </a:r>
+          </a:p>
+          <a:p>
+            <a:pPr marL="228600" indent="-228600" algn="l">
+              <a:lnSpc>
+                <a:spcPct val="104000"/>
+              </a:lnSpc>
+              <a:spcBef>
+                <a:spcPts val="100"/>
+              </a:spcBef>
+              <a:spcAft>
+                <a:spcPts val="140"/>
+              </a:spcAft>
+              <a:buFont typeface="Arial"/>
+              <a:buChar char="•"/>
+            </a:pPr>
+            <a:r>
+              <a:rPr lang="en-US" sz="1400" b="1" dirty="0">
+                <a:solidFill>
+                  <a:srgbClr val="00396B"/>
+                </a:solidFill>
+              </a:rPr>
+              <a:t>Task-specific — </a:t>
+            </a:r>
+            <a:r>
+              <a:rPr lang="en-US" sz="1400" dirty="0">
+                <a:solidFill>
+                  <a:srgbClr val="3A3A3C"/>
+                </a:solidFill>
+              </a:rPr>
+              <a:t>CodeLlama</a:t>
+            </a:r>
+          </a:p>
+        </p:txBody>
+      </p:sp>
+      <p:sp>
+        <p:nvSpPr>
+          <p:cNvPr id="4" name="Slide Number Placeholder 3">
+            <a:extLst>
+              <a:ext uri="{FF2B5EF4-FFF2-40B4-BE49-F238E27FC236}">
+                <a16:creationId xmlns:a16="http://schemas.microsoft.com/office/drawing/2014/main" id="{9AB8EB81-3AE2-EACC-AB7F-E845DCFC5C9A}"/>
+              </a:ext>
+            </a:extLst>
+          </p:cNvPr>
+          <p:cNvSpPr>
+            <a:spLocks noGrp="1"/>
+          </p:cNvSpPr>
+          <p:nvPr>
+            <p:ph type="sldNum" sz="quarter" idx="12"/>
+          </p:nvPr>
+        </p:nvSpPr>
+        <p:spPr>
+          <a:xfrm>
+            <a:off x="10210800" y="6451600"/>
+            <a:ext cx="1524000" cy="304800"/>
+          </a:xfrm>
+        </p:spPr>
+        <p:txBody>
+          <a:bodyPr anchor="ctr" anchorCtr="0"/>
+          <a:lstStyle/>
+          <a:p>
+            <a:fld id="{FC0A7A6B-4B1F-5446-A3A1-99DEB5EA7F81}" type="slidenum">
+              <a:rPr lang="en-CN" smtClean="0">
+                <a:solidFill>
+                  <a:srgbClr val="9AA7B5"/>
+                </a:solidFill>
+              </a:rPr>
+              <a:t>12</a:t>
+            </a:fld>
+            <a:endParaRPr lang="en-CN">
+              <a:solidFill>
+                <a:srgbClr val="9AA7B5"/>
+              </a:solidFill>
+            </a:endParaRPr>
+          </a:p>
+        </p:txBody>
+      </p:sp>
+      <p:sp>
+        <p:nvSpPr>
+          <p:cNvPr id="6" name="Accent Rule">
+            <a:extLst>
+              <a:ext uri="{FF2B5EF4-FFF2-40B4-BE49-F238E27FC236}">
+                <a16:creationId xmlns:a16="http://schemas.microsoft.com/office/drawing/2014/main" id="{47E7542B-EF94-D00E-07E5-A560F2B92E62}"/>
+              </a:ext>
+            </a:extLst>
+          </p:cNvPr>
+          <p:cNvSpPr/>
+          <p:nvPr/>
+        </p:nvSpPr>
+        <p:spPr>
+          <a:xfrm>
+            <a:off x="838200" y="2209800"/>
+            <a:ext cx="1524000" cy="76200"/>
+          </a:xfrm>
+          <a:prstGeom prst="rect">
+            <a:avLst/>
+          </a:prstGeom>
+          <a:solidFill>
+            <a:srgbClr val="0073CF"/>
+          </a:solidFill>
+          <a:ln w="12700" cap="flat" cmpd="sng" algn="ctr">
+            <a:noFill/>
+            <a:prstDash val="solid"/>
+            <a:miter lim="800000"/>
+          </a:ln>
+        </p:spPr>
+        <p:style>
+          <a:lnRef idx="2">
+            <a:schemeClr val="accent1">
+              <a:shade val="15000"/>
+            </a:schemeClr>
+          </a:lnRef>
+          <a:fillRef idx="1">
+            <a:schemeClr val="accent1"/>
+          </a:fillRef>
+          <a:effectRef idx="0">
+            <a:schemeClr val="accent1"/>
+          </a:effectRef>
+          <a:fontRef idx="minor">
+            <a:schemeClr val="lt1"/>
+          </a:fontRef>
+        </p:style>
+        <p:txBody>
+          <a:bodyPr vertOverflow="clip" horzOverflow="clip" rtlCol="0" anchor="t"/>
+          <a:lstStyle/>
+          <a:p>
+            <a:pPr algn="l"/>
+            <a:endParaRPr lang="en-CN"/>
+          </a:p>
+        </p:txBody>
+      </p:sp>
+      <p:pic>
+        <p:nvPicPr>
+          <p:cNvPr id="7" name="Copied Picture 7">
+            <a:extLst>
+              <a:ext uri="{FF2B5EF4-FFF2-40B4-BE49-F238E27FC236}">
+                <a16:creationId xmlns:a16="http://schemas.microsoft.com/office/drawing/2014/main" id="{D326D1E3-63F4-65D5-3525-EF5578C285D7}"/>
+              </a:ext>
+            </a:extLst>
+          </p:cNvPr>
+          <p:cNvPicPr>
+            <a:picLocks noChangeAspect="1"/>
+          </p:cNvPicPr>
+          <p:nvPr/>
+        </p:nvPicPr>
+        <p:blipFill>
+          <a:blip r:embed="rId2"/>
+          <a:stretch>
+            <a:fillRect/>
+          </a:stretch>
+        </p:blipFill>
+        <p:spPr>
+          <a:xfrm>
+            <a:off x="838200" y="508000"/>
+            <a:ext cx="762000" cy="762000"/>
+          </a:xfrm>
+          <a:prstGeom prst="rect">
+            <a:avLst/>
+          </a:prstGeom>
+        </p:spPr>
+      </p:pic>
+      <p:sp>
+        <p:nvSpPr>
+          <p:cNvPr id="10" name="Footer Name">
+            <a:extLst>
+              <a:ext uri="{FF2B5EF4-FFF2-40B4-BE49-F238E27FC236}">
+                <a16:creationId xmlns:a16="http://schemas.microsoft.com/office/drawing/2014/main" id="{E6A38FE1-CEAF-8F5B-CE3F-4AC7DF63EE51}"/>
+              </a:ext>
+            </a:extLst>
+          </p:cNvPr>
+          <p:cNvSpPr txBox="1"/>
+          <p:nvPr/>
+        </p:nvSpPr>
+        <p:spPr>
+          <a:xfrm>
+            <a:off x="838200" y="6350000"/>
+            <a:ext cx="5080000" cy="508000"/>
+          </a:xfrm>
+          <a:prstGeom prst="rect">
+            <a:avLst/>
+          </a:prstGeom>
+          <a:noFill/>
+        </p:spPr>
+        <p:txBody>
+          <a:bodyPr vertOverflow="overflow" vert="horz" wrap="none" rtlCol="0" anchor="ctr" anchorCtr="0">
+            <a:noAutofit/>
+          </a:bodyPr>
+          <a:lstStyle/>
+          <a:p>
+            <a:pPr algn="l">
+              <a:buNone/>
+            </a:pPr>
+            <a:r>
+              <a:rPr lang="en-US" sz="1400" b="1" spc="200" dirty="0">
+                <a:solidFill>
+                  <a:srgbClr val="FFFFFF"/>
+                </a:solidFill>
+              </a:rPr>
+              <a:t>Quan Wei</a:t>
+            </a:r>
+            <a:r>
+              <a:rPr lang="en-US" sz="1400" b="1" spc="200" dirty="0">
+                <a:solidFill>
+                  <a:srgbClr val="9AA7B5"/>
+                </a:solidFill>
+              </a:rPr>
+              <a:t>   |   </a:t>
+            </a:r>
+            <a:r>
+              <a:rPr lang="en-US" sz="1400" b="1" spc="200" dirty="0">
+                <a:solidFill>
+                  <a:srgbClr val="FFFFFF"/>
+                </a:solidFill>
+              </a:rPr>
+              <a:t>WEEK 2</a:t>
+            </a:r>
+          </a:p>
+        </p:txBody>
+      </p:sp>
+      <p:sp>
+        <p:nvSpPr>
+          <p:cNvPr id="8" name="RightCol">
+            <a:extLst>
+              <a:ext uri="{FF2B5EF4-FFF2-40B4-BE49-F238E27FC236}">
+                <a16:creationId xmlns:a16="http://schemas.microsoft.com/office/drawing/2014/main" id="{AB2A035E-6DFF-A442-BE79-65774EBAF4CB}"/>
+              </a:ext>
+            </a:extLst>
+          </p:cNvPr>
+          <p:cNvSpPr txBox="1"/>
+          <p:nvPr/>
+        </p:nvSpPr>
+        <p:spPr>
+          <a:xfrm>
+            <a:off x="6172200" y="2489200"/>
+            <a:ext cx="5181600" cy="3429000"/>
+          </a:xfrm>
+          <a:prstGeom prst="rect">
+            <a:avLst/>
+          </a:prstGeom>
+          <a:noFill/>
+        </p:spPr>
+        <p:txBody>
+          <a:bodyPr vertOverflow="overflow" vert="horz" wrap="square" rtlCol="0" anchor="t" anchorCtr="0">
+            <a:noAutofit/>
+          </a:bodyPr>
+          <a:lstStyle/>
+          <a:p>
+            <a:pPr marL="0" indent="0" algn="l">
+              <a:spcBef>
+                <a:spcPts val="0"/>
+              </a:spcBef>
+              <a:spcAft>
+                <a:spcPts val="200"/>
+              </a:spcAft>
+              <a:buNone/>
+            </a:pPr>
+            <a:r>
+              <a:rPr lang="en-US" sz="1600" b="1" dirty="0">
+                <a:solidFill>
+                  <a:srgbClr val="0073CF"/>
+                </a:solidFill>
+              </a:rPr>
+              <a:t>Tasks &amp; datasets</a:t>
+            </a:r>
+          </a:p>
+          <a:p>
+            <a:pPr marL="228600" indent="-228600" algn="l">
+              <a:lnSpc>
+                <a:spcPct val="104000"/>
+              </a:lnSpc>
+              <a:spcBef>
+                <a:spcPts val="100"/>
+              </a:spcBef>
+              <a:spcAft>
+                <a:spcPts val="140"/>
+              </a:spcAft>
+              <a:buFont typeface="Arial"/>
+              <a:buChar char="•"/>
+            </a:pPr>
+            <a:r>
+              <a:rPr lang="en-US" sz="1400" b="1" dirty="0">
+                <a:solidFill>
+                  <a:srgbClr val="00396B"/>
+                </a:solidFill>
+              </a:rPr>
+              <a:t>Search — </a:t>
+            </a:r>
+            <a:r>
+              <a:rPr lang="en-US" sz="1400" dirty="0">
+                <a:solidFill>
+                  <a:srgbClr val="3A3A3C"/>
+                </a:solidFill>
+              </a:rPr>
+              <a:t>HotpotQA</a:t>
+            </a:r>
+          </a:p>
+          <a:p>
+            <a:pPr marL="228600" indent="-228600" algn="l">
+              <a:lnSpc>
+                <a:spcPct val="104000"/>
+              </a:lnSpc>
+              <a:spcBef>
+                <a:spcPts val="100"/>
+              </a:spcBef>
+              <a:spcAft>
+                <a:spcPts val="140"/>
+              </a:spcAft>
+              <a:buFont typeface="Arial"/>
+              <a:buChar char="•"/>
+            </a:pPr>
+            <a:r>
+              <a:rPr lang="en-US" sz="1400" b="1" dirty="0">
+                <a:solidFill>
+                  <a:srgbClr val="00396B"/>
+                </a:solidFill>
+              </a:rPr>
+              <a:t>Deep research — </a:t>
+            </a:r>
+            <a:r>
+              <a:rPr lang="en-US" sz="1400" dirty="0">
+                <a:solidFill>
+                  <a:srgbClr val="3A3A3C"/>
+                </a:solidFill>
+              </a:rPr>
+              <a:t>GAIA, BrowseComp+</a:t>
+            </a:r>
+          </a:p>
+          <a:p>
+            <a:pPr marL="228600" indent="-228600" algn="l">
+              <a:lnSpc>
+                <a:spcPct val="104000"/>
+              </a:lnSpc>
+              <a:spcBef>
+                <a:spcPts val="100"/>
+              </a:spcBef>
+              <a:spcAft>
+                <a:spcPts val="140"/>
+              </a:spcAft>
+              <a:buFont typeface="Arial"/>
+              <a:buChar char="•"/>
+            </a:pPr>
+            <a:r>
+              <a:rPr lang="en-US" sz="1400" b="1" dirty="0">
+                <a:solidFill>
+                  <a:srgbClr val="00396B"/>
+                </a:solidFill>
+              </a:rPr>
+              <a:t>Math — </a:t>
+            </a:r>
+            <a:r>
+              <a:rPr lang="en-US" sz="1400" dirty="0">
+                <a:solidFill>
+                  <a:srgbClr val="3A3A3C"/>
+                </a:solidFill>
+              </a:rPr>
+              <a:t>AIME, AMC</a:t>
+            </a:r>
+          </a:p>
+          <a:p>
+            <a:pPr marL="228600" indent="-228600" algn="l">
+              <a:lnSpc>
+                <a:spcPct val="104000"/>
+              </a:lnSpc>
+              <a:spcBef>
+                <a:spcPts val="100"/>
+              </a:spcBef>
+              <a:spcAft>
+                <a:spcPts val="140"/>
+              </a:spcAft>
+              <a:buFont typeface="Arial"/>
+              <a:buChar char="•"/>
+            </a:pPr>
+            <a:r>
+              <a:rPr lang="en-US" sz="1400" b="1" dirty="0">
+                <a:solidFill>
+                  <a:srgbClr val="00396B"/>
+                </a:solidFill>
+              </a:rPr>
+              <a:t>Science — </a:t>
+            </a:r>
+            <a:r>
+              <a:rPr lang="en-US" sz="1400" dirty="0">
+                <a:solidFill>
+                  <a:srgbClr val="3A3A3C"/>
+                </a:solidFill>
+              </a:rPr>
+              <a:t>GPQA</a:t>
+            </a:r>
+          </a:p>
+          <a:p>
+            <a:pPr marL="228600" indent="-228600" algn="l">
+              <a:lnSpc>
+                <a:spcPct val="104000"/>
+              </a:lnSpc>
+              <a:spcBef>
+                <a:spcPts val="100"/>
+              </a:spcBef>
+              <a:spcAft>
+                <a:spcPts val="140"/>
+              </a:spcAft>
+              <a:buFont typeface="Arial"/>
+              <a:buChar char="•"/>
+            </a:pPr>
+            <a:r>
+              <a:rPr lang="en-US" sz="1400" b="1" dirty="0">
+                <a:solidFill>
+                  <a:srgbClr val="00396B"/>
+                </a:solidFill>
+              </a:rPr>
+              <a:t>Code — </a:t>
+            </a:r>
+            <a:r>
+              <a:rPr lang="en-US" sz="1400" dirty="0">
+                <a:solidFill>
+                  <a:srgbClr val="3A3A3C"/>
+                </a:solidFill>
+              </a:rPr>
+              <a:t>SWE-bench, Terminal-bench</a:t>
+            </a:r>
+          </a:p>
+          <a:p>
+            <a:pPr marL="0" indent="0" algn="l">
+              <a:spcBef>
+                <a:spcPts val="600"/>
+              </a:spcBef>
+              <a:spcAft>
+                <a:spcPts val="200"/>
+              </a:spcAft>
+              <a:buNone/>
+            </a:pPr>
+            <a:r>
+              <a:rPr lang="en-US" sz="1600" b="1" dirty="0">
+                <a:solidFill>
+                  <a:srgbClr val="0073CF"/>
+                </a:solidFill>
+              </a:rPr>
+              <a:t>Metrics</a:t>
+            </a:r>
+          </a:p>
+          <a:p>
+            <a:pPr marL="228600" indent="-228600" algn="l">
+              <a:lnSpc>
+                <a:spcPct val="104000"/>
+              </a:lnSpc>
+              <a:spcBef>
+                <a:spcPts val="100"/>
+              </a:spcBef>
+              <a:spcAft>
+                <a:spcPts val="140"/>
+              </a:spcAft>
+              <a:buFont typeface="Arial"/>
+              <a:buChar char="•"/>
+            </a:pPr>
+            <a:r>
+              <a:rPr lang="en-US" sz="1400" b="1" dirty="0">
+                <a:solidFill>
+                  <a:srgbClr val="00396B"/>
+                </a:solidFill>
+              </a:rPr>
+              <a:t>Accuracy — </a:t>
+            </a:r>
+            <a:r>
+              <a:rPr lang="en-US" sz="1400" dirty="0">
+                <a:solidFill>
+                  <a:srgbClr val="3A3A3C"/>
+                </a:solidFill>
+              </a:rPr>
+              <a:t>task completion quality</a:t>
+            </a:r>
+          </a:p>
+          <a:p>
+            <a:pPr marL="228600" indent="-228600" algn="l">
+              <a:lnSpc>
+                <a:spcPct val="104000"/>
+              </a:lnSpc>
+              <a:spcBef>
+                <a:spcPts val="100"/>
+              </a:spcBef>
+              <a:spcAft>
+                <a:spcPts val="140"/>
+              </a:spcAft>
+              <a:buFont typeface="Arial"/>
+              <a:buChar char="•"/>
+            </a:pPr>
+            <a:r>
+              <a:rPr lang="en-US" sz="1400" b="1" dirty="0">
+                <a:solidFill>
+                  <a:srgbClr val="00396B"/>
+                </a:solidFill>
+              </a:rPr>
+              <a:t>Cost — </a:t>
+            </a:r>
+            <a:r>
+              <a:rPr lang="en-US" sz="1400" dirty="0">
+                <a:solidFill>
+                  <a:srgbClr val="3A3A3C"/>
+                </a:solidFill>
+              </a:rPr>
+              <a:t>model + token + communication</a:t>
+            </a:r>
+          </a:p>
+        </p:txBody>
+      </p:sp>
+      <p:sp>
+        <p:nvSpPr>
+          <p:cNvPr id="9" name="References">
+            <a:extLst>
+              <a:ext uri="{FF2B5EF4-FFF2-40B4-BE49-F238E27FC236}">
+                <a16:creationId xmlns:a16="http://schemas.microsoft.com/office/drawing/2014/main" id="{7D303B13-3751-6F41-9785-B7A3AACBBBAE}"/>
+              </a:ext>
+            </a:extLst>
+          </p:cNvPr>
+          <p:cNvSpPr txBox="1"/>
+          <p:nvPr/>
+        </p:nvSpPr>
+        <p:spPr>
+          <a:xfrm>
+            <a:off x="838200" y="5969000"/>
+            <a:ext cx="10515600" cy="330200"/>
+          </a:xfrm>
+          <a:prstGeom prst="rect">
+            <a:avLst/>
+          </a:prstGeom>
+          <a:noFill/>
+        </p:spPr>
+        <p:txBody>
+          <a:bodyPr vertOverflow="overflow" vert="horz" wrap="square" rtlCol="0" anchor="ctr" anchorCtr="0">
+            <a:noAutofit/>
+          </a:bodyPr>
+          <a:lstStyle/>
+          <a:p>
+            <a:pPr marL="0" indent="0" algn="l">
+              <a:buNone/>
+            </a:pPr>
+            <a:r>
+              <a:rPr lang="en-US" sz="1100" b="1" dirty="0">
+                <a:solidFill>
+                  <a:srgbClr val="9AA7B5"/>
+                </a:solidFill>
+              </a:rPr>
+              <a:t>References:  </a:t>
+            </a:r>
+            <a:r>
+              <a:rPr lang="en-US" sz="1100" b="1" u="sng" dirty="0" err="1">
+                <a:solidFill>
+                  <a:srgbClr val="0073CF"/>
+                </a:solidFill>
+              </a:rPr>
+              <a:t>AgentFlow</a:t>
+            </a:r>
+            <a:r>
+              <a:rPr lang="en-US" sz="1100" b="1" dirty="0">
+                <a:solidFill>
+                  <a:srgbClr val="9AA7B5"/>
+                </a:solidFill>
+              </a:rPr>
+              <a:t>    ·    </a:t>
+            </a:r>
+            <a:r>
+              <a:rPr lang="en-US" sz="1100" b="1" u="sng" dirty="0">
+                <a:solidFill>
+                  <a:srgbClr val="0073CF"/>
+                </a:solidFill>
+              </a:rPr>
+              <a:t>AORCHESTRA</a:t>
+            </a:r>
+            <a:r>
+              <a:rPr lang="en-US" sz="1100" b="1" dirty="0">
+                <a:solidFill>
+                  <a:srgbClr val="9AA7B5"/>
+                </a:solidFill>
+              </a:rPr>
+              <a:t>    ·    </a:t>
+            </a:r>
+            <a:r>
+              <a:rPr lang="en-US" sz="1100" b="1" u="sng" dirty="0">
+                <a:solidFill>
+                  <a:srgbClr val="0073CF"/>
+                </a:solidFill>
+              </a:rPr>
+              <a:t>MAS-Orchestra</a:t>
+            </a:r>
+            <a:endParaRPr lang="en-US" sz="1100" dirty="0">
+              <a:solidFill>
+                <a:srgbClr val="9AA7B5"/>
+              </a:solidFill>
+            </a:endParaRPr>
+          </a:p>
+        </p:txBody>
+      </p:sp>
+    </p:spTree>
+    <p:extLst>
+      <p:ext uri="{BB962C8B-B14F-4D97-AF65-F5344CB8AC3E}">
+        <p14:creationId xmlns:p14="http://schemas.microsoft.com/office/powerpoint/2010/main" val="1468420791"/>
+      </p:ext>
+    </p:extLst>
+  </p:cSld>
+  <p:clrMapOvr>
+    <a:masterClrMapping/>
+  </p:clrMapOvr>
+</p:sld>
+</file>
+
+<file path=ppt/slides/slide13.xml><?xml version="1.0" encoding="utf-8"?>
+<p:sld xmlns:a="http://schemas.openxmlformats.org/drawingml/2006/main" xmlns:r="http://schemas.openxmlformats.org/officeDocument/2006/relationships" xmlns:p="http://schemas.openxmlformats.org/presentationml/2006/main">
+  <p:cSld>
+    <p:spTree>
+      <p:nvGrpSpPr>
+        <p:cNvPr id="1" name="">
+          <a:extLst>
+            <a:ext uri="{FF2B5EF4-FFF2-40B4-BE49-F238E27FC236}">
+              <a16:creationId xmlns:a16="http://schemas.microsoft.com/office/drawing/2014/main" id="{23D49A8B-44F5-3D21-3273-F7F84498A9B2}"/>
+            </a:ext>
+          </a:extLst>
+        </p:cNvPr>
+        <p:cNvGrpSpPr/>
+        <p:nvPr/>
+      </p:nvGrpSpPr>
+      <p:grpSpPr>
+        <a:xfrm>
+          <a:off x="0" y="0"/>
+          <a:ext cx="0" cy="0"/>
+          <a:chOff x="0" y="0"/>
+          <a:chExt cx="0" cy="0"/>
+        </a:xfrm>
+      </p:grpSpPr>
+      <p:sp>
+        <p:nvSpPr>
+          <p:cNvPr id="5" name="Footer Bar">
+            <a:extLst>
+              <a:ext uri="{FF2B5EF4-FFF2-40B4-BE49-F238E27FC236}">
+                <a16:creationId xmlns:a16="http://schemas.microsoft.com/office/drawing/2014/main" id="{5341933F-002B-EA81-F176-3616706947C7}"/>
+              </a:ext>
+            </a:extLst>
+          </p:cNvPr>
+          <p:cNvSpPr/>
+          <p:nvPr/>
+        </p:nvSpPr>
+        <p:spPr>
+          <a:xfrm>
+            <a:off x="0" y="6350000"/>
+            <a:ext cx="12192000" cy="508000"/>
+          </a:xfrm>
+          <a:prstGeom prst="rect">
+            <a:avLst/>
+          </a:prstGeom>
+          <a:solidFill>
+            <a:srgbClr val="00396B"/>
+          </a:solidFill>
+          <a:ln w="12700" cap="flat" cmpd="sng" algn="ctr">
+            <a:noFill/>
+            <a:prstDash val="solid"/>
+            <a:miter lim="800000"/>
+          </a:ln>
+        </p:spPr>
+        <p:style>
+          <a:lnRef idx="2">
+            <a:schemeClr val="accent1">
+              <a:shade val="15000"/>
+            </a:schemeClr>
+          </a:lnRef>
+          <a:fillRef idx="1">
+            <a:schemeClr val="accent1"/>
+          </a:fillRef>
+          <a:effectRef idx="0">
+            <a:schemeClr val="accent1"/>
+          </a:effectRef>
+          <a:fontRef idx="minor">
+            <a:schemeClr val="lt1"/>
+          </a:fontRef>
+        </p:style>
+        <p:txBody>
+          <a:bodyPr vertOverflow="clip" horzOverflow="clip" rtlCol="0" anchor="t"/>
+          <a:lstStyle/>
+          <a:p>
+            <a:pPr algn="l"/>
+            <a:endParaRPr lang="en-CN"/>
+          </a:p>
+        </p:txBody>
+      </p:sp>
+      <p:sp>
+        <p:nvSpPr>
+          <p:cNvPr id="2" name="Title 1">
+            <a:extLst>
+              <a:ext uri="{FF2B5EF4-FFF2-40B4-BE49-F238E27FC236}">
+                <a16:creationId xmlns:a16="http://schemas.microsoft.com/office/drawing/2014/main" id="{E707CFA4-C473-EE7D-60A7-A56E11483AF9}"/>
+              </a:ext>
+            </a:extLst>
+          </p:cNvPr>
+          <p:cNvSpPr>
+            <a:spLocks noGrp="1"/>
+          </p:cNvSpPr>
+          <p:nvPr>
+            <p:ph type="title"/>
+          </p:nvPr>
+        </p:nvSpPr>
+        <p:spPr>
+          <a:xfrm>
+            <a:off x="838200" y="1397000"/>
+            <a:ext cx="10515600" cy="711200"/>
+          </a:xfrm>
+        </p:spPr>
+        <p:txBody>
+          <a:bodyPr anchor="t" anchorCtr="0"/>
+          <a:lstStyle/>
+          <a:p>
+            <a:r>
+              <a:rPr lang="en-US" sz="3200" b="1" dirty="0">
+                <a:solidFill>
+                  <a:srgbClr val="00396B"/>
+                </a:solidFill>
+              </a:rPr>
+              <a:t>References</a:t>
+            </a:r>
+          </a:p>
+        </p:txBody>
+      </p:sp>
+      <p:sp>
+        <p:nvSpPr>
+          <p:cNvPr id="3" name="Content Placeholder 2">
+            <a:extLst>
+              <a:ext uri="{FF2B5EF4-FFF2-40B4-BE49-F238E27FC236}">
+                <a16:creationId xmlns:a16="http://schemas.microsoft.com/office/drawing/2014/main" id="{2BC78B36-AE0A-D38E-AB83-BADE920971DE}"/>
+              </a:ext>
+            </a:extLst>
+          </p:cNvPr>
+          <p:cNvSpPr>
+            <a:spLocks noGrp="1"/>
+          </p:cNvSpPr>
+          <p:nvPr>
+            <p:ph idx="1"/>
+          </p:nvPr>
+        </p:nvSpPr>
+        <p:spPr>
+          <a:xfrm>
+            <a:off x="838200" y="2540000"/>
+            <a:ext cx="10515600" cy="3657600"/>
+          </a:xfrm>
+        </p:spPr>
+        <p:txBody>
+          <a:bodyPr anchor="ctr" anchorCtr="0">
+            <a:normAutofit/>
+          </a:bodyPr>
+          <a:lstStyle/>
+          <a:p>
+            <a:pPr marL="400050" indent="-400050" algn="l">
+              <a:lnSpc>
+                <a:spcPct val="108000"/>
+              </a:lnSpc>
+              <a:spcBef>
+                <a:spcPts val="600"/>
+              </a:spcBef>
+              <a:spcAft>
+                <a:spcPts val="900"/>
+              </a:spcAft>
+              <a:buFont typeface="Arial"/>
+              <a:buAutoNum type="arabicPeriod"/>
+            </a:pPr>
+            <a:r>
+              <a:rPr lang="en-US" sz="1600" b="1" dirty="0">
+                <a:solidFill>
+                  <a:srgbClr val="00396B"/>
+                </a:solidFill>
+              </a:rPr>
+              <a:t>AgentFlow  </a:t>
+            </a:r>
+            <a:r>
+              <a:rPr lang="en-US" sz="1600" dirty="0">
+                <a:solidFill>
+                  <a:srgbClr val="3A3A3C"/>
+                </a:solidFill>
+              </a:rPr>
+              <a:t>In-the-Flow Agentic System Optimization for Effective Planning and Tool Use.  </a:t>
+            </a:r>
+            <a:r>
+              <a:rPr lang="en-US" sz="1600" i="1" dirty="0">
+                <a:solidFill>
+                  <a:srgbClr val="6E7B8B"/>
+                </a:solidFill>
+              </a:rPr>
+              <a:t>arXiv:2510.05592, 2025.</a:t>
+            </a:r>
+          </a:p>
+          <a:p>
+            <a:pPr marL="400050" indent="-400050" algn="l">
+              <a:lnSpc>
+                <a:spcPct val="108000"/>
+              </a:lnSpc>
+              <a:spcBef>
+                <a:spcPts val="600"/>
+              </a:spcBef>
+              <a:spcAft>
+                <a:spcPts val="900"/>
+              </a:spcAft>
+              <a:buFont typeface="Arial"/>
+              <a:buAutoNum type="arabicPeriod"/>
+            </a:pPr>
+            <a:r>
+              <a:rPr lang="en-US" sz="1600" b="1" dirty="0">
+                <a:solidFill>
+                  <a:srgbClr val="00396B"/>
+                </a:solidFill>
+              </a:rPr>
+              <a:t>AORCHESTRA  </a:t>
+            </a:r>
+            <a:r>
+              <a:rPr lang="en-US" sz="1600" dirty="0">
+                <a:solidFill>
+                  <a:srgbClr val="3A3A3C"/>
+                </a:solidFill>
+              </a:rPr>
+              <a:t>AOrchestra: Automating Sub-Agent Creation for Agentic Orchestration.  </a:t>
+            </a:r>
+            <a:r>
+              <a:rPr lang="en-US" sz="1600" i="1" dirty="0">
+                <a:solidFill>
+                  <a:srgbClr val="6E7B8B"/>
+                </a:solidFill>
+              </a:rPr>
+              <a:t>arXiv:2602.03786, 2026.</a:t>
+            </a:r>
+          </a:p>
+          <a:p>
+            <a:pPr marL="400050" indent="-400050" algn="l">
+              <a:lnSpc>
+                <a:spcPct val="108000"/>
+              </a:lnSpc>
+              <a:spcBef>
+                <a:spcPts val="600"/>
+              </a:spcBef>
+              <a:spcAft>
+                <a:spcPts val="900"/>
+              </a:spcAft>
+              <a:buFont typeface="Arial"/>
+              <a:buAutoNum type="arabicPeriod"/>
+            </a:pPr>
+            <a:r>
+              <a:rPr lang="en-US" sz="1600" b="1" dirty="0">
+                <a:solidFill>
+                  <a:srgbClr val="00396B"/>
+                </a:solidFill>
+              </a:rPr>
+              <a:t>MAS-Orchestra  </a:t>
+            </a:r>
+            <a:r>
+              <a:rPr lang="en-US" sz="1600" dirty="0">
+                <a:solidFill>
+                  <a:srgbClr val="3A3A3C"/>
+                </a:solidFill>
+              </a:rPr>
+              <a:t>Understanding and Improving Multi-Agent Reasoning Through Holistic Orchestration and Controlled Benchmarks.  </a:t>
+            </a:r>
+            <a:r>
+              <a:rPr lang="en-US" sz="1600" i="1" dirty="0">
+                <a:solidFill>
+                  <a:srgbClr val="6E7B8B"/>
+                </a:solidFill>
+              </a:rPr>
+              <a:t>arXiv:2601.14652, 2026.</a:t>
+            </a:r>
+          </a:p>
+        </p:txBody>
+      </p:sp>
+      <p:sp>
+        <p:nvSpPr>
+          <p:cNvPr id="4" name="Slide Number Placeholder 3">
+            <a:extLst>
+              <a:ext uri="{FF2B5EF4-FFF2-40B4-BE49-F238E27FC236}">
+                <a16:creationId xmlns:a16="http://schemas.microsoft.com/office/drawing/2014/main" id="{13B911C5-A231-2935-6CF4-C8E6CCF51FF4}"/>
+              </a:ext>
+            </a:extLst>
+          </p:cNvPr>
+          <p:cNvSpPr>
+            <a:spLocks noGrp="1"/>
+          </p:cNvSpPr>
+          <p:nvPr>
+            <p:ph type="sldNum" sz="quarter" idx="12"/>
+          </p:nvPr>
+        </p:nvSpPr>
+        <p:spPr>
+          <a:xfrm>
+            <a:off x="10210800" y="6451600"/>
+            <a:ext cx="1524000" cy="304800"/>
+          </a:xfrm>
+        </p:spPr>
+        <p:txBody>
+          <a:bodyPr anchor="ctr" anchorCtr="0"/>
+          <a:lstStyle/>
+          <a:p>
+            <a:fld id="{FC0A7A6B-4B1F-5446-A3A1-99DEB5EA7F81}" type="slidenum">
+              <a:rPr lang="en-CN" smtClean="0">
+                <a:solidFill>
+                  <a:srgbClr val="9AA7B5"/>
+                </a:solidFill>
+              </a:rPr>
+              <a:t>13</a:t>
+            </a:fld>
+            <a:endParaRPr lang="en-CN">
+              <a:solidFill>
+                <a:srgbClr val="9AA7B5"/>
+              </a:solidFill>
+            </a:endParaRPr>
+          </a:p>
+        </p:txBody>
+      </p:sp>
+      <p:sp>
+        <p:nvSpPr>
+          <p:cNvPr id="6" name="Accent Rule">
+            <a:extLst>
+              <a:ext uri="{FF2B5EF4-FFF2-40B4-BE49-F238E27FC236}">
+                <a16:creationId xmlns:a16="http://schemas.microsoft.com/office/drawing/2014/main" id="{B3E5C5B5-68FB-DD6B-E562-BD23A5B3FE47}"/>
+              </a:ext>
+            </a:extLst>
+          </p:cNvPr>
+          <p:cNvSpPr/>
+          <p:nvPr/>
+        </p:nvSpPr>
+        <p:spPr>
+          <a:xfrm>
+            <a:off x="838200" y="2209800"/>
+            <a:ext cx="1524000" cy="76200"/>
+          </a:xfrm>
+          <a:prstGeom prst="rect">
+            <a:avLst/>
+          </a:prstGeom>
+          <a:solidFill>
+            <a:srgbClr val="0073CF"/>
+          </a:solidFill>
+          <a:ln w="12700" cap="flat" cmpd="sng" algn="ctr">
+            <a:noFill/>
+            <a:prstDash val="solid"/>
+            <a:miter lim="800000"/>
+          </a:ln>
+        </p:spPr>
+        <p:style>
+          <a:lnRef idx="2">
+            <a:schemeClr val="accent1">
+              <a:shade val="15000"/>
+            </a:schemeClr>
+          </a:lnRef>
+          <a:fillRef idx="1">
+            <a:schemeClr val="accent1"/>
+          </a:fillRef>
+          <a:effectRef idx="0">
+            <a:schemeClr val="accent1"/>
+          </a:effectRef>
+          <a:fontRef idx="minor">
+            <a:schemeClr val="lt1"/>
+          </a:fontRef>
+        </p:style>
+        <p:txBody>
+          <a:bodyPr vertOverflow="clip" horzOverflow="clip" rtlCol="0" anchor="t"/>
+          <a:lstStyle/>
+          <a:p>
+            <a:pPr algn="l"/>
+            <a:endParaRPr lang="en-CN"/>
+          </a:p>
+        </p:txBody>
+      </p:sp>
+      <p:pic>
+        <p:nvPicPr>
+          <p:cNvPr id="7" name="Copied Picture 7">
+            <a:extLst>
+              <a:ext uri="{FF2B5EF4-FFF2-40B4-BE49-F238E27FC236}">
+                <a16:creationId xmlns:a16="http://schemas.microsoft.com/office/drawing/2014/main" id="{411AA0B4-19AE-C9F9-1EC1-74CE17208DD6}"/>
+              </a:ext>
+            </a:extLst>
+          </p:cNvPr>
+          <p:cNvPicPr>
+            <a:picLocks noChangeAspect="1"/>
+          </p:cNvPicPr>
+          <p:nvPr/>
+        </p:nvPicPr>
+        <p:blipFill>
+          <a:blip r:embed="rId2"/>
+          <a:stretch>
+            <a:fillRect/>
+          </a:stretch>
+        </p:blipFill>
+        <p:spPr>
+          <a:xfrm>
+            <a:off x="838200" y="508000"/>
+            <a:ext cx="762000" cy="762000"/>
+          </a:xfrm>
+          <a:prstGeom prst="rect">
+            <a:avLst/>
+          </a:prstGeom>
+        </p:spPr>
+      </p:pic>
+      <p:sp>
+        <p:nvSpPr>
+          <p:cNvPr id="10" name="Footer Name">
+            <a:extLst>
+              <a:ext uri="{FF2B5EF4-FFF2-40B4-BE49-F238E27FC236}">
+                <a16:creationId xmlns:a16="http://schemas.microsoft.com/office/drawing/2014/main" id="{10F430A3-570D-D19B-5FA8-40674FA2F7FF}"/>
+              </a:ext>
+            </a:extLst>
+          </p:cNvPr>
+          <p:cNvSpPr txBox="1"/>
+          <p:nvPr/>
+        </p:nvSpPr>
+        <p:spPr>
+          <a:xfrm>
+            <a:off x="838200" y="6350000"/>
+            <a:ext cx="5080000" cy="508000"/>
+          </a:xfrm>
+          <a:prstGeom prst="rect">
+            <a:avLst/>
+          </a:prstGeom>
+          <a:noFill/>
+        </p:spPr>
+        <p:txBody>
+          <a:bodyPr vertOverflow="overflow" vert="horz" wrap="none" rtlCol="0" anchor="ctr" anchorCtr="0">
+            <a:noAutofit/>
+          </a:bodyPr>
+          <a:lstStyle/>
+          <a:p>
+            <a:pPr algn="l">
+              <a:buNone/>
+            </a:pPr>
+            <a:r>
+              <a:rPr lang="en-US" sz="1400" b="1" spc="200" dirty="0">
+                <a:solidFill>
+                  <a:srgbClr val="FFFFFF"/>
+                </a:solidFill>
+              </a:rPr>
+              <a:t>Quan Wei</a:t>
+            </a:r>
+            <a:r>
+              <a:rPr lang="en-US" sz="1400" b="1" spc="200" dirty="0">
+                <a:solidFill>
+                  <a:srgbClr val="9AA7B5"/>
+                </a:solidFill>
+              </a:rPr>
+              <a:t>   |   </a:t>
+            </a:r>
+            <a:r>
+              <a:rPr lang="en-US" sz="1400" b="1" spc="200" dirty="0">
+                <a:solidFill>
+                  <a:srgbClr val="FFFFFF"/>
+                </a:solidFill>
+              </a:rPr>
+              <a:t>WEEK </a:t>
+            </a:r>
+            <a:r>
+              <a:rPr lang="en-US" altLang="zh-CN" sz="1400" b="1" spc="200" dirty="0">
+                <a:solidFill>
+                  <a:srgbClr val="FFFFFF"/>
+                </a:solidFill>
+              </a:rPr>
+              <a:t>2</a:t>
+            </a:r>
+            <a:endParaRPr lang="en-US" sz="1400" b="1" spc="200" dirty="0">
+              <a:solidFill>
+                <a:srgbClr val="FFFFFF"/>
+              </a:solidFill>
+            </a:endParaRPr>
+          </a:p>
+        </p:txBody>
+      </p:sp>
+    </p:spTree>
+    <p:extLst>
+      <p:ext uri="{BB962C8B-B14F-4D97-AF65-F5344CB8AC3E}">
+        <p14:creationId xmlns:p14="http://schemas.microsoft.com/office/powerpoint/2010/main" val="635272683"/>
       </p:ext>
     </p:extLst>
   </p:cSld>
@@ -4006,6 +6629,657 @@
       </p:grpSpPr>
       <p:sp>
         <p:nvSpPr>
+          <p:cNvPr id="50" name="Side Band"/>
+          <p:cNvSpPr/>
+          <p:nvPr/>
+        </p:nvSpPr>
+        <p:spPr>
+          <a:xfrm>
+            <a:off x="0" y="6350000"/>
+            <a:ext cx="12192000" cy="508000"/>
+          </a:xfrm>
+          <a:prstGeom prst="rect">
+            <a:avLst/>
+          </a:prstGeom>
+          <a:solidFill>
+            <a:srgbClr val="00396B"/>
+          </a:solidFill>
+          <a:ln>
+            <a:noFill/>
+          </a:ln>
+        </p:spPr>
+        <p:txBody>
+          <a:bodyPr/>
+          <a:lstStyle/>
+          <a:p>
+            <a:endParaRPr lang="en-US"/>
+          </a:p>
+        </p:txBody>
+      </p:sp>
+      <p:sp>
+        <p:nvSpPr>
+          <p:cNvPr id="51" name="Accent Stripe"/>
+          <p:cNvSpPr/>
+          <p:nvPr/>
+        </p:nvSpPr>
+        <p:spPr>
+          <a:xfrm>
+            <a:off x="914400" y="4572000"/>
+            <a:ext cx="1524000" cy="76200"/>
+          </a:xfrm>
+          <a:prstGeom prst="rect">
+            <a:avLst/>
+          </a:prstGeom>
+          <a:solidFill>
+            <a:srgbClr val="0073CF"/>
+          </a:solidFill>
+          <a:ln>
+            <a:noFill/>
+          </a:ln>
+        </p:spPr>
+        <p:txBody>
+          <a:bodyPr/>
+          <a:lstStyle/>
+          <a:p>
+            <a:endParaRPr lang="en-US"/>
+          </a:p>
+        </p:txBody>
+      </p:sp>
+      <p:sp>
+        <p:nvSpPr>
+          <p:cNvPr id="2" name="Title 1">
+            <a:extLst>
+              <a:ext uri="{FF2B5EF4-FFF2-40B4-BE49-F238E27FC236}">
+                <a16:creationId xmlns:a16="http://schemas.microsoft.com/office/drawing/2014/main" id="{9603BC2B-9AD7-8F77-0482-60AC0C38D2D0}"/>
+              </a:ext>
+            </a:extLst>
+          </p:cNvPr>
+          <p:cNvSpPr>
+            <a:spLocks noGrp="1"/>
+          </p:cNvSpPr>
+          <p:nvPr>
+            <p:ph type="ctrTitle"/>
+          </p:nvPr>
+        </p:nvSpPr>
+        <p:spPr>
+          <a:xfrm>
+            <a:off x="914400" y="2489200"/>
+            <a:ext cx="10414000" cy="1524000"/>
+          </a:xfrm>
+        </p:spPr>
+        <p:txBody>
+          <a:bodyPr>
+            <a:normAutofit/>
+          </a:bodyPr>
+          <a:lstStyle/>
+          <a:p>
+            <a:pPr algn="l">
+              <a:buNone/>
+            </a:pPr>
+            <a:r>
+              <a:rPr lang="en-US" sz="4800" b="1" dirty="0">
+                <a:solidFill>
+                  <a:srgbClr val="00396B"/>
+                </a:solidFill>
+              </a:rPr>
+              <a:t>Summer Intern Project Update</a:t>
+            </a:r>
+          </a:p>
+        </p:txBody>
+      </p:sp>
+      <p:sp>
+        <p:nvSpPr>
+          <p:cNvPr id="3" name="Subtitle 2">
+            <a:extLst>
+              <a:ext uri="{FF2B5EF4-FFF2-40B4-BE49-F238E27FC236}">
+                <a16:creationId xmlns:a16="http://schemas.microsoft.com/office/drawing/2014/main" id="{3C306AAC-30D0-931F-13F6-83F8F178D39A}"/>
+              </a:ext>
+            </a:extLst>
+          </p:cNvPr>
+          <p:cNvSpPr>
+            <a:spLocks noGrp="1"/>
+          </p:cNvSpPr>
+          <p:nvPr>
+            <p:ph type="subTitle" idx="1"/>
+          </p:nvPr>
+        </p:nvSpPr>
+        <p:spPr>
+          <a:xfrm>
+            <a:off x="914400" y="4978400"/>
+            <a:ext cx="9652000" cy="889000"/>
+          </a:xfrm>
+        </p:spPr>
+        <p:txBody>
+          <a:bodyPr anchor="ctr">
+            <a:normAutofit/>
+          </a:bodyPr>
+          <a:lstStyle/>
+          <a:p>
+            <a:pPr algn="l">
+              <a:buNone/>
+            </a:pPr>
+            <a:r>
+              <a:rPr lang="en-US" sz="2200" b="1" dirty="0">
+                <a:solidFill>
+                  <a:srgbClr val="00396B"/>
+                </a:solidFill>
+              </a:rPr>
+              <a:t>Quan Wei</a:t>
+            </a:r>
+            <a:r>
+              <a:rPr lang="en-US" sz="1800" dirty="0">
+                <a:solidFill>
+                  <a:srgbClr val="9AA7B5"/>
+                </a:solidFill>
+              </a:rPr>
+              <a:t>      |      </a:t>
+            </a:r>
+            <a:r>
+              <a:rPr lang="en-US" sz="1600" dirty="0">
+                <a:solidFill>
+                  <a:srgbClr val="6E7B8B"/>
+                </a:solidFill>
+              </a:rPr>
+              <a:t>June 1 – August 7, 2026</a:t>
+            </a:r>
+          </a:p>
+        </p:txBody>
+      </p:sp>
+      <p:sp>
+        <p:nvSpPr>
+          <p:cNvPr id="4" name="Slide Number Placeholder 3">
+            <a:extLst>
+              <a:ext uri="{FF2B5EF4-FFF2-40B4-BE49-F238E27FC236}">
+                <a16:creationId xmlns:a16="http://schemas.microsoft.com/office/drawing/2014/main" id="{30D07311-195D-0088-1A8F-8AE5FDECFF7F}"/>
+              </a:ext>
+            </a:extLst>
+          </p:cNvPr>
+          <p:cNvSpPr>
+            <a:spLocks noGrp="1"/>
+          </p:cNvSpPr>
+          <p:nvPr>
+            <p:ph type="sldNum" sz="quarter" idx="12"/>
+          </p:nvPr>
+        </p:nvSpPr>
+        <p:spPr>
+          <a:xfrm>
+            <a:off x="10210800" y="6451600"/>
+            <a:ext cx="1524000" cy="304800"/>
+          </a:xfrm>
+        </p:spPr>
+        <p:txBody>
+          <a:bodyPr anchor="ctr" anchorCtr="0"/>
+          <a:lstStyle/>
+          <a:p>
+            <a:fld id="{FC0A7A6B-4B1F-5446-A3A1-99DEB5EA7F81}" type="slidenum">
+              <a:rPr lang="en-CN" smtClean="0">
+                <a:solidFill>
+                  <a:srgbClr val="9AA7B5"/>
+                </a:solidFill>
+              </a:rPr>
+              <a:t>2</a:t>
+            </a:fld>
+            <a:endParaRPr lang="en-CN">
+              <a:solidFill>
+                <a:srgbClr val="9AA7B5"/>
+              </a:solidFill>
+            </a:endParaRPr>
+          </a:p>
+        </p:txBody>
+      </p:sp>
+      <p:sp>
+        <p:nvSpPr>
+          <p:cNvPr id="61" name="Band Label"/>
+          <p:cNvSpPr/>
+          <p:nvPr/>
+        </p:nvSpPr>
+        <p:spPr>
+          <a:xfrm>
+            <a:off x="914400" y="2133600"/>
+            <a:ext cx="6350000" cy="355600"/>
+          </a:xfrm>
+          <a:prstGeom prst="rect">
+            <a:avLst/>
+          </a:prstGeom>
+          <a:noFill/>
+          <a:ln>
+            <a:noFill/>
+          </a:ln>
+        </p:spPr>
+        <p:txBody>
+          <a:bodyPr wrap="square" lIns="0" tIns="0" rIns="0" bIns="0">
+            <a:normAutofit/>
+          </a:bodyPr>
+          <a:lstStyle/>
+          <a:p>
+            <a:pPr algn="l">
+              <a:buNone/>
+            </a:pPr>
+            <a:r>
+              <a:rPr lang="en-US" sz="1400" b="1" spc="300" dirty="0">
+                <a:solidFill>
+                  <a:srgbClr val="0073CF"/>
+                </a:solidFill>
+              </a:rPr>
+              <a:t>RESEARCH INTERNSHIP</a:t>
+            </a:r>
+          </a:p>
+        </p:txBody>
+      </p:sp>
+      <p:pic>
+        <p:nvPicPr>
+          <p:cNvPr id="5" name="Picture 4">
+            <a:extLst>
+              <a:ext uri="{FF2B5EF4-FFF2-40B4-BE49-F238E27FC236}">
+                <a16:creationId xmlns:a16="http://schemas.microsoft.com/office/drawing/2014/main" id="{56B1ED2A-126C-C268-0703-0A945A4F18CB}"/>
+              </a:ext>
+            </a:extLst>
+          </p:cNvPr>
+          <p:cNvPicPr>
+            <a:picLocks noChangeAspect="1"/>
+          </p:cNvPicPr>
+          <p:nvPr/>
+        </p:nvPicPr>
+        <p:blipFill>
+          <a:blip r:embed="rId2"/>
+          <a:stretch>
+            <a:fillRect/>
+          </a:stretch>
+        </p:blipFill>
+        <p:spPr>
+          <a:xfrm>
+            <a:off x="914400" y="711200"/>
+            <a:ext cx="1219200" cy="1219200"/>
+          </a:xfrm>
+          <a:prstGeom prst="rect">
+            <a:avLst/>
+          </a:prstGeom>
+        </p:spPr>
+      </p:pic>
+    </p:spTree>
+    <p:extLst>
+      <p:ext uri="{BB962C8B-B14F-4D97-AF65-F5344CB8AC3E}">
+        <p14:creationId xmlns:p14="http://schemas.microsoft.com/office/powerpoint/2010/main" val="3483358848"/>
+      </p:ext>
+    </p:extLst>
+  </p:cSld>
+  <p:clrMapOvr>
+    <a:masterClrMapping/>
+  </p:clrMapOvr>
+</p:sld>
+</file>
+
+<file path=ppt/slides/slide3.xml><?xml version="1.0" encoding="utf-8"?>
+<p:sld xmlns:a="http://schemas.openxmlformats.org/drawingml/2006/main" xmlns:r="http://schemas.openxmlformats.org/officeDocument/2006/relationships" xmlns:p="http://schemas.openxmlformats.org/presentationml/2006/main">
+  <p:cSld>
+    <p:spTree>
+      <p:nvGrpSpPr>
+        <p:cNvPr id="1" name="">
+          <a:extLst>
+            <a:ext uri="{FF2B5EF4-FFF2-40B4-BE49-F238E27FC236}">
+              <a16:creationId xmlns:a16="http://schemas.microsoft.com/office/drawing/2014/main" id="{EEF571E8-75E4-DDB6-C54E-9A6DD05EEC55}"/>
+            </a:ext>
+          </a:extLst>
+        </p:cNvPr>
+        <p:cNvGrpSpPr/>
+        <p:nvPr/>
+      </p:nvGrpSpPr>
+      <p:grpSpPr>
+        <a:xfrm>
+          <a:off x="0" y="0"/>
+          <a:ext cx="0" cy="0"/>
+          <a:chOff x="0" y="0"/>
+          <a:chExt cx="0" cy="0"/>
+        </a:xfrm>
+      </p:grpSpPr>
+      <p:sp>
+        <p:nvSpPr>
+          <p:cNvPr id="50" name="Side Band">
+            <a:extLst>
+              <a:ext uri="{FF2B5EF4-FFF2-40B4-BE49-F238E27FC236}">
+                <a16:creationId xmlns:a16="http://schemas.microsoft.com/office/drawing/2014/main" id="{DADDDFD8-A892-4C1C-B8FF-D1173ED0F599}"/>
+              </a:ext>
+            </a:extLst>
+          </p:cNvPr>
+          <p:cNvSpPr/>
+          <p:nvPr/>
+        </p:nvSpPr>
+        <p:spPr>
+          <a:xfrm>
+            <a:off x="0" y="6350000"/>
+            <a:ext cx="12192000" cy="508000"/>
+          </a:xfrm>
+          <a:prstGeom prst="rect">
+            <a:avLst/>
+          </a:prstGeom>
+          <a:solidFill>
+            <a:srgbClr val="00396B"/>
+          </a:solidFill>
+          <a:ln>
+            <a:noFill/>
+          </a:ln>
+        </p:spPr>
+        <p:txBody>
+          <a:bodyPr/>
+          <a:lstStyle/>
+          <a:p>
+            <a:endParaRPr lang="en-US"/>
+          </a:p>
+        </p:txBody>
+      </p:sp>
+      <p:sp>
+        <p:nvSpPr>
+          <p:cNvPr id="51" name="Accent Stripe">
+            <a:extLst>
+              <a:ext uri="{FF2B5EF4-FFF2-40B4-BE49-F238E27FC236}">
+                <a16:creationId xmlns:a16="http://schemas.microsoft.com/office/drawing/2014/main" id="{105FDE61-73DD-61E8-505D-25DB1AF5DA9B}"/>
+              </a:ext>
+            </a:extLst>
+          </p:cNvPr>
+          <p:cNvSpPr/>
+          <p:nvPr/>
+        </p:nvSpPr>
+        <p:spPr>
+          <a:xfrm>
+            <a:off x="914400" y="4572000"/>
+            <a:ext cx="1524000" cy="76200"/>
+          </a:xfrm>
+          <a:prstGeom prst="rect">
+            <a:avLst/>
+          </a:prstGeom>
+          <a:solidFill>
+            <a:srgbClr val="0073CF"/>
+          </a:solidFill>
+          <a:ln>
+            <a:noFill/>
+          </a:ln>
+        </p:spPr>
+        <p:txBody>
+          <a:bodyPr/>
+          <a:lstStyle/>
+          <a:p>
+            <a:endParaRPr lang="en-US"/>
+          </a:p>
+        </p:txBody>
+      </p:sp>
+      <p:sp>
+        <p:nvSpPr>
+          <p:cNvPr id="2" name="Title 1">
+            <a:extLst>
+              <a:ext uri="{FF2B5EF4-FFF2-40B4-BE49-F238E27FC236}">
+                <a16:creationId xmlns:a16="http://schemas.microsoft.com/office/drawing/2014/main" id="{A6696C4B-6147-A048-89F8-E1900C10B378}"/>
+              </a:ext>
+            </a:extLst>
+          </p:cNvPr>
+          <p:cNvSpPr>
+            <a:spLocks noGrp="1"/>
+          </p:cNvSpPr>
+          <p:nvPr>
+            <p:ph type="ctrTitle"/>
+          </p:nvPr>
+        </p:nvSpPr>
+        <p:spPr>
+          <a:xfrm>
+            <a:off x="914400" y="2489200"/>
+            <a:ext cx="10414000" cy="1524000"/>
+          </a:xfrm>
+        </p:spPr>
+        <p:txBody>
+          <a:bodyPr>
+            <a:normAutofit/>
+          </a:bodyPr>
+          <a:lstStyle/>
+          <a:p>
+            <a:pPr algn="l">
+              <a:buNone/>
+            </a:pPr>
+            <a:r>
+              <a:rPr lang="en-US" sz="4800" b="1" dirty="0">
+                <a:solidFill>
+                  <a:srgbClr val="00396B"/>
+                </a:solidFill>
+              </a:rPr>
+              <a:t>Summer Intern Project Update</a:t>
+            </a:r>
+          </a:p>
+        </p:txBody>
+      </p:sp>
+      <p:sp>
+        <p:nvSpPr>
+          <p:cNvPr id="3" name="Subtitle 2">
+            <a:extLst>
+              <a:ext uri="{FF2B5EF4-FFF2-40B4-BE49-F238E27FC236}">
+                <a16:creationId xmlns:a16="http://schemas.microsoft.com/office/drawing/2014/main" id="{52C7ABAE-485D-8204-76A7-B7CFC51E16BB}"/>
+              </a:ext>
+            </a:extLst>
+          </p:cNvPr>
+          <p:cNvSpPr>
+            <a:spLocks noGrp="1"/>
+          </p:cNvSpPr>
+          <p:nvPr>
+            <p:ph type="subTitle" idx="1"/>
+          </p:nvPr>
+        </p:nvSpPr>
+        <p:spPr>
+          <a:xfrm>
+            <a:off x="914400" y="4978400"/>
+            <a:ext cx="9652000" cy="889000"/>
+          </a:xfrm>
+        </p:spPr>
+        <p:txBody>
+          <a:bodyPr anchor="ctr">
+            <a:normAutofit/>
+          </a:bodyPr>
+          <a:lstStyle/>
+          <a:p>
+            <a:pPr algn="l">
+              <a:buNone/>
+            </a:pPr>
+            <a:r>
+              <a:rPr lang="en-US" sz="2200" b="1" dirty="0">
+                <a:solidFill>
+                  <a:srgbClr val="00396B"/>
+                </a:solidFill>
+              </a:rPr>
+              <a:t>Quan Wei</a:t>
+            </a:r>
+            <a:r>
+              <a:rPr lang="en-US" sz="1800" dirty="0">
+                <a:solidFill>
+                  <a:srgbClr val="9AA7B5"/>
+                </a:solidFill>
+              </a:rPr>
+              <a:t>      |      </a:t>
+            </a:r>
+            <a:r>
+              <a:rPr lang="en-US" sz="1600" dirty="0">
+                <a:solidFill>
+                  <a:srgbClr val="6E7B8B"/>
+                </a:solidFill>
+              </a:rPr>
+              <a:t>Wee</a:t>
+            </a:r>
+            <a:r>
+              <a:rPr lang="en-US" altLang="zh-CN" sz="1600" dirty="0">
+                <a:solidFill>
+                  <a:srgbClr val="6E7B8B"/>
+                </a:solidFill>
+              </a:rPr>
+              <a:t>k</a:t>
+            </a:r>
+            <a:r>
+              <a:rPr lang="zh-CN" altLang="en-US" sz="1600" dirty="0">
+                <a:solidFill>
+                  <a:srgbClr val="6E7B8B"/>
+                </a:solidFill>
+              </a:rPr>
+              <a:t> </a:t>
+            </a:r>
+            <a:r>
+              <a:rPr lang="en-US" altLang="zh-CN" sz="1600" dirty="0">
+                <a:solidFill>
+                  <a:srgbClr val="6E7B8B"/>
+                </a:solidFill>
+              </a:rPr>
+              <a:t>1</a:t>
+            </a:r>
+            <a:endParaRPr lang="en-US" sz="1600" dirty="0">
+              <a:solidFill>
+                <a:srgbClr val="6E7B8B"/>
+              </a:solidFill>
+            </a:endParaRPr>
+          </a:p>
+        </p:txBody>
+      </p:sp>
+      <p:sp>
+        <p:nvSpPr>
+          <p:cNvPr id="4" name="Slide Number Placeholder 3">
+            <a:extLst>
+              <a:ext uri="{FF2B5EF4-FFF2-40B4-BE49-F238E27FC236}">
+                <a16:creationId xmlns:a16="http://schemas.microsoft.com/office/drawing/2014/main" id="{783F58E6-7DAD-1A83-1C57-81BEF89E33DE}"/>
+              </a:ext>
+            </a:extLst>
+          </p:cNvPr>
+          <p:cNvSpPr>
+            <a:spLocks noGrp="1"/>
+          </p:cNvSpPr>
+          <p:nvPr>
+            <p:ph type="sldNum" sz="quarter" idx="12"/>
+          </p:nvPr>
+        </p:nvSpPr>
+        <p:spPr>
+          <a:xfrm>
+            <a:off x="10210800" y="6451600"/>
+            <a:ext cx="1524000" cy="304800"/>
+          </a:xfrm>
+        </p:spPr>
+        <p:txBody>
+          <a:bodyPr anchor="ctr" anchorCtr="0"/>
+          <a:lstStyle/>
+          <a:p>
+            <a:fld id="{FC0A7A6B-4B1F-5446-A3A1-99DEB5EA7F81}" type="slidenum">
+              <a:rPr lang="en-CN" smtClean="0">
+                <a:solidFill>
+                  <a:srgbClr val="9AA7B5"/>
+                </a:solidFill>
+              </a:rPr>
+              <a:t>3</a:t>
+            </a:fld>
+            <a:endParaRPr lang="en-CN">
+              <a:solidFill>
+                <a:srgbClr val="9AA7B5"/>
+              </a:solidFill>
+            </a:endParaRPr>
+          </a:p>
+        </p:txBody>
+      </p:sp>
+      <p:sp>
+        <p:nvSpPr>
+          <p:cNvPr id="61" name="Band Label">
+            <a:extLst>
+              <a:ext uri="{FF2B5EF4-FFF2-40B4-BE49-F238E27FC236}">
+                <a16:creationId xmlns:a16="http://schemas.microsoft.com/office/drawing/2014/main" id="{677DDEFC-0AB0-13A2-6B42-E9B6867CA4A4}"/>
+              </a:ext>
+            </a:extLst>
+          </p:cNvPr>
+          <p:cNvSpPr/>
+          <p:nvPr/>
+        </p:nvSpPr>
+        <p:spPr>
+          <a:xfrm>
+            <a:off x="914400" y="2133600"/>
+            <a:ext cx="6350000" cy="355600"/>
+          </a:xfrm>
+          <a:prstGeom prst="rect">
+            <a:avLst/>
+          </a:prstGeom>
+          <a:noFill/>
+          <a:ln>
+            <a:noFill/>
+          </a:ln>
+        </p:spPr>
+        <p:txBody>
+          <a:bodyPr wrap="square" lIns="0" tIns="0" rIns="0" bIns="0">
+            <a:normAutofit/>
+          </a:bodyPr>
+          <a:lstStyle/>
+          <a:p>
+            <a:pPr algn="l">
+              <a:buNone/>
+            </a:pPr>
+            <a:r>
+              <a:rPr lang="en-US" sz="1400" b="1" spc="300" dirty="0">
+                <a:solidFill>
+                  <a:srgbClr val="0073CF"/>
+                </a:solidFill>
+              </a:rPr>
+              <a:t>RESEARCH INTERNSHIP</a:t>
+            </a:r>
+          </a:p>
+        </p:txBody>
+      </p:sp>
+      <p:pic>
+        <p:nvPicPr>
+          <p:cNvPr id="5" name="Picture 4">
+            <a:extLst>
+              <a:ext uri="{FF2B5EF4-FFF2-40B4-BE49-F238E27FC236}">
+                <a16:creationId xmlns:a16="http://schemas.microsoft.com/office/drawing/2014/main" id="{AEE1924F-9B49-64C2-0074-9F7A31659FE6}"/>
+              </a:ext>
+            </a:extLst>
+          </p:cNvPr>
+          <p:cNvPicPr>
+            <a:picLocks noChangeAspect="1"/>
+          </p:cNvPicPr>
+          <p:nvPr/>
+        </p:nvPicPr>
+        <p:blipFill>
+          <a:blip r:embed="rId2"/>
+          <a:stretch>
+            <a:fillRect/>
+          </a:stretch>
+        </p:blipFill>
+        <p:spPr>
+          <a:xfrm>
+            <a:off x="914400" y="711200"/>
+            <a:ext cx="1219200" cy="1219200"/>
+          </a:xfrm>
+          <a:prstGeom prst="rect">
+            <a:avLst/>
+          </a:prstGeom>
+        </p:spPr>
+      </p:pic>
+    </p:spTree>
+    <p:extLst>
+      <p:ext uri="{BB962C8B-B14F-4D97-AF65-F5344CB8AC3E}">
+        <p14:creationId xmlns:p14="http://schemas.microsoft.com/office/powerpoint/2010/main" val="879835196"/>
+      </p:ext>
+    </p:extLst>
+  </p:cSld>
+  <p:clrMapOvr>
+    <a:masterClrMapping/>
+  </p:clrMapOvr>
+</p:sld>
+</file>
+
+<file path=ppt/slides/slide4.xml><?xml version="1.0" encoding="utf-8"?>
+<p:sld xmlns:a="http://schemas.openxmlformats.org/drawingml/2006/main" xmlns:r="http://schemas.openxmlformats.org/officeDocument/2006/relationships" xmlns:p="http://schemas.openxmlformats.org/presentationml/2006/main">
+  <p:cSld>
+    <p:spTree>
+      <p:nvGrpSpPr>
+        <p:cNvPr id="1" name=""/>
+        <p:cNvGrpSpPr/>
+        <p:nvPr/>
+      </p:nvGrpSpPr>
+      <p:grpSpPr>
+        <a:xfrm>
+          <a:off x="0" y="0"/>
+          <a:ext cx="0" cy="0"/>
+          <a:chOff x="0" y="0"/>
+          <a:chExt cx="0" cy="0"/>
+        </a:xfrm>
+      </p:grpSpPr>
+      <p:sp>
+        <p:nvSpPr>
           <p:cNvPr id="5" name="Footer Bar">
             <a:extLst>
               <a:ext uri="{FF2B5EF4-FFF2-40B4-BE49-F238E27FC236}">
@@ -4184,7 +7458,7 @@
                   <a:srgbClr val="9AA7B5"/>
                 </a:solidFill>
               </a:rPr>
-              <a:t>2</a:t>
+              <a:t>4</a:t>
             </a:fld>
             <a:endParaRPr lang="en-CN">
               <a:solidFill>
@@ -4647,7 +7921,7 @@
 </p:sld>
 </file>
 
-<file path=ppt/slides/slide3.xml><?xml version="1.0" encoding="utf-8"?>
+<file path=ppt/slides/slide5.xml><?xml version="1.0" encoding="utf-8"?>
 <p:sld xmlns:a="http://schemas.openxmlformats.org/drawingml/2006/main" xmlns:r="http://schemas.openxmlformats.org/officeDocument/2006/relationships" xmlns:p="http://schemas.openxmlformats.org/presentationml/2006/main">
   <p:cSld>
     <p:spTree>
@@ -4865,7 +8139,7 @@
                   <a:srgbClr val="9AA7B5"/>
                 </a:solidFill>
               </a:rPr>
-              <a:t>3</a:t>
+              <a:t>5</a:t>
             </a:fld>
             <a:endParaRPr lang="en-CN">
               <a:solidFill>
@@ -5528,7 +8802,7 @@
 </p:sld>
 </file>
 
-<file path=ppt/slides/slide4.xml><?xml version="1.0" encoding="utf-8"?>
+<file path=ppt/slides/slide6.xml><?xml version="1.0" encoding="utf-8"?>
 <p:sld xmlns:a="http://schemas.openxmlformats.org/drawingml/2006/main" xmlns:r="http://schemas.openxmlformats.org/officeDocument/2006/relationships" xmlns:p="http://schemas.openxmlformats.org/presentationml/2006/main">
   <p:cSld>
     <p:spTree>
@@ -5977,7 +9251,7 @@
                   <a:srgbClr val="9AA7B5"/>
                 </a:solidFill>
               </a:rPr>
-              <a:t>4</a:t>
+              <a:t>6</a:t>
             </a:fld>
             <a:endParaRPr lang="en-CN">
               <a:solidFill>
@@ -6142,7 +9416,359 @@
 </p:sld>
 </file>
 
-<file path=ppt/slides/slide5.xml><?xml version="1.0" encoding="utf-8"?>
+<file path=ppt/slides/slide7.xml><?xml version="1.0" encoding="utf-8"?>
+<p:sld xmlns:a="http://schemas.openxmlformats.org/drawingml/2006/main" xmlns:r="http://schemas.openxmlformats.org/officeDocument/2006/relationships" xmlns:p="http://schemas.openxmlformats.org/presentationml/2006/main">
+  <p:cSld>
+    <p:spTree>
+      <p:nvGrpSpPr>
+        <p:cNvPr id="1" name="">
+          <a:extLst>
+            <a:ext uri="{FF2B5EF4-FFF2-40B4-BE49-F238E27FC236}">
+              <a16:creationId xmlns:a16="http://schemas.microsoft.com/office/drawing/2014/main" id="{35852844-1A84-3109-CEB9-2F8D4EBD9D63}"/>
+            </a:ext>
+          </a:extLst>
+        </p:cNvPr>
+        <p:cNvGrpSpPr/>
+        <p:nvPr/>
+      </p:nvGrpSpPr>
+      <p:grpSpPr>
+        <a:xfrm>
+          <a:off x="0" y="0"/>
+          <a:ext cx="0" cy="0"/>
+          <a:chOff x="0" y="0"/>
+          <a:chExt cx="0" cy="0"/>
+        </a:xfrm>
+      </p:grpSpPr>
+      <p:sp>
+        <p:nvSpPr>
+          <p:cNvPr id="50" name="Side Band">
+            <a:extLst>
+              <a:ext uri="{FF2B5EF4-FFF2-40B4-BE49-F238E27FC236}">
+                <a16:creationId xmlns:a16="http://schemas.microsoft.com/office/drawing/2014/main" id="{6AAEA816-A24E-7E1C-41C8-3C5F05207A40}"/>
+              </a:ext>
+            </a:extLst>
+          </p:cNvPr>
+          <p:cNvSpPr/>
+          <p:nvPr/>
+        </p:nvSpPr>
+        <p:spPr>
+          <a:xfrm>
+            <a:off x="0" y="6350000"/>
+            <a:ext cx="12192000" cy="508000"/>
+          </a:xfrm>
+          <a:prstGeom prst="rect">
+            <a:avLst/>
+          </a:prstGeom>
+          <a:solidFill>
+            <a:srgbClr val="00396B"/>
+          </a:solidFill>
+          <a:ln>
+            <a:noFill/>
+          </a:ln>
+        </p:spPr>
+        <p:txBody>
+          <a:bodyPr/>
+          <a:lstStyle/>
+          <a:p>
+            <a:endParaRPr lang="en-US"/>
+          </a:p>
+        </p:txBody>
+      </p:sp>
+      <p:sp>
+        <p:nvSpPr>
+          <p:cNvPr id="51" name="Accent Stripe">
+            <a:extLst>
+              <a:ext uri="{FF2B5EF4-FFF2-40B4-BE49-F238E27FC236}">
+                <a16:creationId xmlns:a16="http://schemas.microsoft.com/office/drawing/2014/main" id="{9B3EE851-4260-DA97-158F-C02334D9603A}"/>
+              </a:ext>
+            </a:extLst>
+          </p:cNvPr>
+          <p:cNvSpPr/>
+          <p:nvPr/>
+        </p:nvSpPr>
+        <p:spPr>
+          <a:xfrm>
+            <a:off x="914400" y="4572000"/>
+            <a:ext cx="1524000" cy="76200"/>
+          </a:xfrm>
+          <a:prstGeom prst="rect">
+            <a:avLst/>
+          </a:prstGeom>
+          <a:solidFill>
+            <a:srgbClr val="0073CF"/>
+          </a:solidFill>
+          <a:ln>
+            <a:noFill/>
+          </a:ln>
+        </p:spPr>
+        <p:txBody>
+          <a:bodyPr/>
+          <a:lstStyle/>
+          <a:p>
+            <a:endParaRPr lang="en-US"/>
+          </a:p>
+        </p:txBody>
+      </p:sp>
+      <p:sp>
+        <p:nvSpPr>
+          <p:cNvPr id="2" name="Title 1">
+            <a:extLst>
+              <a:ext uri="{FF2B5EF4-FFF2-40B4-BE49-F238E27FC236}">
+                <a16:creationId xmlns:a16="http://schemas.microsoft.com/office/drawing/2014/main" id="{9A4C006A-B7E0-D0A9-C9D0-95CDDEAB24B0}"/>
+              </a:ext>
+            </a:extLst>
+          </p:cNvPr>
+          <p:cNvSpPr>
+            <a:spLocks noGrp="1"/>
+          </p:cNvSpPr>
+          <p:nvPr>
+            <p:ph type="ctrTitle"/>
+          </p:nvPr>
+        </p:nvSpPr>
+        <p:spPr>
+          <a:xfrm>
+            <a:off x="914400" y="2489200"/>
+            <a:ext cx="10414000" cy="1524000"/>
+          </a:xfrm>
+        </p:spPr>
+        <p:txBody>
+          <a:bodyPr>
+            <a:normAutofit/>
+          </a:bodyPr>
+          <a:lstStyle/>
+          <a:p>
+            <a:pPr algn="l">
+              <a:buNone/>
+            </a:pPr>
+            <a:r>
+              <a:rPr lang="en-US" sz="4800" b="1" dirty="0">
+                <a:solidFill>
+                  <a:srgbClr val="00396B"/>
+                </a:solidFill>
+              </a:rPr>
+              <a:t>Summer Intern Project Update</a:t>
+            </a:r>
+          </a:p>
+        </p:txBody>
+      </p:sp>
+      <p:sp>
+        <p:nvSpPr>
+          <p:cNvPr id="3" name="Subtitle 2">
+            <a:extLst>
+              <a:ext uri="{FF2B5EF4-FFF2-40B4-BE49-F238E27FC236}">
+                <a16:creationId xmlns:a16="http://schemas.microsoft.com/office/drawing/2014/main" id="{75B097EF-8867-71FB-23A1-8807E7D85751}"/>
+              </a:ext>
+            </a:extLst>
+          </p:cNvPr>
+          <p:cNvSpPr>
+            <a:spLocks noGrp="1"/>
+          </p:cNvSpPr>
+          <p:nvPr>
+            <p:ph type="subTitle" idx="1"/>
+          </p:nvPr>
+        </p:nvSpPr>
+        <p:spPr>
+          <a:xfrm>
+            <a:off x="914400" y="4978400"/>
+            <a:ext cx="9652000" cy="889000"/>
+          </a:xfrm>
+        </p:spPr>
+        <p:txBody>
+          <a:bodyPr anchor="ctr">
+            <a:normAutofit/>
+          </a:bodyPr>
+          <a:lstStyle/>
+          <a:p>
+            <a:pPr algn="l">
+              <a:buNone/>
+            </a:pPr>
+            <a:r>
+              <a:rPr lang="en-US" sz="2200" b="1" dirty="0">
+                <a:solidFill>
+                  <a:srgbClr val="00396B"/>
+                </a:solidFill>
+              </a:rPr>
+              <a:t>Quan Wei</a:t>
+            </a:r>
+            <a:r>
+              <a:rPr lang="en-US" sz="1800" dirty="0">
+                <a:solidFill>
+                  <a:srgbClr val="9AA7B5"/>
+                </a:solidFill>
+              </a:rPr>
+              <a:t>      |      </a:t>
+            </a:r>
+            <a:r>
+              <a:rPr lang="en-US" sz="1600" dirty="0">
+                <a:solidFill>
+                  <a:srgbClr val="6E7B8B"/>
+                </a:solidFill>
+              </a:rPr>
+              <a:t>Wee</a:t>
+            </a:r>
+            <a:r>
+              <a:rPr lang="en-US" altLang="zh-CN" sz="1600" dirty="0">
+                <a:solidFill>
+                  <a:srgbClr val="6E7B8B"/>
+                </a:solidFill>
+              </a:rPr>
+              <a:t>k</a:t>
+            </a:r>
+            <a:r>
+              <a:rPr lang="zh-CN" altLang="en-US" sz="1600" dirty="0">
+                <a:solidFill>
+                  <a:srgbClr val="6E7B8B"/>
+                </a:solidFill>
+              </a:rPr>
+              <a:t> </a:t>
+            </a:r>
+            <a:r>
+              <a:rPr lang="en-US" altLang="zh-CN" sz="1600" dirty="0">
+                <a:solidFill>
+                  <a:srgbClr val="6E7B8B"/>
+                </a:solidFill>
+              </a:rPr>
+              <a:t>2</a:t>
+            </a:r>
+            <a:endParaRPr lang="en-US" sz="1600" dirty="0">
+              <a:solidFill>
+                <a:srgbClr val="6E7B8B"/>
+              </a:solidFill>
+            </a:endParaRPr>
+          </a:p>
+        </p:txBody>
+      </p:sp>
+      <p:sp>
+        <p:nvSpPr>
+          <p:cNvPr id="4" name="Slide Number Placeholder 3">
+            <a:extLst>
+              <a:ext uri="{FF2B5EF4-FFF2-40B4-BE49-F238E27FC236}">
+                <a16:creationId xmlns:a16="http://schemas.microsoft.com/office/drawing/2014/main" id="{8C5DA901-52A8-D8B7-08DB-4AE227CC4736}"/>
+              </a:ext>
+            </a:extLst>
+          </p:cNvPr>
+          <p:cNvSpPr>
+            <a:spLocks noGrp="1"/>
+          </p:cNvSpPr>
+          <p:nvPr>
+            <p:ph type="sldNum" sz="quarter" idx="12"/>
+          </p:nvPr>
+        </p:nvSpPr>
+        <p:spPr>
+          <a:xfrm>
+            <a:off x="10210800" y="6451600"/>
+            <a:ext cx="1524000" cy="304800"/>
+          </a:xfrm>
+        </p:spPr>
+        <p:txBody>
+          <a:bodyPr anchor="ctr" anchorCtr="0"/>
+          <a:lstStyle/>
+          <a:p>
+            <a:fld id="{FC0A7A6B-4B1F-5446-A3A1-99DEB5EA7F81}" type="slidenum">
+              <a:rPr lang="en-CN" smtClean="0">
+                <a:solidFill>
+                  <a:srgbClr val="9AA7B5"/>
+                </a:solidFill>
+              </a:rPr>
+              <a:t>7</a:t>
+            </a:fld>
+            <a:endParaRPr lang="en-CN">
+              <a:solidFill>
+                <a:srgbClr val="9AA7B5"/>
+              </a:solidFill>
+            </a:endParaRPr>
+          </a:p>
+        </p:txBody>
+      </p:sp>
+      <p:sp>
+        <p:nvSpPr>
+          <p:cNvPr id="61" name="Band Label">
+            <a:extLst>
+              <a:ext uri="{FF2B5EF4-FFF2-40B4-BE49-F238E27FC236}">
+                <a16:creationId xmlns:a16="http://schemas.microsoft.com/office/drawing/2014/main" id="{A5139BD3-DD71-C962-7FDD-3D57D020F030}"/>
+              </a:ext>
+            </a:extLst>
+          </p:cNvPr>
+          <p:cNvSpPr/>
+          <p:nvPr/>
+        </p:nvSpPr>
+        <p:spPr>
+          <a:xfrm>
+            <a:off x="914400" y="2133600"/>
+            <a:ext cx="6350000" cy="355600"/>
+          </a:xfrm>
+          <a:prstGeom prst="rect">
+            <a:avLst/>
+          </a:prstGeom>
+          <a:noFill/>
+          <a:ln>
+            <a:noFill/>
+          </a:ln>
+        </p:spPr>
+        <p:txBody>
+          <a:bodyPr wrap="square" lIns="0" tIns="0" rIns="0" bIns="0">
+            <a:normAutofit/>
+          </a:bodyPr>
+          <a:lstStyle/>
+          <a:p>
+            <a:pPr algn="l">
+              <a:buNone/>
+            </a:pPr>
+            <a:r>
+              <a:rPr lang="en-US" sz="1400" b="1" spc="300" dirty="0">
+                <a:solidFill>
+                  <a:srgbClr val="0073CF"/>
+                </a:solidFill>
+              </a:rPr>
+              <a:t>RESEARCH INTERNSHIP</a:t>
+            </a:r>
+          </a:p>
+        </p:txBody>
+      </p:sp>
+      <p:pic>
+        <p:nvPicPr>
+          <p:cNvPr id="5" name="Picture 4">
+            <a:extLst>
+              <a:ext uri="{FF2B5EF4-FFF2-40B4-BE49-F238E27FC236}">
+                <a16:creationId xmlns:a16="http://schemas.microsoft.com/office/drawing/2014/main" id="{61B97C0E-5BDB-6337-4FFF-C26DA51CC91C}"/>
+              </a:ext>
+            </a:extLst>
+          </p:cNvPr>
+          <p:cNvPicPr>
+            <a:picLocks noChangeAspect="1"/>
+          </p:cNvPicPr>
+          <p:nvPr/>
+        </p:nvPicPr>
+        <p:blipFill>
+          <a:blip r:embed="rId2"/>
+          <a:stretch>
+            <a:fillRect/>
+          </a:stretch>
+        </p:blipFill>
+        <p:spPr>
+          <a:xfrm>
+            <a:off x="914400" y="711200"/>
+            <a:ext cx="1219200" cy="1219200"/>
+          </a:xfrm>
+          <a:prstGeom prst="rect">
+            <a:avLst/>
+          </a:prstGeom>
+        </p:spPr>
+      </p:pic>
+    </p:spTree>
+    <p:extLst>
+      <p:ext uri="{BB962C8B-B14F-4D97-AF65-F5344CB8AC3E}">
+        <p14:creationId xmlns:p14="http://schemas.microsoft.com/office/powerpoint/2010/main" val="1175682247"/>
+      </p:ext>
+    </p:extLst>
+  </p:cSld>
+  <p:clrMapOvr>
+    <a:masterClrMapping/>
+  </p:clrMapOvr>
+</p:sld>
+</file>
+
+<file path=ppt/slides/slide8.xml><?xml version="1.0" encoding="utf-8"?>
 <p:sld xmlns:a="http://schemas.openxmlformats.org/drawingml/2006/main" xmlns:r="http://schemas.openxmlformats.org/officeDocument/2006/relationships" xmlns:p="http://schemas.openxmlformats.org/presentationml/2006/main">
   <p:cSld>
     <p:spTree>
@@ -6245,11 +9871,14 @@
           <a:bodyPr anchor="t" anchorCtr="0"/>
           <a:lstStyle/>
           <a:p>
-            <a:endParaRPr lang="en-US" sz="3200" b="1" dirty="0">
-              <a:solidFill>
-                <a:srgbClr val="00396B"/>
-              </a:solidFill>
-            </a:endParaRPr>
+            <a:r>
+              <a:rPr lang="en-US" sz="3200" b="1" dirty="0">
+                <a:solidFill>
+                  <a:srgbClr val="00396B"/>
+                </a:solidFill>
+              </a:rPr>
+              <a:t>OrchestrateAnything: Project Overview</a:t>
+            </a:r>
           </a:p>
         </p:txBody>
       </p:sp>
@@ -6271,30 +9900,192 @@
         </p:nvSpPr>
         <p:spPr>
           <a:xfrm>
-            <a:off x="838200" y="2540000"/>
-            <a:ext cx="10515600" cy="3657600"/>
-          </a:xfrm>
-        </p:spPr>
-        <p:txBody>
-          <a:bodyPr>
+            <a:off x="838200" y="2387600"/>
+            <a:ext cx="10515600" cy="3810000"/>
+          </a:xfrm>
+        </p:spPr>
+        <p:txBody>
+          <a:bodyPr anchor="ctr" anchorCtr="0">
             <a:normAutofit/>
           </a:bodyPr>
           <a:lstStyle/>
           <a:p>
             <a:pPr marL="0" indent="0" algn="l">
+              <a:spcAft>
+                <a:spcPts val="500"/>
+              </a:spcAft>
+              <a:buNone/>
+            </a:pPr>
+            <a:r>
+              <a:rPr lang="en-US" sz="1600" i="1" dirty="0">
+                <a:solidFill>
+                  <a:srgbClr val="6E7B8B"/>
+                </a:solidFill>
+              </a:rPr>
+              <a:t>Goal: unified orchestration of tasks, models, and resources across heterogeneous multi-agent systems.</a:t>
+            </a:r>
+          </a:p>
+          <a:p>
+            <a:pPr marL="0" indent="0" algn="l">
+              <a:spcBef>
+                <a:spcPts val="600"/>
+              </a:spcBef>
+              <a:spcAft>
+                <a:spcPts val="250"/>
+              </a:spcAft>
+              <a:buNone/>
+            </a:pPr>
+            <a:r>
+              <a:rPr lang="en-US" sz="1800" b="1" dirty="0">
+                <a:solidFill>
+                  <a:srgbClr val="0073CF"/>
+                </a:solidFill>
+              </a:rPr>
+              <a:t>RQ1</a:t>
+            </a:r>
+            <a:r>
+              <a:rPr lang="en-US" sz="1800" b="1" dirty="0">
+                <a:solidFill>
+                  <a:srgbClr val="00396B"/>
+                </a:solidFill>
+              </a:rPr>
+              <a:t>  — Build a hierarchical MAS</a:t>
+            </a:r>
+          </a:p>
+          <a:p>
+            <a:pPr marL="285750" indent="-285750" algn="l">
+              <a:lnSpc>
+                <a:spcPct val="106000"/>
+              </a:lnSpc>
               <a:spcBef>
                 <a:spcPts val="100"/>
               </a:spcBef>
               <a:spcAft>
                 <a:spcPts val="150"/>
               </a:spcAft>
+              <a:buFont typeface="Arial"/>
+              <a:buChar char="•"/>
+            </a:pPr>
+            <a:r>
+              <a:rPr lang="en-US" sz="1600" dirty="0">
+                <a:solidFill>
+                  <a:srgbClr val="3A3A3C"/>
+                </a:solidFill>
+              </a:rPr>
+              <a:t>How can a hierarchical multi-agent system reliably complete complex tasks?</a:t>
+            </a:r>
+          </a:p>
+          <a:p>
+            <a:pPr marL="285750" indent="-285750" algn="l">
+              <a:lnSpc>
+                <a:spcPct val="106000"/>
+              </a:lnSpc>
+              <a:spcBef>
+                <a:spcPts val="100"/>
+              </a:spcBef>
+              <a:spcAft>
+                <a:spcPts val="150"/>
+              </a:spcAft>
+              <a:buFont typeface="Arial"/>
+              <a:buChar char="•"/>
+            </a:pPr>
+            <a:r>
+              <a:rPr lang="en-US" sz="1600" b="1" dirty="0">
+                <a:solidFill>
+                  <a:srgbClr val="00396B"/>
+                </a:solidFill>
+              </a:rPr>
+              <a:t>Approach: </a:t>
+            </a:r>
+            <a:r>
+              <a:rPr lang="en-US" sz="1600" dirty="0">
+                <a:solidFill>
+                  <a:srgbClr val="3A3A3C"/>
+                </a:solidFill>
+              </a:rPr>
+              <a:t>pair a centralized orchestrator with decentralized, autonomous subagents.</a:t>
+            </a:r>
+          </a:p>
+          <a:p>
+            <a:pPr marL="0" indent="0" algn="l">
+              <a:spcBef>
+                <a:spcPts val="600"/>
+              </a:spcBef>
+              <a:spcAft>
+                <a:spcPts val="250"/>
+              </a:spcAft>
               <a:buNone/>
             </a:pPr>
-            <a:endParaRPr lang="en-US" sz="1500" dirty="0">
-              <a:solidFill>
-                <a:srgbClr val="0073CF"/>
-              </a:solidFill>
-            </a:endParaRPr>
+            <a:r>
+              <a:rPr lang="en-US" sz="1800" b="1" dirty="0">
+                <a:solidFill>
+                  <a:srgbClr val="0073CF"/>
+                </a:solidFill>
+              </a:rPr>
+              <a:t>RQ2</a:t>
+            </a:r>
+            <a:r>
+              <a:rPr lang="en-US" sz="1800" b="1" dirty="0">
+                <a:solidFill>
+                  <a:srgbClr val="00396B"/>
+                </a:solidFill>
+              </a:rPr>
+              <a:t>  — Orchestrate it efficiently</a:t>
+            </a:r>
+          </a:p>
+          <a:p>
+            <a:pPr marL="285750" indent="-285750" algn="l">
+              <a:lnSpc>
+                <a:spcPct val="106000"/>
+              </a:lnSpc>
+              <a:spcBef>
+                <a:spcPts val="100"/>
+              </a:spcBef>
+              <a:spcAft>
+                <a:spcPts val="150"/>
+              </a:spcAft>
+              <a:buFont typeface="Arial"/>
+              <a:buChar char="•"/>
+            </a:pPr>
+            <a:r>
+              <a:rPr lang="en-US" sz="1600" dirty="0">
+                <a:solidFill>
+                  <a:srgbClr val="3A3A3C"/>
+                </a:solidFill>
+              </a:rPr>
+              <a:t>Given a mixed pool of closed- and open-source models, how to stay efficient without losing accuracy?</a:t>
+            </a:r>
+          </a:p>
+          <a:p>
+            <a:pPr marL="285750" indent="-285750" algn="l">
+              <a:lnSpc>
+                <a:spcPct val="106000"/>
+              </a:lnSpc>
+              <a:spcBef>
+                <a:spcPts val="100"/>
+              </a:spcBef>
+              <a:spcAft>
+                <a:spcPts val="150"/>
+              </a:spcAft>
+              <a:buFont typeface="Arial"/>
+              <a:buChar char="•"/>
+            </a:pPr>
+            <a:r>
+              <a:rPr lang="en-US" sz="1600" b="1" dirty="0">
+                <a:solidFill>
+                  <a:srgbClr val="00396B"/>
+                </a:solidFill>
+              </a:rPr>
+              <a:t>Approach: </a:t>
+            </a:r>
+            <a:r>
+              <a:rPr lang="en-US" sz="1600" dirty="0">
+                <a:solidFill>
+                  <a:srgbClr val="3A3A3C"/>
+                </a:solidFill>
+              </a:rPr>
+              <a:t>jointly optimize accuracy against model, token, communication, API, and latency cost.</a:t>
+            </a:r>
           </a:p>
         </p:txBody>
       </p:sp>
@@ -6330,7 +10121,7 @@
                   <a:srgbClr val="9AA7B5"/>
                 </a:solidFill>
               </a:rPr>
-              <a:t>5</a:t>
+              <a:t>8</a:t>
             </a:fld>
             <a:endParaRPr lang="en-CN">
               <a:solidFill>
@@ -6477,7 +10268,7 @@
                   <a:srgbClr val="FFFFFF"/>
                 </a:solidFill>
               </a:rPr>
-              <a:t>WEEK 1</a:t>
+              <a:t>WEEK 2</a:t>
             </a:r>
           </a:p>
         </p:txBody>
@@ -6485,7 +10276,623 @@
     </p:spTree>
     <p:extLst>
       <p:ext uri="{BB962C8B-B14F-4D97-AF65-F5344CB8AC3E}">
-        <p14:creationId xmlns:p14="http://schemas.microsoft.com/office/powerpoint/2010/main" val="3498725614"/>
+        <p14:creationId xmlns:p14="http://schemas.microsoft.com/office/powerpoint/2010/main" val="2708186"/>
+      </p:ext>
+    </p:extLst>
+  </p:cSld>
+  <p:clrMapOvr>
+    <a:masterClrMapping/>
+  </p:clrMapOvr>
+</p:sld>
+</file>
+
+<file path=ppt/slides/slide9.xml><?xml version="1.0" encoding="utf-8"?>
+<p:sld xmlns:a="http://schemas.openxmlformats.org/drawingml/2006/main" xmlns:r="http://schemas.openxmlformats.org/officeDocument/2006/relationships" xmlns:p="http://schemas.openxmlformats.org/presentationml/2006/main">
+  <p:cSld>
+    <p:spTree>
+      <p:nvGrpSpPr>
+        <p:cNvPr id="1" name="">
+          <a:extLst>
+            <a:ext uri="{FF2B5EF4-FFF2-40B4-BE49-F238E27FC236}">
+              <a16:creationId xmlns:a16="http://schemas.microsoft.com/office/drawing/2014/main" id="{01D4A40B-372B-714E-76A8-A59DC9DE9FEF}"/>
+            </a:ext>
+          </a:extLst>
+        </p:cNvPr>
+        <p:cNvGrpSpPr/>
+        <p:nvPr/>
+      </p:nvGrpSpPr>
+      <p:grpSpPr>
+        <a:xfrm>
+          <a:off x="0" y="0"/>
+          <a:ext cx="0" cy="0"/>
+          <a:chOff x="0" y="0"/>
+          <a:chExt cx="0" cy="0"/>
+        </a:xfrm>
+      </p:grpSpPr>
+      <p:sp>
+        <p:nvSpPr>
+          <p:cNvPr id="5" name="Footer Bar">
+            <a:extLst>
+              <a:ext uri="{FF2B5EF4-FFF2-40B4-BE49-F238E27FC236}">
+                <a16:creationId xmlns:a16="http://schemas.microsoft.com/office/drawing/2014/main" id="{B99E0EC1-3528-97A3-8350-1CE2B1C99FE0}"/>
+              </a:ext>
+            </a:extLst>
+          </p:cNvPr>
+          <p:cNvSpPr/>
+          <p:nvPr/>
+        </p:nvSpPr>
+        <p:spPr>
+          <a:xfrm>
+            <a:off x="0" y="6350000"/>
+            <a:ext cx="12192000" cy="508000"/>
+          </a:xfrm>
+          <a:prstGeom prst="rect">
+            <a:avLst/>
+          </a:prstGeom>
+          <a:solidFill>
+            <a:srgbClr val="00396B"/>
+          </a:solidFill>
+          <a:ln w="12700" cap="flat" cmpd="sng" algn="ctr">
+            <a:noFill/>
+            <a:prstDash val="solid"/>
+            <a:miter lim="800000"/>
+          </a:ln>
+        </p:spPr>
+        <p:style>
+          <a:lnRef idx="2">
+            <a:schemeClr val="accent1">
+              <a:shade val="15000"/>
+            </a:schemeClr>
+          </a:lnRef>
+          <a:fillRef idx="1">
+            <a:schemeClr val="accent1"/>
+          </a:fillRef>
+          <a:effectRef idx="0">
+            <a:schemeClr val="accent1"/>
+          </a:effectRef>
+          <a:fontRef idx="minor">
+            <a:schemeClr val="lt1"/>
+          </a:fontRef>
+        </p:style>
+        <p:txBody>
+          <a:bodyPr vertOverflow="clip" horzOverflow="clip" rtlCol="0" anchor="t"/>
+          <a:lstStyle/>
+          <a:p>
+            <a:pPr algn="l"/>
+            <a:endParaRPr lang="en-CN"/>
+          </a:p>
+        </p:txBody>
+      </p:sp>
+      <p:sp>
+        <p:nvSpPr>
+          <p:cNvPr id="2" name="Title 1">
+            <a:extLst>
+              <a:ext uri="{FF2B5EF4-FFF2-40B4-BE49-F238E27FC236}">
+                <a16:creationId xmlns:a16="http://schemas.microsoft.com/office/drawing/2014/main" id="{5F1D89D9-A0C0-0666-246D-AF168E24D741}"/>
+              </a:ext>
+            </a:extLst>
+          </p:cNvPr>
+          <p:cNvSpPr>
+            <a:spLocks noGrp="1"/>
+          </p:cNvSpPr>
+          <p:nvPr>
+            <p:ph type="title"/>
+          </p:nvPr>
+        </p:nvSpPr>
+        <p:spPr>
+          <a:xfrm>
+            <a:off x="838200" y="1397000"/>
+            <a:ext cx="10515600" cy="711200"/>
+          </a:xfrm>
+        </p:spPr>
+        <p:txBody>
+          <a:bodyPr anchor="t" anchorCtr="0"/>
+          <a:lstStyle/>
+          <a:p>
+            <a:r>
+              <a:rPr lang="en-US" sz="3200" b="1" dirty="0">
+                <a:solidFill>
+                  <a:srgbClr val="00396B"/>
+                </a:solidFill>
+              </a:rPr>
+              <a:t>Hierarchical MAS Architecture</a:t>
+            </a:r>
+          </a:p>
+        </p:txBody>
+      </p:sp>
+      <p:sp>
+        <p:nvSpPr>
+          <p:cNvPr id="3" name="Content Placeholder 2">
+            <a:extLst>
+              <a:ext uri="{FF2B5EF4-FFF2-40B4-BE49-F238E27FC236}">
+                <a16:creationId xmlns:a16="http://schemas.microsoft.com/office/drawing/2014/main" id="{12369365-C0F5-36EC-5425-548E9C108197}"/>
+              </a:ext>
+            </a:extLst>
+          </p:cNvPr>
+          <p:cNvSpPr>
+            <a:spLocks noGrp="1"/>
+          </p:cNvSpPr>
+          <p:nvPr>
+            <p:ph idx="1"/>
+          </p:nvPr>
+        </p:nvSpPr>
+        <p:spPr>
+          <a:xfrm>
+            <a:off x="838200" y="2387600"/>
+            <a:ext cx="10515600" cy="3810000"/>
+          </a:xfrm>
+        </p:spPr>
+        <p:txBody>
+          <a:bodyPr anchor="t" anchorCtr="0">
+            <a:normAutofit/>
+          </a:bodyPr>
+          <a:lstStyle/>
+          <a:p>
+            <a:pPr marL="0" indent="0" algn="l">
+              <a:lnSpc>
+                <a:spcPct val="100000"/>
+              </a:lnSpc>
+              <a:spcBef>
+                <a:spcPts val="150"/>
+              </a:spcBef>
+              <a:spcAft>
+                <a:spcPts val="200"/>
+              </a:spcAft>
+              <a:buNone/>
+            </a:pPr>
+            <a:r>
+              <a:rPr lang="en-US" sz="1600" b="1" dirty="0">
+                <a:solidFill>
+                  <a:srgbClr val="00396B"/>
+                </a:solidFill>
+              </a:rPr>
+              <a:t>Agent = Model + Harness</a:t>
+            </a:r>
+            <a:r>
+              <a:rPr lang="en-US" sz="1600" dirty="0">
+                <a:solidFill>
+                  <a:srgbClr val="3A3A3C"/>
+                </a:solidFill>
+              </a:rPr>
+              <a:t>   —   model reasons; harness handles prompts, tool routing, memory, and execution.</a:t>
+            </a:r>
+          </a:p>
+          <a:p>
+            <a:pPr marL="0" indent="0" algn="l">
+              <a:lnSpc>
+                <a:spcPct val="100000"/>
+              </a:lnSpc>
+              <a:spcBef>
+                <a:spcPts val="150"/>
+              </a:spcBef>
+              <a:spcAft>
+                <a:spcPts val="200"/>
+              </a:spcAft>
+              <a:buNone/>
+            </a:pPr>
+            <a:r>
+              <a:rPr lang="en-US" sz="1600" b="1" dirty="0">
+                <a:solidFill>
+                  <a:srgbClr val="00396B"/>
+                </a:solidFill>
+              </a:rPr>
+              <a:t>Agent Context = Profile + Memory + Communication + Tools</a:t>
+            </a:r>
+          </a:p>
+          <a:p>
+            <a:pPr marL="0" indent="0" algn="l">
+              <a:spcBef>
+                <a:spcPts val="600"/>
+              </a:spcBef>
+              <a:spcAft>
+                <a:spcPts val="250"/>
+              </a:spcAft>
+              <a:buNone/>
+            </a:pPr>
+            <a:r>
+              <a:rPr lang="en-US" sz="1800" b="1" dirty="0">
+                <a:solidFill>
+                  <a:srgbClr val="0073CF"/>
+                </a:solidFill>
+              </a:rPr>
+              <a:t>Two-layer control</a:t>
+            </a:r>
+          </a:p>
+          <a:p>
+            <a:pPr marL="285750" indent="-285750" algn="l">
+              <a:lnSpc>
+                <a:spcPct val="104000"/>
+              </a:lnSpc>
+              <a:spcBef>
+                <a:spcPts val="80"/>
+              </a:spcBef>
+              <a:spcAft>
+                <a:spcPts val="120"/>
+              </a:spcAft>
+              <a:buFont typeface="Arial"/>
+              <a:buChar char="•"/>
+            </a:pPr>
+            <a:r>
+              <a:rPr lang="en-US" sz="1600" b="1" dirty="0">
+                <a:solidFill>
+                  <a:srgbClr val="00396B"/>
+                </a:solidFill>
+              </a:rPr>
+              <a:t>Centralized — </a:t>
+            </a:r>
+            <a:r>
+              <a:rPr lang="en-US" sz="1600" dirty="0">
+                <a:solidFill>
+                  <a:srgbClr val="3A3A3C"/>
+                </a:solidFill>
+              </a:rPr>
+              <a:t>orchestrator holds the global view and drives high-level decisions.</a:t>
+            </a:r>
+          </a:p>
+          <a:p>
+            <a:pPr marL="285750" indent="-285750" algn="l">
+              <a:lnSpc>
+                <a:spcPct val="104000"/>
+              </a:lnSpc>
+              <a:spcBef>
+                <a:spcPts val="80"/>
+              </a:spcBef>
+              <a:spcAft>
+                <a:spcPts val="120"/>
+              </a:spcAft>
+              <a:buFont typeface="Arial"/>
+              <a:buChar char="•"/>
+            </a:pPr>
+            <a:r>
+              <a:rPr lang="en-US" sz="1600" b="1" dirty="0">
+                <a:solidFill>
+                  <a:srgbClr val="00396B"/>
+                </a:solidFill>
+              </a:rPr>
+              <a:t>Decentralized — </a:t>
+            </a:r>
+            <a:r>
+              <a:rPr lang="en-US" sz="1600" dirty="0">
+                <a:solidFill>
+                  <a:srgbClr val="3A3A3C"/>
+                </a:solidFill>
+              </a:rPr>
+              <a:t>subagents execute locally and autonomously, without central intervention.</a:t>
+            </a:r>
+          </a:p>
+          <a:p>
+            <a:pPr marL="0" indent="0" algn="l">
+              <a:spcBef>
+                <a:spcPts val="700"/>
+              </a:spcBef>
+              <a:spcAft>
+                <a:spcPts val="250"/>
+              </a:spcAft>
+              <a:buNone/>
+            </a:pPr>
+            <a:r>
+              <a:rPr lang="en-US" sz="1800" b="1" dirty="0">
+                <a:solidFill>
+                  <a:srgbClr val="0073CF"/>
+                </a:solidFill>
+              </a:rPr>
+              <a:t>Subagent roles</a:t>
+            </a:r>
+          </a:p>
+          <a:p>
+            <a:pPr marL="285750" indent="-285750" algn="l">
+              <a:lnSpc>
+                <a:spcPct val="104000"/>
+              </a:lnSpc>
+              <a:spcBef>
+                <a:spcPts val="80"/>
+              </a:spcBef>
+              <a:spcAft>
+                <a:spcPts val="120"/>
+              </a:spcAft>
+              <a:buFont typeface="Arial"/>
+              <a:buChar char="•"/>
+            </a:pPr>
+            <a:r>
+              <a:rPr lang="en-US" sz="1600" b="1" dirty="0">
+                <a:solidFill>
+                  <a:srgbClr val="00396B"/>
+                </a:solidFill>
+              </a:rPr>
+              <a:t>Executor — </a:t>
+            </a:r>
+            <a:r>
+              <a:rPr lang="en-US" sz="1600" dirty="0">
+                <a:solidFill>
+                  <a:srgbClr val="3A3A3C"/>
+                </a:solidFill>
+              </a:rPr>
+              <a:t>carries out assigned subtasks.</a:t>
+            </a:r>
+          </a:p>
+          <a:p>
+            <a:pPr marL="285750" indent="-285750" algn="l">
+              <a:lnSpc>
+                <a:spcPct val="104000"/>
+              </a:lnSpc>
+              <a:spcBef>
+                <a:spcPts val="80"/>
+              </a:spcBef>
+              <a:spcAft>
+                <a:spcPts val="120"/>
+              </a:spcAft>
+              <a:buFont typeface="Arial"/>
+              <a:buChar char="•"/>
+            </a:pPr>
+            <a:r>
+              <a:rPr lang="en-US" sz="1600" b="1" dirty="0">
+                <a:solidFill>
+                  <a:srgbClr val="00396B"/>
+                </a:solidFill>
+              </a:rPr>
+              <a:t>Verifier — </a:t>
+            </a:r>
+            <a:r>
+              <a:rPr lang="en-US" sz="1600" dirty="0">
+                <a:solidFill>
+                  <a:srgbClr val="3A3A3C"/>
+                </a:solidFill>
+              </a:rPr>
+              <a:t>validates outputs for correctness.</a:t>
+            </a:r>
+          </a:p>
+          <a:p>
+            <a:pPr marL="285750" indent="-285750" algn="l">
+              <a:lnSpc>
+                <a:spcPct val="104000"/>
+              </a:lnSpc>
+              <a:spcBef>
+                <a:spcPts val="80"/>
+              </a:spcBef>
+              <a:spcAft>
+                <a:spcPts val="120"/>
+              </a:spcAft>
+              <a:buFont typeface="Arial"/>
+              <a:buChar char="•"/>
+            </a:pPr>
+            <a:r>
+              <a:rPr lang="en-US" sz="1600" b="1" dirty="0">
+                <a:solidFill>
+                  <a:srgbClr val="00396B"/>
+                </a:solidFill>
+              </a:rPr>
+              <a:t>Responder — </a:t>
+            </a:r>
+            <a:r>
+              <a:rPr lang="en-US" sz="1600" dirty="0">
+                <a:solidFill>
+                  <a:srgbClr val="3A3A3C"/>
+                </a:solidFill>
+              </a:rPr>
+              <a:t>synthesizes and delivers the final response.</a:t>
+            </a:r>
+          </a:p>
+          <a:p>
+            <a:pPr marL="285750" indent="-285750" algn="l">
+              <a:lnSpc>
+                <a:spcPct val="104000"/>
+              </a:lnSpc>
+              <a:spcBef>
+                <a:spcPts val="80"/>
+              </a:spcBef>
+              <a:spcAft>
+                <a:spcPts val="120"/>
+              </a:spcAft>
+              <a:buFont typeface="Arial"/>
+              <a:buChar char="•"/>
+            </a:pPr>
+            <a:r>
+              <a:rPr lang="en-US" sz="1600" b="1" dirty="0">
+                <a:solidFill>
+                  <a:srgbClr val="00396B"/>
+                </a:solidFill>
+              </a:rPr>
+              <a:t>Memory Manager — </a:t>
+            </a:r>
+            <a:r>
+              <a:rPr lang="en-US" sz="1600" dirty="0">
+                <a:solidFill>
+                  <a:srgbClr val="3A3A3C"/>
+                </a:solidFill>
+              </a:rPr>
+              <a:t>maintains persistent and working memory.</a:t>
+            </a:r>
+          </a:p>
+        </p:txBody>
+      </p:sp>
+      <p:sp>
+        <p:nvSpPr>
+          <p:cNvPr id="4" name="Slide Number Placeholder 3">
+            <a:extLst>
+              <a:ext uri="{FF2B5EF4-FFF2-40B4-BE49-F238E27FC236}">
+                <a16:creationId xmlns:a16="http://schemas.microsoft.com/office/drawing/2014/main" id="{BEC4D31A-3DB6-0A13-A758-D19C66D2910B}"/>
+              </a:ext>
+            </a:extLst>
+          </p:cNvPr>
+          <p:cNvSpPr>
+            <a:spLocks noGrp="1"/>
+          </p:cNvSpPr>
+          <p:nvPr>
+            <p:ph type="sldNum" sz="quarter" idx="12"/>
+          </p:nvPr>
+        </p:nvSpPr>
+        <p:spPr>
+          <a:xfrm>
+            <a:off x="10210800" y="6451600"/>
+            <a:ext cx="1524000" cy="304800"/>
+          </a:xfrm>
+        </p:spPr>
+        <p:txBody>
+          <a:bodyPr anchor="ctr" anchorCtr="0"/>
+          <a:lstStyle/>
+          <a:p>
+            <a:fld id="{FC0A7A6B-4B1F-5446-A3A1-99DEB5EA7F81}" type="slidenum">
+              <a:rPr lang="en-CN" smtClean="0">
+                <a:solidFill>
+                  <a:srgbClr val="9AA7B5"/>
+                </a:solidFill>
+              </a:rPr>
+              <a:t>9</a:t>
+            </a:fld>
+            <a:endParaRPr lang="en-CN">
+              <a:solidFill>
+                <a:srgbClr val="9AA7B5"/>
+              </a:solidFill>
+            </a:endParaRPr>
+          </a:p>
+        </p:txBody>
+      </p:sp>
+      <p:sp>
+        <p:nvSpPr>
+          <p:cNvPr id="6" name="Accent Rule">
+            <a:extLst>
+              <a:ext uri="{FF2B5EF4-FFF2-40B4-BE49-F238E27FC236}">
+                <a16:creationId xmlns:a16="http://schemas.microsoft.com/office/drawing/2014/main" id="{822F9242-BFFF-3D7B-B19C-4254BFC9269E}"/>
+              </a:ext>
+            </a:extLst>
+          </p:cNvPr>
+          <p:cNvSpPr/>
+          <p:nvPr/>
+        </p:nvSpPr>
+        <p:spPr>
+          <a:xfrm>
+            <a:off x="838200" y="2209800"/>
+            <a:ext cx="1524000" cy="76200"/>
+          </a:xfrm>
+          <a:prstGeom prst="rect">
+            <a:avLst/>
+          </a:prstGeom>
+          <a:solidFill>
+            <a:srgbClr val="0073CF"/>
+          </a:solidFill>
+          <a:ln w="12700" cap="flat" cmpd="sng" algn="ctr">
+            <a:noFill/>
+            <a:prstDash val="solid"/>
+            <a:miter lim="800000"/>
+          </a:ln>
+        </p:spPr>
+        <p:style>
+          <a:lnRef idx="2">
+            <a:schemeClr val="accent1">
+              <a:shade val="15000"/>
+            </a:schemeClr>
+          </a:lnRef>
+          <a:fillRef idx="1">
+            <a:schemeClr val="accent1"/>
+          </a:fillRef>
+          <a:effectRef idx="0">
+            <a:schemeClr val="accent1"/>
+          </a:effectRef>
+          <a:fontRef idx="minor">
+            <a:schemeClr val="lt1"/>
+          </a:fontRef>
+        </p:style>
+        <p:txBody>
+          <a:bodyPr vertOverflow="clip" horzOverflow="clip" rtlCol="0" anchor="t"/>
+          <a:lstStyle/>
+          <a:p>
+            <a:pPr algn="l"/>
+            <a:endParaRPr lang="en-CN"/>
+          </a:p>
+        </p:txBody>
+      </p:sp>
+      <p:pic>
+        <p:nvPicPr>
+          <p:cNvPr id="7" name="Copied Picture 7">
+            <a:extLst>
+              <a:ext uri="{FF2B5EF4-FFF2-40B4-BE49-F238E27FC236}">
+                <a16:creationId xmlns:a16="http://schemas.microsoft.com/office/drawing/2014/main" id="{4E15F3D7-0092-B24A-8DAA-DD6B47A29ECE}"/>
+              </a:ext>
+            </a:extLst>
+          </p:cNvPr>
+          <p:cNvPicPr>
+            <a:picLocks noChangeAspect="1"/>
+          </p:cNvPicPr>
+          <p:nvPr/>
+        </p:nvPicPr>
+        <p:blipFill>
+          <a:blip r:embed="rId2"/>
+          <a:stretch>
+            <a:fillRect/>
+          </a:stretch>
+        </p:blipFill>
+        <p:spPr>
+          <a:xfrm>
+            <a:off x="838200" y="508000"/>
+            <a:ext cx="762000" cy="762000"/>
+          </a:xfrm>
+          <a:prstGeom prst="rect">
+            <a:avLst/>
+          </a:prstGeom>
+        </p:spPr>
+      </p:pic>
+      <p:sp>
+        <p:nvSpPr>
+          <p:cNvPr id="10" name="Footer Name">
+            <a:extLst>
+              <a:ext uri="{FF2B5EF4-FFF2-40B4-BE49-F238E27FC236}">
+                <a16:creationId xmlns:a16="http://schemas.microsoft.com/office/drawing/2014/main" id="{82B5A17A-0CCB-F44B-1566-C78A9E50B8CF}"/>
+              </a:ext>
+            </a:extLst>
+          </p:cNvPr>
+          <p:cNvSpPr txBox="1"/>
+          <p:nvPr/>
+        </p:nvSpPr>
+        <p:spPr>
+          <a:xfrm>
+            <a:off x="838200" y="6350000"/>
+            <a:ext cx="5080000" cy="508000"/>
+          </a:xfrm>
+          <a:prstGeom prst="rect">
+            <a:avLst/>
+          </a:prstGeom>
+          <a:noFill/>
+        </p:spPr>
+        <p:txBody>
+          <a:bodyPr vertOverflow="overflow" vert="horz" wrap="none" rtlCol="0" anchor="ctr" anchorCtr="0">
+            <a:noAutofit/>
+          </a:bodyPr>
+          <a:lstStyle/>
+          <a:p>
+            <a:pPr algn="l">
+              <a:buNone/>
+            </a:pPr>
+            <a:r>
+              <a:rPr lang="en-US" sz="1400" b="1" spc="200" dirty="0">
+                <a:solidFill>
+                  <a:srgbClr val="FFFFFF"/>
+                </a:solidFill>
+              </a:rPr>
+              <a:t>Quan Wei</a:t>
+            </a:r>
+            <a:r>
+              <a:rPr lang="en-US" sz="1400" b="1" spc="200" dirty="0">
+                <a:solidFill>
+                  <a:srgbClr val="9AA7B5"/>
+                </a:solidFill>
+              </a:rPr>
+              <a:t>   |   </a:t>
+            </a:r>
+            <a:r>
+              <a:rPr lang="en-US" sz="1400" b="1" spc="200" dirty="0">
+                <a:solidFill>
+                  <a:srgbClr val="FFFFFF"/>
+                </a:solidFill>
+              </a:rPr>
+              <a:t>WEEK 2</a:t>
+            </a:r>
+          </a:p>
+        </p:txBody>
+      </p:sp>
+    </p:spTree>
+    <p:extLst>
+      <p:ext uri="{BB962C8B-B14F-4D97-AF65-F5344CB8AC3E}">
+        <p14:creationId xmlns:p14="http://schemas.microsoft.com/office/powerpoint/2010/main" val="552295894"/>
       </p:ext>
     </p:extLst>
   </p:cSld>

--- a/project_update.pptx
+++ b/project_update.pptx
@@ -5,22 +5,27 @@
     <p:sldMasterId id="2147483672" r:id="rId1"/>
   </p:sldMasterIdLst>
   <p:notesMasterIdLst>
-    <p:notesMasterId r:id="rId15"/>
+    <p:notesMasterId r:id="rId20"/>
   </p:notesMasterIdLst>
   <p:sldIdLst>
-    <p:sldId id="332" r:id="rId2"/>
+    <p:sldId id="389" r:id="rId2"/>
     <p:sldId id="275" r:id="rId3"/>
     <p:sldId id="353" r:id="rId4"/>
     <p:sldId id="312" r:id="rId5"/>
-    <p:sldId id="327" r:id="rId6"/>
-    <p:sldId id="334" r:id="rId7"/>
+    <p:sldId id="375" r:id="rId6"/>
+    <p:sldId id="382" r:id="rId7"/>
     <p:sldId id="354" r:id="rId8"/>
-    <p:sldId id="355" r:id="rId9"/>
-    <p:sldId id="356" r:id="rId10"/>
-    <p:sldId id="362" r:id="rId11"/>
-    <p:sldId id="361" r:id="rId12"/>
-    <p:sldId id="365" r:id="rId13"/>
-    <p:sldId id="369" r:id="rId14"/>
+    <p:sldId id="381" r:id="rId9"/>
+    <p:sldId id="383" r:id="rId10"/>
+    <p:sldId id="388" r:id="rId11"/>
+    <p:sldId id="385" r:id="rId12"/>
+    <p:sldId id="386" r:id="rId13"/>
+    <p:sldId id="387" r:id="rId14"/>
+    <p:sldId id="374" r:id="rId15"/>
+    <p:sldId id="419" r:id="rId16"/>
+    <p:sldId id="416" r:id="rId17"/>
+    <p:sldId id="417" r:id="rId18"/>
+    <p:sldId id="418" r:id="rId19"/>
   </p:sldIdLst>
   <p:sldSz cx="12192000" cy="6858000"/>
   <p:notesSz cx="6858000" cy="9144000"/>
@@ -209,7 +214,7 @@
           <a:p>
             <a:fld id="{A969A4D8-3B2C-044F-B9CE-BA9A5D441629}" type="datetimeFigureOut">
               <a:rPr lang="en-CN" smtClean="0"/>
-              <a:t>2026/6/10</a:t>
+              <a:t>2026/6/11</a:t>
             </a:fld>
             <a:endParaRPr lang="en-CN"/>
           </a:p>
@@ -626,7 +631,7 @@
           <a:p>
             <a:fld id="{95F109AB-5A71-B848-AE30-6241B4A377C3}" type="datetime1">
               <a:rPr lang="en-US" smtClean="0"/>
-              <a:t>6/10/26</a:t>
+              <a:t>6/11/26</a:t>
             </a:fld>
             <a:endParaRPr lang="en-CN"/>
           </a:p>
@@ -826,7 +831,7 @@
           <a:p>
             <a:fld id="{3988228F-5CF2-0046-9186-A5BCE16AD50F}" type="datetime1">
               <a:rPr lang="en-US" smtClean="0"/>
-              <a:t>6/10/26</a:t>
+              <a:t>6/11/26</a:t>
             </a:fld>
             <a:endParaRPr lang="en-CN"/>
           </a:p>
@@ -1036,7 +1041,7 @@
           <a:p>
             <a:fld id="{9F4B0477-26BF-834F-AE73-C91BC4DF75D4}" type="datetime1">
               <a:rPr lang="en-US" smtClean="0"/>
-              <a:t>6/10/26</a:t>
+              <a:t>6/11/26</a:t>
             </a:fld>
             <a:endParaRPr lang="en-CN"/>
           </a:p>
@@ -1236,7 +1241,7 @@
           <a:p>
             <a:fld id="{589112CF-B6AE-474E-A1D1-12258281CB95}" type="datetime1">
               <a:rPr lang="en-US" smtClean="0"/>
-              <a:t>6/10/26</a:t>
+              <a:t>6/11/26</a:t>
             </a:fld>
             <a:endParaRPr lang="en-CN"/>
           </a:p>
@@ -1512,7 +1517,7 @@
           <a:p>
             <a:fld id="{C226D9D0-4F79-BC4B-978E-030A93E4CCAE}" type="datetime1">
               <a:rPr lang="en-US" smtClean="0"/>
-              <a:t>6/10/26</a:t>
+              <a:t>6/11/26</a:t>
             </a:fld>
             <a:endParaRPr lang="en-CN"/>
           </a:p>
@@ -1780,7 +1785,7 @@
           <a:p>
             <a:fld id="{9122B4FA-D8CB-FF46-9B48-72A2520F1EB0}" type="datetime1">
               <a:rPr lang="en-US" smtClean="0"/>
-              <a:t>6/10/26</a:t>
+              <a:t>6/11/26</a:t>
             </a:fld>
             <a:endParaRPr lang="en-CN"/>
           </a:p>
@@ -2195,7 +2200,7 @@
           <a:p>
             <a:fld id="{C4DD5D45-C04D-A143-B571-20041271315A}" type="datetime1">
               <a:rPr lang="en-US" smtClean="0"/>
-              <a:t>6/10/26</a:t>
+              <a:t>6/11/26</a:t>
             </a:fld>
             <a:endParaRPr lang="en-CN"/>
           </a:p>
@@ -2337,7 +2342,7 @@
           <a:p>
             <a:fld id="{6B770501-1AEF-9240-8471-86DF1A6D9745}" type="datetime1">
               <a:rPr lang="en-US" smtClean="0"/>
-              <a:t>6/10/26</a:t>
+              <a:t>6/11/26</a:t>
             </a:fld>
             <a:endParaRPr lang="en-CN"/>
           </a:p>
@@ -2450,7 +2455,7 @@
           <a:p>
             <a:fld id="{F04344E2-A38D-ED4A-9FAE-38DACDB44195}" type="datetime1">
               <a:rPr lang="en-US" smtClean="0"/>
-              <a:t>6/10/26</a:t>
+              <a:t>6/11/26</a:t>
             </a:fld>
             <a:endParaRPr lang="en-CN"/>
           </a:p>
@@ -2763,7 +2768,7 @@
           <a:p>
             <a:fld id="{5FB8D108-18C9-8A47-BCEE-FC844F24048D}" type="datetime1">
               <a:rPr lang="en-US" smtClean="0"/>
-              <a:t>6/10/26</a:t>
+              <a:t>6/11/26</a:t>
             </a:fld>
             <a:endParaRPr lang="en-CN"/>
           </a:p>
@@ -3052,7 +3057,7 @@
           <a:p>
             <a:fld id="{564B0546-E853-EA4A-BB99-95D94DD39026}" type="datetime1">
               <a:rPr lang="en-US" smtClean="0"/>
-              <a:t>6/10/26</a:t>
+              <a:t>6/11/26</a:t>
             </a:fld>
             <a:endParaRPr lang="en-CN"/>
           </a:p>
@@ -3295,7 +3300,7 @@
           <a:p>
             <a:fld id="{DB67D221-21D5-E343-9B76-E6DA17C5106F}" type="datetime1">
               <a:rPr lang="en-US" smtClean="0"/>
-              <a:t>6/10/26</a:t>
+              <a:t>6/11/26</a:t>
             </a:fld>
             <a:endParaRPr lang="en-CN"/>
           </a:p>
@@ -3799,7 +3804,7 @@
           <a:bodyPr anchor="t" anchorCtr="0"/>
           <a:lstStyle/>
           <a:p>
-            <a:endParaRPr lang="en-US" sz="3200" b="1" dirty="0">
+            <a:endParaRPr lang="en-US" sz="4000" b="1" dirty="0">
               <a:solidFill>
                 <a:srgbClr val="00396B"/>
               </a:solidFill>
@@ -3844,7 +3849,7 @@
               </a:spcAft>
               <a:buNone/>
             </a:pPr>
-            <a:endParaRPr lang="en-US" sz="1500" dirty="0">
+            <a:endParaRPr lang="en-US" sz="2400" dirty="0">
               <a:solidFill>
                 <a:srgbClr val="0073CF"/>
               </a:solidFill>
@@ -4039,7 +4044,7 @@
     </p:spTree>
     <p:extLst>
       <p:ext uri="{BB962C8B-B14F-4D97-AF65-F5344CB8AC3E}">
-        <p14:creationId xmlns:p14="http://schemas.microsoft.com/office/powerpoint/2010/main" val="3498725614"/>
+        <p14:creationId xmlns:p14="http://schemas.microsoft.com/office/powerpoint/2010/main" val="2406343144"/>
       </p:ext>
     </p:extLst>
   </p:cSld>
@@ -4149,11 +4154,13 @@
           </a:xfrm>
         </p:spPr>
         <p:txBody>
-          <a:bodyPr anchor="t" anchorCtr="0"/>
-          <a:lstStyle/>
-          <a:p>
-            <a:r>
-              <a:rPr lang="en-US" sz="3200" b="1" dirty="0">
+          <a:bodyPr anchor="t" anchorCtr="0">
+            <a:normAutofit/>
+          </a:bodyPr>
+          <a:lstStyle/>
+          <a:p>
+            <a:r>
+              <a:rPr lang="en-US" sz="4000" b="1" dirty="0">
                 <a:solidFill>
                   <a:srgbClr val="00396B"/>
                 </a:solidFill>
@@ -4187,7 +4194,7 @@
         </p:spPr>
         <p:txBody>
           <a:bodyPr anchor="ctr" anchorCtr="0">
-            <a:normAutofit/>
+            <a:normAutofit lnSpcReduction="10000"/>
           </a:bodyPr>
           <a:lstStyle/>
           <a:p>
@@ -4198,7 +4205,7 @@
               <a:buNone/>
             </a:pPr>
             <a:r>
-              <a:rPr lang="en-US" sz="1600" i="1" dirty="0">
+              <a:rPr lang="en-US" sz="2200" i="1" dirty="0">
                 <a:solidFill>
                   <a:srgbClr val="6E7B8B"/>
                 </a:solidFill>
@@ -4217,11 +4224,14 @@
               <a:spcAft>
                 <a:spcPts val="200"/>
               </a:spcAft>
+              <a:buClr>
+                <a:srgbClr val="0073CF"/>
+              </a:buClr>
               <a:buFont typeface="Arial"/>
               <a:buChar char="•"/>
             </a:pPr>
             <a:r>
-              <a:rPr lang="en-US" sz="1600" b="1" dirty="0">
+              <a:rPr lang="en-US" sz="2200" b="1" dirty="0">
                 <a:solidFill>
                   <a:srgbClr val="00396B"/>
                 </a:solidFill>
@@ -4229,7 +4239,7 @@
               <a:t>Task orchestration — </a:t>
             </a:r>
             <a:r>
-              <a:rPr lang="en-US" sz="1600" dirty="0">
+              <a:rPr lang="en-US" sz="2200" dirty="0">
                 <a:solidFill>
                   <a:srgbClr val="3A3A3C"/>
                 </a:solidFill>
@@ -4248,11 +4258,14 @@
               <a:spcAft>
                 <a:spcPts val="200"/>
               </a:spcAft>
+              <a:buClr>
+                <a:srgbClr val="0073CF"/>
+              </a:buClr>
               <a:buFont typeface="Arial"/>
               <a:buChar char="•"/>
             </a:pPr>
             <a:r>
-              <a:rPr lang="en-US" sz="1600" b="1" dirty="0">
+              <a:rPr lang="en-US" sz="2200" b="1" dirty="0">
                 <a:solidFill>
                   <a:srgbClr val="00396B"/>
                 </a:solidFill>
@@ -4260,7 +4273,7 @@
               <a:t>Model orchestration — </a:t>
             </a:r>
             <a:r>
-              <a:rPr lang="en-US" sz="1600" dirty="0">
+              <a:rPr lang="en-US" sz="2200" dirty="0">
                 <a:solidFill>
                   <a:srgbClr val="3A3A3C"/>
                 </a:solidFill>
@@ -4279,11 +4292,14 @@
               <a:spcAft>
                 <a:spcPts val="200"/>
               </a:spcAft>
+              <a:buClr>
+                <a:srgbClr val="0073CF"/>
+              </a:buClr>
               <a:buFont typeface="Arial"/>
               <a:buChar char="•"/>
             </a:pPr>
             <a:r>
-              <a:rPr lang="en-US" sz="1600" b="1" dirty="0">
+              <a:rPr lang="en-US" sz="2200" b="1" dirty="0">
                 <a:solidFill>
                   <a:srgbClr val="00396B"/>
                 </a:solidFill>
@@ -4291,7 +4307,7 @@
               <a:t>Resource orchestration — </a:t>
             </a:r>
             <a:r>
-              <a:rPr lang="en-US" sz="1600" dirty="0">
+              <a:rPr lang="en-US" sz="2200" dirty="0">
                 <a:solidFill>
                   <a:srgbClr val="3A3A3C"/>
                 </a:solidFill>
@@ -4310,7 +4326,7 @@
               <a:buNone/>
             </a:pPr>
             <a:r>
-              <a:rPr lang="en-US" sz="1800" b="1" dirty="0">
+              <a:rPr lang="en-US" sz="2200" b="1" dirty="0">
                 <a:solidFill>
                   <a:srgbClr val="0073CF"/>
                 </a:solidFill>
@@ -4329,11 +4345,14 @@
               <a:spcAft>
                 <a:spcPts val="200"/>
               </a:spcAft>
+              <a:buClr>
+                <a:srgbClr val="0073CF"/>
+              </a:buClr>
               <a:buFont typeface="Arial"/>
               <a:buChar char="•"/>
             </a:pPr>
             <a:r>
-              <a:rPr lang="en-US" sz="1600" dirty="0">
+              <a:rPr lang="en-US" sz="2200" dirty="0">
                 <a:solidFill>
                   <a:srgbClr val="3A3A3C"/>
                 </a:solidFill>
@@ -4341,7 +4360,7 @@
               <a:t>Prior work covers task and model orchestration; </a:t>
             </a:r>
             <a:r>
-              <a:rPr lang="en-US" sz="1600" b="1" dirty="0">
+              <a:rPr lang="en-US" sz="2200" b="1" dirty="0">
                 <a:solidFill>
                   <a:srgbClr val="00396B"/>
                 </a:solidFill>
@@ -4538,7 +4557,7 @@
     </p:spTree>
     <p:extLst>
       <p:ext uri="{BB962C8B-B14F-4D97-AF65-F5344CB8AC3E}">
-        <p14:creationId xmlns:p14="http://schemas.microsoft.com/office/powerpoint/2010/main" val="2798204962"/>
+        <p14:creationId xmlns:p14="http://schemas.microsoft.com/office/powerpoint/2010/main" val="3553519539"/>
       </p:ext>
     </p:extLst>
   </p:cSld>
@@ -4648,11 +4667,13 @@
           </a:xfrm>
         </p:spPr>
         <p:txBody>
-          <a:bodyPr anchor="t" anchorCtr="0"/>
-          <a:lstStyle/>
-          <a:p>
-            <a:r>
-              <a:rPr lang="en-US" sz="3200" b="1" dirty="0">
+          <a:bodyPr anchor="t" anchorCtr="0">
+            <a:normAutofit/>
+          </a:bodyPr>
+          <a:lstStyle/>
+          <a:p>
+            <a:r>
+              <a:rPr lang="en-US" sz="4000" b="1" dirty="0">
                 <a:solidFill>
                   <a:srgbClr val="00396B"/>
                 </a:solidFill>
@@ -4700,7 +4721,7 @@
               <a:buNone/>
             </a:pPr>
             <a:r>
-              <a:rPr lang="en-US" sz="1700" b="1" dirty="0">
+              <a:rPr lang="en-US" sz="2000" b="1" dirty="0">
                 <a:solidFill>
                   <a:srgbClr val="0073CF"/>
                 </a:solidFill>
@@ -4719,11 +4740,14 @@
               <a:spcAft>
                 <a:spcPts val="160"/>
               </a:spcAft>
+              <a:buClr>
+                <a:srgbClr val="0073CF"/>
+              </a:buClr>
               <a:buFont typeface="Arial"/>
               <a:buChar char="•"/>
             </a:pPr>
             <a:r>
-              <a:rPr lang="en-US" sz="1500" b="1" dirty="0">
+              <a:rPr lang="en-US" sz="2000" b="1" dirty="0">
                 <a:solidFill>
                   <a:srgbClr val="00396B"/>
                 </a:solidFill>
@@ -4731,7 +4755,7 @@
               <a:t>Model — </a:t>
             </a:r>
             <a:r>
-              <a:rPr lang="en-US" sz="1500" dirty="0">
+              <a:rPr lang="en-US" sz="2000" dirty="0">
                 <a:solidFill>
                   <a:srgbClr val="3A3A3C"/>
                 </a:solidFill>
@@ -4750,11 +4774,14 @@
               <a:spcAft>
                 <a:spcPts val="160"/>
               </a:spcAft>
+              <a:buClr>
+                <a:srgbClr val="0073CF"/>
+              </a:buClr>
               <a:buFont typeface="Arial"/>
               <a:buChar char="•"/>
             </a:pPr>
             <a:r>
-              <a:rPr lang="en-US" sz="1500" b="1" dirty="0">
+              <a:rPr lang="en-US" sz="2000" b="1" dirty="0">
                 <a:solidFill>
                   <a:srgbClr val="00396B"/>
                 </a:solidFill>
@@ -4762,7 +4789,7 @@
               <a:t>Token — </a:t>
             </a:r>
             <a:r>
-              <a:rPr lang="en-US" sz="1500" dirty="0">
+              <a:rPr lang="en-US" sz="2000" dirty="0">
                 <a:solidFill>
                   <a:srgbClr val="3A3A3C"/>
                 </a:solidFill>
@@ -4781,11 +4808,14 @@
               <a:spcAft>
                 <a:spcPts val="160"/>
               </a:spcAft>
+              <a:buClr>
+                <a:srgbClr val="0073CF"/>
+              </a:buClr>
               <a:buFont typeface="Arial"/>
               <a:buChar char="•"/>
             </a:pPr>
             <a:r>
-              <a:rPr lang="en-US" sz="1500" b="1" dirty="0">
+              <a:rPr lang="en-US" sz="2000" b="1" dirty="0">
                 <a:solidFill>
                   <a:srgbClr val="00396B"/>
                 </a:solidFill>
@@ -4793,7 +4823,7 @@
               <a:t>Communication — </a:t>
             </a:r>
             <a:r>
-              <a:rPr lang="en-US" sz="1500" dirty="0">
+              <a:rPr lang="en-US" sz="2000" dirty="0">
                 <a:solidFill>
                   <a:srgbClr val="3A3A3C"/>
                 </a:solidFill>
@@ -4812,11 +4842,14 @@
               <a:spcAft>
                 <a:spcPts val="160"/>
               </a:spcAft>
+              <a:buClr>
+                <a:srgbClr val="0073CF"/>
+              </a:buClr>
               <a:buFont typeface="Arial"/>
               <a:buChar char="•"/>
             </a:pPr>
             <a:r>
-              <a:rPr lang="en-US" sz="1500" b="1" dirty="0">
+              <a:rPr lang="en-US" sz="2000" b="1" dirty="0">
                 <a:solidFill>
                   <a:srgbClr val="00396B"/>
                 </a:solidFill>
@@ -4824,7 +4857,7 @@
               <a:t>API — </a:t>
             </a:r>
             <a:r>
-              <a:rPr lang="en-US" sz="1500" dirty="0">
+              <a:rPr lang="en-US" sz="2000" dirty="0">
                 <a:solidFill>
                   <a:srgbClr val="3A3A3C"/>
                 </a:solidFill>
@@ -4843,11 +4876,14 @@
               <a:spcAft>
                 <a:spcPts val="160"/>
               </a:spcAft>
+              <a:buClr>
+                <a:srgbClr val="0073CF"/>
+              </a:buClr>
               <a:buFont typeface="Arial"/>
               <a:buChar char="•"/>
             </a:pPr>
             <a:r>
-              <a:rPr lang="en-US" sz="1500" b="1" dirty="0">
+              <a:rPr lang="en-US" sz="2000" b="1" dirty="0">
                 <a:solidFill>
                   <a:srgbClr val="00396B"/>
                 </a:solidFill>
@@ -4855,7 +4891,7 @@
               <a:t>Latency — </a:t>
             </a:r>
             <a:r>
-              <a:rPr lang="en-US" sz="1500" dirty="0">
+              <a:rPr lang="en-US" sz="2000" dirty="0">
                 <a:solidFill>
                   <a:srgbClr val="3A3A3C"/>
                 </a:solidFill>
@@ -4874,7 +4910,7 @@
               <a:buNone/>
             </a:pPr>
             <a:r>
-              <a:rPr lang="en-US" sz="1700" b="1" dirty="0">
+              <a:rPr lang="en-US" sz="2000" b="1" dirty="0">
                 <a:solidFill>
                   <a:srgbClr val="0073CF"/>
                 </a:solidFill>
@@ -4893,11 +4929,14 @@
               <a:spcAft>
                 <a:spcPts val="160"/>
               </a:spcAft>
+              <a:buClr>
+                <a:srgbClr val="0073CF"/>
+              </a:buClr>
               <a:buFont typeface="Arial"/>
               <a:buChar char="•"/>
             </a:pPr>
             <a:r>
-              <a:rPr lang="en-US" sz="1500" b="1" dirty="0">
+              <a:rPr lang="en-US" sz="2000" b="1" dirty="0">
                 <a:solidFill>
                   <a:srgbClr val="00396B"/>
                 </a:solidFill>
@@ -4905,7 +4944,7 @@
               <a:t>Model allocation — </a:t>
             </a:r>
             <a:r>
-              <a:rPr lang="en-US" sz="1500" dirty="0">
+              <a:rPr lang="en-US" sz="2000" dirty="0">
                 <a:solidFill>
                   <a:srgbClr val="3A3A3C"/>
                 </a:solidFill>
@@ -4924,11 +4963,14 @@
               <a:spcAft>
                 <a:spcPts val="160"/>
               </a:spcAft>
+              <a:buClr>
+                <a:srgbClr val="0073CF"/>
+              </a:buClr>
               <a:buFont typeface="Arial"/>
               <a:buChar char="•"/>
             </a:pPr>
             <a:r>
-              <a:rPr lang="en-US" sz="1500" b="1" dirty="0">
+              <a:rPr lang="en-US" sz="2000" b="1" dirty="0">
                 <a:solidFill>
                   <a:srgbClr val="00396B"/>
                 </a:solidFill>
@@ -4936,7 +4978,7 @@
               <a:t>Token allocation — </a:t>
             </a:r>
             <a:r>
-              <a:rPr lang="en-US" sz="1500" dirty="0">
+              <a:rPr lang="en-US" sz="2000" dirty="0">
                 <a:solidFill>
                   <a:srgbClr val="3A3A3C"/>
                 </a:solidFill>
@@ -4955,11 +4997,14 @@
               <a:spcAft>
                 <a:spcPts val="160"/>
               </a:spcAft>
+              <a:buClr>
+                <a:srgbClr val="0073CF"/>
+              </a:buClr>
               <a:buFont typeface="Arial"/>
               <a:buChar char="•"/>
             </a:pPr>
             <a:r>
-              <a:rPr lang="en-US" sz="1500" b="1" dirty="0">
+              <a:rPr lang="en-US" sz="2000" b="1" dirty="0">
                 <a:solidFill>
                   <a:srgbClr val="00396B"/>
                 </a:solidFill>
@@ -4967,7 +5012,7 @@
               <a:t>Communication allocation — </a:t>
             </a:r>
             <a:r>
-              <a:rPr lang="en-US" sz="1500" dirty="0">
+              <a:rPr lang="en-US" sz="2000" dirty="0">
                 <a:solidFill>
                   <a:srgbClr val="3A3A3C"/>
                 </a:solidFill>
@@ -5164,7 +5209,7 @@
     </p:spTree>
     <p:extLst>
       <p:ext uri="{BB962C8B-B14F-4D97-AF65-F5344CB8AC3E}">
-        <p14:creationId xmlns:p14="http://schemas.microsoft.com/office/powerpoint/2010/main" val="4216221840"/>
+        <p14:creationId xmlns:p14="http://schemas.microsoft.com/office/powerpoint/2010/main" val="576075889"/>
       </p:ext>
     </p:extLst>
   </p:cSld>
@@ -5274,11 +5319,13 @@
           </a:xfrm>
         </p:spPr>
         <p:txBody>
-          <a:bodyPr anchor="t" anchorCtr="0"/>
-          <a:lstStyle/>
-          <a:p>
-            <a:r>
-              <a:rPr lang="en-US" sz="3200" b="1" dirty="0">
+          <a:bodyPr anchor="t" anchorCtr="0">
+            <a:normAutofit/>
+          </a:bodyPr>
+          <a:lstStyle/>
+          <a:p>
+            <a:r>
+              <a:rPr lang="en-US" sz="4000" b="1" dirty="0">
                 <a:solidFill>
                   <a:srgbClr val="00396B"/>
                 </a:solidFill>
@@ -5306,8 +5353,8 @@
         </p:nvSpPr>
         <p:spPr>
           <a:xfrm>
-            <a:off x="838200" y="2489200"/>
-            <a:ext cx="5029200" cy="3429000"/>
+            <a:off x="838200" y="2387600"/>
+            <a:ext cx="5029200" cy="3530600"/>
           </a:xfrm>
         </p:spPr>
         <p:txBody>
@@ -5326,7 +5373,7 @@
               <a:buNone/>
             </a:pPr>
             <a:r>
-              <a:rPr lang="en-US" sz="1600" b="1" dirty="0">
+              <a:rPr lang="en-US" sz="2000" b="1" dirty="0">
                 <a:solidFill>
                   <a:srgbClr val="0073CF"/>
                 </a:solidFill>
@@ -5345,11 +5392,14 @@
               <a:spcAft>
                 <a:spcPts val="140"/>
               </a:spcAft>
+              <a:buClr>
+                <a:srgbClr val="0073CF"/>
+              </a:buClr>
               <a:buFont typeface="Arial"/>
               <a:buChar char="•"/>
             </a:pPr>
             <a:r>
-              <a:rPr lang="en-US" sz="1400" b="1" dirty="0">
+              <a:rPr lang="en-US" sz="1800" b="1" dirty="0">
                 <a:solidFill>
                   <a:srgbClr val="00396B"/>
                 </a:solidFill>
@@ -5357,7 +5407,7 @@
               <a:t>Single agent — </a:t>
             </a:r>
             <a:r>
-              <a:rPr lang="en-US" sz="1400" dirty="0">
+              <a:rPr lang="en-US" sz="1800" dirty="0">
                 <a:solidFill>
                   <a:srgbClr val="3A3A3C"/>
                 </a:solidFill>
@@ -5376,11 +5426,14 @@
               <a:spcAft>
                 <a:spcPts val="140"/>
               </a:spcAft>
+              <a:buClr>
+                <a:srgbClr val="0073CF"/>
+              </a:buClr>
               <a:buFont typeface="Arial"/>
               <a:buChar char="•"/>
             </a:pPr>
             <a:r>
-              <a:rPr lang="en-US" sz="1400" b="1" dirty="0">
+              <a:rPr lang="en-US" sz="1800" b="1" dirty="0">
                 <a:solidFill>
                   <a:srgbClr val="00396B"/>
                 </a:solidFill>
@@ -5388,7 +5441,7 @@
               <a:t>Homogeneous MAS — </a:t>
             </a:r>
             <a:r>
-              <a:rPr lang="en-US" sz="1400" dirty="0">
+              <a:rPr lang="en-US" sz="1800" dirty="0">
                 <a:solidFill>
                   <a:srgbClr val="3A3A3C"/>
                 </a:solidFill>
@@ -5407,11 +5460,14 @@
               <a:spcAft>
                 <a:spcPts val="140"/>
               </a:spcAft>
+              <a:buClr>
+                <a:srgbClr val="0073CF"/>
+              </a:buClr>
               <a:buFont typeface="Arial"/>
               <a:buChar char="•"/>
             </a:pPr>
             <a:r>
-              <a:rPr lang="en-US" sz="1400" b="1" dirty="0">
+              <a:rPr lang="en-US" sz="1800" b="1" dirty="0">
                 <a:solidFill>
                   <a:srgbClr val="00396B"/>
                 </a:solidFill>
@@ -5419,7 +5475,7 @@
               <a:t>Heterogeneous MAS — </a:t>
             </a:r>
             <a:r>
-              <a:rPr lang="en-US" sz="1400" dirty="0">
+              <a:rPr lang="en-US" sz="1800" dirty="0">
                 <a:solidFill>
                   <a:srgbClr val="3A3A3C"/>
                 </a:solidFill>
@@ -5438,11 +5494,14 @@
               <a:spcAft>
                 <a:spcPts val="140"/>
               </a:spcAft>
+              <a:buClr>
+                <a:srgbClr val="0073CF"/>
+              </a:buClr>
               <a:buFont typeface="Arial"/>
               <a:buChar char="•"/>
             </a:pPr>
             <a:r>
-              <a:rPr lang="en-US" sz="1400" b="1" dirty="0">
+              <a:rPr lang="en-US" sz="1800" b="1" dirty="0">
                 <a:solidFill>
                   <a:srgbClr val="00396B"/>
                 </a:solidFill>
@@ -5450,7 +5509,7 @@
               <a:t>Public vs. Ours — </a:t>
             </a:r>
             <a:r>
-              <a:rPr lang="en-US" sz="1400" dirty="0">
+              <a:rPr lang="en-US" sz="1800" dirty="0">
                 <a:solidFill>
                   <a:srgbClr val="3A3A3C"/>
                 </a:solidFill>
@@ -5469,7 +5528,7 @@
               <a:buNone/>
             </a:pPr>
             <a:r>
-              <a:rPr lang="en-US" sz="1600" b="1" dirty="0">
+              <a:rPr lang="en-US" sz="2000" b="1" dirty="0">
                 <a:solidFill>
                   <a:srgbClr val="0073CF"/>
                 </a:solidFill>
@@ -5488,11 +5547,14 @@
               <a:spcAft>
                 <a:spcPts val="140"/>
               </a:spcAft>
+              <a:buClr>
+                <a:srgbClr val="0073CF"/>
+              </a:buClr>
               <a:buFont typeface="Arial"/>
               <a:buChar char="•"/>
             </a:pPr>
             <a:r>
-              <a:rPr lang="en-US" sz="1400" b="1" dirty="0">
+              <a:rPr lang="en-US" sz="1800" b="1" dirty="0">
                 <a:solidFill>
                   <a:srgbClr val="00396B"/>
                 </a:solidFill>
@@ -5500,7 +5562,7 @@
               <a:t>Closed-source — </a:t>
             </a:r>
             <a:r>
-              <a:rPr lang="en-US" sz="1400" dirty="0">
+              <a:rPr lang="en-US" sz="1800" dirty="0">
                 <a:solidFill>
                   <a:srgbClr val="3A3A3C"/>
                 </a:solidFill>
@@ -5519,11 +5581,14 @@
               <a:spcAft>
                 <a:spcPts val="140"/>
               </a:spcAft>
+              <a:buClr>
+                <a:srgbClr val="0073CF"/>
+              </a:buClr>
               <a:buFont typeface="Arial"/>
               <a:buChar char="•"/>
             </a:pPr>
             <a:r>
-              <a:rPr lang="en-US" sz="1400" b="1" dirty="0">
+              <a:rPr lang="en-US" sz="1800" b="1" dirty="0">
                 <a:solidFill>
                   <a:srgbClr val="00396B"/>
                 </a:solidFill>
@@ -5531,7 +5596,7 @@
               <a:t>Open-source — </a:t>
             </a:r>
             <a:r>
-              <a:rPr lang="en-US" sz="1400" dirty="0">
+              <a:rPr lang="en-US" sz="1800" dirty="0">
                 <a:solidFill>
                   <a:srgbClr val="3A3A3C"/>
                 </a:solidFill>
@@ -5550,11 +5615,14 @@
               <a:spcAft>
                 <a:spcPts val="140"/>
               </a:spcAft>
+              <a:buClr>
+                <a:srgbClr val="0073CF"/>
+              </a:buClr>
               <a:buFont typeface="Arial"/>
               <a:buChar char="•"/>
             </a:pPr>
             <a:r>
-              <a:rPr lang="en-US" sz="1400" b="1" dirty="0">
+              <a:rPr lang="en-US" sz="1800" b="1" dirty="0">
                 <a:solidFill>
                   <a:srgbClr val="00396B"/>
                 </a:solidFill>
@@ -5562,7 +5630,7 @@
               <a:t>Task-specific — </a:t>
             </a:r>
             <a:r>
-              <a:rPr lang="en-US" sz="1400" dirty="0">
+              <a:rPr lang="en-US" sz="1800" dirty="0">
                 <a:solidFill>
                   <a:srgbClr val="3A3A3C"/>
                 </a:solidFill>
@@ -5770,8 +5838,8 @@
         </p:nvSpPr>
         <p:spPr>
           <a:xfrm>
-            <a:off x="6172200" y="2489200"/>
-            <a:ext cx="5181600" cy="3429000"/>
+            <a:off x="6172200" y="2387600"/>
+            <a:ext cx="5181600" cy="3530600"/>
           </a:xfrm>
           <a:prstGeom prst="rect">
             <a:avLst/>
@@ -5780,7 +5848,7 @@
         </p:spPr>
         <p:txBody>
           <a:bodyPr vertOverflow="overflow" vert="horz" wrap="square" rtlCol="0" anchor="t" anchorCtr="0">
-            <a:noAutofit/>
+            <a:normAutofit/>
           </a:bodyPr>
           <a:lstStyle/>
           <a:p>
@@ -5794,7 +5862,7 @@
               <a:buNone/>
             </a:pPr>
             <a:r>
-              <a:rPr lang="en-US" sz="1600" b="1" dirty="0">
+              <a:rPr lang="en-US" sz="2000" b="1" dirty="0">
                 <a:solidFill>
                   <a:srgbClr val="0073CF"/>
                 </a:solidFill>
@@ -5813,11 +5881,14 @@
               <a:spcAft>
                 <a:spcPts val="140"/>
               </a:spcAft>
+              <a:buClr>
+                <a:srgbClr val="0073CF"/>
+              </a:buClr>
               <a:buFont typeface="Arial"/>
               <a:buChar char="•"/>
             </a:pPr>
             <a:r>
-              <a:rPr lang="en-US" sz="1400" b="1" dirty="0">
+              <a:rPr lang="en-US" sz="1800" b="1" dirty="0">
                 <a:solidFill>
                   <a:srgbClr val="00396B"/>
                 </a:solidFill>
@@ -5825,7 +5896,7 @@
               <a:t>Search — </a:t>
             </a:r>
             <a:r>
-              <a:rPr lang="en-US" sz="1400" dirty="0">
+              <a:rPr lang="en-US" sz="1800" dirty="0">
                 <a:solidFill>
                   <a:srgbClr val="3A3A3C"/>
                 </a:solidFill>
@@ -5844,11 +5915,14 @@
               <a:spcAft>
                 <a:spcPts val="140"/>
               </a:spcAft>
+              <a:buClr>
+                <a:srgbClr val="0073CF"/>
+              </a:buClr>
               <a:buFont typeface="Arial"/>
               <a:buChar char="•"/>
             </a:pPr>
             <a:r>
-              <a:rPr lang="en-US" sz="1400" b="1" dirty="0">
+              <a:rPr lang="en-US" sz="1800" b="1" dirty="0">
                 <a:solidFill>
                   <a:srgbClr val="00396B"/>
                 </a:solidFill>
@@ -5856,7 +5930,7 @@
               <a:t>Deep research — </a:t>
             </a:r>
             <a:r>
-              <a:rPr lang="en-US" sz="1400" dirty="0">
+              <a:rPr lang="en-US" sz="1800" dirty="0">
                 <a:solidFill>
                   <a:srgbClr val="3A3A3C"/>
                 </a:solidFill>
@@ -5875,11 +5949,14 @@
               <a:spcAft>
                 <a:spcPts val="140"/>
               </a:spcAft>
+              <a:buClr>
+                <a:srgbClr val="0073CF"/>
+              </a:buClr>
               <a:buFont typeface="Arial"/>
               <a:buChar char="•"/>
             </a:pPr>
             <a:r>
-              <a:rPr lang="en-US" sz="1400" b="1" dirty="0">
+              <a:rPr lang="en-US" sz="1800" b="1" dirty="0">
                 <a:solidFill>
                   <a:srgbClr val="00396B"/>
                 </a:solidFill>
@@ -5887,7 +5964,7 @@
               <a:t>Math — </a:t>
             </a:r>
             <a:r>
-              <a:rPr lang="en-US" sz="1400" dirty="0">
+              <a:rPr lang="en-US" sz="1800" dirty="0">
                 <a:solidFill>
                   <a:srgbClr val="3A3A3C"/>
                 </a:solidFill>
@@ -5906,11 +5983,14 @@
               <a:spcAft>
                 <a:spcPts val="140"/>
               </a:spcAft>
+              <a:buClr>
+                <a:srgbClr val="0073CF"/>
+              </a:buClr>
               <a:buFont typeface="Arial"/>
               <a:buChar char="•"/>
             </a:pPr>
             <a:r>
-              <a:rPr lang="en-US" sz="1400" b="1" dirty="0">
+              <a:rPr lang="en-US" sz="1800" b="1" dirty="0">
                 <a:solidFill>
                   <a:srgbClr val="00396B"/>
                 </a:solidFill>
@@ -5918,7 +5998,7 @@
               <a:t>Science — </a:t>
             </a:r>
             <a:r>
-              <a:rPr lang="en-US" sz="1400" dirty="0">
+              <a:rPr lang="en-US" sz="1800" dirty="0">
                 <a:solidFill>
                   <a:srgbClr val="3A3A3C"/>
                 </a:solidFill>
@@ -5937,11 +6017,14 @@
               <a:spcAft>
                 <a:spcPts val="140"/>
               </a:spcAft>
+              <a:buClr>
+                <a:srgbClr val="0073CF"/>
+              </a:buClr>
               <a:buFont typeface="Arial"/>
               <a:buChar char="•"/>
             </a:pPr>
             <a:r>
-              <a:rPr lang="en-US" sz="1400" b="1" dirty="0">
+              <a:rPr lang="en-US" sz="1800" b="1" dirty="0">
                 <a:solidFill>
                   <a:srgbClr val="00396B"/>
                 </a:solidFill>
@@ -5949,7 +6032,7 @@
               <a:t>Code — </a:t>
             </a:r>
             <a:r>
-              <a:rPr lang="en-US" sz="1400" dirty="0">
+              <a:rPr lang="en-US" sz="1800" dirty="0">
                 <a:solidFill>
                   <a:srgbClr val="3A3A3C"/>
                 </a:solidFill>
@@ -5968,7 +6051,7 @@
               <a:buNone/>
             </a:pPr>
             <a:r>
-              <a:rPr lang="en-US" sz="1600" b="1" dirty="0">
+              <a:rPr lang="en-US" sz="2000" b="1" dirty="0">
                 <a:solidFill>
                   <a:srgbClr val="0073CF"/>
                 </a:solidFill>
@@ -5987,11 +6070,14 @@
               <a:spcAft>
                 <a:spcPts val="140"/>
               </a:spcAft>
+              <a:buClr>
+                <a:srgbClr val="0073CF"/>
+              </a:buClr>
               <a:buFont typeface="Arial"/>
               <a:buChar char="•"/>
             </a:pPr>
             <a:r>
-              <a:rPr lang="en-US" sz="1400" b="1" dirty="0">
+              <a:rPr lang="en-US" sz="1800" b="1" dirty="0">
                 <a:solidFill>
                   <a:srgbClr val="00396B"/>
                 </a:solidFill>
@@ -5999,7 +6085,7 @@
               <a:t>Accuracy — </a:t>
             </a:r>
             <a:r>
-              <a:rPr lang="en-US" sz="1400" dirty="0">
+              <a:rPr lang="en-US" sz="1800" dirty="0">
                 <a:solidFill>
                   <a:srgbClr val="3A3A3C"/>
                 </a:solidFill>
@@ -6018,11 +6104,14 @@
               <a:spcAft>
                 <a:spcPts val="140"/>
               </a:spcAft>
+              <a:buClr>
+                <a:srgbClr val="0073CF"/>
+              </a:buClr>
               <a:buFont typeface="Arial"/>
               <a:buChar char="•"/>
             </a:pPr>
             <a:r>
-              <a:rPr lang="en-US" sz="1400" b="1" dirty="0">
+              <a:rPr lang="en-US" sz="1800" b="1" dirty="0">
                 <a:solidFill>
                   <a:srgbClr val="00396B"/>
                 </a:solidFill>
@@ -6030,7 +6119,7 @@
               <a:t>Cost — </a:t>
             </a:r>
             <a:r>
-              <a:rPr lang="en-US" sz="1400" dirty="0">
+              <a:rPr lang="en-US" sz="1800" dirty="0">
                 <a:solidFill>
                   <a:srgbClr val="3A3A3C"/>
                 </a:solidFill>
@@ -6130,7 +6219,7 @@
     </p:spTree>
     <p:extLst>
       <p:ext uri="{BB962C8B-B14F-4D97-AF65-F5344CB8AC3E}">
-        <p14:creationId xmlns:p14="http://schemas.microsoft.com/office/powerpoint/2010/main" val="1468420791"/>
+        <p14:creationId xmlns:p14="http://schemas.microsoft.com/office/powerpoint/2010/main" val="4018837472"/>
       </p:ext>
     </p:extLst>
   </p:cSld>
@@ -6240,11 +6329,13 @@
           </a:xfrm>
         </p:spPr>
         <p:txBody>
-          <a:bodyPr anchor="t" anchorCtr="0"/>
-          <a:lstStyle/>
-          <a:p>
-            <a:r>
-              <a:rPr lang="en-US" sz="3200" b="1" dirty="0">
+          <a:bodyPr anchor="t" anchorCtr="0">
+            <a:normAutofit/>
+          </a:bodyPr>
+          <a:lstStyle/>
+          <a:p>
+            <a:r>
+              <a:rPr lang="en-US" sz="4000" b="1" dirty="0">
                 <a:solidFill>
                   <a:srgbClr val="00396B"/>
                 </a:solidFill>
@@ -6292,11 +6383,14 @@
               <a:spcAft>
                 <a:spcPts val="900"/>
               </a:spcAft>
+              <a:buClr>
+                <a:srgbClr val="0073CF"/>
+              </a:buClr>
               <a:buFont typeface="Arial"/>
               <a:buAutoNum type="arabicPeriod"/>
             </a:pPr>
             <a:r>
-              <a:rPr lang="en-US" sz="1600" b="1" dirty="0">
+              <a:rPr lang="en-US" sz="2400" b="1" dirty="0">
                 <a:solidFill>
                   <a:srgbClr val="00396B"/>
                 </a:solidFill>
@@ -6304,7 +6398,7 @@
               <a:t>AgentFlow  </a:t>
             </a:r>
             <a:r>
-              <a:rPr lang="en-US" sz="1600" dirty="0">
+              <a:rPr lang="en-US" sz="2400" dirty="0">
                 <a:solidFill>
                   <a:srgbClr val="3A3A3C"/>
                 </a:solidFill>
@@ -6312,7 +6406,7 @@
               <a:t>In-the-Flow Agentic System Optimization for Effective Planning and Tool Use.  </a:t>
             </a:r>
             <a:r>
-              <a:rPr lang="en-US" sz="1600" i="1" dirty="0">
+              <a:rPr lang="en-US" sz="2400" i="1" dirty="0">
                 <a:solidFill>
                   <a:srgbClr val="6E7B8B"/>
                 </a:solidFill>
@@ -6331,11 +6425,14 @@
               <a:spcAft>
                 <a:spcPts val="900"/>
               </a:spcAft>
+              <a:buClr>
+                <a:srgbClr val="0073CF"/>
+              </a:buClr>
               <a:buFont typeface="Arial"/>
               <a:buAutoNum type="arabicPeriod"/>
             </a:pPr>
             <a:r>
-              <a:rPr lang="en-US" sz="1600" b="1" dirty="0">
+              <a:rPr lang="en-US" sz="2400" b="1" dirty="0">
                 <a:solidFill>
                   <a:srgbClr val="00396B"/>
                 </a:solidFill>
@@ -6343,7 +6440,7 @@
               <a:t>AORCHESTRA  </a:t>
             </a:r>
             <a:r>
-              <a:rPr lang="en-US" sz="1600" dirty="0">
+              <a:rPr lang="en-US" sz="2400" dirty="0">
                 <a:solidFill>
                   <a:srgbClr val="3A3A3C"/>
                 </a:solidFill>
@@ -6351,7 +6448,7 @@
               <a:t>AOrchestra: Automating Sub-Agent Creation for Agentic Orchestration.  </a:t>
             </a:r>
             <a:r>
-              <a:rPr lang="en-US" sz="1600" i="1" dirty="0">
+              <a:rPr lang="en-US" sz="2400" i="1" dirty="0">
                 <a:solidFill>
                   <a:srgbClr val="6E7B8B"/>
                 </a:solidFill>
@@ -6370,11 +6467,14 @@
               <a:spcAft>
                 <a:spcPts val="900"/>
               </a:spcAft>
+              <a:buClr>
+                <a:srgbClr val="0073CF"/>
+              </a:buClr>
               <a:buFont typeface="Arial"/>
               <a:buAutoNum type="arabicPeriod"/>
             </a:pPr>
             <a:r>
-              <a:rPr lang="en-US" sz="1600" b="1" dirty="0">
+              <a:rPr lang="en-US" sz="2400" b="1" dirty="0">
                 <a:solidFill>
                   <a:srgbClr val="00396B"/>
                 </a:solidFill>
@@ -6382,7 +6482,7 @@
               <a:t>MAS-Orchestra  </a:t>
             </a:r>
             <a:r>
-              <a:rPr lang="en-US" sz="1600" dirty="0">
+              <a:rPr lang="en-US" sz="2400" dirty="0">
                 <a:solidFill>
                   <a:srgbClr val="3A3A3C"/>
                 </a:solidFill>
@@ -6390,7 +6490,7 @@
               <a:t>Understanding and Improving Multi-Agent Reasoning Through Holistic Orchestration and Controlled Benchmarks.  </a:t>
             </a:r>
             <a:r>
-              <a:rPr lang="en-US" sz="1600" i="1" dirty="0">
+              <a:rPr lang="en-US" sz="2400" i="1" dirty="0">
                 <a:solidFill>
                   <a:srgbClr val="6E7B8B"/>
                 </a:solidFill>
@@ -6600,7 +6700,2662 @@
     </p:spTree>
     <p:extLst>
       <p:ext uri="{BB962C8B-B14F-4D97-AF65-F5344CB8AC3E}">
-        <p14:creationId xmlns:p14="http://schemas.microsoft.com/office/powerpoint/2010/main" val="635272683"/>
+        <p14:creationId xmlns:p14="http://schemas.microsoft.com/office/powerpoint/2010/main" val="2653961353"/>
+      </p:ext>
+    </p:extLst>
+  </p:cSld>
+  <p:clrMapOvr>
+    <a:masterClrMapping/>
+  </p:clrMapOvr>
+</p:sld>
+</file>
+
+<file path=ppt/slides/slide14.xml><?xml version="1.0" encoding="utf-8"?>
+<p:sld xmlns:a="http://schemas.openxmlformats.org/drawingml/2006/main" xmlns:r="http://schemas.openxmlformats.org/officeDocument/2006/relationships" xmlns:p="http://schemas.openxmlformats.org/presentationml/2006/main">
+  <p:cSld>
+    <p:spTree>
+      <p:nvGrpSpPr>
+        <p:cNvPr id="1" name="">
+          <a:extLst>
+            <a:ext uri="{FF2B5EF4-FFF2-40B4-BE49-F238E27FC236}">
+              <a16:creationId xmlns:a16="http://schemas.microsoft.com/office/drawing/2014/main" id="{5330C1EB-0A6A-8388-D2D1-BB489F9E658E}"/>
+            </a:ext>
+          </a:extLst>
+        </p:cNvPr>
+        <p:cNvGrpSpPr/>
+        <p:nvPr/>
+      </p:nvGrpSpPr>
+      <p:grpSpPr>
+        <a:xfrm>
+          <a:off x="0" y="0"/>
+          <a:ext cx="0" cy="0"/>
+          <a:chOff x="0" y="0"/>
+          <a:chExt cx="0" cy="0"/>
+        </a:xfrm>
+      </p:grpSpPr>
+      <p:sp>
+        <p:nvSpPr>
+          <p:cNvPr id="5" name="Footer Bar">
+            <a:extLst>
+              <a:ext uri="{FF2B5EF4-FFF2-40B4-BE49-F238E27FC236}">
+                <a16:creationId xmlns:a16="http://schemas.microsoft.com/office/drawing/2014/main" id="{E65DDBFB-2059-9353-9B38-B4845BC3798A}"/>
+              </a:ext>
+            </a:extLst>
+          </p:cNvPr>
+          <p:cNvSpPr/>
+          <p:nvPr/>
+        </p:nvSpPr>
+        <p:spPr>
+          <a:xfrm>
+            <a:off x="0" y="6350000"/>
+            <a:ext cx="12192000" cy="508000"/>
+          </a:xfrm>
+          <a:prstGeom prst="rect">
+            <a:avLst/>
+          </a:prstGeom>
+          <a:solidFill>
+            <a:srgbClr val="00396B"/>
+          </a:solidFill>
+          <a:ln w="12700" cap="flat" cmpd="sng" algn="ctr">
+            <a:noFill/>
+            <a:prstDash val="solid"/>
+            <a:miter lim="800000"/>
+          </a:ln>
+        </p:spPr>
+        <p:style>
+          <a:lnRef idx="2">
+            <a:schemeClr val="accent1">
+              <a:shade val="15000"/>
+            </a:schemeClr>
+          </a:lnRef>
+          <a:fillRef idx="1">
+            <a:schemeClr val="accent1"/>
+          </a:fillRef>
+          <a:effectRef idx="0">
+            <a:schemeClr val="accent1"/>
+          </a:effectRef>
+          <a:fontRef idx="minor">
+            <a:schemeClr val="lt1"/>
+          </a:fontRef>
+        </p:style>
+        <p:txBody>
+          <a:bodyPr vertOverflow="clip" horzOverflow="clip" rtlCol="0" anchor="t"/>
+          <a:lstStyle/>
+          <a:p>
+            <a:pPr algn="l"/>
+            <a:endParaRPr lang="en-CN"/>
+          </a:p>
+        </p:txBody>
+      </p:sp>
+      <p:sp>
+        <p:nvSpPr>
+          <p:cNvPr id="2" name="Title 1">
+            <a:extLst>
+              <a:ext uri="{FF2B5EF4-FFF2-40B4-BE49-F238E27FC236}">
+                <a16:creationId xmlns:a16="http://schemas.microsoft.com/office/drawing/2014/main" id="{534BC883-80AB-F403-CE7B-9BF390AD8FDA}"/>
+              </a:ext>
+            </a:extLst>
+          </p:cNvPr>
+          <p:cNvSpPr>
+            <a:spLocks noGrp="1"/>
+          </p:cNvSpPr>
+          <p:nvPr>
+            <p:ph type="title"/>
+          </p:nvPr>
+        </p:nvSpPr>
+        <p:spPr>
+          <a:xfrm>
+            <a:off x="838200" y="1397000"/>
+            <a:ext cx="10515600" cy="711200"/>
+          </a:xfrm>
+        </p:spPr>
+        <p:txBody>
+          <a:bodyPr anchor="t" anchorCtr="0">
+            <a:normAutofit/>
+          </a:bodyPr>
+          <a:lstStyle/>
+          <a:p>
+            <a:r>
+              <a:rPr lang="en-US" altLang="zh-CN" sz="4000" b="1" dirty="0">
+                <a:solidFill>
+                  <a:srgbClr val="00396B"/>
+                </a:solidFill>
+              </a:rPr>
+              <a:t>To-Do</a:t>
+            </a:r>
+            <a:r>
+              <a:rPr lang="zh-CN" altLang="en-US" sz="4000" b="1" dirty="0">
+                <a:solidFill>
+                  <a:srgbClr val="00396B"/>
+                </a:solidFill>
+              </a:rPr>
+              <a:t> </a:t>
+            </a:r>
+            <a:r>
+              <a:rPr lang="en-US" altLang="zh-CN" sz="4000" b="1" dirty="0">
+                <a:solidFill>
+                  <a:srgbClr val="00396B"/>
+                </a:solidFill>
+              </a:rPr>
+              <a:t>List</a:t>
+            </a:r>
+            <a:endParaRPr lang="en-US" sz="4000" b="1" dirty="0">
+              <a:solidFill>
+                <a:srgbClr val="00396B"/>
+              </a:solidFill>
+            </a:endParaRPr>
+          </a:p>
+        </p:txBody>
+      </p:sp>
+      <p:sp>
+        <p:nvSpPr>
+          <p:cNvPr id="3" name="Content Placeholder 2">
+            <a:extLst>
+              <a:ext uri="{FF2B5EF4-FFF2-40B4-BE49-F238E27FC236}">
+                <a16:creationId xmlns:a16="http://schemas.microsoft.com/office/drawing/2014/main" id="{FE903090-DC3E-4758-D01A-822A94B700FB}"/>
+              </a:ext>
+            </a:extLst>
+          </p:cNvPr>
+          <p:cNvSpPr>
+            <a:spLocks noGrp="1"/>
+          </p:cNvSpPr>
+          <p:nvPr>
+            <p:ph idx="1"/>
+          </p:nvPr>
+        </p:nvSpPr>
+        <p:spPr>
+          <a:xfrm>
+            <a:off x="838200" y="2540000"/>
+            <a:ext cx="10515600" cy="3657600"/>
+          </a:xfrm>
+        </p:spPr>
+        <p:txBody>
+          <a:bodyPr anchor="ctr" anchorCtr="0">
+            <a:normAutofit/>
+          </a:bodyPr>
+          <a:lstStyle/>
+          <a:p>
+            <a:pPr marL="457200" indent="-457200" algn="l">
+              <a:lnSpc>
+                <a:spcPct val="108000"/>
+              </a:lnSpc>
+              <a:spcBef>
+                <a:spcPts val="600"/>
+              </a:spcBef>
+              <a:spcAft>
+                <a:spcPts val="900"/>
+              </a:spcAft>
+              <a:buNone/>
+            </a:pPr>
+            <a:r>
+              <a:rPr lang="en-US" sz="2400" b="1" dirty="0">
+                <a:solidFill>
+                  <a:srgbClr val="0073CF"/>
+                </a:solidFill>
+              </a:rPr>
+              <a:t>1.  </a:t>
+            </a:r>
+            <a:r>
+              <a:rPr lang="en-US" sz="2400" dirty="0">
+                <a:solidFill>
+                  <a:srgbClr val="1A1A1A"/>
+                </a:solidFill>
+              </a:rPr>
+              <a:t>Build the heterogeneous MAS codebase on top of MAS-Orchestra</a:t>
+            </a:r>
+          </a:p>
+          <a:p>
+            <a:pPr marL="457200" indent="-457200" algn="l">
+              <a:lnSpc>
+                <a:spcPct val="108000"/>
+              </a:lnSpc>
+              <a:spcBef>
+                <a:spcPts val="600"/>
+              </a:spcBef>
+              <a:spcAft>
+                <a:spcPts val="900"/>
+              </a:spcAft>
+              <a:buNone/>
+            </a:pPr>
+            <a:r>
+              <a:rPr lang="en-US" sz="2400" b="1" dirty="0">
+                <a:solidFill>
+                  <a:srgbClr val="0073CF"/>
+                </a:solidFill>
+              </a:rPr>
+              <a:t>2.  </a:t>
+            </a:r>
+            <a:r>
+              <a:rPr lang="en-US" sz="2400" dirty="0">
+                <a:solidFill>
+                  <a:srgbClr val="1A1A1A"/>
+                </a:solidFill>
+              </a:rPr>
+              <a:t>Implement our proposed approach</a:t>
+            </a:r>
+            <a:r>
+              <a:rPr lang="en-US" altLang="zh-CN" sz="2400" dirty="0">
+                <a:solidFill>
+                  <a:srgbClr val="1A1A1A"/>
+                </a:solidFill>
+              </a:rPr>
+              <a:t>:</a:t>
+            </a:r>
+            <a:r>
+              <a:rPr lang="zh-CN" altLang="en-US" sz="2400" dirty="0">
+                <a:solidFill>
+                  <a:srgbClr val="1A1A1A"/>
+                </a:solidFill>
+              </a:rPr>
+              <a:t> </a:t>
+            </a:r>
+            <a:r>
+              <a:rPr lang="en-US" altLang="zh-CN" sz="2400" dirty="0">
+                <a:solidFill>
+                  <a:srgbClr val="1A1A1A"/>
+                </a:solidFill>
+              </a:rPr>
+              <a:t>prompt,</a:t>
+            </a:r>
+            <a:r>
+              <a:rPr lang="zh-CN" altLang="en-US" sz="2400" dirty="0">
+                <a:solidFill>
+                  <a:srgbClr val="1A1A1A"/>
+                </a:solidFill>
+              </a:rPr>
+              <a:t> </a:t>
+            </a:r>
+            <a:r>
+              <a:rPr lang="en-US" altLang="zh-CN" sz="2400" dirty="0">
+                <a:solidFill>
+                  <a:srgbClr val="1A1A1A"/>
+                </a:solidFill>
+              </a:rPr>
+              <a:t>SFT,</a:t>
+            </a:r>
+            <a:r>
+              <a:rPr lang="zh-CN" altLang="en-US" sz="2400" dirty="0">
+                <a:solidFill>
+                  <a:srgbClr val="1A1A1A"/>
+                </a:solidFill>
+              </a:rPr>
+              <a:t> </a:t>
+            </a:r>
+            <a:r>
+              <a:rPr lang="en-US" altLang="zh-CN" sz="2400" dirty="0">
+                <a:solidFill>
+                  <a:srgbClr val="1A1A1A"/>
+                </a:solidFill>
+              </a:rPr>
+              <a:t>RL</a:t>
+            </a:r>
+            <a:endParaRPr lang="en-US" sz="2400" dirty="0">
+              <a:solidFill>
+                <a:srgbClr val="1A1A1A"/>
+              </a:solidFill>
+            </a:endParaRPr>
+          </a:p>
+          <a:p>
+            <a:pPr marL="457200" indent="-457200" algn="l">
+              <a:lnSpc>
+                <a:spcPct val="108000"/>
+              </a:lnSpc>
+              <a:spcBef>
+                <a:spcPts val="600"/>
+              </a:spcBef>
+              <a:spcAft>
+                <a:spcPts val="900"/>
+              </a:spcAft>
+              <a:buNone/>
+            </a:pPr>
+            <a:r>
+              <a:rPr lang="en-US" sz="2400" b="1" dirty="0">
+                <a:solidFill>
+                  <a:srgbClr val="0073CF"/>
+                </a:solidFill>
+              </a:rPr>
+              <a:t>3.  </a:t>
+            </a:r>
+            <a:r>
+              <a:rPr lang="en-US" sz="2400" dirty="0">
+                <a:solidFill>
+                  <a:srgbClr val="1A1A1A"/>
+                </a:solidFill>
+              </a:rPr>
+              <a:t>Conduct experiments and evaluation</a:t>
+            </a:r>
+          </a:p>
+        </p:txBody>
+      </p:sp>
+      <p:sp>
+        <p:nvSpPr>
+          <p:cNvPr id="4" name="Slide Number Placeholder 3">
+            <a:extLst>
+              <a:ext uri="{FF2B5EF4-FFF2-40B4-BE49-F238E27FC236}">
+                <a16:creationId xmlns:a16="http://schemas.microsoft.com/office/drawing/2014/main" id="{90F84C85-55A6-4471-5B78-F6E78AB42018}"/>
+              </a:ext>
+            </a:extLst>
+          </p:cNvPr>
+          <p:cNvSpPr>
+            <a:spLocks noGrp="1"/>
+          </p:cNvSpPr>
+          <p:nvPr>
+            <p:ph type="sldNum" sz="quarter" idx="12"/>
+          </p:nvPr>
+        </p:nvSpPr>
+        <p:spPr>
+          <a:xfrm>
+            <a:off x="10210800" y="6451600"/>
+            <a:ext cx="1524000" cy="304800"/>
+          </a:xfrm>
+        </p:spPr>
+        <p:txBody>
+          <a:bodyPr anchor="ctr" anchorCtr="0"/>
+          <a:lstStyle/>
+          <a:p>
+            <a:fld id="{FC0A7A6B-4B1F-5446-A3A1-99DEB5EA7F81}" type="slidenum">
+              <a:rPr lang="en-CN" smtClean="0">
+                <a:solidFill>
+                  <a:srgbClr val="9AA7B5"/>
+                </a:solidFill>
+              </a:rPr>
+              <a:t>14</a:t>
+            </a:fld>
+            <a:endParaRPr lang="en-CN">
+              <a:solidFill>
+                <a:srgbClr val="9AA7B5"/>
+              </a:solidFill>
+            </a:endParaRPr>
+          </a:p>
+        </p:txBody>
+      </p:sp>
+      <p:sp>
+        <p:nvSpPr>
+          <p:cNvPr id="6" name="Accent Rule">
+            <a:extLst>
+              <a:ext uri="{FF2B5EF4-FFF2-40B4-BE49-F238E27FC236}">
+                <a16:creationId xmlns:a16="http://schemas.microsoft.com/office/drawing/2014/main" id="{6D20B819-575D-9B7C-5777-38D763B6ED89}"/>
+              </a:ext>
+            </a:extLst>
+          </p:cNvPr>
+          <p:cNvSpPr/>
+          <p:nvPr/>
+        </p:nvSpPr>
+        <p:spPr>
+          <a:xfrm>
+            <a:off x="838200" y="2209800"/>
+            <a:ext cx="1524000" cy="76200"/>
+          </a:xfrm>
+          <a:prstGeom prst="rect">
+            <a:avLst/>
+          </a:prstGeom>
+          <a:solidFill>
+            <a:srgbClr val="0073CF"/>
+          </a:solidFill>
+          <a:ln w="12700" cap="flat" cmpd="sng" algn="ctr">
+            <a:noFill/>
+            <a:prstDash val="solid"/>
+            <a:miter lim="800000"/>
+          </a:ln>
+        </p:spPr>
+        <p:style>
+          <a:lnRef idx="2">
+            <a:schemeClr val="accent1">
+              <a:shade val="15000"/>
+            </a:schemeClr>
+          </a:lnRef>
+          <a:fillRef idx="1">
+            <a:schemeClr val="accent1"/>
+          </a:fillRef>
+          <a:effectRef idx="0">
+            <a:schemeClr val="accent1"/>
+          </a:effectRef>
+          <a:fontRef idx="minor">
+            <a:schemeClr val="lt1"/>
+          </a:fontRef>
+        </p:style>
+        <p:txBody>
+          <a:bodyPr vertOverflow="clip" horzOverflow="clip" rtlCol="0" anchor="t"/>
+          <a:lstStyle/>
+          <a:p>
+            <a:pPr algn="l"/>
+            <a:endParaRPr lang="en-CN"/>
+          </a:p>
+        </p:txBody>
+      </p:sp>
+      <p:pic>
+        <p:nvPicPr>
+          <p:cNvPr id="7" name="Copied Picture 7">
+            <a:extLst>
+              <a:ext uri="{FF2B5EF4-FFF2-40B4-BE49-F238E27FC236}">
+                <a16:creationId xmlns:a16="http://schemas.microsoft.com/office/drawing/2014/main" id="{22D632C3-0F8B-2068-E170-2CF937E2AFAC}"/>
+              </a:ext>
+            </a:extLst>
+          </p:cNvPr>
+          <p:cNvPicPr>
+            <a:picLocks noChangeAspect="1"/>
+          </p:cNvPicPr>
+          <p:nvPr/>
+        </p:nvPicPr>
+        <p:blipFill>
+          <a:blip r:embed="rId2"/>
+          <a:stretch>
+            <a:fillRect/>
+          </a:stretch>
+        </p:blipFill>
+        <p:spPr>
+          <a:xfrm>
+            <a:off x="838200" y="508000"/>
+            <a:ext cx="762000" cy="762000"/>
+          </a:xfrm>
+          <a:prstGeom prst="rect">
+            <a:avLst/>
+          </a:prstGeom>
+        </p:spPr>
+      </p:pic>
+      <p:sp>
+        <p:nvSpPr>
+          <p:cNvPr id="10" name="Footer Name">
+            <a:extLst>
+              <a:ext uri="{FF2B5EF4-FFF2-40B4-BE49-F238E27FC236}">
+                <a16:creationId xmlns:a16="http://schemas.microsoft.com/office/drawing/2014/main" id="{D10B075F-598E-2B65-E519-6762EF817139}"/>
+              </a:ext>
+            </a:extLst>
+          </p:cNvPr>
+          <p:cNvSpPr txBox="1"/>
+          <p:nvPr/>
+        </p:nvSpPr>
+        <p:spPr>
+          <a:xfrm>
+            <a:off x="838200" y="6350000"/>
+            <a:ext cx="5080000" cy="508000"/>
+          </a:xfrm>
+          <a:prstGeom prst="rect">
+            <a:avLst/>
+          </a:prstGeom>
+          <a:noFill/>
+        </p:spPr>
+        <p:txBody>
+          <a:bodyPr vertOverflow="overflow" vert="horz" wrap="none" rtlCol="0" anchor="ctr" anchorCtr="0">
+            <a:noAutofit/>
+          </a:bodyPr>
+          <a:lstStyle/>
+          <a:p>
+            <a:pPr algn="l">
+              <a:buNone/>
+            </a:pPr>
+            <a:r>
+              <a:rPr lang="en-US" sz="1400" b="1" spc="200" dirty="0">
+                <a:solidFill>
+                  <a:srgbClr val="FFFFFF"/>
+                </a:solidFill>
+              </a:rPr>
+              <a:t>Quan Wei</a:t>
+            </a:r>
+            <a:r>
+              <a:rPr lang="en-US" sz="1400" b="1" spc="200" dirty="0">
+                <a:solidFill>
+                  <a:srgbClr val="9AA7B5"/>
+                </a:solidFill>
+              </a:rPr>
+              <a:t>   |   </a:t>
+            </a:r>
+            <a:r>
+              <a:rPr lang="en-US" sz="1400" b="1" spc="200" dirty="0">
+                <a:solidFill>
+                  <a:srgbClr val="FFFFFF"/>
+                </a:solidFill>
+              </a:rPr>
+              <a:t>WEEK </a:t>
+            </a:r>
+            <a:r>
+              <a:rPr lang="en-US" altLang="zh-CN" sz="1400" b="1" spc="200" dirty="0">
+                <a:solidFill>
+                  <a:srgbClr val="FFFFFF"/>
+                </a:solidFill>
+              </a:rPr>
+              <a:t>2</a:t>
+            </a:r>
+            <a:endParaRPr lang="en-US" sz="1400" b="1" spc="200" dirty="0">
+              <a:solidFill>
+                <a:srgbClr val="FFFFFF"/>
+              </a:solidFill>
+            </a:endParaRPr>
+          </a:p>
+        </p:txBody>
+      </p:sp>
+    </p:spTree>
+    <p:extLst>
+      <p:ext uri="{BB962C8B-B14F-4D97-AF65-F5344CB8AC3E}">
+        <p14:creationId xmlns:p14="http://schemas.microsoft.com/office/powerpoint/2010/main" val="2338181147"/>
+      </p:ext>
+    </p:extLst>
+  </p:cSld>
+  <p:clrMapOvr>
+    <a:masterClrMapping/>
+  </p:clrMapOvr>
+</p:sld>
+</file>
+
+<file path=ppt/slides/slide15.xml><?xml version="1.0" encoding="utf-8"?>
+<p:sld xmlns:a="http://schemas.openxmlformats.org/drawingml/2006/main" xmlns:r="http://schemas.openxmlformats.org/officeDocument/2006/relationships" xmlns:p="http://schemas.openxmlformats.org/presentationml/2006/main">
+  <p:cSld>
+    <p:spTree>
+      <p:nvGrpSpPr>
+        <p:cNvPr id="1" name="">
+          <a:extLst>
+            <a:ext uri="{FF2B5EF4-FFF2-40B4-BE49-F238E27FC236}">
+              <a16:creationId xmlns:a16="http://schemas.microsoft.com/office/drawing/2014/main" id="{77E4FB71-9893-98DA-E7F0-0FA46CD38688}"/>
+            </a:ext>
+          </a:extLst>
+        </p:cNvPr>
+        <p:cNvGrpSpPr/>
+        <p:nvPr/>
+      </p:nvGrpSpPr>
+      <p:grpSpPr>
+        <a:xfrm>
+          <a:off x="0" y="0"/>
+          <a:ext cx="0" cy="0"/>
+          <a:chOff x="0" y="0"/>
+          <a:chExt cx="0" cy="0"/>
+        </a:xfrm>
+      </p:grpSpPr>
+      <p:sp>
+        <p:nvSpPr>
+          <p:cNvPr id="5" name="Footer Bar">
+            <a:extLst>
+              <a:ext uri="{FF2B5EF4-FFF2-40B4-BE49-F238E27FC236}">
+                <a16:creationId xmlns:a16="http://schemas.microsoft.com/office/drawing/2014/main" id="{24DF1DB0-6162-C506-3C27-1C69DC951FF6}"/>
+              </a:ext>
+            </a:extLst>
+          </p:cNvPr>
+          <p:cNvSpPr/>
+          <p:nvPr/>
+        </p:nvSpPr>
+        <p:spPr>
+          <a:xfrm>
+            <a:off x="0" y="6350000"/>
+            <a:ext cx="12192000" cy="508000"/>
+          </a:xfrm>
+          <a:prstGeom prst="rect">
+            <a:avLst/>
+          </a:prstGeom>
+          <a:solidFill>
+            <a:srgbClr val="00396B"/>
+          </a:solidFill>
+          <a:ln w="12700" cap="flat" cmpd="sng" algn="ctr">
+            <a:noFill/>
+            <a:prstDash val="solid"/>
+            <a:miter lim="800000"/>
+          </a:ln>
+        </p:spPr>
+        <p:style>
+          <a:lnRef idx="2">
+            <a:schemeClr val="accent1">
+              <a:shade val="15000"/>
+            </a:schemeClr>
+          </a:lnRef>
+          <a:fillRef idx="1">
+            <a:schemeClr val="accent1"/>
+          </a:fillRef>
+          <a:effectRef idx="0">
+            <a:schemeClr val="accent1"/>
+          </a:effectRef>
+          <a:fontRef idx="minor">
+            <a:schemeClr val="lt1"/>
+          </a:fontRef>
+        </p:style>
+        <p:txBody>
+          <a:bodyPr vertOverflow="clip" horzOverflow="clip" rtlCol="0" anchor="t"/>
+          <a:lstStyle/>
+          <a:p>
+            <a:pPr algn="l"/>
+            <a:endParaRPr lang="en-CN"/>
+          </a:p>
+        </p:txBody>
+      </p:sp>
+      <p:sp>
+        <p:nvSpPr>
+          <p:cNvPr id="2" name="Title 1">
+            <a:extLst>
+              <a:ext uri="{FF2B5EF4-FFF2-40B4-BE49-F238E27FC236}">
+                <a16:creationId xmlns:a16="http://schemas.microsoft.com/office/drawing/2014/main" id="{EC786BB6-CB81-FA99-84D2-7C37AE12695B}"/>
+              </a:ext>
+            </a:extLst>
+          </p:cNvPr>
+          <p:cNvSpPr>
+            <a:spLocks noGrp="1"/>
+          </p:cNvSpPr>
+          <p:nvPr>
+            <p:ph type="title"/>
+          </p:nvPr>
+        </p:nvSpPr>
+        <p:spPr>
+          <a:xfrm>
+            <a:off x="838200" y="1397000"/>
+            <a:ext cx="10515600" cy="711200"/>
+          </a:xfrm>
+        </p:spPr>
+        <p:txBody>
+          <a:bodyPr anchor="t" anchorCtr="0">
+            <a:normAutofit/>
+          </a:bodyPr>
+          <a:lstStyle/>
+          <a:p>
+            <a:r>
+              <a:rPr lang="en-US" sz="4000" b="1" dirty="0">
+                <a:solidFill>
+                  <a:srgbClr val="00396B"/>
+                </a:solidFill>
+              </a:rPr>
+              <a:t>Overview</a:t>
+            </a:r>
+            <a:r>
+              <a:rPr lang="en-US" altLang="zh-CN" sz="4000" b="1" dirty="0">
+                <a:solidFill>
+                  <a:srgbClr val="00396B"/>
+                </a:solidFill>
+              </a:rPr>
+              <a:t>:</a:t>
+            </a:r>
+            <a:r>
+              <a:rPr lang="en-US" sz="4000" b="1" dirty="0">
+                <a:solidFill>
+                  <a:srgbClr val="00396B"/>
+                </a:solidFill>
+              </a:rPr>
+              <a:t> MAS</a:t>
+            </a:r>
+            <a:r>
+              <a:rPr lang="zh-CN" altLang="en-US" sz="4000" b="1" dirty="0">
+                <a:solidFill>
+                  <a:srgbClr val="00396B"/>
+                </a:solidFill>
+              </a:rPr>
+              <a:t> </a:t>
+            </a:r>
+            <a:r>
+              <a:rPr lang="en-US" altLang="zh-CN" sz="4000" b="1" dirty="0">
+                <a:solidFill>
+                  <a:srgbClr val="00396B"/>
+                </a:solidFill>
+              </a:rPr>
+              <a:t>Co-Evolution</a:t>
+            </a:r>
+            <a:endParaRPr lang="en-US" sz="4000" b="1" dirty="0">
+              <a:solidFill>
+                <a:srgbClr val="00396B"/>
+              </a:solidFill>
+            </a:endParaRPr>
+          </a:p>
+        </p:txBody>
+      </p:sp>
+      <p:sp>
+        <p:nvSpPr>
+          <p:cNvPr id="3" name="Content Placeholder 2">
+            <a:extLst>
+              <a:ext uri="{FF2B5EF4-FFF2-40B4-BE49-F238E27FC236}">
+                <a16:creationId xmlns:a16="http://schemas.microsoft.com/office/drawing/2014/main" id="{266D992A-4FA0-9A94-37B2-8E36F82B8F86}"/>
+              </a:ext>
+            </a:extLst>
+          </p:cNvPr>
+          <p:cNvSpPr>
+            <a:spLocks noGrp="1"/>
+          </p:cNvSpPr>
+          <p:nvPr>
+            <p:ph idx="1"/>
+          </p:nvPr>
+        </p:nvSpPr>
+        <p:spPr>
+          <a:xfrm>
+            <a:off x="838200" y="2540000"/>
+            <a:ext cx="10515600" cy="3657600"/>
+          </a:xfrm>
+        </p:spPr>
+        <p:txBody>
+          <a:bodyPr>
+            <a:normAutofit/>
+          </a:bodyPr>
+          <a:lstStyle/>
+          <a:p>
+            <a:pPr marL="0" indent="0" algn="l">
+              <a:lnSpc>
+                <a:spcPct val="100000"/>
+              </a:lnSpc>
+              <a:spcBef>
+                <a:spcPts val="100"/>
+              </a:spcBef>
+              <a:spcAft>
+                <a:spcPts val="100"/>
+              </a:spcAft>
+              <a:buNone/>
+            </a:pPr>
+            <a:r>
+              <a:rPr lang="en-US" sz="2200" b="1" dirty="0">
+                <a:solidFill>
+                  <a:srgbClr val="0073CF"/>
+                </a:solidFill>
+              </a:rPr>
+              <a:t>Motivation</a:t>
+            </a:r>
+          </a:p>
+          <a:p>
+            <a:pPr marL="342900" indent="-342900" algn="l">
+              <a:lnSpc>
+                <a:spcPct val="100000"/>
+              </a:lnSpc>
+              <a:spcBef>
+                <a:spcPts val="100"/>
+              </a:spcBef>
+              <a:spcAft>
+                <a:spcPts val="100"/>
+              </a:spcAft>
+              <a:buClr>
+                <a:srgbClr val="0073CF"/>
+              </a:buClr>
+              <a:buFont typeface="Arial"/>
+              <a:buChar char="•"/>
+            </a:pPr>
+            <a:r>
+              <a:rPr lang="en-US" sz="1800" b="1" dirty="0">
+                <a:solidFill>
+                  <a:srgbClr val="00396B"/>
+                </a:solidFill>
+              </a:rPr>
+              <a:t>Centralized MAS </a:t>
+            </a:r>
+            <a:r>
+              <a:rPr lang="en-US" sz="1800" dirty="0">
+                <a:solidFill>
+                  <a:srgbClr val="1A1A1A"/>
+                </a:solidFill>
+              </a:rPr>
+              <a:t>routes every decision through one controller with fixed workflows and roles → </a:t>
+            </a:r>
+            <a:r>
+              <a:rPr lang="en-US" sz="1800" b="1" dirty="0">
+                <a:solidFill>
+                  <a:srgbClr val="00396B"/>
+                </a:solidFill>
+              </a:rPr>
+              <a:t>poor scalability</a:t>
+            </a:r>
+            <a:r>
+              <a:rPr lang="en-US" sz="1800" dirty="0">
+                <a:solidFill>
+                  <a:srgbClr val="1A1A1A"/>
+                </a:solidFill>
+              </a:rPr>
+              <a:t>, </a:t>
+            </a:r>
+            <a:r>
+              <a:rPr lang="en-US" sz="1800" b="1" dirty="0">
+                <a:solidFill>
+                  <a:srgbClr val="00396B"/>
+                </a:solidFill>
+              </a:rPr>
+              <a:t>low adaptability</a:t>
+            </a:r>
+            <a:r>
+              <a:rPr lang="en-US" sz="1800" dirty="0">
+                <a:solidFill>
+                  <a:srgbClr val="1A1A1A"/>
+                </a:solidFill>
+              </a:rPr>
+              <a:t>, a </a:t>
+            </a:r>
+            <a:r>
+              <a:rPr lang="en-US" sz="1800" b="1" dirty="0">
+                <a:solidFill>
+                  <a:srgbClr val="00396B"/>
+                </a:solidFill>
+              </a:rPr>
+              <a:t>single point of failure</a:t>
+            </a:r>
+          </a:p>
+          <a:p>
+            <a:pPr marL="342900" indent="-342900" algn="l">
+              <a:lnSpc>
+                <a:spcPct val="100000"/>
+              </a:lnSpc>
+              <a:spcBef>
+                <a:spcPts val="150"/>
+              </a:spcBef>
+              <a:spcAft>
+                <a:spcPts val="100"/>
+              </a:spcAft>
+              <a:buClr>
+                <a:srgbClr val="0073CF"/>
+              </a:buClr>
+              <a:buFont typeface="Arial"/>
+              <a:buChar char="•"/>
+            </a:pPr>
+            <a:r>
+              <a:rPr lang="en-US" sz="1800" b="1" dirty="0">
+                <a:solidFill>
+                  <a:srgbClr val="00396B"/>
+                </a:solidFill>
+              </a:rPr>
+              <a:t>Decentralized MAS </a:t>
+            </a:r>
+            <a:r>
+              <a:rPr lang="en-US" sz="1800" dirty="0">
+                <a:solidFill>
+                  <a:srgbClr val="1A1A1A"/>
+                </a:solidFill>
+              </a:rPr>
+              <a:t>traps each agent in its </a:t>
+            </a:r>
+            <a:r>
+              <a:rPr lang="en-US" sz="1800" b="1" dirty="0">
+                <a:solidFill>
+                  <a:srgbClr val="00396B"/>
+                </a:solidFill>
+              </a:rPr>
+              <a:t>local view</a:t>
+            </a:r>
+            <a:r>
+              <a:rPr lang="en-US" sz="1800" dirty="0">
+                <a:solidFill>
+                  <a:srgbClr val="1A1A1A"/>
+                </a:solidFill>
+              </a:rPr>
+              <a:t>, ignoring neighbors → </a:t>
+            </a:r>
+            <a:r>
+              <a:rPr lang="en-US" sz="1800" b="1" dirty="0">
+                <a:solidFill>
+                  <a:srgbClr val="00396B"/>
+                </a:solidFill>
+              </a:rPr>
+              <a:t>no collective gain</a:t>
+            </a:r>
+          </a:p>
+          <a:p>
+            <a:pPr marL="0" indent="0" algn="l">
+              <a:lnSpc>
+                <a:spcPct val="100000"/>
+              </a:lnSpc>
+              <a:spcBef>
+                <a:spcPts val="650"/>
+              </a:spcBef>
+              <a:spcAft>
+                <a:spcPts val="100"/>
+              </a:spcAft>
+              <a:buNone/>
+            </a:pPr>
+            <a:r>
+              <a:rPr lang="en-US" sz="2200" b="1" dirty="0">
+                <a:solidFill>
+                  <a:srgbClr val="0073CF"/>
+                </a:solidFill>
+              </a:rPr>
+              <a:t>Research Question &amp; Key Insight</a:t>
+            </a:r>
+          </a:p>
+          <a:p>
+            <a:pPr marL="342900" indent="-342900" algn="l">
+              <a:lnSpc>
+                <a:spcPct val="100000"/>
+              </a:lnSpc>
+              <a:spcBef>
+                <a:spcPts val="100"/>
+              </a:spcBef>
+              <a:spcAft>
+                <a:spcPts val="100"/>
+              </a:spcAft>
+              <a:buClr>
+                <a:srgbClr val="0073CF"/>
+              </a:buClr>
+              <a:buFont typeface="Arial"/>
+              <a:buChar char="•"/>
+            </a:pPr>
+            <a:r>
+              <a:rPr lang="en-US" sz="1800" dirty="0">
+                <a:solidFill>
+                  <a:srgbClr val="1A1A1A"/>
+                </a:solidFill>
+              </a:rPr>
+              <a:t>Can agents co-evolve through </a:t>
+            </a:r>
+            <a:r>
+              <a:rPr lang="en-US" sz="1800" b="1" dirty="0">
+                <a:solidFill>
+                  <a:srgbClr val="00396B"/>
+                </a:solidFill>
+              </a:rPr>
+              <a:t>neighborhood consensus</a:t>
+            </a:r>
+            <a:r>
+              <a:rPr lang="en-US" sz="1800" dirty="0">
+                <a:solidFill>
+                  <a:srgbClr val="1A1A1A"/>
+                </a:solidFill>
+              </a:rPr>
+              <a:t> — improving collectively, with no central controller?</a:t>
+            </a:r>
+          </a:p>
+          <a:p>
+            <a:pPr marL="0" indent="0" algn="l">
+              <a:lnSpc>
+                <a:spcPct val="100000"/>
+              </a:lnSpc>
+              <a:spcBef>
+                <a:spcPts val="650"/>
+              </a:spcBef>
+              <a:spcAft>
+                <a:spcPts val="100"/>
+              </a:spcAft>
+              <a:buNone/>
+            </a:pPr>
+            <a:r>
+              <a:rPr lang="en-US" sz="2200" b="1" dirty="0">
+                <a:solidFill>
+                  <a:srgbClr val="0073CF"/>
+                </a:solidFill>
+              </a:rPr>
+              <a:t>Expected Results</a:t>
+            </a:r>
+          </a:p>
+          <a:p>
+            <a:pPr marL="342900" indent="-342900" algn="l">
+              <a:lnSpc>
+                <a:spcPct val="100000"/>
+              </a:lnSpc>
+              <a:spcBef>
+                <a:spcPts val="100"/>
+              </a:spcBef>
+              <a:spcAft>
+                <a:spcPts val="100"/>
+              </a:spcAft>
+              <a:buClr>
+                <a:srgbClr val="0073CF"/>
+              </a:buClr>
+              <a:buFont typeface="Arial"/>
+              <a:buChar char="•"/>
+            </a:pPr>
+            <a:r>
+              <a:rPr lang="en-US" sz="1800" b="1" dirty="0">
+                <a:solidFill>
+                  <a:srgbClr val="00396B"/>
+                </a:solidFill>
+              </a:rPr>
+              <a:t>Stronger performance </a:t>
+            </a:r>
+            <a:r>
+              <a:rPr lang="en-US" sz="1800" dirty="0">
+                <a:solidFill>
+                  <a:srgbClr val="1A1A1A"/>
+                </a:solidFill>
+              </a:rPr>
+              <a:t>than agents acting in isolation</a:t>
+            </a:r>
+          </a:p>
+          <a:p>
+            <a:pPr marL="342900" indent="-342900" algn="l">
+              <a:lnSpc>
+                <a:spcPct val="100000"/>
+              </a:lnSpc>
+              <a:spcBef>
+                <a:spcPts val="100"/>
+              </a:spcBef>
+              <a:spcAft>
+                <a:spcPts val="100"/>
+              </a:spcAft>
+              <a:buClr>
+                <a:srgbClr val="0073CF"/>
+              </a:buClr>
+              <a:buFont typeface="Arial"/>
+              <a:buChar char="•"/>
+            </a:pPr>
+            <a:r>
+              <a:rPr lang="en-US" sz="1800" b="1" dirty="0">
+                <a:solidFill>
+                  <a:srgbClr val="00396B"/>
+                </a:solidFill>
+              </a:rPr>
+              <a:t>Faster convergence </a:t>
+            </a:r>
+            <a:r>
+              <a:rPr lang="en-US" sz="1800" dirty="0">
+                <a:solidFill>
+                  <a:srgbClr val="1A1A1A"/>
+                </a:solidFill>
+              </a:rPr>
+              <a:t>than purely decentralized settings</a:t>
+            </a:r>
+          </a:p>
+        </p:txBody>
+      </p:sp>
+      <p:sp>
+        <p:nvSpPr>
+          <p:cNvPr id="4" name="Slide Number Placeholder 3">
+            <a:extLst>
+              <a:ext uri="{FF2B5EF4-FFF2-40B4-BE49-F238E27FC236}">
+                <a16:creationId xmlns:a16="http://schemas.microsoft.com/office/drawing/2014/main" id="{EE8CD026-3B59-15A5-1B5F-B87C7520064D}"/>
+              </a:ext>
+            </a:extLst>
+          </p:cNvPr>
+          <p:cNvSpPr>
+            <a:spLocks noGrp="1"/>
+          </p:cNvSpPr>
+          <p:nvPr>
+            <p:ph type="sldNum" sz="quarter" idx="12"/>
+          </p:nvPr>
+        </p:nvSpPr>
+        <p:spPr>
+          <a:xfrm>
+            <a:off x="10210800" y="6451600"/>
+            <a:ext cx="1524000" cy="304800"/>
+          </a:xfrm>
+        </p:spPr>
+        <p:txBody>
+          <a:bodyPr anchor="ctr" anchorCtr="0"/>
+          <a:lstStyle/>
+          <a:p>
+            <a:fld id="{FC0A7A6B-4B1F-5446-A3A1-99DEB5EA7F81}" type="slidenum">
+              <a:rPr lang="en-CN" smtClean="0">
+                <a:solidFill>
+                  <a:srgbClr val="9AA7B5"/>
+                </a:solidFill>
+              </a:rPr>
+              <a:t>15</a:t>
+            </a:fld>
+            <a:endParaRPr lang="en-CN">
+              <a:solidFill>
+                <a:srgbClr val="9AA7B5"/>
+              </a:solidFill>
+            </a:endParaRPr>
+          </a:p>
+        </p:txBody>
+      </p:sp>
+      <p:sp>
+        <p:nvSpPr>
+          <p:cNvPr id="6" name="Accent Rule">
+            <a:extLst>
+              <a:ext uri="{FF2B5EF4-FFF2-40B4-BE49-F238E27FC236}">
+                <a16:creationId xmlns:a16="http://schemas.microsoft.com/office/drawing/2014/main" id="{03073E4E-2B73-0632-B919-06FE618E67E6}"/>
+              </a:ext>
+            </a:extLst>
+          </p:cNvPr>
+          <p:cNvSpPr/>
+          <p:nvPr/>
+        </p:nvSpPr>
+        <p:spPr>
+          <a:xfrm>
+            <a:off x="838200" y="2209800"/>
+            <a:ext cx="1524000" cy="76200"/>
+          </a:xfrm>
+          <a:prstGeom prst="rect">
+            <a:avLst/>
+          </a:prstGeom>
+          <a:solidFill>
+            <a:srgbClr val="0073CF"/>
+          </a:solidFill>
+          <a:ln w="12700" cap="flat" cmpd="sng" algn="ctr">
+            <a:noFill/>
+            <a:prstDash val="solid"/>
+            <a:miter lim="800000"/>
+          </a:ln>
+        </p:spPr>
+        <p:style>
+          <a:lnRef idx="2">
+            <a:schemeClr val="accent1">
+              <a:shade val="15000"/>
+            </a:schemeClr>
+          </a:lnRef>
+          <a:fillRef idx="1">
+            <a:schemeClr val="accent1"/>
+          </a:fillRef>
+          <a:effectRef idx="0">
+            <a:schemeClr val="accent1"/>
+          </a:effectRef>
+          <a:fontRef idx="minor">
+            <a:schemeClr val="lt1"/>
+          </a:fontRef>
+        </p:style>
+        <p:txBody>
+          <a:bodyPr vertOverflow="clip" horzOverflow="clip" rtlCol="0" anchor="t"/>
+          <a:lstStyle/>
+          <a:p>
+            <a:pPr algn="l"/>
+            <a:endParaRPr lang="en-CN"/>
+          </a:p>
+        </p:txBody>
+      </p:sp>
+      <p:pic>
+        <p:nvPicPr>
+          <p:cNvPr id="7" name="Copied Picture 7">
+            <a:extLst>
+              <a:ext uri="{FF2B5EF4-FFF2-40B4-BE49-F238E27FC236}">
+                <a16:creationId xmlns:a16="http://schemas.microsoft.com/office/drawing/2014/main" id="{8AFA1466-9172-5B6C-CD5C-61703720EAC0}"/>
+              </a:ext>
+            </a:extLst>
+          </p:cNvPr>
+          <p:cNvPicPr>
+            <a:picLocks noChangeAspect="1"/>
+          </p:cNvPicPr>
+          <p:nvPr/>
+        </p:nvPicPr>
+        <p:blipFill>
+          <a:blip r:embed="rId2"/>
+          <a:stretch>
+            <a:fillRect/>
+          </a:stretch>
+        </p:blipFill>
+        <p:spPr>
+          <a:xfrm>
+            <a:off x="838200" y="508000"/>
+            <a:ext cx="762000" cy="762000"/>
+          </a:xfrm>
+          <a:prstGeom prst="rect">
+            <a:avLst/>
+          </a:prstGeom>
+        </p:spPr>
+      </p:pic>
+      <p:sp>
+        <p:nvSpPr>
+          <p:cNvPr id="10" name="Footer Name">
+            <a:extLst>
+              <a:ext uri="{FF2B5EF4-FFF2-40B4-BE49-F238E27FC236}">
+                <a16:creationId xmlns:a16="http://schemas.microsoft.com/office/drawing/2014/main" id="{B4C861B5-77BD-9EFC-A5F0-21D64EBAEB5A}"/>
+              </a:ext>
+            </a:extLst>
+          </p:cNvPr>
+          <p:cNvSpPr txBox="1"/>
+          <p:nvPr/>
+        </p:nvSpPr>
+        <p:spPr>
+          <a:xfrm>
+            <a:off x="838200" y="6350000"/>
+            <a:ext cx="5080000" cy="508000"/>
+          </a:xfrm>
+          <a:prstGeom prst="rect">
+            <a:avLst/>
+          </a:prstGeom>
+          <a:noFill/>
+        </p:spPr>
+        <p:txBody>
+          <a:bodyPr vertOverflow="overflow" vert="horz" wrap="none" rtlCol="0" anchor="ctr" anchorCtr="0">
+            <a:noAutofit/>
+          </a:bodyPr>
+          <a:lstStyle/>
+          <a:p>
+            <a:pPr algn="l">
+              <a:buNone/>
+            </a:pPr>
+            <a:r>
+              <a:rPr lang="en-US" sz="1400" b="1" spc="200" dirty="0">
+                <a:solidFill>
+                  <a:srgbClr val="FFFFFF"/>
+                </a:solidFill>
+              </a:rPr>
+              <a:t>Quan Wei</a:t>
+            </a:r>
+            <a:r>
+              <a:rPr lang="en-US" sz="1400" b="1" spc="200" dirty="0">
+                <a:solidFill>
+                  <a:srgbClr val="9AA7B5"/>
+                </a:solidFill>
+              </a:rPr>
+              <a:t>   |   </a:t>
+            </a:r>
+            <a:r>
+              <a:rPr lang="en-US" sz="1400" b="1" spc="200" dirty="0">
+                <a:solidFill>
+                  <a:srgbClr val="FFFFFF"/>
+                </a:solidFill>
+              </a:rPr>
+              <a:t>WEEK 2</a:t>
+            </a:r>
+          </a:p>
+        </p:txBody>
+      </p:sp>
+    </p:spTree>
+    <p:extLst>
+      <p:ext uri="{BB962C8B-B14F-4D97-AF65-F5344CB8AC3E}">
+        <p14:creationId xmlns:p14="http://schemas.microsoft.com/office/powerpoint/2010/main" val="2560429455"/>
+      </p:ext>
+    </p:extLst>
+  </p:cSld>
+  <p:clrMapOvr>
+    <a:masterClrMapping/>
+  </p:clrMapOvr>
+</p:sld>
+</file>
+
+<file path=ppt/slides/slide16.xml><?xml version="1.0" encoding="utf-8"?>
+<p:sld xmlns:a="http://schemas.openxmlformats.org/drawingml/2006/main" xmlns:r="http://schemas.openxmlformats.org/officeDocument/2006/relationships" xmlns:p="http://schemas.openxmlformats.org/presentationml/2006/main">
+  <p:cSld>
+    <p:spTree>
+      <p:nvGrpSpPr>
+        <p:cNvPr id="1" name="">
+          <a:extLst>
+            <a:ext uri="{FF2B5EF4-FFF2-40B4-BE49-F238E27FC236}">
+              <a16:creationId xmlns:a16="http://schemas.microsoft.com/office/drawing/2014/main" id="{1EC21825-3693-ED7A-2F05-1499638F4191}"/>
+            </a:ext>
+          </a:extLst>
+        </p:cNvPr>
+        <p:cNvGrpSpPr/>
+        <p:nvPr/>
+      </p:nvGrpSpPr>
+      <p:grpSpPr>
+        <a:xfrm>
+          <a:off x="0" y="0"/>
+          <a:ext cx="0" cy="0"/>
+          <a:chOff x="0" y="0"/>
+          <a:chExt cx="0" cy="0"/>
+        </a:xfrm>
+      </p:grpSpPr>
+      <p:sp>
+        <p:nvSpPr>
+          <p:cNvPr id="5" name="Footer Bar">
+            <a:extLst>
+              <a:ext uri="{FF2B5EF4-FFF2-40B4-BE49-F238E27FC236}">
+                <a16:creationId xmlns:a16="http://schemas.microsoft.com/office/drawing/2014/main" id="{20D9F296-CAF9-88B0-874F-FB79E3FC03C8}"/>
+              </a:ext>
+            </a:extLst>
+          </p:cNvPr>
+          <p:cNvSpPr/>
+          <p:nvPr/>
+        </p:nvSpPr>
+        <p:spPr>
+          <a:xfrm>
+            <a:off x="0" y="6350000"/>
+            <a:ext cx="12192000" cy="508000"/>
+          </a:xfrm>
+          <a:prstGeom prst="rect">
+            <a:avLst/>
+          </a:prstGeom>
+          <a:solidFill>
+            <a:srgbClr val="00396B"/>
+          </a:solidFill>
+          <a:ln w="12700" cap="flat" cmpd="sng" algn="ctr">
+            <a:noFill/>
+            <a:prstDash val="solid"/>
+            <a:miter lim="800000"/>
+          </a:ln>
+        </p:spPr>
+        <p:style>
+          <a:lnRef idx="2">
+            <a:schemeClr val="accent1">
+              <a:shade val="15000"/>
+            </a:schemeClr>
+          </a:lnRef>
+          <a:fillRef idx="1">
+            <a:schemeClr val="accent1"/>
+          </a:fillRef>
+          <a:effectRef idx="0">
+            <a:schemeClr val="accent1"/>
+          </a:effectRef>
+          <a:fontRef idx="minor">
+            <a:schemeClr val="lt1"/>
+          </a:fontRef>
+        </p:style>
+        <p:txBody>
+          <a:bodyPr vertOverflow="clip" horzOverflow="clip" rtlCol="0" anchor="t"/>
+          <a:lstStyle/>
+          <a:p>
+            <a:pPr algn="l"/>
+            <a:endParaRPr lang="en-CN"/>
+          </a:p>
+        </p:txBody>
+      </p:sp>
+      <p:sp>
+        <p:nvSpPr>
+          <p:cNvPr id="2" name="Title 1">
+            <a:extLst>
+              <a:ext uri="{FF2B5EF4-FFF2-40B4-BE49-F238E27FC236}">
+                <a16:creationId xmlns:a16="http://schemas.microsoft.com/office/drawing/2014/main" id="{608A697A-4466-F4CD-0714-35AB2CE221CA}"/>
+              </a:ext>
+            </a:extLst>
+          </p:cNvPr>
+          <p:cNvSpPr>
+            <a:spLocks noGrp="1"/>
+          </p:cNvSpPr>
+          <p:nvPr>
+            <p:ph type="title"/>
+          </p:nvPr>
+        </p:nvSpPr>
+        <p:spPr>
+          <a:xfrm>
+            <a:off x="838200" y="1397000"/>
+            <a:ext cx="10515600" cy="711200"/>
+          </a:xfrm>
+        </p:spPr>
+        <p:txBody>
+          <a:bodyPr anchor="t" anchorCtr="0"/>
+          <a:lstStyle/>
+          <a:p>
+            <a:r>
+              <a:rPr lang="en-US" sz="4000" b="1" dirty="0">
+                <a:solidFill>
+                  <a:srgbClr val="00396B"/>
+                </a:solidFill>
+              </a:rPr>
+              <a:t>Ex</a:t>
+            </a:r>
+            <a:r>
+              <a:rPr lang="en-US" altLang="zh-CN" sz="4000" b="1" dirty="0">
+                <a:solidFill>
+                  <a:srgbClr val="00396B"/>
+                </a:solidFill>
+              </a:rPr>
+              <a:t>ample</a:t>
+            </a:r>
+            <a:endParaRPr lang="en-US" sz="4000" b="1" dirty="0">
+              <a:solidFill>
+                <a:srgbClr val="00396B"/>
+              </a:solidFill>
+            </a:endParaRPr>
+          </a:p>
+        </p:txBody>
+      </p:sp>
+      <p:sp>
+        <p:nvSpPr>
+          <p:cNvPr id="3" name="Content Placeholder 2">
+            <a:extLst>
+              <a:ext uri="{FF2B5EF4-FFF2-40B4-BE49-F238E27FC236}">
+                <a16:creationId xmlns:a16="http://schemas.microsoft.com/office/drawing/2014/main" id="{DC1E1013-B3BB-A184-3B44-6F0B5E905E22}"/>
+              </a:ext>
+            </a:extLst>
+          </p:cNvPr>
+          <p:cNvSpPr>
+            <a:spLocks noGrp="1"/>
+          </p:cNvSpPr>
+          <p:nvPr>
+            <p:ph idx="1"/>
+          </p:nvPr>
+        </p:nvSpPr>
+        <p:spPr>
+          <a:xfrm>
+            <a:off x="838200" y="2540000"/>
+            <a:ext cx="10515600" cy="3657600"/>
+          </a:xfrm>
+        </p:spPr>
+        <p:txBody>
+          <a:bodyPr>
+            <a:normAutofit/>
+          </a:bodyPr>
+          <a:lstStyle/>
+          <a:p>
+            <a:pPr marL="0" indent="0" algn="l">
+              <a:spcBef>
+                <a:spcPts val="100"/>
+              </a:spcBef>
+              <a:spcAft>
+                <a:spcPts val="150"/>
+              </a:spcAft>
+              <a:buNone/>
+            </a:pPr>
+            <a:endParaRPr lang="en-US" sz="2400" dirty="0">
+              <a:solidFill>
+                <a:srgbClr val="0073CF"/>
+              </a:solidFill>
+            </a:endParaRPr>
+          </a:p>
+        </p:txBody>
+      </p:sp>
+      <p:sp>
+        <p:nvSpPr>
+          <p:cNvPr id="4" name="Slide Number Placeholder 3">
+            <a:extLst>
+              <a:ext uri="{FF2B5EF4-FFF2-40B4-BE49-F238E27FC236}">
+                <a16:creationId xmlns:a16="http://schemas.microsoft.com/office/drawing/2014/main" id="{96E3046E-35EE-5353-D6D7-1660E7C0113B}"/>
+              </a:ext>
+            </a:extLst>
+          </p:cNvPr>
+          <p:cNvSpPr>
+            <a:spLocks noGrp="1"/>
+          </p:cNvSpPr>
+          <p:nvPr>
+            <p:ph type="sldNum" sz="quarter" idx="12"/>
+          </p:nvPr>
+        </p:nvSpPr>
+        <p:spPr>
+          <a:xfrm>
+            <a:off x="10210800" y="6451600"/>
+            <a:ext cx="1524000" cy="304800"/>
+          </a:xfrm>
+        </p:spPr>
+        <p:txBody>
+          <a:bodyPr anchor="ctr" anchorCtr="0"/>
+          <a:lstStyle/>
+          <a:p>
+            <a:fld id="{FC0A7A6B-4B1F-5446-A3A1-99DEB5EA7F81}" type="slidenum">
+              <a:rPr lang="en-CN" smtClean="0">
+                <a:solidFill>
+                  <a:srgbClr val="9AA7B5"/>
+                </a:solidFill>
+              </a:rPr>
+              <a:t>16</a:t>
+            </a:fld>
+            <a:endParaRPr lang="en-CN">
+              <a:solidFill>
+                <a:srgbClr val="9AA7B5"/>
+              </a:solidFill>
+            </a:endParaRPr>
+          </a:p>
+        </p:txBody>
+      </p:sp>
+      <p:sp>
+        <p:nvSpPr>
+          <p:cNvPr id="6" name="Accent Rule">
+            <a:extLst>
+              <a:ext uri="{FF2B5EF4-FFF2-40B4-BE49-F238E27FC236}">
+                <a16:creationId xmlns:a16="http://schemas.microsoft.com/office/drawing/2014/main" id="{13A2CDB7-7DB3-D40D-2EFD-226CF84E11F0}"/>
+              </a:ext>
+            </a:extLst>
+          </p:cNvPr>
+          <p:cNvSpPr/>
+          <p:nvPr/>
+        </p:nvSpPr>
+        <p:spPr>
+          <a:xfrm>
+            <a:off x="838200" y="2209800"/>
+            <a:ext cx="1524000" cy="76200"/>
+          </a:xfrm>
+          <a:prstGeom prst="rect">
+            <a:avLst/>
+          </a:prstGeom>
+          <a:solidFill>
+            <a:srgbClr val="0073CF"/>
+          </a:solidFill>
+          <a:ln w="12700" cap="flat" cmpd="sng" algn="ctr">
+            <a:noFill/>
+            <a:prstDash val="solid"/>
+            <a:miter lim="800000"/>
+          </a:ln>
+        </p:spPr>
+        <p:style>
+          <a:lnRef idx="2">
+            <a:schemeClr val="accent1">
+              <a:shade val="15000"/>
+            </a:schemeClr>
+          </a:lnRef>
+          <a:fillRef idx="1">
+            <a:schemeClr val="accent1"/>
+          </a:fillRef>
+          <a:effectRef idx="0">
+            <a:schemeClr val="accent1"/>
+          </a:effectRef>
+          <a:fontRef idx="minor">
+            <a:schemeClr val="lt1"/>
+          </a:fontRef>
+        </p:style>
+        <p:txBody>
+          <a:bodyPr vertOverflow="clip" horzOverflow="clip" rtlCol="0" anchor="t"/>
+          <a:lstStyle/>
+          <a:p>
+            <a:pPr algn="l"/>
+            <a:endParaRPr lang="en-CN"/>
+          </a:p>
+        </p:txBody>
+      </p:sp>
+      <p:pic>
+        <p:nvPicPr>
+          <p:cNvPr id="7" name="Copied Picture 7">
+            <a:extLst>
+              <a:ext uri="{FF2B5EF4-FFF2-40B4-BE49-F238E27FC236}">
+                <a16:creationId xmlns:a16="http://schemas.microsoft.com/office/drawing/2014/main" id="{E0D2BB50-3939-17A7-F401-B79EF9597945}"/>
+              </a:ext>
+            </a:extLst>
+          </p:cNvPr>
+          <p:cNvPicPr>
+            <a:picLocks noChangeAspect="1"/>
+          </p:cNvPicPr>
+          <p:nvPr/>
+        </p:nvPicPr>
+        <p:blipFill>
+          <a:blip r:embed="rId2"/>
+          <a:stretch>
+            <a:fillRect/>
+          </a:stretch>
+        </p:blipFill>
+        <p:spPr>
+          <a:xfrm>
+            <a:off x="838200" y="508000"/>
+            <a:ext cx="762000" cy="762000"/>
+          </a:xfrm>
+          <a:prstGeom prst="rect">
+            <a:avLst/>
+          </a:prstGeom>
+        </p:spPr>
+      </p:pic>
+      <p:sp>
+        <p:nvSpPr>
+          <p:cNvPr id="10" name="Footer Name">
+            <a:extLst>
+              <a:ext uri="{FF2B5EF4-FFF2-40B4-BE49-F238E27FC236}">
+                <a16:creationId xmlns:a16="http://schemas.microsoft.com/office/drawing/2014/main" id="{ED4E6D75-89DC-A480-717F-F84B0EC8A255}"/>
+              </a:ext>
+            </a:extLst>
+          </p:cNvPr>
+          <p:cNvSpPr txBox="1"/>
+          <p:nvPr/>
+        </p:nvSpPr>
+        <p:spPr>
+          <a:xfrm>
+            <a:off x="838200" y="6350000"/>
+            <a:ext cx="5080000" cy="508000"/>
+          </a:xfrm>
+          <a:prstGeom prst="rect">
+            <a:avLst/>
+          </a:prstGeom>
+          <a:noFill/>
+        </p:spPr>
+        <p:txBody>
+          <a:bodyPr vertOverflow="overflow" vert="horz" wrap="none" rtlCol="0" anchor="ctr" anchorCtr="0">
+            <a:noAutofit/>
+          </a:bodyPr>
+          <a:lstStyle/>
+          <a:p>
+            <a:pPr algn="l">
+              <a:buNone/>
+            </a:pPr>
+            <a:r>
+              <a:rPr lang="en-US" sz="1400" b="1" spc="200" dirty="0">
+                <a:solidFill>
+                  <a:srgbClr val="FFFFFF"/>
+                </a:solidFill>
+              </a:rPr>
+              <a:t>Quan Wei</a:t>
+            </a:r>
+            <a:r>
+              <a:rPr lang="en-US" sz="1400" b="1" spc="200" dirty="0">
+                <a:solidFill>
+                  <a:srgbClr val="9AA7B5"/>
+                </a:solidFill>
+              </a:rPr>
+              <a:t>   |   </a:t>
+            </a:r>
+            <a:r>
+              <a:rPr lang="en-US" sz="1400" b="1" spc="200" dirty="0">
+                <a:solidFill>
+                  <a:srgbClr val="FFFFFF"/>
+                </a:solidFill>
+              </a:rPr>
+              <a:t>WEEK 2</a:t>
+            </a:r>
+          </a:p>
+        </p:txBody>
+      </p:sp>
+      <p:sp>
+        <p:nvSpPr>
+          <p:cNvPr id="9" name="AgentNet Reference">
+            <a:extLst>
+              <a:ext uri="{FF2B5EF4-FFF2-40B4-BE49-F238E27FC236}">
+                <a16:creationId xmlns:a16="http://schemas.microsoft.com/office/drawing/2014/main" id="{8F3ADD61-6AA2-274B-9568-110895831D62}"/>
+              </a:ext>
+            </a:extLst>
+          </p:cNvPr>
+          <p:cNvSpPr txBox="1"/>
+          <p:nvPr/>
+        </p:nvSpPr>
+        <p:spPr>
+          <a:xfrm>
+            <a:off x="1219200" y="5969000"/>
+            <a:ext cx="9753600" cy="304800"/>
+          </a:xfrm>
+          <a:prstGeom prst="rect">
+            <a:avLst/>
+          </a:prstGeom>
+          <a:noFill/>
+        </p:spPr>
+        <p:txBody>
+          <a:bodyPr vertOverflow="overflow" vert="horz" wrap="square" rtlCol="0" anchor="t" anchorCtr="0">
+            <a:spAutoFit/>
+          </a:bodyPr>
+          <a:lstStyle/>
+          <a:p>
+            <a:pPr algn="l"/>
+            <a:r>
+              <a:rPr lang="en-US" sz="1400" i="1">
+                <a:solidFill>
+                  <a:srgbClr val="6E7B8B"/>
+                </a:solidFill>
+              </a:rPr>
+              <a:t>Source: Liu et al., “AgentNet: Decentralized Evolutionary Coordination for LLM-based Multi-Agent Systems,” arXiv:2504.00587, 2025.</a:t>
+            </a:r>
+            <a:endParaRPr lang="en-CN" sz="1400" i="1">
+              <a:solidFill>
+                <a:srgbClr val="6E7B8B"/>
+              </a:solidFill>
+            </a:endParaRPr>
+          </a:p>
+        </p:txBody>
+      </p:sp>
+      <p:pic>
+        <p:nvPicPr>
+          <p:cNvPr id="11" name="Picture 10">
+            <a:extLst>
+              <a:ext uri="{FF2B5EF4-FFF2-40B4-BE49-F238E27FC236}">
+                <a16:creationId xmlns:a16="http://schemas.microsoft.com/office/drawing/2014/main" id="{7EC4E7E5-0117-B30E-3AF0-88389D15388A}"/>
+              </a:ext>
+            </a:extLst>
+          </p:cNvPr>
+          <p:cNvPicPr>
+            <a:picLocks noChangeAspect="1"/>
+          </p:cNvPicPr>
+          <p:nvPr/>
+        </p:nvPicPr>
+        <p:blipFill>
+          <a:blip r:embed="rId3"/>
+          <a:stretch>
+            <a:fillRect/>
+          </a:stretch>
+        </p:blipFill>
+        <p:spPr>
+          <a:xfrm>
+            <a:off x="1405655" y="2511855"/>
+            <a:ext cx="9025089" cy="3457145"/>
+          </a:xfrm>
+          <a:prstGeom prst="rect">
+            <a:avLst/>
+          </a:prstGeom>
+        </p:spPr>
+      </p:pic>
+    </p:spTree>
+    <p:extLst>
+      <p:ext uri="{BB962C8B-B14F-4D97-AF65-F5344CB8AC3E}">
+        <p14:creationId xmlns:p14="http://schemas.microsoft.com/office/powerpoint/2010/main" val="921959006"/>
+      </p:ext>
+    </p:extLst>
+  </p:cSld>
+  <p:clrMapOvr>
+    <a:masterClrMapping/>
+  </p:clrMapOvr>
+</p:sld>
+</file>
+
+<file path=ppt/slides/slide17.xml><?xml version="1.0" encoding="utf-8"?>
+<p:sld xmlns:a="http://schemas.openxmlformats.org/drawingml/2006/main" xmlns:r="http://schemas.openxmlformats.org/officeDocument/2006/relationships" xmlns:p="http://schemas.openxmlformats.org/presentationml/2006/main">
+  <p:cSld>
+    <p:spTree>
+      <p:nvGrpSpPr>
+        <p:cNvPr id="1" name="">
+          <a:extLst>
+            <a:ext uri="{FF2B5EF4-FFF2-40B4-BE49-F238E27FC236}">
+              <a16:creationId xmlns:a16="http://schemas.microsoft.com/office/drawing/2014/main" id="{77E4FB71-9893-98DA-E7F0-0FA46CD38688}"/>
+            </a:ext>
+          </a:extLst>
+        </p:cNvPr>
+        <p:cNvGrpSpPr/>
+        <p:nvPr/>
+      </p:nvGrpSpPr>
+      <p:grpSpPr>
+        <a:xfrm>
+          <a:off x="0" y="0"/>
+          <a:ext cx="0" cy="0"/>
+          <a:chOff x="0" y="0"/>
+          <a:chExt cx="0" cy="0"/>
+        </a:xfrm>
+      </p:grpSpPr>
+      <p:sp>
+        <p:nvSpPr>
+          <p:cNvPr id="5" name="Footer Bar">
+            <a:extLst>
+              <a:ext uri="{FF2B5EF4-FFF2-40B4-BE49-F238E27FC236}">
+                <a16:creationId xmlns:a16="http://schemas.microsoft.com/office/drawing/2014/main" id="{24DF1DB0-6162-C506-3C27-1C69DC951FF6}"/>
+              </a:ext>
+            </a:extLst>
+          </p:cNvPr>
+          <p:cNvSpPr/>
+          <p:nvPr/>
+        </p:nvSpPr>
+        <p:spPr>
+          <a:xfrm>
+            <a:off x="0" y="6350000"/>
+            <a:ext cx="12192000" cy="508000"/>
+          </a:xfrm>
+          <a:prstGeom prst="rect">
+            <a:avLst/>
+          </a:prstGeom>
+          <a:solidFill>
+            <a:srgbClr val="00396B"/>
+          </a:solidFill>
+          <a:ln w="12700" cap="flat" cmpd="sng" algn="ctr">
+            <a:noFill/>
+            <a:prstDash val="solid"/>
+            <a:miter lim="800000"/>
+          </a:ln>
+        </p:spPr>
+        <p:style>
+          <a:lnRef idx="2">
+            <a:schemeClr val="accent1">
+              <a:shade val="15000"/>
+            </a:schemeClr>
+          </a:lnRef>
+          <a:fillRef idx="1">
+            <a:schemeClr val="accent1"/>
+          </a:fillRef>
+          <a:effectRef idx="0">
+            <a:schemeClr val="accent1"/>
+          </a:effectRef>
+          <a:fontRef idx="minor">
+            <a:schemeClr val="lt1"/>
+          </a:fontRef>
+        </p:style>
+        <p:txBody>
+          <a:bodyPr vertOverflow="clip" horzOverflow="clip" rtlCol="0" anchor="t"/>
+          <a:lstStyle/>
+          <a:p>
+            <a:pPr algn="l"/>
+            <a:endParaRPr lang="en-CN"/>
+          </a:p>
+        </p:txBody>
+      </p:sp>
+      <p:sp>
+        <p:nvSpPr>
+          <p:cNvPr id="2" name="Title 1">
+            <a:extLst>
+              <a:ext uri="{FF2B5EF4-FFF2-40B4-BE49-F238E27FC236}">
+                <a16:creationId xmlns:a16="http://schemas.microsoft.com/office/drawing/2014/main" id="{EC786BB6-CB81-FA99-84D2-7C37AE12695B}"/>
+              </a:ext>
+            </a:extLst>
+          </p:cNvPr>
+          <p:cNvSpPr>
+            <a:spLocks noGrp="1"/>
+          </p:cNvSpPr>
+          <p:nvPr>
+            <p:ph type="title"/>
+          </p:nvPr>
+        </p:nvSpPr>
+        <p:spPr>
+          <a:xfrm>
+            <a:off x="838200" y="1397000"/>
+            <a:ext cx="10515600" cy="711200"/>
+          </a:xfrm>
+        </p:spPr>
+        <p:txBody>
+          <a:bodyPr anchor="t" anchorCtr="0">
+            <a:normAutofit/>
+          </a:bodyPr>
+          <a:lstStyle/>
+          <a:p>
+            <a:r>
+              <a:rPr lang="en-US" sz="4000" b="1" dirty="0">
+                <a:solidFill>
+                  <a:srgbClr val="00396B"/>
+                </a:solidFill>
+              </a:rPr>
+              <a:t>Methodology</a:t>
+            </a:r>
+          </a:p>
+        </p:txBody>
+      </p:sp>
+      <p:sp>
+        <p:nvSpPr>
+          <p:cNvPr id="3" name="Content Placeholder 2">
+            <a:extLst>
+              <a:ext uri="{FF2B5EF4-FFF2-40B4-BE49-F238E27FC236}">
+                <a16:creationId xmlns:a16="http://schemas.microsoft.com/office/drawing/2014/main" id="{266D992A-4FA0-9A94-37B2-8E36F82B8F86}"/>
+              </a:ext>
+            </a:extLst>
+          </p:cNvPr>
+          <p:cNvSpPr>
+            <a:spLocks noGrp="1"/>
+          </p:cNvSpPr>
+          <p:nvPr>
+            <p:ph idx="1"/>
+          </p:nvPr>
+        </p:nvSpPr>
+        <p:spPr>
+          <a:xfrm>
+            <a:off x="838200" y="2540000"/>
+            <a:ext cx="10515600" cy="3657600"/>
+          </a:xfrm>
+        </p:spPr>
+        <p:txBody>
+          <a:bodyPr>
+            <a:normAutofit fontScale="92500" lnSpcReduction="10000"/>
+          </a:bodyPr>
+          <a:lstStyle/>
+          <a:p>
+            <a:pPr marL="0" indent="0" algn="l">
+              <a:lnSpc>
+                <a:spcPct val="108000"/>
+              </a:lnSpc>
+              <a:spcBef>
+                <a:spcPts val="200"/>
+              </a:spcBef>
+              <a:spcAft>
+                <a:spcPts val="200"/>
+              </a:spcAft>
+              <a:buNone/>
+            </a:pPr>
+            <a:r>
+              <a:rPr lang="en-US" sz="2400" b="1" dirty="0">
+                <a:solidFill>
+                  <a:srgbClr val="0073CF"/>
+                </a:solidFill>
+              </a:rPr>
+              <a:t>Communication Graph &amp; Neighborhood</a:t>
+            </a:r>
+          </a:p>
+          <a:p>
+            <a:pPr marL="457200" indent="-457200" algn="l">
+              <a:lnSpc>
+                <a:spcPct val="108000"/>
+              </a:lnSpc>
+              <a:spcBef>
+                <a:spcPts val="250"/>
+              </a:spcBef>
+              <a:spcAft>
+                <a:spcPts val="250"/>
+              </a:spcAft>
+              <a:buFont typeface="Arial"/>
+              <a:buChar char="•"/>
+            </a:pPr>
+            <a:r>
+              <a:rPr lang="en-US" sz="2400" dirty="0">
+                <a:solidFill>
+                  <a:srgbClr val="1A1A1A"/>
+                </a:solidFill>
+              </a:rPr>
+              <a:t>Agents connect via a communication graph; each neighborhood is its top-K nearest neighbors</a:t>
+            </a:r>
+          </a:p>
+          <a:p>
+            <a:pPr marL="0" indent="0" algn="l">
+              <a:lnSpc>
+                <a:spcPct val="108000"/>
+              </a:lnSpc>
+              <a:spcBef>
+                <a:spcPts val="600"/>
+              </a:spcBef>
+              <a:spcAft>
+                <a:spcPts val="200"/>
+              </a:spcAft>
+              <a:buNone/>
+            </a:pPr>
+            <a:r>
+              <a:rPr lang="en-US" sz="2400" b="1" dirty="0">
+                <a:solidFill>
+                  <a:srgbClr val="0073CF"/>
+                </a:solidFill>
+              </a:rPr>
+              <a:t>Graph Evolution</a:t>
+            </a:r>
+          </a:p>
+          <a:p>
+            <a:pPr marL="457200" indent="-457200" algn="l">
+              <a:lnSpc>
+                <a:spcPct val="108000"/>
+              </a:lnSpc>
+              <a:spcBef>
+                <a:spcPts val="250"/>
+              </a:spcBef>
+              <a:spcAft>
+                <a:spcPts val="250"/>
+              </a:spcAft>
+              <a:buFont typeface="Arial"/>
+              <a:buChar char="•"/>
+            </a:pPr>
+            <a:r>
+              <a:rPr lang="en-US" sz="2400" dirty="0">
+                <a:solidFill>
+                  <a:srgbClr val="1A1A1A"/>
+                </a:solidFill>
+              </a:rPr>
+              <a:t>The graph is not fixed — agents rewire neighborhood connections based on observed performance and interaction history</a:t>
+            </a:r>
+          </a:p>
+          <a:p>
+            <a:pPr marL="0" indent="0" algn="l">
+              <a:lnSpc>
+                <a:spcPct val="108000"/>
+              </a:lnSpc>
+              <a:spcBef>
+                <a:spcPts val="600"/>
+              </a:spcBef>
+              <a:spcAft>
+                <a:spcPts val="200"/>
+              </a:spcAft>
+              <a:buNone/>
+            </a:pPr>
+            <a:r>
+              <a:rPr lang="en-US" sz="2400" b="1" dirty="0">
+                <a:solidFill>
+                  <a:srgbClr val="0073CF"/>
+                </a:solidFill>
+              </a:rPr>
+              <a:t>Co-Evolution via Neighborhood Consensus</a:t>
+            </a:r>
+          </a:p>
+          <a:p>
+            <a:pPr marL="457200" indent="-457200" algn="l">
+              <a:lnSpc>
+                <a:spcPct val="108000"/>
+              </a:lnSpc>
+              <a:spcBef>
+                <a:spcPts val="250"/>
+              </a:spcBef>
+              <a:spcAft>
+                <a:spcPts val="250"/>
+              </a:spcAft>
+              <a:buFont typeface="Arial"/>
+              <a:buChar char="•"/>
+            </a:pPr>
+            <a:r>
+              <a:rPr lang="en-US" sz="2400" dirty="0">
+                <a:solidFill>
+                  <a:srgbClr val="1A1A1A"/>
+                </a:solidFill>
+              </a:rPr>
+              <a:t>Agents iteratively refine policies by aggregating feedback from their top-K neighbors, converging toward collective improvement without global coordination</a:t>
+            </a:r>
+          </a:p>
+        </p:txBody>
+      </p:sp>
+      <p:sp>
+        <p:nvSpPr>
+          <p:cNvPr id="4" name="Slide Number Placeholder 3">
+            <a:extLst>
+              <a:ext uri="{FF2B5EF4-FFF2-40B4-BE49-F238E27FC236}">
+                <a16:creationId xmlns:a16="http://schemas.microsoft.com/office/drawing/2014/main" id="{EE8CD026-3B59-15A5-1B5F-B87C7520064D}"/>
+              </a:ext>
+            </a:extLst>
+          </p:cNvPr>
+          <p:cNvSpPr>
+            <a:spLocks noGrp="1"/>
+          </p:cNvSpPr>
+          <p:nvPr>
+            <p:ph type="sldNum" sz="quarter" idx="12"/>
+          </p:nvPr>
+        </p:nvSpPr>
+        <p:spPr>
+          <a:xfrm>
+            <a:off x="10210800" y="6451600"/>
+            <a:ext cx="1524000" cy="304800"/>
+          </a:xfrm>
+        </p:spPr>
+        <p:txBody>
+          <a:bodyPr anchor="ctr" anchorCtr="0"/>
+          <a:lstStyle/>
+          <a:p>
+            <a:fld id="{FC0A7A6B-4B1F-5446-A3A1-99DEB5EA7F81}" type="slidenum">
+              <a:rPr lang="en-CN" smtClean="0">
+                <a:solidFill>
+                  <a:srgbClr val="9AA7B5"/>
+                </a:solidFill>
+              </a:rPr>
+              <a:t>17</a:t>
+            </a:fld>
+            <a:endParaRPr lang="en-CN">
+              <a:solidFill>
+                <a:srgbClr val="9AA7B5"/>
+              </a:solidFill>
+            </a:endParaRPr>
+          </a:p>
+        </p:txBody>
+      </p:sp>
+      <p:sp>
+        <p:nvSpPr>
+          <p:cNvPr id="6" name="Accent Rule">
+            <a:extLst>
+              <a:ext uri="{FF2B5EF4-FFF2-40B4-BE49-F238E27FC236}">
+                <a16:creationId xmlns:a16="http://schemas.microsoft.com/office/drawing/2014/main" id="{03073E4E-2B73-0632-B919-06FE618E67E6}"/>
+              </a:ext>
+            </a:extLst>
+          </p:cNvPr>
+          <p:cNvSpPr/>
+          <p:nvPr/>
+        </p:nvSpPr>
+        <p:spPr>
+          <a:xfrm>
+            <a:off x="838200" y="2209800"/>
+            <a:ext cx="1524000" cy="76200"/>
+          </a:xfrm>
+          <a:prstGeom prst="rect">
+            <a:avLst/>
+          </a:prstGeom>
+          <a:solidFill>
+            <a:srgbClr val="0073CF"/>
+          </a:solidFill>
+          <a:ln w="12700" cap="flat" cmpd="sng" algn="ctr">
+            <a:noFill/>
+            <a:prstDash val="solid"/>
+            <a:miter lim="800000"/>
+          </a:ln>
+        </p:spPr>
+        <p:style>
+          <a:lnRef idx="2">
+            <a:schemeClr val="accent1">
+              <a:shade val="15000"/>
+            </a:schemeClr>
+          </a:lnRef>
+          <a:fillRef idx="1">
+            <a:schemeClr val="accent1"/>
+          </a:fillRef>
+          <a:effectRef idx="0">
+            <a:schemeClr val="accent1"/>
+          </a:effectRef>
+          <a:fontRef idx="minor">
+            <a:schemeClr val="lt1"/>
+          </a:fontRef>
+        </p:style>
+        <p:txBody>
+          <a:bodyPr vertOverflow="clip" horzOverflow="clip" rtlCol="0" anchor="t"/>
+          <a:lstStyle/>
+          <a:p>
+            <a:pPr algn="l"/>
+            <a:endParaRPr lang="en-CN"/>
+          </a:p>
+        </p:txBody>
+      </p:sp>
+      <p:pic>
+        <p:nvPicPr>
+          <p:cNvPr id="7" name="Copied Picture 7">
+            <a:extLst>
+              <a:ext uri="{FF2B5EF4-FFF2-40B4-BE49-F238E27FC236}">
+                <a16:creationId xmlns:a16="http://schemas.microsoft.com/office/drawing/2014/main" id="{8AFA1466-9172-5B6C-CD5C-61703720EAC0}"/>
+              </a:ext>
+            </a:extLst>
+          </p:cNvPr>
+          <p:cNvPicPr>
+            <a:picLocks noChangeAspect="1"/>
+          </p:cNvPicPr>
+          <p:nvPr/>
+        </p:nvPicPr>
+        <p:blipFill>
+          <a:blip r:embed="rId2"/>
+          <a:stretch>
+            <a:fillRect/>
+          </a:stretch>
+        </p:blipFill>
+        <p:spPr>
+          <a:xfrm>
+            <a:off x="838200" y="508000"/>
+            <a:ext cx="762000" cy="762000"/>
+          </a:xfrm>
+          <a:prstGeom prst="rect">
+            <a:avLst/>
+          </a:prstGeom>
+        </p:spPr>
+      </p:pic>
+      <p:sp>
+        <p:nvSpPr>
+          <p:cNvPr id="10" name="Footer Name">
+            <a:extLst>
+              <a:ext uri="{FF2B5EF4-FFF2-40B4-BE49-F238E27FC236}">
+                <a16:creationId xmlns:a16="http://schemas.microsoft.com/office/drawing/2014/main" id="{B4C861B5-77BD-9EFC-A5F0-21D64EBAEB5A}"/>
+              </a:ext>
+            </a:extLst>
+          </p:cNvPr>
+          <p:cNvSpPr txBox="1"/>
+          <p:nvPr/>
+        </p:nvSpPr>
+        <p:spPr>
+          <a:xfrm>
+            <a:off x="838200" y="6350000"/>
+            <a:ext cx="5080000" cy="508000"/>
+          </a:xfrm>
+          <a:prstGeom prst="rect">
+            <a:avLst/>
+          </a:prstGeom>
+          <a:noFill/>
+        </p:spPr>
+        <p:txBody>
+          <a:bodyPr vertOverflow="overflow" vert="horz" wrap="none" rtlCol="0" anchor="ctr" anchorCtr="0">
+            <a:noAutofit/>
+          </a:bodyPr>
+          <a:lstStyle/>
+          <a:p>
+            <a:pPr algn="l">
+              <a:buNone/>
+            </a:pPr>
+            <a:r>
+              <a:rPr lang="en-US" sz="1400" b="1" spc="200" dirty="0">
+                <a:solidFill>
+                  <a:srgbClr val="FFFFFF"/>
+                </a:solidFill>
+              </a:rPr>
+              <a:t>Quan Wei</a:t>
+            </a:r>
+            <a:r>
+              <a:rPr lang="en-US" sz="1400" b="1" spc="200" dirty="0">
+                <a:solidFill>
+                  <a:srgbClr val="9AA7B5"/>
+                </a:solidFill>
+              </a:rPr>
+              <a:t>   |   </a:t>
+            </a:r>
+            <a:r>
+              <a:rPr lang="en-US" sz="1400" b="1" spc="200" dirty="0">
+                <a:solidFill>
+                  <a:srgbClr val="FFFFFF"/>
+                </a:solidFill>
+              </a:rPr>
+              <a:t>WEEK 2</a:t>
+            </a:r>
+          </a:p>
+        </p:txBody>
+      </p:sp>
+    </p:spTree>
+    <p:extLst>
+      <p:ext uri="{BB962C8B-B14F-4D97-AF65-F5344CB8AC3E}">
+        <p14:creationId xmlns:p14="http://schemas.microsoft.com/office/powerpoint/2010/main" val="1143223798"/>
+      </p:ext>
+    </p:extLst>
+  </p:cSld>
+  <p:clrMapOvr>
+    <a:masterClrMapping/>
+  </p:clrMapOvr>
+</p:sld>
+</file>
+
+<file path=ppt/slides/slide18.xml><?xml version="1.0" encoding="utf-8"?>
+<p:sld xmlns:a="http://schemas.openxmlformats.org/drawingml/2006/main" xmlns:r="http://schemas.openxmlformats.org/officeDocument/2006/relationships" xmlns:p="http://schemas.openxmlformats.org/presentationml/2006/main">
+  <p:cSld>
+    <p:spTree>
+      <p:nvGrpSpPr>
+        <p:cNvPr id="1" name="">
+          <a:extLst>
+            <a:ext uri="{FF2B5EF4-FFF2-40B4-BE49-F238E27FC236}">
+              <a16:creationId xmlns:a16="http://schemas.microsoft.com/office/drawing/2014/main" id="{77E4FB71-9893-98DA-E7F0-0FA46CD38688}"/>
+            </a:ext>
+          </a:extLst>
+        </p:cNvPr>
+        <p:cNvGrpSpPr/>
+        <p:nvPr/>
+      </p:nvGrpSpPr>
+      <p:grpSpPr>
+        <a:xfrm>
+          <a:off x="0" y="0"/>
+          <a:ext cx="0" cy="0"/>
+          <a:chOff x="0" y="0"/>
+          <a:chExt cx="0" cy="0"/>
+        </a:xfrm>
+      </p:grpSpPr>
+      <p:sp>
+        <p:nvSpPr>
+          <p:cNvPr id="5" name="Footer Bar">
+            <a:extLst>
+              <a:ext uri="{FF2B5EF4-FFF2-40B4-BE49-F238E27FC236}">
+                <a16:creationId xmlns:a16="http://schemas.microsoft.com/office/drawing/2014/main" id="{24DF1DB0-6162-C506-3C27-1C69DC951FF6}"/>
+              </a:ext>
+            </a:extLst>
+          </p:cNvPr>
+          <p:cNvSpPr/>
+          <p:nvPr/>
+        </p:nvSpPr>
+        <p:spPr>
+          <a:xfrm>
+            <a:off x="0" y="6350000"/>
+            <a:ext cx="12192000" cy="508000"/>
+          </a:xfrm>
+          <a:prstGeom prst="rect">
+            <a:avLst/>
+          </a:prstGeom>
+          <a:solidFill>
+            <a:srgbClr val="00396B"/>
+          </a:solidFill>
+          <a:ln w="12700" cap="flat" cmpd="sng" algn="ctr">
+            <a:noFill/>
+            <a:prstDash val="solid"/>
+            <a:miter lim="800000"/>
+          </a:ln>
+        </p:spPr>
+        <p:style>
+          <a:lnRef idx="2">
+            <a:schemeClr val="accent1">
+              <a:shade val="15000"/>
+            </a:schemeClr>
+          </a:lnRef>
+          <a:fillRef idx="1">
+            <a:schemeClr val="accent1"/>
+          </a:fillRef>
+          <a:effectRef idx="0">
+            <a:schemeClr val="accent1"/>
+          </a:effectRef>
+          <a:fontRef idx="minor">
+            <a:schemeClr val="lt1"/>
+          </a:fontRef>
+        </p:style>
+        <p:txBody>
+          <a:bodyPr vertOverflow="clip" horzOverflow="clip" rtlCol="0" anchor="t"/>
+          <a:lstStyle/>
+          <a:p>
+            <a:pPr algn="l"/>
+            <a:endParaRPr lang="en-CN"/>
+          </a:p>
+        </p:txBody>
+      </p:sp>
+      <p:sp>
+        <p:nvSpPr>
+          <p:cNvPr id="2" name="Title 1">
+            <a:extLst>
+              <a:ext uri="{FF2B5EF4-FFF2-40B4-BE49-F238E27FC236}">
+                <a16:creationId xmlns:a16="http://schemas.microsoft.com/office/drawing/2014/main" id="{EC786BB6-CB81-FA99-84D2-7C37AE12695B}"/>
+              </a:ext>
+            </a:extLst>
+          </p:cNvPr>
+          <p:cNvSpPr>
+            <a:spLocks noGrp="1"/>
+          </p:cNvSpPr>
+          <p:nvPr>
+            <p:ph type="title"/>
+          </p:nvPr>
+        </p:nvSpPr>
+        <p:spPr>
+          <a:xfrm>
+            <a:off x="838200" y="1397000"/>
+            <a:ext cx="10515600" cy="711200"/>
+          </a:xfrm>
+        </p:spPr>
+        <p:txBody>
+          <a:bodyPr anchor="t" anchorCtr="0">
+            <a:normAutofit/>
+          </a:bodyPr>
+          <a:lstStyle/>
+          <a:p>
+            <a:r>
+              <a:rPr lang="en-US" sz="4000" b="1" dirty="0">
+                <a:solidFill>
+                  <a:srgbClr val="00396B"/>
+                </a:solidFill>
+              </a:rPr>
+              <a:t>To-Do</a:t>
+            </a:r>
+            <a:r>
+              <a:rPr lang="zh-CN" altLang="en-US" sz="4000" b="1" dirty="0">
+                <a:solidFill>
+                  <a:srgbClr val="00396B"/>
+                </a:solidFill>
+              </a:rPr>
+              <a:t> </a:t>
+            </a:r>
+            <a:r>
+              <a:rPr lang="en-US" altLang="zh-CN" sz="4000" b="1" dirty="0">
+                <a:solidFill>
+                  <a:srgbClr val="00396B"/>
+                </a:solidFill>
+              </a:rPr>
+              <a:t>List</a:t>
+            </a:r>
+            <a:endParaRPr lang="en-US" sz="4000" b="1" dirty="0">
+              <a:solidFill>
+                <a:srgbClr val="00396B"/>
+              </a:solidFill>
+            </a:endParaRPr>
+          </a:p>
+        </p:txBody>
+      </p:sp>
+      <p:sp>
+        <p:nvSpPr>
+          <p:cNvPr id="3" name="Content Placeholder 2">
+            <a:extLst>
+              <a:ext uri="{FF2B5EF4-FFF2-40B4-BE49-F238E27FC236}">
+                <a16:creationId xmlns:a16="http://schemas.microsoft.com/office/drawing/2014/main" id="{266D992A-4FA0-9A94-37B2-8E36F82B8F86}"/>
+              </a:ext>
+            </a:extLst>
+          </p:cNvPr>
+          <p:cNvSpPr>
+            <a:spLocks noGrp="1"/>
+          </p:cNvSpPr>
+          <p:nvPr>
+            <p:ph idx="1"/>
+          </p:nvPr>
+        </p:nvSpPr>
+        <p:spPr>
+          <a:xfrm>
+            <a:off x="838200" y="2540000"/>
+            <a:ext cx="10515600" cy="3657600"/>
+          </a:xfrm>
+        </p:spPr>
+        <p:txBody>
+          <a:bodyPr>
+            <a:normAutofit/>
+          </a:bodyPr>
+          <a:lstStyle/>
+          <a:p>
+            <a:pPr marL="0" indent="0" algn="l">
+              <a:lnSpc>
+                <a:spcPct val="108000"/>
+              </a:lnSpc>
+              <a:spcBef>
+                <a:spcPts val="200"/>
+              </a:spcBef>
+              <a:spcAft>
+                <a:spcPts val="300"/>
+              </a:spcAft>
+              <a:buNone/>
+            </a:pPr>
+            <a:r>
+              <a:rPr lang="en-US" sz="2400" b="1" dirty="0">
+                <a:solidFill>
+                  <a:srgbClr val="0073CF"/>
+                </a:solidFill>
+              </a:rPr>
+              <a:t>To-Do List</a:t>
+            </a:r>
+          </a:p>
+          <a:p>
+            <a:pPr marL="457200" indent="-457200" algn="l">
+              <a:lnSpc>
+                <a:spcPct val="108000"/>
+              </a:lnSpc>
+              <a:spcBef>
+                <a:spcPts val="300"/>
+              </a:spcBef>
+              <a:spcAft>
+                <a:spcPts val="300"/>
+              </a:spcAft>
+              <a:buNone/>
+            </a:pPr>
+            <a:r>
+              <a:rPr lang="en-US" sz="2400" b="1" dirty="0">
+                <a:solidFill>
+                  <a:srgbClr val="0073CF"/>
+                </a:solidFill>
+              </a:rPr>
+              <a:t>1.  </a:t>
+            </a:r>
+            <a:r>
+              <a:rPr lang="en-US" sz="2400" dirty="0">
+                <a:solidFill>
+                  <a:srgbClr val="1A1A1A"/>
+                </a:solidFill>
+              </a:rPr>
+              <a:t>Reproduce AgentNet results</a:t>
+            </a:r>
+          </a:p>
+          <a:p>
+            <a:pPr marL="457200" indent="-457200" algn="l">
+              <a:lnSpc>
+                <a:spcPct val="108000"/>
+              </a:lnSpc>
+              <a:spcBef>
+                <a:spcPts val="300"/>
+              </a:spcBef>
+              <a:spcAft>
+                <a:spcPts val="300"/>
+              </a:spcAft>
+              <a:buNone/>
+            </a:pPr>
+            <a:r>
+              <a:rPr lang="en-US" sz="2400" b="1" dirty="0">
+                <a:solidFill>
+                  <a:srgbClr val="0073CF"/>
+                </a:solidFill>
+              </a:rPr>
+              <a:t>2.  </a:t>
+            </a:r>
+            <a:r>
+              <a:rPr lang="en-US" sz="2400" dirty="0">
+                <a:solidFill>
+                  <a:srgbClr val="1A1A1A"/>
+                </a:solidFill>
+              </a:rPr>
+              <a:t>Implement our idea on top of the AgentNet codebase</a:t>
+            </a:r>
+          </a:p>
+          <a:p>
+            <a:pPr marL="457200" indent="-457200" algn="l">
+              <a:lnSpc>
+                <a:spcPct val="108000"/>
+              </a:lnSpc>
+              <a:spcBef>
+                <a:spcPts val="300"/>
+              </a:spcBef>
+              <a:spcAft>
+                <a:spcPts val="500"/>
+              </a:spcAft>
+              <a:buNone/>
+            </a:pPr>
+            <a:r>
+              <a:rPr lang="en-US" sz="2400" b="1" dirty="0">
+                <a:solidFill>
+                  <a:srgbClr val="0073CF"/>
+                </a:solidFill>
+              </a:rPr>
+              <a:t>3.  </a:t>
+            </a:r>
+            <a:r>
+              <a:rPr lang="en-US" sz="2400" dirty="0">
+                <a:solidFill>
+                  <a:srgbClr val="1A1A1A"/>
+                </a:solidFill>
+              </a:rPr>
+              <a:t>Run extensive experiments on performance gain and convergence speed</a:t>
+            </a:r>
+          </a:p>
+          <a:p>
+            <a:pPr marL="0" indent="0" algn="l">
+              <a:lnSpc>
+                <a:spcPct val="108000"/>
+              </a:lnSpc>
+              <a:spcBef>
+                <a:spcPts val="600"/>
+              </a:spcBef>
+              <a:spcAft>
+                <a:spcPts val="200"/>
+              </a:spcAft>
+              <a:buNone/>
+            </a:pPr>
+            <a:r>
+              <a:rPr lang="en-US" sz="2400" b="1" dirty="0">
+                <a:solidFill>
+                  <a:srgbClr val="0073CF"/>
+                </a:solidFill>
+              </a:rPr>
+              <a:t>Reference</a:t>
+            </a:r>
+          </a:p>
+          <a:p>
+            <a:pPr marL="457200" indent="-457200" algn="l">
+              <a:lnSpc>
+                <a:spcPct val="108000"/>
+              </a:lnSpc>
+              <a:spcBef>
+                <a:spcPts val="200"/>
+              </a:spcBef>
+              <a:spcAft>
+                <a:spcPts val="200"/>
+              </a:spcAft>
+              <a:buFont typeface="Arial"/>
+              <a:buChar char="•"/>
+            </a:pPr>
+            <a:r>
+              <a:rPr lang="en-US" sz="2000" dirty="0">
+                <a:solidFill>
+                  <a:srgbClr val="1A1A1A"/>
+                </a:solidFill>
+              </a:rPr>
+              <a:t>Liu et al., “AgentNet: Decentralized Evolutionary Coordination for LLM-based Multi-Agent Systems,” arXiv:2504.00587, 2025</a:t>
+            </a:r>
+          </a:p>
+        </p:txBody>
+      </p:sp>
+      <p:sp>
+        <p:nvSpPr>
+          <p:cNvPr id="4" name="Slide Number Placeholder 3">
+            <a:extLst>
+              <a:ext uri="{FF2B5EF4-FFF2-40B4-BE49-F238E27FC236}">
+                <a16:creationId xmlns:a16="http://schemas.microsoft.com/office/drawing/2014/main" id="{EE8CD026-3B59-15A5-1B5F-B87C7520064D}"/>
+              </a:ext>
+            </a:extLst>
+          </p:cNvPr>
+          <p:cNvSpPr>
+            <a:spLocks noGrp="1"/>
+          </p:cNvSpPr>
+          <p:nvPr>
+            <p:ph type="sldNum" sz="quarter" idx="12"/>
+          </p:nvPr>
+        </p:nvSpPr>
+        <p:spPr>
+          <a:xfrm>
+            <a:off x="10210800" y="6451600"/>
+            <a:ext cx="1524000" cy="304800"/>
+          </a:xfrm>
+        </p:spPr>
+        <p:txBody>
+          <a:bodyPr anchor="ctr" anchorCtr="0"/>
+          <a:lstStyle/>
+          <a:p>
+            <a:fld id="{FC0A7A6B-4B1F-5446-A3A1-99DEB5EA7F81}" type="slidenum">
+              <a:rPr lang="en-CN" smtClean="0">
+                <a:solidFill>
+                  <a:srgbClr val="9AA7B5"/>
+                </a:solidFill>
+              </a:rPr>
+              <a:t>18</a:t>
+            </a:fld>
+            <a:endParaRPr lang="en-CN">
+              <a:solidFill>
+                <a:srgbClr val="9AA7B5"/>
+              </a:solidFill>
+            </a:endParaRPr>
+          </a:p>
+        </p:txBody>
+      </p:sp>
+      <p:sp>
+        <p:nvSpPr>
+          <p:cNvPr id="6" name="Accent Rule">
+            <a:extLst>
+              <a:ext uri="{FF2B5EF4-FFF2-40B4-BE49-F238E27FC236}">
+                <a16:creationId xmlns:a16="http://schemas.microsoft.com/office/drawing/2014/main" id="{03073E4E-2B73-0632-B919-06FE618E67E6}"/>
+              </a:ext>
+            </a:extLst>
+          </p:cNvPr>
+          <p:cNvSpPr/>
+          <p:nvPr/>
+        </p:nvSpPr>
+        <p:spPr>
+          <a:xfrm>
+            <a:off x="838200" y="2209800"/>
+            <a:ext cx="1524000" cy="76200"/>
+          </a:xfrm>
+          <a:prstGeom prst="rect">
+            <a:avLst/>
+          </a:prstGeom>
+          <a:solidFill>
+            <a:srgbClr val="0073CF"/>
+          </a:solidFill>
+          <a:ln w="12700" cap="flat" cmpd="sng" algn="ctr">
+            <a:noFill/>
+            <a:prstDash val="solid"/>
+            <a:miter lim="800000"/>
+          </a:ln>
+        </p:spPr>
+        <p:style>
+          <a:lnRef idx="2">
+            <a:schemeClr val="accent1">
+              <a:shade val="15000"/>
+            </a:schemeClr>
+          </a:lnRef>
+          <a:fillRef idx="1">
+            <a:schemeClr val="accent1"/>
+          </a:fillRef>
+          <a:effectRef idx="0">
+            <a:schemeClr val="accent1"/>
+          </a:effectRef>
+          <a:fontRef idx="minor">
+            <a:schemeClr val="lt1"/>
+          </a:fontRef>
+        </p:style>
+        <p:txBody>
+          <a:bodyPr vertOverflow="clip" horzOverflow="clip" rtlCol="0" anchor="t"/>
+          <a:lstStyle/>
+          <a:p>
+            <a:pPr algn="l"/>
+            <a:endParaRPr lang="en-CN"/>
+          </a:p>
+        </p:txBody>
+      </p:sp>
+      <p:pic>
+        <p:nvPicPr>
+          <p:cNvPr id="7" name="Copied Picture 7">
+            <a:extLst>
+              <a:ext uri="{FF2B5EF4-FFF2-40B4-BE49-F238E27FC236}">
+                <a16:creationId xmlns:a16="http://schemas.microsoft.com/office/drawing/2014/main" id="{8AFA1466-9172-5B6C-CD5C-61703720EAC0}"/>
+              </a:ext>
+            </a:extLst>
+          </p:cNvPr>
+          <p:cNvPicPr>
+            <a:picLocks noChangeAspect="1"/>
+          </p:cNvPicPr>
+          <p:nvPr/>
+        </p:nvPicPr>
+        <p:blipFill>
+          <a:blip r:embed="rId2"/>
+          <a:stretch>
+            <a:fillRect/>
+          </a:stretch>
+        </p:blipFill>
+        <p:spPr>
+          <a:xfrm>
+            <a:off x="838200" y="508000"/>
+            <a:ext cx="762000" cy="762000"/>
+          </a:xfrm>
+          <a:prstGeom prst="rect">
+            <a:avLst/>
+          </a:prstGeom>
+        </p:spPr>
+      </p:pic>
+      <p:sp>
+        <p:nvSpPr>
+          <p:cNvPr id="10" name="Footer Name">
+            <a:extLst>
+              <a:ext uri="{FF2B5EF4-FFF2-40B4-BE49-F238E27FC236}">
+                <a16:creationId xmlns:a16="http://schemas.microsoft.com/office/drawing/2014/main" id="{B4C861B5-77BD-9EFC-A5F0-21D64EBAEB5A}"/>
+              </a:ext>
+            </a:extLst>
+          </p:cNvPr>
+          <p:cNvSpPr txBox="1"/>
+          <p:nvPr/>
+        </p:nvSpPr>
+        <p:spPr>
+          <a:xfrm>
+            <a:off x="838200" y="6350000"/>
+            <a:ext cx="5080000" cy="508000"/>
+          </a:xfrm>
+          <a:prstGeom prst="rect">
+            <a:avLst/>
+          </a:prstGeom>
+          <a:noFill/>
+        </p:spPr>
+        <p:txBody>
+          <a:bodyPr vertOverflow="overflow" vert="horz" wrap="none" rtlCol="0" anchor="ctr" anchorCtr="0">
+            <a:noAutofit/>
+          </a:bodyPr>
+          <a:lstStyle/>
+          <a:p>
+            <a:pPr algn="l">
+              <a:buNone/>
+            </a:pPr>
+            <a:r>
+              <a:rPr lang="en-US" sz="1400" b="1" spc="200" dirty="0">
+                <a:solidFill>
+                  <a:srgbClr val="FFFFFF"/>
+                </a:solidFill>
+              </a:rPr>
+              <a:t>Quan Wei</a:t>
+            </a:r>
+            <a:r>
+              <a:rPr lang="en-US" sz="1400" b="1" spc="200" dirty="0">
+                <a:solidFill>
+                  <a:srgbClr val="9AA7B5"/>
+                </a:solidFill>
+              </a:rPr>
+              <a:t>   |   </a:t>
+            </a:r>
+            <a:r>
+              <a:rPr lang="en-US" sz="1400" b="1" spc="200" dirty="0">
+                <a:solidFill>
+                  <a:srgbClr val="FFFFFF"/>
+                </a:solidFill>
+              </a:rPr>
+              <a:t>WEEK 2</a:t>
+            </a:r>
+          </a:p>
+        </p:txBody>
+      </p:sp>
+    </p:spTree>
+    <p:extLst>
+      <p:ext uri="{BB962C8B-B14F-4D97-AF65-F5344CB8AC3E}">
+        <p14:creationId xmlns:p14="http://schemas.microsoft.com/office/powerpoint/2010/main" val="3376119073"/>
       </p:ext>
     </p:extLst>
   </p:cSld>
@@ -6717,7 +9472,7 @@
               <a:buNone/>
             </a:pPr>
             <a:r>
-              <a:rPr lang="en-US" sz="4800" b="1" dirty="0">
+              <a:rPr lang="en-US" sz="4000" b="1" dirty="0">
                 <a:solidFill>
                   <a:srgbClr val="00396B"/>
                 </a:solidFill>
@@ -7034,7 +9789,7 @@
               <a:buNone/>
             </a:pPr>
             <a:r>
-              <a:rPr lang="en-US" sz="4800" b="1" dirty="0">
+              <a:rPr lang="en-US" sz="4000" b="1" dirty="0">
                 <a:solidFill>
                   <a:srgbClr val="00396B"/>
                 </a:solidFill>
@@ -7355,14 +10110,16 @@
           </a:xfrm>
         </p:spPr>
         <p:txBody>
-          <a:bodyPr anchor="t" anchorCtr="0"/>
+          <a:bodyPr anchor="t" anchorCtr="0">
+            <a:normAutofit/>
+          </a:bodyPr>
           <a:lstStyle/>
           <a:p>
             <a:pPr algn="l">
               <a:buNone/>
             </a:pPr>
             <a:r>
-              <a:rPr lang="en-US" sz="3200" b="1" dirty="0">
+              <a:rPr lang="en-US" sz="4000" b="1" dirty="0">
                 <a:solidFill>
                   <a:srgbClr val="00396B"/>
                 </a:solidFill>
@@ -7370,7 +10127,7 @@
               <a:t>Project</a:t>
             </a:r>
             <a:r>
-              <a:rPr lang="zh-CN" altLang="en-US" sz="3200" b="1" dirty="0">
+              <a:rPr lang="zh-CN" altLang="en-US" sz="4000" b="1" dirty="0">
                 <a:solidFill>
                   <a:srgbClr val="00396B"/>
                 </a:solidFill>
@@ -7378,14 +10135,14 @@
               <a:t> </a:t>
             </a:r>
             <a:r>
-              <a:rPr lang="en-US" altLang="zh-CN" sz="3200" b="1" dirty="0">
+              <a:rPr lang="en-US" altLang="zh-CN" sz="4000" b="1" dirty="0">
                 <a:solidFill>
                   <a:srgbClr val="00396B"/>
                 </a:solidFill>
               </a:rPr>
               <a:t>Overview</a:t>
             </a:r>
-            <a:endParaRPr lang="en-US" sz="3200" b="1" dirty="0">
+            <a:endParaRPr lang="en-US" sz="4000" b="1" dirty="0">
               <a:solidFill>
                 <a:srgbClr val="00396B"/>
               </a:solidFill>
@@ -7416,7 +10173,9 @@
           </a:xfrm>
         </p:spPr>
         <p:txBody>
-          <a:bodyPr/>
+          <a:bodyPr>
+            <a:normAutofit/>
+          </a:bodyPr>
           <a:lstStyle/>
           <a:p>
             <a:pPr>
@@ -7619,7 +10378,9 @@
           </a:ln>
         </p:spPr>
         <p:txBody>
-          <a:bodyPr wrap="square" lIns="228600" tIns="177800" rIns="228600" bIns="177800" anchor="t"/>
+          <a:bodyPr wrap="square" lIns="228600" tIns="177800" rIns="228600" bIns="177800" anchor="t">
+            <a:normAutofit/>
+          </a:bodyPr>
           <a:lstStyle/>
           <a:p>
             <a:pPr marL="0" indent="0" algn="l">
@@ -7762,7 +10523,9 @@
           </a:ln>
         </p:spPr>
         <p:txBody>
-          <a:bodyPr wrap="square" lIns="228600" tIns="177800" rIns="228600" bIns="177800" anchor="t"/>
+          <a:bodyPr wrap="square" lIns="228600" tIns="177800" rIns="228600" bIns="177800" anchor="t">
+            <a:normAutofit/>
+          </a:bodyPr>
           <a:lstStyle/>
           <a:p>
             <a:pPr marL="254000" indent="-254000" algn="l">
@@ -8021,11 +10784,13 @@
           </a:xfrm>
         </p:spPr>
         <p:txBody>
-          <a:bodyPr anchor="t" anchorCtr="0"/>
-          <a:lstStyle/>
-          <a:p>
-            <a:r>
-              <a:rPr lang="en-US" altLang="zh-CN" sz="3200" b="1" dirty="0">
+          <a:bodyPr anchor="t" anchorCtr="0">
+            <a:normAutofit/>
+          </a:bodyPr>
+          <a:lstStyle/>
+          <a:p>
+            <a:r>
+              <a:rPr lang="en-US" altLang="zh-CN" sz="4000" b="1" dirty="0">
                 <a:solidFill>
                   <a:srgbClr val="00396B"/>
                 </a:solidFill>
@@ -8033,7 +10798,7 @@
               <a:t>Project</a:t>
             </a:r>
             <a:r>
-              <a:rPr lang="zh-CN" altLang="en-US" sz="3200" b="1" dirty="0">
+              <a:rPr lang="zh-CN" altLang="en-US" sz="4000" b="1" dirty="0">
                 <a:solidFill>
                   <a:srgbClr val="00396B"/>
                 </a:solidFill>
@@ -8041,7 +10806,7 @@
               <a:t> </a:t>
             </a:r>
             <a:r>
-              <a:rPr lang="en-US" sz="3200" b="1" dirty="0">
+              <a:rPr lang="en-US" sz="4000" b="1" dirty="0">
                 <a:solidFill>
                   <a:srgbClr val="00396B"/>
                 </a:solidFill>
@@ -8089,7 +10854,7 @@
               <a:buNone/>
             </a:pPr>
             <a:r>
-              <a:rPr lang="en-US" sz="2000" b="1" dirty="0">
+              <a:rPr lang="en-US" sz="1600" b="1" dirty="0">
                 <a:solidFill>
                   <a:srgbClr val="00396B"/>
                 </a:solidFill>
@@ -8303,13 +11068,7 @@
           <p:cNvGraphicFramePr>
             <a:graphicFrameLocks noGrp="1"/>
           </p:cNvGraphicFramePr>
-          <p:nvPr>
-            <p:extLst>
-              <p:ext uri="{D42A27DB-BD31-4B8C-83A1-F6EECF244321}">
-                <p14:modId xmlns:p14="http://schemas.microsoft.com/office/powerpoint/2010/main" val="2998387024"/>
-              </p:ext>
-            </p:extLst>
-          </p:nvPr>
+          <p:nvPr/>
         </p:nvGraphicFramePr>
         <p:xfrm>
           <a:off x="838200" y="2971800"/>
@@ -8674,7 +11433,7 @@
         </p:spPr>
         <p:txBody>
           <a:bodyPr vertOverflow="overflow" vert="horz" wrap="square" rtlCol="0" anchor="t">
-            <a:noAutofit/>
+            <a:normAutofit/>
           </a:bodyPr>
           <a:lstStyle/>
           <a:p>
@@ -8792,7 +11551,7 @@
     </p:spTree>
     <p:extLst>
       <p:ext uri="{BB962C8B-B14F-4D97-AF65-F5344CB8AC3E}">
-        <p14:creationId xmlns:p14="http://schemas.microsoft.com/office/powerpoint/2010/main" val="2778514529"/>
+        <p14:creationId xmlns:p14="http://schemas.microsoft.com/office/powerpoint/2010/main" val="1940943530"/>
       </p:ext>
     </p:extLst>
   </p:cSld>
@@ -8902,11 +11661,13 @@
           </a:xfrm>
         </p:spPr>
         <p:txBody>
-          <a:bodyPr anchor="t" anchorCtr="0"/>
-          <a:lstStyle/>
-          <a:p>
-            <a:r>
-              <a:rPr lang="en-US" sz="3200" b="1" dirty="0">
+          <a:bodyPr anchor="t" anchorCtr="0">
+            <a:normAutofit/>
+          </a:bodyPr>
+          <a:lstStyle/>
+          <a:p>
+            <a:r>
+              <a:rPr lang="en-US" sz="4000" b="1" dirty="0">
                 <a:solidFill>
                   <a:srgbClr val="00396B"/>
                 </a:solidFill>
@@ -8914,7 +11675,7 @@
               <a:t>Project</a:t>
             </a:r>
             <a:r>
-              <a:rPr lang="zh-CN" altLang="en-US" sz="3200" b="1" dirty="0">
+              <a:rPr lang="zh-CN" altLang="en-US" sz="4000" b="1" dirty="0">
                 <a:solidFill>
                   <a:srgbClr val="00396B"/>
                 </a:solidFill>
@@ -8922,14 +11683,14 @@
               <a:t> </a:t>
             </a:r>
             <a:r>
-              <a:rPr lang="en-US" altLang="zh-CN" sz="3200" b="1" dirty="0">
+              <a:rPr lang="en-US" altLang="zh-CN" sz="4000" b="1" dirty="0">
                 <a:solidFill>
                   <a:srgbClr val="00396B"/>
                 </a:solidFill>
               </a:rPr>
               <a:t>Plan</a:t>
             </a:r>
-            <a:endParaRPr lang="en-US" sz="3200" b="1" dirty="0">
+            <a:endParaRPr lang="en-US" sz="4000" b="1" dirty="0">
               <a:solidFill>
                 <a:srgbClr val="00396B"/>
               </a:solidFill>
@@ -8961,7 +11722,7 @@
         </p:spPr>
         <p:txBody>
           <a:bodyPr>
-            <a:normAutofit/>
+            <a:normAutofit fontScale="92500" lnSpcReduction="10000"/>
           </a:bodyPr>
           <a:lstStyle/>
           <a:p>
@@ -8975,7 +11736,7 @@
               <a:buNone/>
             </a:pPr>
             <a:r>
-              <a:rPr lang="en-US" sz="1900" b="1" dirty="0">
+              <a:rPr lang="en-US" sz="2400" b="1" dirty="0">
                 <a:solidFill>
                   <a:srgbClr val="00396B"/>
                 </a:solidFill>
@@ -8991,11 +11752,14 @@
               <a:spcAft>
                 <a:spcPts val="300"/>
               </a:spcAft>
+              <a:buClr>
+                <a:srgbClr val="0073CF"/>
+              </a:buClr>
               <a:buFont typeface="Arial"/>
               <a:buChar char="•"/>
             </a:pPr>
             <a:r>
-              <a:rPr lang="en-US" sz="1600" b="1" dirty="0">
+              <a:rPr lang="en-US" sz="2400" b="1" dirty="0">
                 <a:solidFill>
                   <a:srgbClr val="1A1A1A"/>
                 </a:solidFill>
@@ -9003,7 +11767,7 @@
               <a:t>Closed-source (API): </a:t>
             </a:r>
             <a:r>
-              <a:rPr lang="en-US" sz="1600" dirty="0">
+              <a:rPr lang="en-US" sz="2400" dirty="0">
                 <a:solidFill>
                   <a:srgbClr val="1A1A1A"/>
                 </a:solidFill>
@@ -9019,11 +11783,14 @@
               <a:spcAft>
                 <a:spcPts val="300"/>
               </a:spcAft>
+              <a:buClr>
+                <a:srgbClr val="0073CF"/>
+              </a:buClr>
               <a:buFont typeface="Arial"/>
               <a:buChar char="•"/>
             </a:pPr>
             <a:r>
-              <a:rPr lang="en-US" sz="1600" b="1" dirty="0">
+              <a:rPr lang="en-US" sz="2400" b="1" dirty="0">
                 <a:solidFill>
                   <a:srgbClr val="1A1A1A"/>
                 </a:solidFill>
@@ -9031,7 +11798,7 @@
               <a:t>Open-source: </a:t>
             </a:r>
             <a:r>
-              <a:rPr lang="en-US" sz="1600" dirty="0">
+              <a:rPr lang="en-US" sz="2400" dirty="0">
                 <a:solidFill>
                   <a:srgbClr val="1A1A1A"/>
                 </a:solidFill>
@@ -9050,7 +11817,7 @@
               <a:buNone/>
             </a:pPr>
             <a:r>
-              <a:rPr lang="en-US" sz="1900" b="1" dirty="0">
+              <a:rPr lang="en-US" sz="2400" b="1" dirty="0">
                 <a:solidFill>
                   <a:srgbClr val="00396B"/>
                 </a:solidFill>
@@ -9066,11 +11833,14 @@
               <a:spcAft>
                 <a:spcPts val="300"/>
               </a:spcAft>
+              <a:buClr>
+                <a:srgbClr val="0073CF"/>
+              </a:buClr>
               <a:buFont typeface="Arial"/>
               <a:buChar char="•"/>
             </a:pPr>
             <a:r>
-              <a:rPr lang="en-US" sz="1600" b="1" dirty="0">
+              <a:rPr lang="en-US" sz="2400" b="1" dirty="0">
                 <a:solidFill>
                   <a:srgbClr val="1A1A1A"/>
                 </a:solidFill>
@@ -9078,7 +11848,7 @@
               <a:t>Deep Search: </a:t>
             </a:r>
             <a:r>
-              <a:rPr lang="en-US" sz="1600" dirty="0">
+              <a:rPr lang="en-US" sz="2400" dirty="0">
                 <a:solidFill>
                   <a:srgbClr val="1A1A1A"/>
                 </a:solidFill>
@@ -9094,11 +11864,14 @@
               <a:spcAft>
                 <a:spcPts val="300"/>
               </a:spcAft>
+              <a:buClr>
+                <a:srgbClr val="0073CF"/>
+              </a:buClr>
               <a:buFont typeface="Arial"/>
               <a:buChar char="•"/>
             </a:pPr>
             <a:r>
-              <a:rPr lang="en-US" sz="1600" b="1" dirty="0">
+              <a:rPr lang="en-US" sz="2400" b="1" dirty="0">
                 <a:solidFill>
                   <a:srgbClr val="1A1A1A"/>
                 </a:solidFill>
@@ -9106,7 +11879,7 @@
               <a:t>Deep Research: </a:t>
             </a:r>
             <a:r>
-              <a:rPr lang="en-US" sz="1600" dirty="0">
+              <a:rPr lang="en-US" sz="2400" dirty="0">
                 <a:solidFill>
                   <a:srgbClr val="1A1A1A"/>
                 </a:solidFill>
@@ -9122,11 +11895,14 @@
               <a:spcAft>
                 <a:spcPts val="300"/>
               </a:spcAft>
+              <a:buClr>
+                <a:srgbClr val="0073CF"/>
+              </a:buClr>
               <a:buFont typeface="Arial"/>
               <a:buChar char="•"/>
             </a:pPr>
             <a:r>
-              <a:rPr lang="en-US" sz="1600" b="1" dirty="0">
+              <a:rPr lang="en-US" sz="2400" b="1" dirty="0">
                 <a:solidFill>
                   <a:srgbClr val="1A1A1A"/>
                 </a:solidFill>
@@ -9134,7 +11910,7 @@
               <a:t>Code Generation: </a:t>
             </a:r>
             <a:r>
-              <a:rPr lang="en-US" sz="1600" dirty="0">
+              <a:rPr lang="en-US" sz="2400" dirty="0">
                 <a:solidFill>
                   <a:srgbClr val="1A1A1A"/>
                 </a:solidFill>
@@ -9153,7 +11929,7 @@
               <a:buNone/>
             </a:pPr>
             <a:r>
-              <a:rPr lang="en-US" sz="1900" b="1" dirty="0">
+              <a:rPr lang="en-US" sz="2400" b="1" dirty="0">
                 <a:solidFill>
                   <a:srgbClr val="00396B"/>
                 </a:solidFill>
@@ -9169,11 +11945,14 @@
               <a:spcAft>
                 <a:spcPts val="300"/>
               </a:spcAft>
+              <a:buClr>
+                <a:srgbClr val="0073CF"/>
+              </a:buClr>
               <a:buFont typeface="Arial"/>
               <a:buChar char="•"/>
             </a:pPr>
             <a:r>
-              <a:rPr lang="en-US" sz="1600" b="1" dirty="0">
+              <a:rPr lang="en-US" sz="2400" b="1" dirty="0">
                 <a:solidFill>
                   <a:srgbClr val="1A1A1A"/>
                 </a:solidFill>
@@ -9181,7 +11960,7 @@
               <a:t>Quality: </a:t>
             </a:r>
             <a:r>
-              <a:rPr lang="en-US" sz="1600" dirty="0">
+              <a:rPr lang="en-US" sz="2400" dirty="0">
                 <a:solidFill>
                   <a:srgbClr val="1A1A1A"/>
                 </a:solidFill>
@@ -9197,11 +11976,14 @@
               <a:spcAft>
                 <a:spcPts val="300"/>
               </a:spcAft>
+              <a:buClr>
+                <a:srgbClr val="0073CF"/>
+              </a:buClr>
               <a:buFont typeface="Arial"/>
               <a:buChar char="•"/>
             </a:pPr>
             <a:r>
-              <a:rPr lang="en-US" sz="1600" b="1" dirty="0">
+              <a:rPr lang="en-US" sz="2400" b="1" dirty="0">
                 <a:solidFill>
                   <a:srgbClr val="1A1A1A"/>
                 </a:solidFill>
@@ -9209,7 +11991,7 @@
               <a:t>Efficiency: </a:t>
             </a:r>
             <a:r>
-              <a:rPr lang="en-US" sz="1600" dirty="0">
+              <a:rPr lang="en-US" sz="2400" dirty="0">
                 <a:solidFill>
                   <a:srgbClr val="1A1A1A"/>
                 </a:solidFill>
@@ -9406,7 +12188,7 @@
     </p:spTree>
     <p:extLst>
       <p:ext uri="{BB962C8B-B14F-4D97-AF65-F5344CB8AC3E}">
-        <p14:creationId xmlns:p14="http://schemas.microsoft.com/office/powerpoint/2010/main" val="1557384389"/>
+        <p14:creationId xmlns:p14="http://schemas.microsoft.com/office/powerpoint/2010/main" val="3554688405"/>
       </p:ext>
     </p:extLst>
   </p:cSld>
@@ -9541,7 +12323,7 @@
               <a:buNone/>
             </a:pPr>
             <a:r>
-              <a:rPr lang="en-US" sz="4800" b="1" dirty="0">
+              <a:rPr lang="en-US" sz="4000" b="1" dirty="0">
                 <a:solidFill>
                   <a:srgbClr val="00396B"/>
                 </a:solidFill>
@@ -9868,11 +12650,13 @@
           </a:xfrm>
         </p:spPr>
         <p:txBody>
-          <a:bodyPr anchor="t" anchorCtr="0"/>
-          <a:lstStyle/>
-          <a:p>
-            <a:r>
-              <a:rPr lang="en-US" sz="3200" b="1" dirty="0">
+          <a:bodyPr anchor="t" anchorCtr="0">
+            <a:normAutofit/>
+          </a:bodyPr>
+          <a:lstStyle/>
+          <a:p>
+            <a:r>
+              <a:rPr lang="en-US" sz="4000" b="1" dirty="0">
                 <a:solidFill>
                   <a:srgbClr val="00396B"/>
                 </a:solidFill>
@@ -9906,7 +12690,7 @@
         </p:spPr>
         <p:txBody>
           <a:bodyPr anchor="ctr" anchorCtr="0">
-            <a:normAutofit/>
+            <a:normAutofit lnSpcReduction="10000"/>
           </a:bodyPr>
           <a:lstStyle/>
           <a:p>
@@ -9917,7 +12701,7 @@
               <a:buNone/>
             </a:pPr>
             <a:r>
-              <a:rPr lang="en-US" sz="1600" i="1" dirty="0">
+              <a:rPr lang="en-US" sz="2200" i="1" dirty="0">
                 <a:solidFill>
                   <a:srgbClr val="6E7B8B"/>
                 </a:solidFill>
@@ -9936,7 +12720,7 @@
               <a:buNone/>
             </a:pPr>
             <a:r>
-              <a:rPr lang="en-US" sz="1800" b="1" dirty="0">
+              <a:rPr lang="en-US" sz="2200" b="1" dirty="0">
                 <a:solidFill>
                   <a:srgbClr val="0073CF"/>
                 </a:solidFill>
@@ -9944,7 +12728,7 @@
               <a:t>RQ1</a:t>
             </a:r>
             <a:r>
-              <a:rPr lang="en-US" sz="1800" b="1" dirty="0">
+              <a:rPr lang="en-US" sz="2200" b="1" dirty="0">
                 <a:solidFill>
                   <a:srgbClr val="00396B"/>
                 </a:solidFill>
@@ -9963,11 +12747,14 @@
               <a:spcAft>
                 <a:spcPts val="150"/>
               </a:spcAft>
+              <a:buClr>
+                <a:srgbClr val="0073CF"/>
+              </a:buClr>
               <a:buFont typeface="Arial"/>
               <a:buChar char="•"/>
             </a:pPr>
             <a:r>
-              <a:rPr lang="en-US" sz="1600" dirty="0">
+              <a:rPr lang="en-US" sz="2200" dirty="0">
                 <a:solidFill>
                   <a:srgbClr val="3A3A3C"/>
                 </a:solidFill>
@@ -9986,11 +12773,14 @@
               <a:spcAft>
                 <a:spcPts val="150"/>
               </a:spcAft>
+              <a:buClr>
+                <a:srgbClr val="0073CF"/>
+              </a:buClr>
               <a:buFont typeface="Arial"/>
               <a:buChar char="•"/>
             </a:pPr>
             <a:r>
-              <a:rPr lang="en-US" sz="1600" b="1" dirty="0">
+              <a:rPr lang="en-US" sz="2200" b="1" dirty="0">
                 <a:solidFill>
                   <a:srgbClr val="00396B"/>
                 </a:solidFill>
@@ -9998,7 +12788,7 @@
               <a:t>Approach: </a:t>
             </a:r>
             <a:r>
-              <a:rPr lang="en-US" sz="1600" dirty="0">
+              <a:rPr lang="en-US" sz="2200" dirty="0">
                 <a:solidFill>
                   <a:srgbClr val="3A3A3C"/>
                 </a:solidFill>
@@ -10017,7 +12807,7 @@
               <a:buNone/>
             </a:pPr>
             <a:r>
-              <a:rPr lang="en-US" sz="1800" b="1" dirty="0">
+              <a:rPr lang="en-US" sz="2200" b="1" dirty="0">
                 <a:solidFill>
                   <a:srgbClr val="0073CF"/>
                 </a:solidFill>
@@ -10025,7 +12815,7 @@
               <a:t>RQ2</a:t>
             </a:r>
             <a:r>
-              <a:rPr lang="en-US" sz="1800" b="1" dirty="0">
+              <a:rPr lang="en-US" sz="2200" b="1" dirty="0">
                 <a:solidFill>
                   <a:srgbClr val="00396B"/>
                 </a:solidFill>
@@ -10044,11 +12834,14 @@
               <a:spcAft>
                 <a:spcPts val="150"/>
               </a:spcAft>
+              <a:buClr>
+                <a:srgbClr val="0073CF"/>
+              </a:buClr>
               <a:buFont typeface="Arial"/>
               <a:buChar char="•"/>
             </a:pPr>
             <a:r>
-              <a:rPr lang="en-US" sz="1600" dirty="0">
+              <a:rPr lang="en-US" sz="2200" dirty="0">
                 <a:solidFill>
                   <a:srgbClr val="3A3A3C"/>
                 </a:solidFill>
@@ -10067,11 +12860,14 @@
               <a:spcAft>
                 <a:spcPts val="150"/>
               </a:spcAft>
+              <a:buClr>
+                <a:srgbClr val="0073CF"/>
+              </a:buClr>
               <a:buFont typeface="Arial"/>
               <a:buChar char="•"/>
             </a:pPr>
             <a:r>
-              <a:rPr lang="en-US" sz="1600" b="1" dirty="0">
+              <a:rPr lang="en-US" sz="2200" b="1" dirty="0">
                 <a:solidFill>
                   <a:srgbClr val="00396B"/>
                 </a:solidFill>
@@ -10079,7 +12875,7 @@
               <a:t>Approach: </a:t>
             </a:r>
             <a:r>
-              <a:rPr lang="en-US" sz="1600" dirty="0">
+              <a:rPr lang="en-US" sz="2200" dirty="0">
                 <a:solidFill>
                   <a:srgbClr val="3A3A3C"/>
                 </a:solidFill>
@@ -10276,7 +13072,7 @@
     </p:spTree>
     <p:extLst>
       <p:ext uri="{BB962C8B-B14F-4D97-AF65-F5344CB8AC3E}">
-        <p14:creationId xmlns:p14="http://schemas.microsoft.com/office/powerpoint/2010/main" val="2708186"/>
+        <p14:creationId xmlns:p14="http://schemas.microsoft.com/office/powerpoint/2010/main" val="41267842"/>
       </p:ext>
     </p:extLst>
   </p:cSld>
@@ -10386,11 +13182,13 @@
           </a:xfrm>
         </p:spPr>
         <p:txBody>
-          <a:bodyPr anchor="t" anchorCtr="0"/>
-          <a:lstStyle/>
-          <a:p>
-            <a:r>
-              <a:rPr lang="en-US" sz="3200" b="1" dirty="0">
+          <a:bodyPr anchor="t" anchorCtr="0">
+            <a:normAutofit/>
+          </a:bodyPr>
+          <a:lstStyle/>
+          <a:p>
+            <a:r>
+              <a:rPr lang="en-US" sz="4000" b="1" dirty="0">
                 <a:solidFill>
                   <a:srgbClr val="00396B"/>
                 </a:solidFill>
@@ -10424,7 +13222,7 @@
         </p:spPr>
         <p:txBody>
           <a:bodyPr anchor="t" anchorCtr="0">
-            <a:normAutofit/>
+            <a:normAutofit lnSpcReduction="10000"/>
           </a:bodyPr>
           <a:lstStyle/>
           <a:p>
@@ -10441,7 +13239,7 @@
               <a:buNone/>
             </a:pPr>
             <a:r>
-              <a:rPr lang="en-US" sz="1600" b="1" dirty="0">
+              <a:rPr lang="en-US" sz="2000" b="1" dirty="0">
                 <a:solidFill>
                   <a:srgbClr val="00396B"/>
                 </a:solidFill>
@@ -10449,7 +13247,7 @@
               <a:t>Agent = Model + Harness</a:t>
             </a:r>
             <a:r>
-              <a:rPr lang="en-US" sz="1600" dirty="0">
+              <a:rPr lang="en-US" sz="2000" dirty="0">
                 <a:solidFill>
                   <a:srgbClr val="3A3A3C"/>
                 </a:solidFill>
@@ -10471,7 +13269,7 @@
               <a:buNone/>
             </a:pPr>
             <a:r>
-              <a:rPr lang="en-US" sz="1600" b="1" dirty="0">
+              <a:rPr lang="en-US" sz="2000" b="1" dirty="0">
                 <a:solidFill>
                   <a:srgbClr val="00396B"/>
                 </a:solidFill>
@@ -10490,7 +13288,7 @@
               <a:buNone/>
             </a:pPr>
             <a:r>
-              <a:rPr lang="en-US" sz="1800" b="1" dirty="0">
+              <a:rPr lang="en-US" sz="2000" b="1" dirty="0">
                 <a:solidFill>
                   <a:srgbClr val="0073CF"/>
                 </a:solidFill>
@@ -10509,11 +13307,14 @@
               <a:spcAft>
                 <a:spcPts val="120"/>
               </a:spcAft>
+              <a:buClr>
+                <a:srgbClr val="0073CF"/>
+              </a:buClr>
               <a:buFont typeface="Arial"/>
               <a:buChar char="•"/>
             </a:pPr>
             <a:r>
-              <a:rPr lang="en-US" sz="1600" b="1" dirty="0">
+              <a:rPr lang="en-US" sz="2000" b="1" dirty="0">
                 <a:solidFill>
                   <a:srgbClr val="00396B"/>
                 </a:solidFill>
@@ -10521,7 +13322,7 @@
               <a:t>Centralized — </a:t>
             </a:r>
             <a:r>
-              <a:rPr lang="en-US" sz="1600" dirty="0">
+              <a:rPr lang="en-US" sz="2000" dirty="0">
                 <a:solidFill>
                   <a:srgbClr val="3A3A3C"/>
                 </a:solidFill>
@@ -10540,11 +13341,14 @@
               <a:spcAft>
                 <a:spcPts val="120"/>
               </a:spcAft>
+              <a:buClr>
+                <a:srgbClr val="0073CF"/>
+              </a:buClr>
               <a:buFont typeface="Arial"/>
               <a:buChar char="•"/>
             </a:pPr>
             <a:r>
-              <a:rPr lang="en-US" sz="1600" b="1" dirty="0">
+              <a:rPr lang="en-US" sz="2000" b="1" dirty="0">
                 <a:solidFill>
                   <a:srgbClr val="00396B"/>
                 </a:solidFill>
@@ -10552,7 +13356,7 @@
               <a:t>Decentralized — </a:t>
             </a:r>
             <a:r>
-              <a:rPr lang="en-US" sz="1600" dirty="0">
+              <a:rPr lang="en-US" sz="2000" dirty="0">
                 <a:solidFill>
                   <a:srgbClr val="3A3A3C"/>
                 </a:solidFill>
@@ -10571,7 +13375,7 @@
               <a:buNone/>
             </a:pPr>
             <a:r>
-              <a:rPr lang="en-US" sz="1800" b="1" dirty="0">
+              <a:rPr lang="en-US" sz="2000" b="1" dirty="0">
                 <a:solidFill>
                   <a:srgbClr val="0073CF"/>
                 </a:solidFill>
@@ -10590,11 +13394,14 @@
               <a:spcAft>
                 <a:spcPts val="120"/>
               </a:spcAft>
+              <a:buClr>
+                <a:srgbClr val="0073CF"/>
+              </a:buClr>
               <a:buFont typeface="Arial"/>
               <a:buChar char="•"/>
             </a:pPr>
             <a:r>
-              <a:rPr lang="en-US" sz="1600" b="1" dirty="0">
+              <a:rPr lang="en-US" sz="2000" b="1" dirty="0">
                 <a:solidFill>
                   <a:srgbClr val="00396B"/>
                 </a:solidFill>
@@ -10602,7 +13409,7 @@
               <a:t>Executor — </a:t>
             </a:r>
             <a:r>
-              <a:rPr lang="en-US" sz="1600" dirty="0">
+              <a:rPr lang="en-US" sz="2000" dirty="0">
                 <a:solidFill>
                   <a:srgbClr val="3A3A3C"/>
                 </a:solidFill>
@@ -10621,11 +13428,14 @@
               <a:spcAft>
                 <a:spcPts val="120"/>
               </a:spcAft>
+              <a:buClr>
+                <a:srgbClr val="0073CF"/>
+              </a:buClr>
               <a:buFont typeface="Arial"/>
               <a:buChar char="•"/>
             </a:pPr>
             <a:r>
-              <a:rPr lang="en-US" sz="1600" b="1" dirty="0">
+              <a:rPr lang="en-US" sz="2000" b="1" dirty="0">
                 <a:solidFill>
                   <a:srgbClr val="00396B"/>
                 </a:solidFill>
@@ -10633,7 +13443,7 @@
               <a:t>Verifier — </a:t>
             </a:r>
             <a:r>
-              <a:rPr lang="en-US" sz="1600" dirty="0">
+              <a:rPr lang="en-US" sz="2000" dirty="0">
                 <a:solidFill>
                   <a:srgbClr val="3A3A3C"/>
                 </a:solidFill>
@@ -10652,11 +13462,14 @@
               <a:spcAft>
                 <a:spcPts val="120"/>
               </a:spcAft>
+              <a:buClr>
+                <a:srgbClr val="0073CF"/>
+              </a:buClr>
               <a:buFont typeface="Arial"/>
               <a:buChar char="•"/>
             </a:pPr>
             <a:r>
-              <a:rPr lang="en-US" sz="1600" b="1" dirty="0">
+              <a:rPr lang="en-US" sz="2000" b="1" dirty="0">
                 <a:solidFill>
                   <a:srgbClr val="00396B"/>
                 </a:solidFill>
@@ -10664,7 +13477,7 @@
               <a:t>Responder — </a:t>
             </a:r>
             <a:r>
-              <a:rPr lang="en-US" sz="1600" dirty="0">
+              <a:rPr lang="en-US" sz="2000" dirty="0">
                 <a:solidFill>
                   <a:srgbClr val="3A3A3C"/>
                 </a:solidFill>
@@ -10683,11 +13496,14 @@
               <a:spcAft>
                 <a:spcPts val="120"/>
               </a:spcAft>
+              <a:buClr>
+                <a:srgbClr val="0073CF"/>
+              </a:buClr>
               <a:buFont typeface="Arial"/>
               <a:buChar char="•"/>
             </a:pPr>
             <a:r>
-              <a:rPr lang="en-US" sz="1600" b="1" dirty="0">
+              <a:rPr lang="en-US" sz="2000" b="1" dirty="0">
                 <a:solidFill>
                   <a:srgbClr val="00396B"/>
                 </a:solidFill>
@@ -10695,7 +13511,7 @@
               <a:t>Memory Manager — </a:t>
             </a:r>
             <a:r>
-              <a:rPr lang="en-US" sz="1600" dirty="0">
+              <a:rPr lang="en-US" sz="2000" dirty="0">
                 <a:solidFill>
                   <a:srgbClr val="3A3A3C"/>
                 </a:solidFill>
@@ -10892,7 +13708,7 @@
     </p:spTree>
     <p:extLst>
       <p:ext uri="{BB962C8B-B14F-4D97-AF65-F5344CB8AC3E}">
-        <p14:creationId xmlns:p14="http://schemas.microsoft.com/office/powerpoint/2010/main" val="552295894"/>
+        <p14:creationId xmlns:p14="http://schemas.microsoft.com/office/powerpoint/2010/main" val="2439352580"/>
       </p:ext>
     </p:extLst>
   </p:cSld>

--- a/project_update.pptx
+++ b/project_update.pptx
@@ -3702,7 +3702,7 @@
 </file>
 
 <file path=ppt/slides/slide1.xml><?xml version="1.0" encoding="utf-8"?>
-<p:sld xmlns:a="http://schemas.openxmlformats.org/drawingml/2006/main" xmlns:r="http://schemas.openxmlformats.org/officeDocument/2006/relationships" xmlns:p="http://schemas.openxmlformats.org/presentationml/2006/main">
+<p:sld xmlns:a="http://schemas.openxmlformats.org/drawingml/2006/main" xmlns:r="http://schemas.openxmlformats.org/officeDocument/2006/relationships" xmlns:p="http://schemas.openxmlformats.org/presentationml/2006/main" show="0">
   <p:cSld>
     <p:spTree>
       <p:nvGrpSpPr>
@@ -4055,7 +4055,7 @@
 </file>
 
 <file path=ppt/slides/slide10.xml><?xml version="1.0" encoding="utf-8"?>
-<p:sld xmlns:a="http://schemas.openxmlformats.org/drawingml/2006/main" xmlns:r="http://schemas.openxmlformats.org/officeDocument/2006/relationships" xmlns:p="http://schemas.openxmlformats.org/presentationml/2006/main">
+<p:sld xmlns:a="http://schemas.openxmlformats.org/drawingml/2006/main" xmlns:r="http://schemas.openxmlformats.org/officeDocument/2006/relationships" xmlns:p="http://schemas.openxmlformats.org/presentationml/2006/main" show="0">
   <p:cSld>
     <p:spTree>
       <p:nvGrpSpPr>
@@ -4568,7 +4568,7 @@
 </file>
 
 <file path=ppt/slides/slide11.xml><?xml version="1.0" encoding="utf-8"?>
-<p:sld xmlns:a="http://schemas.openxmlformats.org/drawingml/2006/main" xmlns:r="http://schemas.openxmlformats.org/officeDocument/2006/relationships" xmlns:p="http://schemas.openxmlformats.org/presentationml/2006/main">
+<p:sld xmlns:a="http://schemas.openxmlformats.org/drawingml/2006/main" xmlns:r="http://schemas.openxmlformats.org/officeDocument/2006/relationships" xmlns:p="http://schemas.openxmlformats.org/presentationml/2006/main" show="0">
   <p:cSld>
     <p:spTree>
       <p:nvGrpSpPr>
@@ -5220,7 +5220,7 @@
 </file>
 
 <file path=ppt/slides/slide12.xml><?xml version="1.0" encoding="utf-8"?>
-<p:sld xmlns:a="http://schemas.openxmlformats.org/drawingml/2006/main" xmlns:r="http://schemas.openxmlformats.org/officeDocument/2006/relationships" xmlns:p="http://schemas.openxmlformats.org/presentationml/2006/main">
+<p:sld xmlns:a="http://schemas.openxmlformats.org/drawingml/2006/main" xmlns:r="http://schemas.openxmlformats.org/officeDocument/2006/relationships" xmlns:p="http://schemas.openxmlformats.org/presentationml/2006/main" show="0">
   <p:cSld>
     <p:spTree>
       <p:nvGrpSpPr>
@@ -6230,7 +6230,7 @@
 </file>
 
 <file path=ppt/slides/slide13.xml><?xml version="1.0" encoding="utf-8"?>
-<p:sld xmlns:a="http://schemas.openxmlformats.org/drawingml/2006/main" xmlns:r="http://schemas.openxmlformats.org/officeDocument/2006/relationships" xmlns:p="http://schemas.openxmlformats.org/presentationml/2006/main">
+<p:sld xmlns:a="http://schemas.openxmlformats.org/drawingml/2006/main" xmlns:r="http://schemas.openxmlformats.org/officeDocument/2006/relationships" xmlns:p="http://schemas.openxmlformats.org/presentationml/2006/main" show="0">
   <p:cSld>
     <p:spTree>
       <p:nvGrpSpPr>
@@ -6711,7 +6711,7 @@
 </file>
 
 <file path=ppt/slides/slide14.xml><?xml version="1.0" encoding="utf-8"?>
-<p:sld xmlns:a="http://schemas.openxmlformats.org/drawingml/2006/main" xmlns:r="http://schemas.openxmlformats.org/officeDocument/2006/relationships" xmlns:p="http://schemas.openxmlformats.org/presentationml/2006/main">
+<p:sld xmlns:a="http://schemas.openxmlformats.org/drawingml/2006/main" xmlns:r="http://schemas.openxmlformats.org/officeDocument/2006/relationships" xmlns:p="http://schemas.openxmlformats.org/presentationml/2006/main" show="0">
   <p:cSld>
     <p:spTree>
       <p:nvGrpSpPr>
@@ -12551,7 +12551,7 @@
 </file>
 
 <file path=ppt/slides/slide8.xml><?xml version="1.0" encoding="utf-8"?>
-<p:sld xmlns:a="http://schemas.openxmlformats.org/drawingml/2006/main" xmlns:r="http://schemas.openxmlformats.org/officeDocument/2006/relationships" xmlns:p="http://schemas.openxmlformats.org/presentationml/2006/main">
+<p:sld xmlns:a="http://schemas.openxmlformats.org/drawingml/2006/main" xmlns:r="http://schemas.openxmlformats.org/officeDocument/2006/relationships" xmlns:p="http://schemas.openxmlformats.org/presentationml/2006/main" show="0">
   <p:cSld>
     <p:spTree>
       <p:nvGrpSpPr>
@@ -13083,7 +13083,7 @@
 </file>
 
 <file path=ppt/slides/slide9.xml><?xml version="1.0" encoding="utf-8"?>
-<p:sld xmlns:a="http://schemas.openxmlformats.org/drawingml/2006/main" xmlns:r="http://schemas.openxmlformats.org/officeDocument/2006/relationships" xmlns:p="http://schemas.openxmlformats.org/presentationml/2006/main">
+<p:sld xmlns:a="http://schemas.openxmlformats.org/drawingml/2006/main" xmlns:r="http://schemas.openxmlformats.org/officeDocument/2006/relationships" xmlns:p="http://schemas.openxmlformats.org/presentationml/2006/main" show="0">
   <p:cSld>
     <p:spTree>
       <p:nvGrpSpPr>

--- a/project_update.pptx
+++ b/project_update.pptx
@@ -5,7 +5,7 @@
     <p:sldMasterId id="2147483672" r:id="rId1"/>
   </p:sldMasterIdLst>
   <p:notesMasterIdLst>
-    <p:notesMasterId r:id="rId20"/>
+    <p:notesMasterId r:id="rId19"/>
   </p:notesMasterIdLst>
   <p:sldIdLst>
     <p:sldId id="389" r:id="rId2"/>
@@ -22,10 +22,9 @@
     <p:sldId id="386" r:id="rId13"/>
     <p:sldId id="387" r:id="rId14"/>
     <p:sldId id="374" r:id="rId15"/>
-    <p:sldId id="419" r:id="rId16"/>
+    <p:sldId id="449" r:id="rId16"/>
     <p:sldId id="416" r:id="rId17"/>
-    <p:sldId id="417" r:id="rId18"/>
-    <p:sldId id="418" r:id="rId19"/>
+    <p:sldId id="418" r:id="rId18"/>
   </p:sldIdLst>
   <p:sldSz cx="12192000" cy="6858000"/>
   <p:notesSz cx="6858000" cy="9144000"/>
@@ -214,7 +213,7 @@
           <a:p>
             <a:fld id="{A969A4D8-3B2C-044F-B9CE-BA9A5D441629}" type="datetimeFigureOut">
               <a:rPr lang="en-CN" smtClean="0"/>
-              <a:t>2026/6/11</a:t>
+              <a:t>2026/6/12</a:t>
             </a:fld>
             <a:endParaRPr lang="en-CN"/>
           </a:p>
@@ -482,6 +481,174 @@
 </p:notesMaster>
 </file>
 
+<file path=ppt/notesSlides/notesSlide1.xml><?xml version="1.0" encoding="utf-8"?>
+<p:notes xmlns:a="http://schemas.openxmlformats.org/drawingml/2006/main" xmlns:r="http://schemas.openxmlformats.org/officeDocument/2006/relationships" xmlns:p="http://schemas.openxmlformats.org/presentationml/2006/main">
+  <p:cSld>
+    <p:spTree>
+      <p:nvGrpSpPr>
+        <p:cNvPr id="1" name=""/>
+        <p:cNvGrpSpPr/>
+        <p:nvPr/>
+      </p:nvGrpSpPr>
+      <p:grpSpPr>
+        <a:xfrm>
+          <a:off x="0" y="0"/>
+          <a:ext cx="0" cy="0"/>
+          <a:chOff x="0" y="0"/>
+          <a:chExt cx="0" cy="0"/>
+        </a:xfrm>
+      </p:grpSpPr>
+      <p:sp>
+        <p:nvSpPr>
+          <p:cNvPr id="2" name="Slide Image Placeholder 1"/>
+          <p:cNvSpPr>
+            <a:spLocks noGrp="1" noRot="1" noChangeAspect="1"/>
+          </p:cNvSpPr>
+          <p:nvPr>
+            <p:ph type="sldImg"/>
+          </p:nvPr>
+        </p:nvSpPr>
+        <p:spPr/>
+      </p:sp>
+      <p:sp>
+        <p:nvSpPr>
+          <p:cNvPr id="3" name="Notes Placeholder 2"/>
+          <p:cNvSpPr>
+            <a:spLocks noGrp="1"/>
+          </p:cNvSpPr>
+          <p:nvPr>
+            <p:ph type="body" idx="1"/>
+          </p:nvPr>
+        </p:nvSpPr>
+        <p:spPr/>
+        <p:txBody>
+          <a:bodyPr/>
+          <a:lstStyle/>
+          <a:p>
+            <a:endParaRPr lang="en-CN" dirty="0"/>
+          </a:p>
+        </p:txBody>
+      </p:sp>
+      <p:sp>
+        <p:nvSpPr>
+          <p:cNvPr id="4" name="Slide Number Placeholder 3"/>
+          <p:cNvSpPr>
+            <a:spLocks noGrp="1"/>
+          </p:cNvSpPr>
+          <p:nvPr>
+            <p:ph type="sldNum" sz="quarter" idx="5"/>
+          </p:nvPr>
+        </p:nvSpPr>
+        <p:spPr/>
+        <p:txBody>
+          <a:bodyPr/>
+          <a:lstStyle/>
+          <a:p>
+            <a:fld id="{AD6F683E-058F-7844-92CC-A1F3595AD258}" type="slidenum">
+              <a:rPr lang="en-CN" smtClean="0"/>
+              <a:t>14</a:t>
+            </a:fld>
+            <a:endParaRPr lang="en-CN"/>
+          </a:p>
+        </p:txBody>
+      </p:sp>
+    </p:spTree>
+    <p:extLst>
+      <p:ext uri="{BB962C8B-B14F-4D97-AF65-F5344CB8AC3E}">
+        <p14:creationId xmlns:p14="http://schemas.microsoft.com/office/powerpoint/2010/main" val="2806650986"/>
+      </p:ext>
+    </p:extLst>
+  </p:cSld>
+  <p:clrMapOvr>
+    <a:masterClrMapping/>
+  </p:clrMapOvr>
+</p:notes>
+</file>
+
+<file path=ppt/notesSlides/notesSlide2.xml><?xml version="1.0" encoding="utf-8"?>
+<p:notes xmlns:a="http://schemas.openxmlformats.org/drawingml/2006/main" xmlns:r="http://schemas.openxmlformats.org/officeDocument/2006/relationships" xmlns:p="http://schemas.openxmlformats.org/presentationml/2006/main">
+  <p:cSld>
+    <p:spTree>
+      <p:nvGrpSpPr>
+        <p:cNvPr id="1" name=""/>
+        <p:cNvGrpSpPr/>
+        <p:nvPr/>
+      </p:nvGrpSpPr>
+      <p:grpSpPr>
+        <a:xfrm>
+          <a:off x="0" y="0"/>
+          <a:ext cx="0" cy="0"/>
+          <a:chOff x="0" y="0"/>
+          <a:chExt cx="0" cy="0"/>
+        </a:xfrm>
+      </p:grpSpPr>
+      <p:sp>
+        <p:nvSpPr>
+          <p:cNvPr id="2" name="Slide Image Placeholder 1"/>
+          <p:cNvSpPr>
+            <a:spLocks noGrp="1" noRot="1" noChangeAspect="1"/>
+          </p:cNvSpPr>
+          <p:nvPr>
+            <p:ph type="sldImg"/>
+          </p:nvPr>
+        </p:nvSpPr>
+        <p:spPr/>
+      </p:sp>
+      <p:sp>
+        <p:nvSpPr>
+          <p:cNvPr id="3" name="Notes Placeholder 2"/>
+          <p:cNvSpPr>
+            <a:spLocks noGrp="1"/>
+          </p:cNvSpPr>
+          <p:nvPr>
+            <p:ph type="body" idx="1"/>
+          </p:nvPr>
+        </p:nvSpPr>
+        <p:spPr/>
+        <p:txBody>
+          <a:bodyPr/>
+          <a:lstStyle/>
+          <a:p>
+            <a:endParaRPr lang="en-CN" dirty="0"/>
+          </a:p>
+        </p:txBody>
+      </p:sp>
+      <p:sp>
+        <p:nvSpPr>
+          <p:cNvPr id="4" name="Slide Number Placeholder 3"/>
+          <p:cNvSpPr>
+            <a:spLocks noGrp="1"/>
+          </p:cNvSpPr>
+          <p:nvPr>
+            <p:ph type="sldNum" sz="quarter" idx="5"/>
+          </p:nvPr>
+        </p:nvSpPr>
+        <p:spPr/>
+        <p:txBody>
+          <a:bodyPr/>
+          <a:lstStyle/>
+          <a:p>
+            <a:fld id="{AD6F683E-058F-7844-92CC-A1F3595AD258}" type="slidenum">
+              <a:rPr lang="en-CN" smtClean="0"/>
+              <a:t>15</a:t>
+            </a:fld>
+            <a:endParaRPr lang="en-CN"/>
+          </a:p>
+        </p:txBody>
+      </p:sp>
+    </p:spTree>
+    <p:extLst>
+      <p:ext uri="{BB962C8B-B14F-4D97-AF65-F5344CB8AC3E}">
+        <p14:creationId xmlns:p14="http://schemas.microsoft.com/office/powerpoint/2010/main" val="2410861973"/>
+      </p:ext>
+    </p:extLst>
+  </p:cSld>
+  <p:clrMapOvr>
+    <a:masterClrMapping/>
+  </p:clrMapOvr>
+</p:notes>
+</file>
+
 <file path=ppt/slideLayouts/slideLayout1.xml><?xml version="1.0" encoding="utf-8"?>
 <p:sldLayout xmlns:a="http://schemas.openxmlformats.org/drawingml/2006/main" xmlns:r="http://schemas.openxmlformats.org/officeDocument/2006/relationships" xmlns:p="http://schemas.openxmlformats.org/presentationml/2006/main" type="title">
   <p:cSld name="Title Slide">
@@ -631,7 +798,7 @@
           <a:p>
             <a:fld id="{95F109AB-5A71-B848-AE30-6241B4A377C3}" type="datetime1">
               <a:rPr lang="en-US" smtClean="0"/>
-              <a:t>6/11/26</a:t>
+              <a:t>6/12/26</a:t>
             </a:fld>
             <a:endParaRPr lang="en-CN"/>
           </a:p>
@@ -831,7 +998,7 @@
           <a:p>
             <a:fld id="{3988228F-5CF2-0046-9186-A5BCE16AD50F}" type="datetime1">
               <a:rPr lang="en-US" smtClean="0"/>
-              <a:t>6/11/26</a:t>
+              <a:t>6/12/26</a:t>
             </a:fld>
             <a:endParaRPr lang="en-CN"/>
           </a:p>
@@ -1041,7 +1208,7 @@
           <a:p>
             <a:fld id="{9F4B0477-26BF-834F-AE73-C91BC4DF75D4}" type="datetime1">
               <a:rPr lang="en-US" smtClean="0"/>
-              <a:t>6/11/26</a:t>
+              <a:t>6/12/26</a:t>
             </a:fld>
             <a:endParaRPr lang="en-CN"/>
           </a:p>
@@ -1241,7 +1408,7 @@
           <a:p>
             <a:fld id="{589112CF-B6AE-474E-A1D1-12258281CB95}" type="datetime1">
               <a:rPr lang="en-US" smtClean="0"/>
-              <a:t>6/11/26</a:t>
+              <a:t>6/12/26</a:t>
             </a:fld>
             <a:endParaRPr lang="en-CN"/>
           </a:p>
@@ -1517,7 +1684,7 @@
           <a:p>
             <a:fld id="{C226D9D0-4F79-BC4B-978E-030A93E4CCAE}" type="datetime1">
               <a:rPr lang="en-US" smtClean="0"/>
-              <a:t>6/11/26</a:t>
+              <a:t>6/12/26</a:t>
             </a:fld>
             <a:endParaRPr lang="en-CN"/>
           </a:p>
@@ -1785,7 +1952,7 @@
           <a:p>
             <a:fld id="{9122B4FA-D8CB-FF46-9B48-72A2520F1EB0}" type="datetime1">
               <a:rPr lang="en-US" smtClean="0"/>
-              <a:t>6/11/26</a:t>
+              <a:t>6/12/26</a:t>
             </a:fld>
             <a:endParaRPr lang="en-CN"/>
           </a:p>
@@ -2200,7 +2367,7 @@
           <a:p>
             <a:fld id="{C4DD5D45-C04D-A143-B571-20041271315A}" type="datetime1">
               <a:rPr lang="en-US" smtClean="0"/>
-              <a:t>6/11/26</a:t>
+              <a:t>6/12/26</a:t>
             </a:fld>
             <a:endParaRPr lang="en-CN"/>
           </a:p>
@@ -2342,7 +2509,7 @@
           <a:p>
             <a:fld id="{6B770501-1AEF-9240-8471-86DF1A6D9745}" type="datetime1">
               <a:rPr lang="en-US" smtClean="0"/>
-              <a:t>6/11/26</a:t>
+              <a:t>6/12/26</a:t>
             </a:fld>
             <a:endParaRPr lang="en-CN"/>
           </a:p>
@@ -2455,7 +2622,7 @@
           <a:p>
             <a:fld id="{F04344E2-A38D-ED4A-9FAE-38DACDB44195}" type="datetime1">
               <a:rPr lang="en-US" smtClean="0"/>
-              <a:t>6/11/26</a:t>
+              <a:t>6/12/26</a:t>
             </a:fld>
             <a:endParaRPr lang="en-CN"/>
           </a:p>
@@ -2768,7 +2935,7 @@
           <a:p>
             <a:fld id="{5FB8D108-18C9-8A47-BCEE-FC844F24048D}" type="datetime1">
               <a:rPr lang="en-US" smtClean="0"/>
-              <a:t>6/11/26</a:t>
+              <a:t>6/12/26</a:t>
             </a:fld>
             <a:endParaRPr lang="en-CN"/>
           </a:p>
@@ -3057,7 +3224,7 @@
           <a:p>
             <a:fld id="{564B0546-E853-EA4A-BB99-95D94DD39026}" type="datetime1">
               <a:rPr lang="en-US" smtClean="0"/>
-              <a:t>6/11/26</a:t>
+              <a:t>6/12/26</a:t>
             </a:fld>
             <a:endParaRPr lang="en-CN"/>
           </a:p>
@@ -3300,7 +3467,7 @@
           <a:p>
             <a:fld id="{DB67D221-21D5-E343-9B76-E6DA17C5106F}" type="datetime1">
               <a:rPr lang="en-US" smtClean="0"/>
-              <a:t>6/11/26</a:t>
+              <a:t>6/12/26</a:t>
             </a:fld>
             <a:endParaRPr lang="en-CN"/>
           </a:p>
@@ -7138,7 +7305,7 @@
           <p:nvPr/>
         </p:nvPicPr>
         <p:blipFill>
-          <a:blip r:embed="rId2"/>
+          <a:blip r:embed="rId3"/>
           <a:stretch>
             <a:fillRect/>
           </a:stretch>
@@ -7262,10 +7429,10 @@
       </p:grpSpPr>
       <p:sp>
         <p:nvSpPr>
-          <p:cNvPr id="5" name="Footer Bar">
-            <a:extLst>
-              <a:ext uri="{FF2B5EF4-FFF2-40B4-BE49-F238E27FC236}">
-                <a16:creationId xmlns:a16="http://schemas.microsoft.com/office/drawing/2014/main" id="{24DF1DB0-6162-C506-3C27-1C69DC951FF6}"/>
+          <p:cNvPr id="9" name="TopCard 496">
+            <a:extLst>
+              <a:ext uri="{FF2B5EF4-FFF2-40B4-BE49-F238E27FC236}">
+                <a16:creationId xmlns:a16="http://schemas.microsoft.com/office/drawing/2014/main" id="{87714806-0485-3C4F-AA5D-A9A028EAD123}"/>
               </a:ext>
             </a:extLst>
           </p:cNvPr>
@@ -7274,17 +7441,19 @@
         </p:nvSpPr>
         <p:spPr>
           <a:xfrm>
-            <a:off x="0" y="6350000"/>
-            <a:ext cx="12192000" cy="508000"/>
-          </a:xfrm>
-          <a:prstGeom prst="rect">
+            <a:off x="6299200" y="2311400"/>
+            <a:ext cx="5054600" cy="1828800"/>
+          </a:xfrm>
+          <a:prstGeom prst="roundRect">
             <a:avLst/>
           </a:prstGeom>
           <a:solidFill>
-            <a:srgbClr val="00396B"/>
+            <a:srgbClr val="FFFFFF"/>
           </a:solidFill>
           <a:ln w="12700" cap="flat" cmpd="sng" algn="ctr">
-            <a:noFill/>
+            <a:solidFill>
+              <a:srgbClr val="9AA7B5"/>
+            </a:solidFill>
             <a:prstDash val="solid"/>
             <a:miter lim="800000"/>
           </a:ln>
@@ -7316,465 +7485,10 @@
       </p:sp>
       <p:sp>
         <p:nvSpPr>
-          <p:cNvPr id="2" name="Title 1">
-            <a:extLst>
-              <a:ext uri="{FF2B5EF4-FFF2-40B4-BE49-F238E27FC236}">
-                <a16:creationId xmlns:a16="http://schemas.microsoft.com/office/drawing/2014/main" id="{EC786BB6-CB81-FA99-84D2-7C37AE12695B}"/>
-              </a:ext>
-            </a:extLst>
-          </p:cNvPr>
-          <p:cNvSpPr>
-            <a:spLocks noGrp="1"/>
-          </p:cNvSpPr>
-          <p:nvPr>
-            <p:ph type="title"/>
-          </p:nvPr>
-        </p:nvSpPr>
-        <p:spPr>
-          <a:xfrm>
-            <a:off x="838200" y="1397000"/>
-            <a:ext cx="10515600" cy="711200"/>
-          </a:xfrm>
-        </p:spPr>
-        <p:txBody>
-          <a:bodyPr anchor="t" anchorCtr="0">
-            <a:normAutofit/>
-          </a:bodyPr>
-          <a:lstStyle/>
-          <a:p>
-            <a:r>
-              <a:rPr lang="en-US" sz="4000" b="1" dirty="0">
-                <a:solidFill>
-                  <a:srgbClr val="00396B"/>
-                </a:solidFill>
-              </a:rPr>
-              <a:t>Overview</a:t>
-            </a:r>
-            <a:r>
-              <a:rPr lang="en-US" altLang="zh-CN" sz="4000" b="1" dirty="0">
-                <a:solidFill>
-                  <a:srgbClr val="00396B"/>
-                </a:solidFill>
-              </a:rPr>
-              <a:t>:</a:t>
-            </a:r>
-            <a:r>
-              <a:rPr lang="en-US" sz="4000" b="1" dirty="0">
-                <a:solidFill>
-                  <a:srgbClr val="00396B"/>
-                </a:solidFill>
-              </a:rPr>
-              <a:t> MAS</a:t>
-            </a:r>
-            <a:r>
-              <a:rPr lang="zh-CN" altLang="en-US" sz="4000" b="1" dirty="0">
-                <a:solidFill>
-                  <a:srgbClr val="00396B"/>
-                </a:solidFill>
-              </a:rPr>
-              <a:t> </a:t>
-            </a:r>
-            <a:r>
-              <a:rPr lang="en-US" altLang="zh-CN" sz="4000" b="1" dirty="0">
-                <a:solidFill>
-                  <a:srgbClr val="00396B"/>
-                </a:solidFill>
-              </a:rPr>
-              <a:t>Co-Evolution</a:t>
-            </a:r>
-            <a:endParaRPr lang="en-US" sz="4000" b="1" dirty="0">
-              <a:solidFill>
-                <a:srgbClr val="00396B"/>
-              </a:solidFill>
-            </a:endParaRPr>
-          </a:p>
-        </p:txBody>
-      </p:sp>
-      <p:sp>
-        <p:nvSpPr>
-          <p:cNvPr id="3" name="Content Placeholder 2">
-            <a:extLst>
-              <a:ext uri="{FF2B5EF4-FFF2-40B4-BE49-F238E27FC236}">
-                <a16:creationId xmlns:a16="http://schemas.microsoft.com/office/drawing/2014/main" id="{266D992A-4FA0-9A94-37B2-8E36F82B8F86}"/>
-              </a:ext>
-            </a:extLst>
-          </p:cNvPr>
-          <p:cNvSpPr>
-            <a:spLocks noGrp="1"/>
-          </p:cNvSpPr>
-          <p:nvPr>
-            <p:ph idx="1"/>
-          </p:nvPr>
-        </p:nvSpPr>
-        <p:spPr>
-          <a:xfrm>
-            <a:off x="838200" y="2540000"/>
-            <a:ext cx="10515600" cy="3657600"/>
-          </a:xfrm>
-        </p:spPr>
-        <p:txBody>
-          <a:bodyPr>
-            <a:normAutofit/>
-          </a:bodyPr>
-          <a:lstStyle/>
-          <a:p>
-            <a:pPr marL="0" indent="0" algn="l">
-              <a:lnSpc>
-                <a:spcPct val="100000"/>
-              </a:lnSpc>
-              <a:spcBef>
-                <a:spcPts val="100"/>
-              </a:spcBef>
-              <a:spcAft>
-                <a:spcPts val="100"/>
-              </a:spcAft>
-              <a:buNone/>
-            </a:pPr>
-            <a:r>
-              <a:rPr lang="en-US" sz="2200" b="1" dirty="0">
-                <a:solidFill>
-                  <a:srgbClr val="0073CF"/>
-                </a:solidFill>
-              </a:rPr>
-              <a:t>Motivation</a:t>
-            </a:r>
-          </a:p>
-          <a:p>
-            <a:pPr marL="342900" indent="-342900" algn="l">
-              <a:lnSpc>
-                <a:spcPct val="100000"/>
-              </a:lnSpc>
-              <a:spcBef>
-                <a:spcPts val="100"/>
-              </a:spcBef>
-              <a:spcAft>
-                <a:spcPts val="100"/>
-              </a:spcAft>
-              <a:buClr>
-                <a:srgbClr val="0073CF"/>
-              </a:buClr>
-              <a:buFont typeface="Arial"/>
-              <a:buChar char="•"/>
-            </a:pPr>
-            <a:r>
-              <a:rPr lang="en-US" sz="1800" b="1" dirty="0">
-                <a:solidFill>
-                  <a:srgbClr val="00396B"/>
-                </a:solidFill>
-              </a:rPr>
-              <a:t>Centralized MAS </a:t>
-            </a:r>
-            <a:r>
-              <a:rPr lang="en-US" sz="1800" dirty="0">
-                <a:solidFill>
-                  <a:srgbClr val="1A1A1A"/>
-                </a:solidFill>
-              </a:rPr>
-              <a:t>routes every decision through one controller with fixed workflows and roles → </a:t>
-            </a:r>
-            <a:r>
-              <a:rPr lang="en-US" sz="1800" b="1" dirty="0">
-                <a:solidFill>
-                  <a:srgbClr val="00396B"/>
-                </a:solidFill>
-              </a:rPr>
-              <a:t>poor scalability</a:t>
-            </a:r>
-            <a:r>
-              <a:rPr lang="en-US" sz="1800" dirty="0">
-                <a:solidFill>
-                  <a:srgbClr val="1A1A1A"/>
-                </a:solidFill>
-              </a:rPr>
-              <a:t>, </a:t>
-            </a:r>
-            <a:r>
-              <a:rPr lang="en-US" sz="1800" b="1" dirty="0">
-                <a:solidFill>
-                  <a:srgbClr val="00396B"/>
-                </a:solidFill>
-              </a:rPr>
-              <a:t>low adaptability</a:t>
-            </a:r>
-            <a:r>
-              <a:rPr lang="en-US" sz="1800" dirty="0">
-                <a:solidFill>
-                  <a:srgbClr val="1A1A1A"/>
-                </a:solidFill>
-              </a:rPr>
-              <a:t>, a </a:t>
-            </a:r>
-            <a:r>
-              <a:rPr lang="en-US" sz="1800" b="1" dirty="0">
-                <a:solidFill>
-                  <a:srgbClr val="00396B"/>
-                </a:solidFill>
-              </a:rPr>
-              <a:t>single point of failure</a:t>
-            </a:r>
-          </a:p>
-          <a:p>
-            <a:pPr marL="342900" indent="-342900" algn="l">
-              <a:lnSpc>
-                <a:spcPct val="100000"/>
-              </a:lnSpc>
-              <a:spcBef>
-                <a:spcPts val="150"/>
-              </a:spcBef>
-              <a:spcAft>
-                <a:spcPts val="100"/>
-              </a:spcAft>
-              <a:buClr>
-                <a:srgbClr val="0073CF"/>
-              </a:buClr>
-              <a:buFont typeface="Arial"/>
-              <a:buChar char="•"/>
-            </a:pPr>
-            <a:r>
-              <a:rPr lang="en-US" sz="1800" b="1" dirty="0">
-                <a:solidFill>
-                  <a:srgbClr val="00396B"/>
-                </a:solidFill>
-              </a:rPr>
-              <a:t>Decentralized MAS </a:t>
-            </a:r>
-            <a:r>
-              <a:rPr lang="en-US" sz="1800" dirty="0">
-                <a:solidFill>
-                  <a:srgbClr val="1A1A1A"/>
-                </a:solidFill>
-              </a:rPr>
-              <a:t>traps each agent in its </a:t>
-            </a:r>
-            <a:r>
-              <a:rPr lang="en-US" sz="1800" b="1" dirty="0">
-                <a:solidFill>
-                  <a:srgbClr val="00396B"/>
-                </a:solidFill>
-              </a:rPr>
-              <a:t>local view</a:t>
-            </a:r>
-            <a:r>
-              <a:rPr lang="en-US" sz="1800" dirty="0">
-                <a:solidFill>
-                  <a:srgbClr val="1A1A1A"/>
-                </a:solidFill>
-              </a:rPr>
-              <a:t>, ignoring neighbors → </a:t>
-            </a:r>
-            <a:r>
-              <a:rPr lang="en-US" sz="1800" b="1" dirty="0">
-                <a:solidFill>
-                  <a:srgbClr val="00396B"/>
-                </a:solidFill>
-              </a:rPr>
-              <a:t>no collective gain</a:t>
-            </a:r>
-          </a:p>
-          <a:p>
-            <a:pPr marL="0" indent="0" algn="l">
-              <a:lnSpc>
-                <a:spcPct val="100000"/>
-              </a:lnSpc>
-              <a:spcBef>
-                <a:spcPts val="650"/>
-              </a:spcBef>
-              <a:spcAft>
-                <a:spcPts val="100"/>
-              </a:spcAft>
-              <a:buNone/>
-            </a:pPr>
-            <a:r>
-              <a:rPr lang="en-US" sz="2200" b="1" dirty="0">
-                <a:solidFill>
-                  <a:srgbClr val="0073CF"/>
-                </a:solidFill>
-              </a:rPr>
-              <a:t>Research Question &amp; Key Insight</a:t>
-            </a:r>
-          </a:p>
-          <a:p>
-            <a:pPr marL="342900" indent="-342900" algn="l">
-              <a:lnSpc>
-                <a:spcPct val="100000"/>
-              </a:lnSpc>
-              <a:spcBef>
-                <a:spcPts val="100"/>
-              </a:spcBef>
-              <a:spcAft>
-                <a:spcPts val="100"/>
-              </a:spcAft>
-              <a:buClr>
-                <a:srgbClr val="0073CF"/>
-              </a:buClr>
-              <a:buFont typeface="Arial"/>
-              <a:buChar char="•"/>
-            </a:pPr>
-            <a:r>
-              <a:rPr lang="en-US" sz="1800" dirty="0">
-                <a:solidFill>
-                  <a:srgbClr val="1A1A1A"/>
-                </a:solidFill>
-              </a:rPr>
-              <a:t>Can agents co-evolve through </a:t>
-            </a:r>
-            <a:r>
-              <a:rPr lang="en-US" sz="1800" b="1" dirty="0">
-                <a:solidFill>
-                  <a:srgbClr val="00396B"/>
-                </a:solidFill>
-              </a:rPr>
-              <a:t>neighborhood consensus</a:t>
-            </a:r>
-            <a:r>
-              <a:rPr lang="en-US" sz="1800" dirty="0">
-                <a:solidFill>
-                  <a:srgbClr val="1A1A1A"/>
-                </a:solidFill>
-              </a:rPr>
-              <a:t> — improving collectively, with no central controller?</a:t>
-            </a:r>
-          </a:p>
-          <a:p>
-            <a:pPr marL="0" indent="0" algn="l">
-              <a:lnSpc>
-                <a:spcPct val="100000"/>
-              </a:lnSpc>
-              <a:spcBef>
-                <a:spcPts val="650"/>
-              </a:spcBef>
-              <a:spcAft>
-                <a:spcPts val="100"/>
-              </a:spcAft>
-              <a:buNone/>
-            </a:pPr>
-            <a:r>
-              <a:rPr lang="en-US" sz="2200" b="1" dirty="0">
-                <a:solidFill>
-                  <a:srgbClr val="0073CF"/>
-                </a:solidFill>
-              </a:rPr>
-              <a:t>Expected Results</a:t>
-            </a:r>
-          </a:p>
-          <a:p>
-            <a:pPr marL="342900" indent="-342900" algn="l">
-              <a:lnSpc>
-                <a:spcPct val="100000"/>
-              </a:lnSpc>
-              <a:spcBef>
-                <a:spcPts val="100"/>
-              </a:spcBef>
-              <a:spcAft>
-                <a:spcPts val="100"/>
-              </a:spcAft>
-              <a:buClr>
-                <a:srgbClr val="0073CF"/>
-              </a:buClr>
-              <a:buFont typeface="Arial"/>
-              <a:buChar char="•"/>
-            </a:pPr>
-            <a:r>
-              <a:rPr lang="en-US" sz="1800" b="1" dirty="0">
-                <a:solidFill>
-                  <a:srgbClr val="00396B"/>
-                </a:solidFill>
-              </a:rPr>
-              <a:t>Stronger performance </a:t>
-            </a:r>
-            <a:r>
-              <a:rPr lang="en-US" sz="1800" dirty="0">
-                <a:solidFill>
-                  <a:srgbClr val="1A1A1A"/>
-                </a:solidFill>
-              </a:rPr>
-              <a:t>than agents acting in isolation</a:t>
-            </a:r>
-          </a:p>
-          <a:p>
-            <a:pPr marL="342900" indent="-342900" algn="l">
-              <a:lnSpc>
-                <a:spcPct val="100000"/>
-              </a:lnSpc>
-              <a:spcBef>
-                <a:spcPts val="100"/>
-              </a:spcBef>
-              <a:spcAft>
-                <a:spcPts val="100"/>
-              </a:spcAft>
-              <a:buClr>
-                <a:srgbClr val="0073CF"/>
-              </a:buClr>
-              <a:buFont typeface="Arial"/>
-              <a:buChar char="•"/>
-            </a:pPr>
-            <a:r>
-              <a:rPr lang="en-US" sz="1800" b="1" dirty="0">
-                <a:solidFill>
-                  <a:srgbClr val="00396B"/>
-                </a:solidFill>
-              </a:rPr>
-              <a:t>Faster convergence </a:t>
-            </a:r>
-            <a:r>
-              <a:rPr lang="en-US" sz="1800" dirty="0">
-                <a:solidFill>
-                  <a:srgbClr val="1A1A1A"/>
-                </a:solidFill>
-              </a:rPr>
-              <a:t>than purely decentralized settings</a:t>
-            </a:r>
-          </a:p>
-        </p:txBody>
-      </p:sp>
-      <p:sp>
-        <p:nvSpPr>
-          <p:cNvPr id="4" name="Slide Number Placeholder 3">
-            <a:extLst>
-              <a:ext uri="{FF2B5EF4-FFF2-40B4-BE49-F238E27FC236}">
-                <a16:creationId xmlns:a16="http://schemas.microsoft.com/office/drawing/2014/main" id="{EE8CD026-3B59-15A5-1B5F-B87C7520064D}"/>
-              </a:ext>
-            </a:extLst>
-          </p:cNvPr>
-          <p:cNvSpPr>
-            <a:spLocks noGrp="1"/>
-          </p:cNvSpPr>
-          <p:nvPr>
-            <p:ph type="sldNum" sz="quarter" idx="12"/>
-          </p:nvPr>
-        </p:nvSpPr>
-        <p:spPr>
-          <a:xfrm>
-            <a:off x="10210800" y="6451600"/>
-            <a:ext cx="1524000" cy="304800"/>
-          </a:xfrm>
-        </p:spPr>
-        <p:txBody>
-          <a:bodyPr anchor="ctr" anchorCtr="0"/>
-          <a:lstStyle/>
-          <a:p>
-            <a:fld id="{FC0A7A6B-4B1F-5446-A3A1-99DEB5EA7F81}" type="slidenum">
-              <a:rPr lang="en-CN" smtClean="0">
-                <a:solidFill>
-                  <a:srgbClr val="9AA7B5"/>
-                </a:solidFill>
-              </a:rPr>
-              <a:t>15</a:t>
-            </a:fld>
-            <a:endParaRPr lang="en-CN">
-              <a:solidFill>
-                <a:srgbClr val="9AA7B5"/>
-              </a:solidFill>
-            </a:endParaRPr>
-          </a:p>
-        </p:txBody>
-      </p:sp>
-      <p:sp>
-        <p:nvSpPr>
-          <p:cNvPr id="6" name="Accent Rule">
-            <a:extLst>
-              <a:ext uri="{FF2B5EF4-FFF2-40B4-BE49-F238E27FC236}">
-                <a16:creationId xmlns:a16="http://schemas.microsoft.com/office/drawing/2014/main" id="{03073E4E-2B73-0632-B919-06FE618E67E6}"/>
+          <p:cNvPr id="8" name="TopCard 66">
+            <a:extLst>
+              <a:ext uri="{FF2B5EF4-FFF2-40B4-BE49-F238E27FC236}">
+                <a16:creationId xmlns:a16="http://schemas.microsoft.com/office/drawing/2014/main" id="{C0B54BD6-C697-CF4E-879B-4A5C039A16E7}"/>
               </a:ext>
             </a:extLst>
           </p:cNvPr>
@@ -7783,17 +7497,19 @@
         </p:nvSpPr>
         <p:spPr>
           <a:xfrm>
-            <a:off x="838200" y="2209800"/>
-            <a:ext cx="1524000" cy="76200"/>
-          </a:xfrm>
-          <a:prstGeom prst="rect">
+            <a:off x="838200" y="2311400"/>
+            <a:ext cx="5054600" cy="1828800"/>
+          </a:xfrm>
+          <a:prstGeom prst="roundRect">
             <a:avLst/>
           </a:prstGeom>
           <a:solidFill>
-            <a:srgbClr val="0073CF"/>
+            <a:srgbClr val="FFFFFF"/>
           </a:solidFill>
           <a:ln w="12700" cap="flat" cmpd="sng" algn="ctr">
-            <a:noFill/>
+            <a:solidFill>
+              <a:srgbClr val="9AA7B5"/>
+            </a:solidFill>
             <a:prstDash val="solid"/>
             <a:miter lim="800000"/>
           </a:ln>
@@ -7823,6 +7539,342 @@
           </a:p>
         </p:txBody>
       </p:sp>
+      <p:sp>
+        <p:nvSpPr>
+          <p:cNvPr id="5" name="Footer Bar">
+            <a:extLst>
+              <a:ext uri="{FF2B5EF4-FFF2-40B4-BE49-F238E27FC236}">
+                <a16:creationId xmlns:a16="http://schemas.microsoft.com/office/drawing/2014/main" id="{24DF1DB0-6162-C506-3C27-1C69DC951FF6}"/>
+              </a:ext>
+            </a:extLst>
+          </p:cNvPr>
+          <p:cNvSpPr/>
+          <p:nvPr/>
+        </p:nvSpPr>
+        <p:spPr>
+          <a:xfrm>
+            <a:off x="0" y="6350000"/>
+            <a:ext cx="12192000" cy="508000"/>
+          </a:xfrm>
+          <a:prstGeom prst="rect">
+            <a:avLst/>
+          </a:prstGeom>
+          <a:solidFill>
+            <a:srgbClr val="00396B"/>
+          </a:solidFill>
+          <a:ln w="12700" cap="flat" cmpd="sng" algn="ctr">
+            <a:noFill/>
+            <a:prstDash val="solid"/>
+            <a:miter lim="800000"/>
+          </a:ln>
+        </p:spPr>
+        <p:style>
+          <a:lnRef idx="2">
+            <a:schemeClr val="accent1">
+              <a:shade val="15000"/>
+            </a:schemeClr>
+          </a:lnRef>
+          <a:fillRef idx="1">
+            <a:schemeClr val="accent1"/>
+          </a:fillRef>
+          <a:effectRef idx="0">
+            <a:schemeClr val="accent1"/>
+          </a:effectRef>
+          <a:fontRef idx="minor">
+            <a:schemeClr val="lt1"/>
+          </a:fontRef>
+        </p:style>
+        <p:txBody>
+          <a:bodyPr vertOverflow="clip" horzOverflow="clip" rtlCol="0" anchor="t"/>
+          <a:lstStyle/>
+          <a:p>
+            <a:pPr algn="l"/>
+            <a:endParaRPr lang="en-CN"/>
+          </a:p>
+        </p:txBody>
+      </p:sp>
+      <p:sp>
+        <p:nvSpPr>
+          <p:cNvPr id="2" name="Title 1">
+            <a:extLst>
+              <a:ext uri="{FF2B5EF4-FFF2-40B4-BE49-F238E27FC236}">
+                <a16:creationId xmlns:a16="http://schemas.microsoft.com/office/drawing/2014/main" id="{EC786BB6-CB81-FA99-84D2-7C37AE12695B}"/>
+              </a:ext>
+            </a:extLst>
+          </p:cNvPr>
+          <p:cNvSpPr>
+            <a:spLocks noGrp="1"/>
+          </p:cNvSpPr>
+          <p:nvPr>
+            <p:ph type="title"/>
+          </p:nvPr>
+        </p:nvSpPr>
+        <p:spPr>
+          <a:xfrm>
+            <a:off x="838200" y="1397000"/>
+            <a:ext cx="10515600" cy="711200"/>
+          </a:xfrm>
+        </p:spPr>
+        <p:txBody>
+          <a:bodyPr anchor="t" anchorCtr="0">
+            <a:normAutofit/>
+          </a:bodyPr>
+          <a:lstStyle/>
+          <a:p>
+            <a:r>
+              <a:rPr lang="en-US" sz="4000" b="1" dirty="0">
+                <a:solidFill>
+                  <a:srgbClr val="00396B"/>
+                </a:solidFill>
+              </a:rPr>
+              <a:t>Overview</a:t>
+            </a:r>
+            <a:r>
+              <a:rPr lang="en-US" altLang="zh-CN" sz="4000" b="1" dirty="0">
+                <a:solidFill>
+                  <a:srgbClr val="00396B"/>
+                </a:solidFill>
+              </a:rPr>
+              <a:t>:</a:t>
+            </a:r>
+            <a:r>
+              <a:rPr lang="en-US" sz="4000" b="1" dirty="0">
+                <a:solidFill>
+                  <a:srgbClr val="00396B"/>
+                </a:solidFill>
+              </a:rPr>
+              <a:t> MAS</a:t>
+            </a:r>
+            <a:r>
+              <a:rPr lang="zh-CN" altLang="en-US" sz="4000" b="1" dirty="0">
+                <a:solidFill>
+                  <a:srgbClr val="00396B"/>
+                </a:solidFill>
+              </a:rPr>
+              <a:t> </a:t>
+            </a:r>
+            <a:r>
+              <a:rPr lang="en-US" altLang="zh-CN" sz="4000" b="1" dirty="0">
+                <a:solidFill>
+                  <a:srgbClr val="00396B"/>
+                </a:solidFill>
+              </a:rPr>
+              <a:t>Co-Evolution</a:t>
+            </a:r>
+            <a:endParaRPr lang="en-US" sz="4000" b="1" dirty="0">
+              <a:solidFill>
+                <a:srgbClr val="00396B"/>
+              </a:solidFill>
+            </a:endParaRPr>
+          </a:p>
+        </p:txBody>
+      </p:sp>
+      <p:sp>
+        <p:nvSpPr>
+          <p:cNvPr id="3" name="Content Placeholder 2">
+            <a:extLst>
+              <a:ext uri="{FF2B5EF4-FFF2-40B4-BE49-F238E27FC236}">
+                <a16:creationId xmlns:a16="http://schemas.microsoft.com/office/drawing/2014/main" id="{266D992A-4FA0-9A94-37B2-8E36F82B8F86}"/>
+              </a:ext>
+            </a:extLst>
+          </p:cNvPr>
+          <p:cNvSpPr>
+            <a:spLocks noGrp="1"/>
+          </p:cNvSpPr>
+          <p:nvPr>
+            <p:ph idx="1"/>
+          </p:nvPr>
+        </p:nvSpPr>
+        <p:spPr>
+          <a:xfrm>
+            <a:off x="838200" y="2311400"/>
+            <a:ext cx="5054600" cy="1828800"/>
+          </a:xfrm>
+        </p:spPr>
+        <p:txBody>
+          <a:bodyPr lIns="152400" tIns="152400" rIns="114300" bIns="101600" anchor="t" anchorCtr="0">
+            <a:noAutofit/>
+          </a:bodyPr>
+          <a:lstStyle/>
+          <a:p>
+            <a:pPr marL="0" indent="0" algn="l">
+              <a:spcBef>
+                <a:spcPts val="0"/>
+              </a:spcBef>
+              <a:spcAft>
+                <a:spcPts val="600"/>
+              </a:spcAft>
+              <a:buNone/>
+            </a:pPr>
+            <a:r>
+              <a:rPr lang="en-US" sz="2200" b="1" dirty="0">
+                <a:solidFill>
+                  <a:srgbClr val="0073CF"/>
+                </a:solidFill>
+              </a:rPr>
+              <a:t>Motivation</a:t>
+            </a:r>
+          </a:p>
+          <a:p>
+            <a:pPr marL="200025" indent="-200025" algn="l">
+              <a:lnSpc>
+                <a:spcPct val="104000"/>
+              </a:lnSpc>
+              <a:spcBef>
+                <a:spcPts val="300"/>
+              </a:spcBef>
+              <a:buClr>
+                <a:srgbClr val="0073CF"/>
+              </a:buClr>
+              <a:buFont typeface="Arial"/>
+              <a:buChar char="•"/>
+            </a:pPr>
+            <a:r>
+              <a:rPr lang="en-US" sz="1400" b="1" dirty="0">
+                <a:solidFill>
+                  <a:srgbClr val="00396B"/>
+                </a:solidFill>
+              </a:rPr>
+              <a:t>Centralized MAS: </a:t>
+            </a:r>
+            <a:r>
+              <a:rPr lang="en-US" sz="1400" dirty="0">
+                <a:solidFill>
+                  <a:srgbClr val="1A1A1A"/>
+                </a:solidFill>
+              </a:rPr>
+              <a:t>a single controller becomes a scalability bottleneck and a single point of failure</a:t>
+            </a:r>
+          </a:p>
+          <a:p>
+            <a:pPr marL="200025" indent="-200025" algn="l">
+              <a:lnSpc>
+                <a:spcPct val="104000"/>
+              </a:lnSpc>
+              <a:spcBef>
+                <a:spcPts val="300"/>
+              </a:spcBef>
+              <a:buClr>
+                <a:srgbClr val="0073CF"/>
+              </a:buClr>
+              <a:buFont typeface="Arial"/>
+              <a:buChar char="•"/>
+            </a:pPr>
+            <a:r>
+              <a:rPr lang="en-US" sz="1400" b="1" dirty="0">
+                <a:solidFill>
+                  <a:srgbClr val="00396B"/>
+                </a:solidFill>
+              </a:rPr>
+              <a:t>Decentralized MAS: </a:t>
+            </a:r>
+            <a:r>
+              <a:rPr lang="en-US" sz="1400" dirty="0">
+                <a:solidFill>
+                  <a:srgbClr val="1A1A1A"/>
+                </a:solidFill>
+              </a:rPr>
+              <a:t>local-only views block knowledge sharing, capping collective performance</a:t>
+            </a:r>
+          </a:p>
+        </p:txBody>
+      </p:sp>
+      <p:sp>
+        <p:nvSpPr>
+          <p:cNvPr id="4" name="Slide Number Placeholder 3">
+            <a:extLst>
+              <a:ext uri="{FF2B5EF4-FFF2-40B4-BE49-F238E27FC236}">
+                <a16:creationId xmlns:a16="http://schemas.microsoft.com/office/drawing/2014/main" id="{EE8CD026-3B59-15A5-1B5F-B87C7520064D}"/>
+              </a:ext>
+            </a:extLst>
+          </p:cNvPr>
+          <p:cNvSpPr>
+            <a:spLocks noGrp="1"/>
+          </p:cNvSpPr>
+          <p:nvPr>
+            <p:ph type="sldNum" sz="quarter" idx="12"/>
+          </p:nvPr>
+        </p:nvSpPr>
+        <p:spPr>
+          <a:xfrm>
+            <a:off x="10210800" y="6451600"/>
+            <a:ext cx="1524000" cy="304800"/>
+          </a:xfrm>
+        </p:spPr>
+        <p:txBody>
+          <a:bodyPr anchor="ctr" anchorCtr="0"/>
+          <a:lstStyle/>
+          <a:p>
+            <a:fld id="{FC0A7A6B-4B1F-5446-A3A1-99DEB5EA7F81}" type="slidenum">
+              <a:rPr lang="en-CN" smtClean="0">
+                <a:solidFill>
+                  <a:srgbClr val="9AA7B5"/>
+                </a:solidFill>
+              </a:rPr>
+              <a:t>15</a:t>
+            </a:fld>
+            <a:endParaRPr lang="en-CN">
+              <a:solidFill>
+                <a:srgbClr val="9AA7B5"/>
+              </a:solidFill>
+            </a:endParaRPr>
+          </a:p>
+        </p:txBody>
+      </p:sp>
+      <p:sp>
+        <p:nvSpPr>
+          <p:cNvPr id="6" name="Accent Rule">
+            <a:extLst>
+              <a:ext uri="{FF2B5EF4-FFF2-40B4-BE49-F238E27FC236}">
+                <a16:creationId xmlns:a16="http://schemas.microsoft.com/office/drawing/2014/main" id="{03073E4E-2B73-0632-B919-06FE618E67E6}"/>
+              </a:ext>
+            </a:extLst>
+          </p:cNvPr>
+          <p:cNvSpPr/>
+          <p:nvPr/>
+        </p:nvSpPr>
+        <p:spPr>
+          <a:xfrm>
+            <a:off x="838200" y="2209800"/>
+            <a:ext cx="1524000" cy="76200"/>
+          </a:xfrm>
+          <a:prstGeom prst="rect">
+            <a:avLst/>
+          </a:prstGeom>
+          <a:solidFill>
+            <a:srgbClr val="0073CF"/>
+          </a:solidFill>
+          <a:ln w="12700" cap="flat" cmpd="sng" algn="ctr">
+            <a:noFill/>
+            <a:prstDash val="solid"/>
+            <a:miter lim="800000"/>
+          </a:ln>
+        </p:spPr>
+        <p:style>
+          <a:lnRef idx="2">
+            <a:schemeClr val="accent1">
+              <a:shade val="15000"/>
+            </a:schemeClr>
+          </a:lnRef>
+          <a:fillRef idx="1">
+            <a:schemeClr val="accent1"/>
+          </a:fillRef>
+          <a:effectRef idx="0">
+            <a:schemeClr val="accent1"/>
+          </a:effectRef>
+          <a:fontRef idx="minor">
+            <a:schemeClr val="lt1"/>
+          </a:fontRef>
+        </p:style>
+        <p:txBody>
+          <a:bodyPr vertOverflow="clip" horzOverflow="clip" rtlCol="0" anchor="t"/>
+          <a:lstStyle/>
+          <a:p>
+            <a:pPr algn="l"/>
+            <a:endParaRPr lang="en-CN"/>
+          </a:p>
+        </p:txBody>
+      </p:sp>
       <p:pic>
         <p:nvPicPr>
           <p:cNvPr id="7" name="Copied Picture 7">
@@ -7838,7 +7890,7 @@
           <p:nvPr/>
         </p:nvPicPr>
         <p:blipFill>
-          <a:blip r:embed="rId2"/>
+          <a:blip r:embed="rId3"/>
           <a:stretch>
             <a:fillRect/>
           </a:stretch>
@@ -7911,10 +7963,494 @@
           </a:p>
         </p:txBody>
       </p:sp>
+      <p:sp>
+        <p:nvSpPr>
+          <p:cNvPr id="30" name="Novelty Column"/>
+          <p:cNvSpPr>
+            <a:spLocks noGrp="1"/>
+          </p:cNvSpPr>
+          <p:nvPr/>
+        </p:nvSpPr>
+        <p:spPr>
+          <a:xfrm>
+            <a:off x="6299200" y="2311400"/>
+            <a:ext cx="5054600" cy="1828800"/>
+          </a:xfrm>
+          <a:prstGeom prst="rect">
+            <a:avLst/>
+          </a:prstGeom>
+        </p:spPr>
+        <p:txBody>
+          <a:bodyPr wrap="square" lIns="152400" tIns="152400" rIns="114300" bIns="101600" anchor="t" anchorCtr="0">
+            <a:noAutofit/>
+          </a:bodyPr>
+          <a:lstStyle/>
+          <a:p>
+            <a:pPr marL="0" indent="0" algn="l">
+              <a:spcBef>
+                <a:spcPts val="0"/>
+              </a:spcBef>
+              <a:spcAft>
+                <a:spcPts val="200"/>
+              </a:spcAft>
+              <a:buNone/>
+            </a:pPr>
+            <a:r>
+              <a:rPr lang="en-US" sz="2200" b="1" dirty="0">
+                <a:solidFill>
+                  <a:srgbClr val="0073CF"/>
+                </a:solidFill>
+              </a:rPr>
+              <a:t>Novelty</a:t>
+            </a:r>
+            <a:r>
+              <a:rPr lang="en-US" sz="2200" b="1">
+                <a:solidFill>
+                  <a:srgbClr val="0073CF"/>
+                </a:solidFill>
+              </a:rPr>
+              <a:t>: Neighborhood </a:t>
+            </a:r>
+            <a:r>
+              <a:rPr lang="en-US" sz="2200" b="1" dirty="0">
+                <a:solidFill>
+                  <a:srgbClr val="0073CF"/>
+                </a:solidFill>
+              </a:rPr>
+              <a:t>Learning</a:t>
+            </a:r>
+          </a:p>
+          <a:p>
+            <a:pPr marL="200025" indent="-200025" algn="l">
+              <a:lnSpc>
+                <a:spcPct val="98000"/>
+              </a:lnSpc>
+              <a:spcBef>
+                <a:spcPts val="100"/>
+              </a:spcBef>
+              <a:buClr>
+                <a:srgbClr val="0073CF"/>
+              </a:buClr>
+              <a:buFont typeface="Arial"/>
+              <a:buChar char="•"/>
+            </a:pPr>
+            <a:r>
+              <a:rPr lang="en-US" sz="1400" b="1" dirty="0">
+                <a:solidFill>
+                  <a:srgbClr val="00396B"/>
+                </a:solidFill>
+              </a:rPr>
+              <a:t>No controller: </a:t>
+            </a:r>
+            <a:r>
+              <a:rPr lang="en-US" sz="1400" dirty="0">
+                <a:solidFill>
+                  <a:srgbClr val="1A1A1A"/>
+                </a:solidFill>
+              </a:rPr>
+              <a:t>fully decentralized — scales and avoids a single point of failure</a:t>
+            </a:r>
+          </a:p>
+          <a:p>
+            <a:pPr marL="200025" indent="-200025" algn="l">
+              <a:lnSpc>
+                <a:spcPct val="98000"/>
+              </a:lnSpc>
+              <a:spcBef>
+                <a:spcPts val="100"/>
+              </a:spcBef>
+              <a:buClr>
+                <a:srgbClr val="0073CF"/>
+              </a:buClr>
+              <a:buFont typeface="Arial"/>
+              <a:buChar char="•"/>
+            </a:pPr>
+            <a:r>
+              <a:rPr lang="en-US" sz="1400" b="1" dirty="0">
+                <a:solidFill>
+                  <a:srgbClr val="00396B"/>
+                </a:solidFill>
+              </a:rPr>
+              <a:t>Hierarchical memory: </a:t>
+            </a:r>
+            <a:r>
+              <a:rPr lang="en-US" sz="1400" dirty="0">
+                <a:solidFill>
+                  <a:srgbClr val="1A1A1A"/>
+                </a:solidFill>
+              </a:rPr>
+              <a:t>fuses local state with top-K peer signals for global context</a:t>
+            </a:r>
+          </a:p>
+          <a:p>
+            <a:pPr marL="200025" indent="-200025" algn="l">
+              <a:lnSpc>
+                <a:spcPct val="98000"/>
+              </a:lnSpc>
+              <a:spcBef>
+                <a:spcPts val="100"/>
+              </a:spcBef>
+              <a:buClr>
+                <a:srgbClr val="0073CF"/>
+              </a:buClr>
+              <a:buFont typeface="Arial"/>
+              <a:buChar char="•"/>
+            </a:pPr>
+            <a:r>
+              <a:rPr lang="en-US" sz="1400" b="1" dirty="0">
+                <a:solidFill>
+                  <a:srgbClr val="00396B"/>
+                </a:solidFill>
+              </a:rPr>
+              <a:t>Co-evolution: </a:t>
+            </a:r>
+            <a:r>
+              <a:rPr lang="en-US" sz="1400" dirty="0">
+                <a:solidFill>
+                  <a:srgbClr val="1A1A1A"/>
+                </a:solidFill>
+              </a:rPr>
+              <a:t>act on neighbor consensus and improve together, faster convergence</a:t>
+            </a:r>
+          </a:p>
+        </p:txBody>
+      </p:sp>
+      <p:sp>
+        <p:nvSpPr>
+          <p:cNvPr id="16" name="Methodology Panel">
+            <a:extLst>
+              <a:ext uri="{FF2B5EF4-FFF2-40B4-BE49-F238E27FC236}">
+                <a16:creationId xmlns:a16="http://schemas.microsoft.com/office/drawing/2014/main" id="{A705F024-E608-5643-845E-E7F08FDA515C}"/>
+              </a:ext>
+            </a:extLst>
+          </p:cNvPr>
+          <p:cNvSpPr/>
+          <p:nvPr/>
+        </p:nvSpPr>
+        <p:spPr>
+          <a:xfrm>
+            <a:off x="838200" y="4191000"/>
+            <a:ext cx="5054600" cy="2082800"/>
+          </a:xfrm>
+          <a:prstGeom prst="roundRect">
+            <a:avLst/>
+          </a:prstGeom>
+          <a:solidFill>
+            <a:srgbClr val="FFFFFF"/>
+          </a:solidFill>
+          <a:ln w="12700" cap="flat" cmpd="sng" algn="ctr">
+            <a:solidFill>
+              <a:srgbClr val="9AA7B5"/>
+            </a:solidFill>
+            <a:prstDash val="solid"/>
+            <a:miter lim="800000"/>
+          </a:ln>
+        </p:spPr>
+        <p:style>
+          <a:lnRef idx="2">
+            <a:schemeClr val="accent1">
+              <a:shade val="15000"/>
+            </a:schemeClr>
+          </a:lnRef>
+          <a:fillRef idx="1">
+            <a:schemeClr val="accent1"/>
+          </a:fillRef>
+          <a:effectRef idx="0">
+            <a:schemeClr val="accent1"/>
+          </a:effectRef>
+          <a:fontRef idx="minor">
+            <a:schemeClr val="lt1"/>
+          </a:fontRef>
+        </p:style>
+        <p:txBody>
+          <a:bodyPr vertOverflow="clip" horzOverflow="clip" lIns="152400" tIns="152400" rIns="114300" bIns="101600" rtlCol="0" anchor="t" anchorCtr="0">
+            <a:noAutofit/>
+          </a:bodyPr>
+          <a:lstStyle/>
+          <a:p>
+            <a:pPr marL="0" indent="0" algn="l">
+              <a:spcBef>
+                <a:spcPts val="0"/>
+              </a:spcBef>
+              <a:spcAft>
+                <a:spcPts val="200"/>
+              </a:spcAft>
+              <a:buNone/>
+            </a:pPr>
+            <a:r>
+              <a:rPr lang="en-US" sz="2200" b="1" dirty="0">
+                <a:solidFill>
+                  <a:srgbClr val="0073CF"/>
+                </a:solidFill>
+              </a:rPr>
+              <a:t>Methodology</a:t>
+            </a:r>
+          </a:p>
+          <a:p>
+            <a:pPr marL="200025" indent="-200025" algn="l">
+              <a:lnSpc>
+                <a:spcPct val="98000"/>
+              </a:lnSpc>
+              <a:spcBef>
+                <a:spcPts val="100"/>
+              </a:spcBef>
+              <a:buClr>
+                <a:srgbClr val="0073CF"/>
+              </a:buClr>
+              <a:buFont typeface="Arial"/>
+              <a:buChar char="•"/>
+            </a:pPr>
+            <a:r>
+              <a:rPr lang="en-US" sz="1400" b="1" dirty="0">
+                <a:solidFill>
+                  <a:srgbClr val="00396B"/>
+                </a:solidFill>
+              </a:rPr>
+              <a:t>Neighbor selection: </a:t>
+            </a:r>
+            <a:r>
+              <a:rPr lang="en-US" sz="1400" dirty="0">
+                <a:solidFill>
+                  <a:srgbClr val="1A1A1A"/>
+                </a:solidFill>
+              </a:rPr>
+              <a:t>each agent scores peers and keeps its top-K</a:t>
+            </a:r>
+          </a:p>
+          <a:p>
+            <a:pPr marL="200025" indent="-200025" algn="l">
+              <a:lnSpc>
+                <a:spcPct val="98000"/>
+              </a:lnSpc>
+              <a:spcBef>
+                <a:spcPts val="100"/>
+              </a:spcBef>
+              <a:buClr>
+                <a:srgbClr val="0073CF"/>
+              </a:buClr>
+              <a:buFont typeface="Arial"/>
+              <a:buChar char="•"/>
+            </a:pPr>
+            <a:r>
+              <a:rPr lang="en-US" sz="1400" b="1" dirty="0">
+                <a:solidFill>
+                  <a:srgbClr val="00396B"/>
+                </a:solidFill>
+              </a:rPr>
+              <a:t>Graph evolution: </a:t>
+            </a:r>
+            <a:r>
+              <a:rPr lang="en-US" sz="1400" dirty="0">
+                <a:solidFill>
+                  <a:srgbClr val="1A1A1A"/>
+                </a:solidFill>
+              </a:rPr>
+              <a:t>edges rewire toward higher-value neighbors</a:t>
+            </a:r>
+          </a:p>
+          <a:p>
+            <a:pPr marL="200025" indent="-200025" algn="l">
+              <a:lnSpc>
+                <a:spcPct val="98000"/>
+              </a:lnSpc>
+              <a:spcBef>
+                <a:spcPts val="100"/>
+              </a:spcBef>
+              <a:buClr>
+                <a:srgbClr val="0073CF"/>
+              </a:buClr>
+              <a:buFont typeface="Arial"/>
+              <a:buChar char="•"/>
+            </a:pPr>
+            <a:r>
+              <a:rPr lang="en-US" sz="1400" b="1" dirty="0">
+                <a:solidFill>
+                  <a:srgbClr val="00396B"/>
+                </a:solidFill>
+              </a:rPr>
+              <a:t>Agent co-evolution: </a:t>
+            </a:r>
+            <a:r>
+              <a:rPr lang="en-US" sz="1400" dirty="0">
+                <a:solidFill>
+                  <a:srgbClr val="1A1A1A"/>
+                </a:solidFill>
+              </a:rPr>
+              <a:t>behavior adapts to neighbor consensus</a:t>
+            </a:r>
+          </a:p>
+        </p:txBody>
+      </p:sp>
+      <p:sp>
+        <p:nvSpPr>
+          <p:cNvPr id="17" name="Experiments Panel">
+            <a:extLst>
+              <a:ext uri="{FF2B5EF4-FFF2-40B4-BE49-F238E27FC236}">
+                <a16:creationId xmlns:a16="http://schemas.microsoft.com/office/drawing/2014/main" id="{6DF9720D-8A0C-B84D-9F00-FBF1621C1134}"/>
+              </a:ext>
+            </a:extLst>
+          </p:cNvPr>
+          <p:cNvSpPr/>
+          <p:nvPr/>
+        </p:nvSpPr>
+        <p:spPr>
+          <a:xfrm>
+            <a:off x="6299200" y="4191000"/>
+            <a:ext cx="5054600" cy="2082800"/>
+          </a:xfrm>
+          <a:prstGeom prst="roundRect">
+            <a:avLst/>
+          </a:prstGeom>
+          <a:solidFill>
+            <a:srgbClr val="FFFFFF"/>
+          </a:solidFill>
+          <a:ln w="12700" cap="flat" cmpd="sng" algn="ctr">
+            <a:solidFill>
+              <a:srgbClr val="9AA7B5"/>
+            </a:solidFill>
+            <a:prstDash val="solid"/>
+            <a:miter lim="800000"/>
+          </a:ln>
+        </p:spPr>
+        <p:style>
+          <a:lnRef idx="2">
+            <a:schemeClr val="accent1">
+              <a:shade val="15000"/>
+            </a:schemeClr>
+          </a:lnRef>
+          <a:fillRef idx="1">
+            <a:schemeClr val="accent1"/>
+          </a:fillRef>
+          <a:effectRef idx="0">
+            <a:schemeClr val="accent1"/>
+          </a:effectRef>
+          <a:fontRef idx="minor">
+            <a:schemeClr val="lt1"/>
+          </a:fontRef>
+        </p:style>
+        <p:txBody>
+          <a:bodyPr vertOverflow="clip" horzOverflow="clip" lIns="152400" tIns="152400" rIns="114300" bIns="101600" rtlCol="0" anchor="t" anchorCtr="0">
+            <a:noAutofit/>
+          </a:bodyPr>
+          <a:lstStyle/>
+          <a:p>
+            <a:pPr marL="0" indent="0" algn="l">
+              <a:spcBef>
+                <a:spcPts val="0"/>
+              </a:spcBef>
+              <a:spcAft>
+                <a:spcPts val="400"/>
+              </a:spcAft>
+              <a:buNone/>
+            </a:pPr>
+            <a:r>
+              <a:rPr lang="en-US" sz="2200" b="1" dirty="0">
+                <a:solidFill>
+                  <a:srgbClr val="0073CF"/>
+                </a:solidFill>
+              </a:rPr>
+              <a:t>Experiments — Tasks</a:t>
+            </a:r>
+          </a:p>
+          <a:p>
+            <a:pPr marL="200025" indent="-200025" algn="l">
+              <a:lnSpc>
+                <a:spcPct val="104000"/>
+              </a:lnSpc>
+              <a:spcBef>
+                <a:spcPts val="150"/>
+              </a:spcBef>
+              <a:buClr>
+                <a:srgbClr val="0073CF"/>
+              </a:buClr>
+              <a:buFont typeface="Arial"/>
+              <a:buChar char="•"/>
+            </a:pPr>
+            <a:r>
+              <a:rPr lang="en-US" sz="1400" b="1" dirty="0">
+                <a:solidFill>
+                  <a:srgbClr val="00396B"/>
+                </a:solidFill>
+              </a:rPr>
+              <a:t>Collaborative Reasoning: </a:t>
+            </a:r>
+            <a:r>
+              <a:rPr lang="en-US" sz="1400" dirty="0">
+                <a:solidFill>
+                  <a:srgbClr val="1A1A1A"/>
+                </a:solidFill>
+              </a:rPr>
+              <a:t>jointly solving hard problems</a:t>
+            </a:r>
+          </a:p>
+          <a:p>
+            <a:pPr marL="200025" indent="-200025" algn="l">
+              <a:lnSpc>
+                <a:spcPct val="104000"/>
+              </a:lnSpc>
+              <a:spcBef>
+                <a:spcPts val="150"/>
+              </a:spcBef>
+              <a:buClr>
+                <a:srgbClr val="0073CF"/>
+              </a:buClr>
+              <a:buFont typeface="Arial"/>
+              <a:buChar char="•"/>
+            </a:pPr>
+            <a:r>
+              <a:rPr lang="en-US" sz="1400" b="1" dirty="0">
+                <a:solidFill>
+                  <a:srgbClr val="00396B"/>
+                </a:solidFill>
+              </a:rPr>
+              <a:t>Multi-Hop QA: </a:t>
+            </a:r>
+            <a:r>
+              <a:rPr lang="en-US" sz="1400" dirty="0">
+                <a:solidFill>
+                  <a:srgbClr val="1A1A1A"/>
+                </a:solidFill>
+              </a:rPr>
+              <a:t>multi-step, shared-evidence questions</a:t>
+            </a:r>
+          </a:p>
+          <a:p>
+            <a:pPr marL="200025" indent="-200025" algn="l">
+              <a:lnSpc>
+                <a:spcPct val="104000"/>
+              </a:lnSpc>
+              <a:spcBef>
+                <a:spcPts val="150"/>
+              </a:spcBef>
+              <a:buClr>
+                <a:srgbClr val="0073CF"/>
+              </a:buClr>
+              <a:buFont typeface="Arial"/>
+              <a:buChar char="•"/>
+            </a:pPr>
+            <a:r>
+              <a:rPr lang="en-US" sz="1400" b="1" dirty="0">
+                <a:solidFill>
+                  <a:srgbClr val="00396B"/>
+                </a:solidFill>
+              </a:rPr>
+              <a:t>Code &amp; Tool Use: </a:t>
+            </a:r>
+            <a:r>
+              <a:rPr lang="en-US" sz="1400" dirty="0">
+                <a:solidFill>
+                  <a:srgbClr val="1A1A1A"/>
+                </a:solidFill>
+              </a:rPr>
+              <a:t>cooperative, tool-assisted coding</a:t>
+            </a:r>
+          </a:p>
+        </p:txBody>
+      </p:sp>
     </p:spTree>
     <p:extLst>
       <p:ext uri="{BB962C8B-B14F-4D97-AF65-F5344CB8AC3E}">
-        <p14:creationId xmlns:p14="http://schemas.microsoft.com/office/powerpoint/2010/main" val="2560429455"/>
+        <p14:creationId xmlns:p14="http://schemas.microsoft.com/office/powerpoint/2010/main" val="1968786515"/>
       </p:ext>
     </p:extLst>
   </p:cSld>
@@ -8479,483 +9015,6 @@
                   <a:srgbClr val="00396B"/>
                 </a:solidFill>
               </a:rPr>
-              <a:t>Methodology</a:t>
-            </a:r>
-          </a:p>
-        </p:txBody>
-      </p:sp>
-      <p:sp>
-        <p:nvSpPr>
-          <p:cNvPr id="3" name="Content Placeholder 2">
-            <a:extLst>
-              <a:ext uri="{FF2B5EF4-FFF2-40B4-BE49-F238E27FC236}">
-                <a16:creationId xmlns:a16="http://schemas.microsoft.com/office/drawing/2014/main" id="{266D992A-4FA0-9A94-37B2-8E36F82B8F86}"/>
-              </a:ext>
-            </a:extLst>
-          </p:cNvPr>
-          <p:cNvSpPr>
-            <a:spLocks noGrp="1"/>
-          </p:cNvSpPr>
-          <p:nvPr>
-            <p:ph idx="1"/>
-          </p:nvPr>
-        </p:nvSpPr>
-        <p:spPr>
-          <a:xfrm>
-            <a:off x="838200" y="2540000"/>
-            <a:ext cx="10515600" cy="3657600"/>
-          </a:xfrm>
-        </p:spPr>
-        <p:txBody>
-          <a:bodyPr>
-            <a:normAutofit fontScale="92500" lnSpcReduction="10000"/>
-          </a:bodyPr>
-          <a:lstStyle/>
-          <a:p>
-            <a:pPr marL="0" indent="0" algn="l">
-              <a:lnSpc>
-                <a:spcPct val="108000"/>
-              </a:lnSpc>
-              <a:spcBef>
-                <a:spcPts val="200"/>
-              </a:spcBef>
-              <a:spcAft>
-                <a:spcPts val="200"/>
-              </a:spcAft>
-              <a:buNone/>
-            </a:pPr>
-            <a:r>
-              <a:rPr lang="en-US" sz="2400" b="1" dirty="0">
-                <a:solidFill>
-                  <a:srgbClr val="0073CF"/>
-                </a:solidFill>
-              </a:rPr>
-              <a:t>Communication Graph &amp; Neighborhood</a:t>
-            </a:r>
-          </a:p>
-          <a:p>
-            <a:pPr marL="457200" indent="-457200" algn="l">
-              <a:lnSpc>
-                <a:spcPct val="108000"/>
-              </a:lnSpc>
-              <a:spcBef>
-                <a:spcPts val="250"/>
-              </a:spcBef>
-              <a:spcAft>
-                <a:spcPts val="250"/>
-              </a:spcAft>
-              <a:buFont typeface="Arial"/>
-              <a:buChar char="•"/>
-            </a:pPr>
-            <a:r>
-              <a:rPr lang="en-US" sz="2400" dirty="0">
-                <a:solidFill>
-                  <a:srgbClr val="1A1A1A"/>
-                </a:solidFill>
-              </a:rPr>
-              <a:t>Agents connect via a communication graph; each neighborhood is its top-K nearest neighbors</a:t>
-            </a:r>
-          </a:p>
-          <a:p>
-            <a:pPr marL="0" indent="0" algn="l">
-              <a:lnSpc>
-                <a:spcPct val="108000"/>
-              </a:lnSpc>
-              <a:spcBef>
-                <a:spcPts val="600"/>
-              </a:spcBef>
-              <a:spcAft>
-                <a:spcPts val="200"/>
-              </a:spcAft>
-              <a:buNone/>
-            </a:pPr>
-            <a:r>
-              <a:rPr lang="en-US" sz="2400" b="1" dirty="0">
-                <a:solidFill>
-                  <a:srgbClr val="0073CF"/>
-                </a:solidFill>
-              </a:rPr>
-              <a:t>Graph Evolution</a:t>
-            </a:r>
-          </a:p>
-          <a:p>
-            <a:pPr marL="457200" indent="-457200" algn="l">
-              <a:lnSpc>
-                <a:spcPct val="108000"/>
-              </a:lnSpc>
-              <a:spcBef>
-                <a:spcPts val="250"/>
-              </a:spcBef>
-              <a:spcAft>
-                <a:spcPts val="250"/>
-              </a:spcAft>
-              <a:buFont typeface="Arial"/>
-              <a:buChar char="•"/>
-            </a:pPr>
-            <a:r>
-              <a:rPr lang="en-US" sz="2400" dirty="0">
-                <a:solidFill>
-                  <a:srgbClr val="1A1A1A"/>
-                </a:solidFill>
-              </a:rPr>
-              <a:t>The graph is not fixed — agents rewire neighborhood connections based on observed performance and interaction history</a:t>
-            </a:r>
-          </a:p>
-          <a:p>
-            <a:pPr marL="0" indent="0" algn="l">
-              <a:lnSpc>
-                <a:spcPct val="108000"/>
-              </a:lnSpc>
-              <a:spcBef>
-                <a:spcPts val="600"/>
-              </a:spcBef>
-              <a:spcAft>
-                <a:spcPts val="200"/>
-              </a:spcAft>
-              <a:buNone/>
-            </a:pPr>
-            <a:r>
-              <a:rPr lang="en-US" sz="2400" b="1" dirty="0">
-                <a:solidFill>
-                  <a:srgbClr val="0073CF"/>
-                </a:solidFill>
-              </a:rPr>
-              <a:t>Co-Evolution via Neighborhood Consensus</a:t>
-            </a:r>
-          </a:p>
-          <a:p>
-            <a:pPr marL="457200" indent="-457200" algn="l">
-              <a:lnSpc>
-                <a:spcPct val="108000"/>
-              </a:lnSpc>
-              <a:spcBef>
-                <a:spcPts val="250"/>
-              </a:spcBef>
-              <a:spcAft>
-                <a:spcPts val="250"/>
-              </a:spcAft>
-              <a:buFont typeface="Arial"/>
-              <a:buChar char="•"/>
-            </a:pPr>
-            <a:r>
-              <a:rPr lang="en-US" sz="2400" dirty="0">
-                <a:solidFill>
-                  <a:srgbClr val="1A1A1A"/>
-                </a:solidFill>
-              </a:rPr>
-              <a:t>Agents iteratively refine policies by aggregating feedback from their top-K neighbors, converging toward collective improvement without global coordination</a:t>
-            </a:r>
-          </a:p>
-        </p:txBody>
-      </p:sp>
-      <p:sp>
-        <p:nvSpPr>
-          <p:cNvPr id="4" name="Slide Number Placeholder 3">
-            <a:extLst>
-              <a:ext uri="{FF2B5EF4-FFF2-40B4-BE49-F238E27FC236}">
-                <a16:creationId xmlns:a16="http://schemas.microsoft.com/office/drawing/2014/main" id="{EE8CD026-3B59-15A5-1B5F-B87C7520064D}"/>
-              </a:ext>
-            </a:extLst>
-          </p:cNvPr>
-          <p:cNvSpPr>
-            <a:spLocks noGrp="1"/>
-          </p:cNvSpPr>
-          <p:nvPr>
-            <p:ph type="sldNum" sz="quarter" idx="12"/>
-          </p:nvPr>
-        </p:nvSpPr>
-        <p:spPr>
-          <a:xfrm>
-            <a:off x="10210800" y="6451600"/>
-            <a:ext cx="1524000" cy="304800"/>
-          </a:xfrm>
-        </p:spPr>
-        <p:txBody>
-          <a:bodyPr anchor="ctr" anchorCtr="0"/>
-          <a:lstStyle/>
-          <a:p>
-            <a:fld id="{FC0A7A6B-4B1F-5446-A3A1-99DEB5EA7F81}" type="slidenum">
-              <a:rPr lang="en-CN" smtClean="0">
-                <a:solidFill>
-                  <a:srgbClr val="9AA7B5"/>
-                </a:solidFill>
-              </a:rPr>
-              <a:t>17</a:t>
-            </a:fld>
-            <a:endParaRPr lang="en-CN">
-              <a:solidFill>
-                <a:srgbClr val="9AA7B5"/>
-              </a:solidFill>
-            </a:endParaRPr>
-          </a:p>
-        </p:txBody>
-      </p:sp>
-      <p:sp>
-        <p:nvSpPr>
-          <p:cNvPr id="6" name="Accent Rule">
-            <a:extLst>
-              <a:ext uri="{FF2B5EF4-FFF2-40B4-BE49-F238E27FC236}">
-                <a16:creationId xmlns:a16="http://schemas.microsoft.com/office/drawing/2014/main" id="{03073E4E-2B73-0632-B919-06FE618E67E6}"/>
-              </a:ext>
-            </a:extLst>
-          </p:cNvPr>
-          <p:cNvSpPr/>
-          <p:nvPr/>
-        </p:nvSpPr>
-        <p:spPr>
-          <a:xfrm>
-            <a:off x="838200" y="2209800"/>
-            <a:ext cx="1524000" cy="76200"/>
-          </a:xfrm>
-          <a:prstGeom prst="rect">
-            <a:avLst/>
-          </a:prstGeom>
-          <a:solidFill>
-            <a:srgbClr val="0073CF"/>
-          </a:solidFill>
-          <a:ln w="12700" cap="flat" cmpd="sng" algn="ctr">
-            <a:noFill/>
-            <a:prstDash val="solid"/>
-            <a:miter lim="800000"/>
-          </a:ln>
-        </p:spPr>
-        <p:style>
-          <a:lnRef idx="2">
-            <a:schemeClr val="accent1">
-              <a:shade val="15000"/>
-            </a:schemeClr>
-          </a:lnRef>
-          <a:fillRef idx="1">
-            <a:schemeClr val="accent1"/>
-          </a:fillRef>
-          <a:effectRef idx="0">
-            <a:schemeClr val="accent1"/>
-          </a:effectRef>
-          <a:fontRef idx="minor">
-            <a:schemeClr val="lt1"/>
-          </a:fontRef>
-        </p:style>
-        <p:txBody>
-          <a:bodyPr vertOverflow="clip" horzOverflow="clip" rtlCol="0" anchor="t"/>
-          <a:lstStyle/>
-          <a:p>
-            <a:pPr algn="l"/>
-            <a:endParaRPr lang="en-CN"/>
-          </a:p>
-        </p:txBody>
-      </p:sp>
-      <p:pic>
-        <p:nvPicPr>
-          <p:cNvPr id="7" name="Copied Picture 7">
-            <a:extLst>
-              <a:ext uri="{FF2B5EF4-FFF2-40B4-BE49-F238E27FC236}">
-                <a16:creationId xmlns:a16="http://schemas.microsoft.com/office/drawing/2014/main" id="{8AFA1466-9172-5B6C-CD5C-61703720EAC0}"/>
-              </a:ext>
-            </a:extLst>
-          </p:cNvPr>
-          <p:cNvPicPr>
-            <a:picLocks noChangeAspect="1"/>
-          </p:cNvPicPr>
-          <p:nvPr/>
-        </p:nvPicPr>
-        <p:blipFill>
-          <a:blip r:embed="rId2"/>
-          <a:stretch>
-            <a:fillRect/>
-          </a:stretch>
-        </p:blipFill>
-        <p:spPr>
-          <a:xfrm>
-            <a:off x="838200" y="508000"/>
-            <a:ext cx="762000" cy="762000"/>
-          </a:xfrm>
-          <a:prstGeom prst="rect">
-            <a:avLst/>
-          </a:prstGeom>
-        </p:spPr>
-      </p:pic>
-      <p:sp>
-        <p:nvSpPr>
-          <p:cNvPr id="10" name="Footer Name">
-            <a:extLst>
-              <a:ext uri="{FF2B5EF4-FFF2-40B4-BE49-F238E27FC236}">
-                <a16:creationId xmlns:a16="http://schemas.microsoft.com/office/drawing/2014/main" id="{B4C861B5-77BD-9EFC-A5F0-21D64EBAEB5A}"/>
-              </a:ext>
-            </a:extLst>
-          </p:cNvPr>
-          <p:cNvSpPr txBox="1"/>
-          <p:nvPr/>
-        </p:nvSpPr>
-        <p:spPr>
-          <a:xfrm>
-            <a:off x="838200" y="6350000"/>
-            <a:ext cx="5080000" cy="508000"/>
-          </a:xfrm>
-          <a:prstGeom prst="rect">
-            <a:avLst/>
-          </a:prstGeom>
-          <a:noFill/>
-        </p:spPr>
-        <p:txBody>
-          <a:bodyPr vertOverflow="overflow" vert="horz" wrap="none" rtlCol="0" anchor="ctr" anchorCtr="0">
-            <a:noAutofit/>
-          </a:bodyPr>
-          <a:lstStyle/>
-          <a:p>
-            <a:pPr algn="l">
-              <a:buNone/>
-            </a:pPr>
-            <a:r>
-              <a:rPr lang="en-US" sz="1400" b="1" spc="200" dirty="0">
-                <a:solidFill>
-                  <a:srgbClr val="FFFFFF"/>
-                </a:solidFill>
-              </a:rPr>
-              <a:t>Quan Wei</a:t>
-            </a:r>
-            <a:r>
-              <a:rPr lang="en-US" sz="1400" b="1" spc="200" dirty="0">
-                <a:solidFill>
-                  <a:srgbClr val="9AA7B5"/>
-                </a:solidFill>
-              </a:rPr>
-              <a:t>   |   </a:t>
-            </a:r>
-            <a:r>
-              <a:rPr lang="en-US" sz="1400" b="1" spc="200" dirty="0">
-                <a:solidFill>
-                  <a:srgbClr val="FFFFFF"/>
-                </a:solidFill>
-              </a:rPr>
-              <a:t>WEEK 2</a:t>
-            </a:r>
-          </a:p>
-        </p:txBody>
-      </p:sp>
-    </p:spTree>
-    <p:extLst>
-      <p:ext uri="{BB962C8B-B14F-4D97-AF65-F5344CB8AC3E}">
-        <p14:creationId xmlns:p14="http://schemas.microsoft.com/office/powerpoint/2010/main" val="1143223798"/>
-      </p:ext>
-    </p:extLst>
-  </p:cSld>
-  <p:clrMapOvr>
-    <a:masterClrMapping/>
-  </p:clrMapOvr>
-</p:sld>
-</file>
-
-<file path=ppt/slides/slide18.xml><?xml version="1.0" encoding="utf-8"?>
-<p:sld xmlns:a="http://schemas.openxmlformats.org/drawingml/2006/main" xmlns:r="http://schemas.openxmlformats.org/officeDocument/2006/relationships" xmlns:p="http://schemas.openxmlformats.org/presentationml/2006/main">
-  <p:cSld>
-    <p:spTree>
-      <p:nvGrpSpPr>
-        <p:cNvPr id="1" name="">
-          <a:extLst>
-            <a:ext uri="{FF2B5EF4-FFF2-40B4-BE49-F238E27FC236}">
-              <a16:creationId xmlns:a16="http://schemas.microsoft.com/office/drawing/2014/main" id="{77E4FB71-9893-98DA-E7F0-0FA46CD38688}"/>
-            </a:ext>
-          </a:extLst>
-        </p:cNvPr>
-        <p:cNvGrpSpPr/>
-        <p:nvPr/>
-      </p:nvGrpSpPr>
-      <p:grpSpPr>
-        <a:xfrm>
-          <a:off x="0" y="0"/>
-          <a:ext cx="0" cy="0"/>
-          <a:chOff x="0" y="0"/>
-          <a:chExt cx="0" cy="0"/>
-        </a:xfrm>
-      </p:grpSpPr>
-      <p:sp>
-        <p:nvSpPr>
-          <p:cNvPr id="5" name="Footer Bar">
-            <a:extLst>
-              <a:ext uri="{FF2B5EF4-FFF2-40B4-BE49-F238E27FC236}">
-                <a16:creationId xmlns:a16="http://schemas.microsoft.com/office/drawing/2014/main" id="{24DF1DB0-6162-C506-3C27-1C69DC951FF6}"/>
-              </a:ext>
-            </a:extLst>
-          </p:cNvPr>
-          <p:cNvSpPr/>
-          <p:nvPr/>
-        </p:nvSpPr>
-        <p:spPr>
-          <a:xfrm>
-            <a:off x="0" y="6350000"/>
-            <a:ext cx="12192000" cy="508000"/>
-          </a:xfrm>
-          <a:prstGeom prst="rect">
-            <a:avLst/>
-          </a:prstGeom>
-          <a:solidFill>
-            <a:srgbClr val="00396B"/>
-          </a:solidFill>
-          <a:ln w="12700" cap="flat" cmpd="sng" algn="ctr">
-            <a:noFill/>
-            <a:prstDash val="solid"/>
-            <a:miter lim="800000"/>
-          </a:ln>
-        </p:spPr>
-        <p:style>
-          <a:lnRef idx="2">
-            <a:schemeClr val="accent1">
-              <a:shade val="15000"/>
-            </a:schemeClr>
-          </a:lnRef>
-          <a:fillRef idx="1">
-            <a:schemeClr val="accent1"/>
-          </a:fillRef>
-          <a:effectRef idx="0">
-            <a:schemeClr val="accent1"/>
-          </a:effectRef>
-          <a:fontRef idx="minor">
-            <a:schemeClr val="lt1"/>
-          </a:fontRef>
-        </p:style>
-        <p:txBody>
-          <a:bodyPr vertOverflow="clip" horzOverflow="clip" rtlCol="0" anchor="t"/>
-          <a:lstStyle/>
-          <a:p>
-            <a:pPr algn="l"/>
-            <a:endParaRPr lang="en-CN"/>
-          </a:p>
-        </p:txBody>
-      </p:sp>
-      <p:sp>
-        <p:nvSpPr>
-          <p:cNvPr id="2" name="Title 1">
-            <a:extLst>
-              <a:ext uri="{FF2B5EF4-FFF2-40B4-BE49-F238E27FC236}">
-                <a16:creationId xmlns:a16="http://schemas.microsoft.com/office/drawing/2014/main" id="{EC786BB6-CB81-FA99-84D2-7C37AE12695B}"/>
-              </a:ext>
-            </a:extLst>
-          </p:cNvPr>
-          <p:cNvSpPr>
-            <a:spLocks noGrp="1"/>
-          </p:cNvSpPr>
-          <p:nvPr>
-            <p:ph type="title"/>
-          </p:nvPr>
-        </p:nvSpPr>
-        <p:spPr>
-          <a:xfrm>
-            <a:off x="838200" y="1397000"/>
-            <a:ext cx="10515600" cy="711200"/>
-          </a:xfrm>
-        </p:spPr>
-        <p:txBody>
-          <a:bodyPr anchor="t" anchorCtr="0">
-            <a:normAutofit/>
-          </a:bodyPr>
-          <a:lstStyle/>
-          <a:p>
-            <a:r>
-              <a:rPr lang="en-US" sz="4000" b="1" dirty="0">
-                <a:solidFill>
-                  <a:srgbClr val="00396B"/>
-                </a:solidFill>
-              </a:rPr>
               <a:t>To-Do</a:t>
             </a:r>
             <a:r>
@@ -9200,7 +9259,7 @@
                   <a:srgbClr val="9AA7B5"/>
                 </a:solidFill>
               </a:rPr>
-              <a:t>18</a:t>
+              <a:t>17</a:t>
             </a:fld>
             <a:endParaRPr lang="en-CN">
               <a:solidFill>
